--- a/assets/presentation/diaporama/caramel-presentation.pptx
+++ b/assets/presentation/diaporama/caramel-presentation.pptx
@@ -525,7 +525,7 @@
           <a:p>
             <a:r>
               <a:rPr lang="en-US" dirty="0"/>
-              <a:t>Caramel est une application web gratuite, sans compte, qui prépare avec l'IA des activités interactives et des parcours complets pour Éléa, Magistère et Moodle. Ce diaporama présente ce qu'elle fait, comment elle fonctionne et ce à quoi nous tenons : la main laissée à l'enseignant et la protection des données. Il correspond à Caramel 7.0.0 ; il est mis à jour à chaque version.</a:t>
+              <a:t>Caramel est une application web gratuite, sans compte, qui prépare avec l'IA des activités interactives et des parcours complets pour Éléa, Magistère et Moodle. Ce diaporama présente ce qu'elle fait, comment elle fonctionne et ce à quoi nous tenons : la main laissée à l'enseignant et la protection des données. Il correspond à Caramel 7.0.1 ; il est mis à jour à chaque version.</a:t>
             </a:r>
             <a:endParaRPr lang="en-US" dirty="0"/>
           </a:p>
@@ -1933,7 +1933,7 @@
           <a:p>
             <a:r>
               <a:rPr lang="en-US" dirty="0"/>
-              <a:t>Pour conclure : Caramel s’ouvre à l’adresse caramel.forge.apps.education.fr, gratuitement et sans compte. Invitez chacun à préparer une activité pour sa propre classe, à la relire dans l’éditeur, puis à la déposer sur un espace de test. Les contacts des deux co-créateurs figurent ici pour toute question. Ce support correspond à Caramel 7.0.0, dans sa version du 29 septembre 2026.</a:t>
+              <a:t>Pour conclure : Caramel s’ouvre à l’adresse caramel.forge.apps.education.fr, gratuitement et sans compte. Invitez chacun à préparer une activité pour sa propre classe, à la relire dans l’éditeur, puis à la déposer sur un espace de test. Les contacts des deux co-créateurs figurent ici pour toute question. Ce support correspond à Caramel 7.0.1, dans sa version du 30 septembre 2026.</a:t>
             </a:r>
             <a:endParaRPr lang="en-US" dirty="0"/>
           </a:p>
@@ -2924,7 +2924,7 @@
       </p:grpSpPr>
       <p:pic>
         <p:nvPicPr>
-          <p:cNvPr id="2" name="Image 0" descr="/var/folders/b7/tkzbyvzx72qcg9wb0t1jybvm0000gn/T/diaporama-oS58O7/logo-caramel.png">    </p:cNvPr>
+          <p:cNvPr id="2" name="Image 0" descr="/var/folders/b7/tkzbyvzx72qcg9wb0t1jybvm0000gn/T/diaporama-zLbeHS/logo-caramel.png">    </p:cNvPr>
           <p:cNvPicPr>
             <a:picLocks noChangeAspect="1"/>
           </p:cNvPicPr>
@@ -3145,7 +3145,7 @@
                 <a:ea typeface="Arial" pitchFamily="34" charset="-122"/>
                 <a:cs typeface="Arial" pitchFamily="34" charset="-120"/>
               </a:rPr>
-              <a:t>Support de présentation · Caramel v7.0.0 · 29 septembre 2026</a:t>
+              <a:t>Support de présentation · Caramel v7.0.1 · 30 septembre 2026</a:t>
             </a:r>
             <a:endParaRPr lang="en-US" sz="1200" dirty="0"/>
           </a:p>
@@ -3187,7 +3187,7 @@
       </p:sp>
       <p:pic>
         <p:nvPicPr>
-          <p:cNvPr id="9" name="Image 1" descr="/var/folders/b7/tkzbyvzx72qcg9wb0t1jybvm0000gn/T/diaporama-oS58O7/accueil.jpg">    </p:cNvPr>
+          <p:cNvPr id="9" name="Image 1" descr="/var/folders/b7/tkzbyvzx72qcg9wb0t1jybvm0000gn/T/diaporama-zLbeHS/accueil.jpg">    </p:cNvPr>
           <p:cNvPicPr>
             <a:picLocks noChangeAspect="1"/>
           </p:cNvPicPr>
@@ -3382,7 +3382,7 @@
       </p:sp>
       <p:pic>
         <p:nvPicPr>
-          <p:cNvPr id="6" name="Image 0" descr="/var/folders/b7/tkzbyvzx72qcg9wb0t1jybvm0000gn/T/diaporama-oS58O7/icone-11.png">    </p:cNvPr>
+          <p:cNvPr id="6" name="Image 0" descr="/var/folders/b7/tkzbyvzx72qcg9wb0t1jybvm0000gn/T/diaporama-zLbeHS/icone-11.png">    </p:cNvPr>
           <p:cNvPicPr>
             <a:picLocks noChangeAspect="1"/>
           </p:cNvPicPr>
@@ -3481,7 +3481,7 @@
       </p:sp>
       <p:pic>
         <p:nvPicPr>
-          <p:cNvPr id="9" name="Image 1" descr="/var/folders/b7/tkzbyvzx72qcg9wb0t1jybvm0000gn/T/diaporama-oS58O7/icone-12.png">    </p:cNvPr>
+          <p:cNvPr id="9" name="Image 1" descr="/var/folders/b7/tkzbyvzx72qcg9wb0t1jybvm0000gn/T/diaporama-zLbeHS/icone-12.png">    </p:cNvPr>
           <p:cNvPicPr>
             <a:picLocks noChangeAspect="1"/>
           </p:cNvPicPr>
@@ -3580,7 +3580,7 @@
       </p:sp>
       <p:pic>
         <p:nvPicPr>
-          <p:cNvPr id="12" name="Image 2" descr="/var/folders/b7/tkzbyvzx72qcg9wb0t1jybvm0000gn/T/diaporama-oS58O7/icone-13.png">    </p:cNvPr>
+          <p:cNvPr id="12" name="Image 2" descr="/var/folders/b7/tkzbyvzx72qcg9wb0t1jybvm0000gn/T/diaporama-zLbeHS/icone-13.png">    </p:cNvPr>
           <p:cNvPicPr>
             <a:picLocks noChangeAspect="1"/>
           </p:cNvPicPr>
@@ -3679,7 +3679,7 @@
       </p:sp>
       <p:pic>
         <p:nvPicPr>
-          <p:cNvPr id="15" name="Image 3" descr="/var/folders/b7/tkzbyvzx72qcg9wb0t1jybvm0000gn/T/diaporama-oS58O7/icone-14.png">    </p:cNvPr>
+          <p:cNvPr id="15" name="Image 3" descr="/var/folders/b7/tkzbyvzx72qcg9wb0t1jybvm0000gn/T/diaporama-zLbeHS/icone-14.png">    </p:cNvPr>
           <p:cNvPicPr>
             <a:picLocks noChangeAspect="1"/>
           </p:cNvPicPr>
@@ -3778,7 +3778,7 @@
       </p:sp>
       <p:pic>
         <p:nvPicPr>
-          <p:cNvPr id="18" name="Image 4" descr="/var/folders/b7/tkzbyvzx72qcg9wb0t1jybvm0000gn/T/diaporama-oS58O7/icone-15.png">    </p:cNvPr>
+          <p:cNvPr id="18" name="Image 4" descr="/var/folders/b7/tkzbyvzx72qcg9wb0t1jybvm0000gn/T/diaporama-zLbeHS/icone-15.png">    </p:cNvPr>
           <p:cNvPicPr>
             <a:picLocks noChangeAspect="1"/>
           </p:cNvPicPr>
@@ -3889,7 +3889,7 @@
       </p:sp>
       <p:pic>
         <p:nvPicPr>
-          <p:cNvPr id="21" name="Image 5" descr="/var/folders/b7/tkzbyvzx72qcg9wb0t1jybvm0000gn/T/diaporama-oS58O7/avance.jpg">    </p:cNvPr>
+          <p:cNvPr id="21" name="Image 5" descr="/var/folders/b7/tkzbyvzx72qcg9wb0t1jybvm0000gn/T/diaporama-zLbeHS/avance.jpg">    </p:cNvPr>
           <p:cNvPicPr>
             <a:picLocks noChangeAspect="1"/>
           </p:cNvPicPr>
@@ -3944,7 +3944,7 @@
                 <a:ea typeface="Arial" pitchFamily="34" charset="-122"/>
                 <a:cs typeface="Arial" pitchFamily="34" charset="-120"/>
               </a:rPr>
-              <a:t>Caramel v7.0.0 · Présentation · septembre 2026</a:t>
+              <a:t>Caramel v7.0.1 · Présentation · septembre 2026</a:t>
             </a:r>
             <a:endParaRPr lang="en-US" sz="900" dirty="0"/>
           </a:p>
@@ -4135,7 +4135,7 @@
       </p:sp>
       <p:pic>
         <p:nvPicPr>
-          <p:cNvPr id="5" name="Image 0" descr="/var/folders/b7/tkzbyvzx72qcg9wb0t1jybvm0000gn/T/diaporama-oS58O7/activites.jpg">    </p:cNvPr>
+          <p:cNvPr id="5" name="Image 0" descr="/var/folders/b7/tkzbyvzx72qcg9wb0t1jybvm0000gn/T/diaporama-zLbeHS/activites.jpg">    </p:cNvPr>
           <p:cNvPicPr>
             <a:picLocks noChangeAspect="1"/>
           </p:cNvPicPr>
@@ -4977,7 +4977,7 @@
                 <a:ea typeface="Arial" pitchFamily="34" charset="-122"/>
                 <a:cs typeface="Arial" pitchFamily="34" charset="-120"/>
               </a:rPr>
-              <a:t>Caramel v7.0.0 · Présentation · septembre 2026</a:t>
+              <a:t>Caramel v7.0.1 · Présentation · septembre 2026</a:t>
             </a:r>
             <a:endParaRPr lang="en-US" sz="900" dirty="0"/>
           </a:p>
@@ -5367,7 +5367,7 @@
       </p:sp>
       <p:pic>
         <p:nvPicPr>
-          <p:cNvPr id="10" name="Image 0" descr="/var/folders/b7/tkzbyvzx72qcg9wb0t1jybvm0000gn/T/diaporama-oS58O7/icone-1.png">    </p:cNvPr>
+          <p:cNvPr id="10" name="Image 0" descr="/var/folders/b7/tkzbyvzx72qcg9wb0t1jybvm0000gn/T/diaporama-zLbeHS/icone-1.png">    </p:cNvPr>
           <p:cNvPicPr>
             <a:picLocks noChangeAspect="1"/>
           </p:cNvPicPr>
@@ -5464,7 +5464,7 @@
       </p:sp>
       <p:pic>
         <p:nvPicPr>
-          <p:cNvPr id="13" name="Image 1" descr="/var/folders/b7/tkzbyvzx72qcg9wb0t1jybvm0000gn/T/diaporama-oS58O7/generation.jpg">    </p:cNvPr>
+          <p:cNvPr id="13" name="Image 1" descr="/var/folders/b7/tkzbyvzx72qcg9wb0t1jybvm0000gn/T/diaporama-zLbeHS/generation.jpg">    </p:cNvPr>
           <p:cNvPicPr>
             <a:picLocks noChangeAspect="1"/>
           </p:cNvPicPr>
@@ -5578,7 +5578,7 @@
                 <a:ea typeface="Arial" pitchFamily="34" charset="-122"/>
                 <a:cs typeface="Arial" pitchFamily="34" charset="-120"/>
               </a:rPr>
-              <a:t>Caramel v7.0.0 · Présentation · septembre 2026</a:t>
+              <a:t>Caramel v7.0.1 · Présentation · septembre 2026</a:t>
             </a:r>
             <a:endParaRPr lang="en-US" sz="900" dirty="0"/>
           </a:p>
@@ -5769,7 +5769,7 @@
       </p:sp>
       <p:pic>
         <p:nvPicPr>
-          <p:cNvPr id="5" name="Image 0" descr="/var/folders/b7/tkzbyvzx72qcg9wb0t1jybvm0000gn/T/diaporama-oS58O7/apercu.jpg">    </p:cNvPr>
+          <p:cNvPr id="5" name="Image 0" descr="/var/folders/b7/tkzbyvzx72qcg9wb0t1jybvm0000gn/T/diaporama-zLbeHS/apercu.jpg">    </p:cNvPr>
           <p:cNvPicPr>
             <a:picLocks noChangeAspect="1"/>
           </p:cNvPicPr>
@@ -5827,7 +5827,7 @@
       </p:sp>
       <p:pic>
         <p:nvPicPr>
-          <p:cNvPr id="7" name="Image 1" descr="/var/folders/b7/tkzbyvzx72qcg9wb0t1jybvm0000gn/T/diaporama-oS58O7/editeur.jpg">    </p:cNvPr>
+          <p:cNvPr id="7" name="Image 1" descr="/var/folders/b7/tkzbyvzx72qcg9wb0t1jybvm0000gn/T/diaporama-zLbeHS/editeur.jpg">    </p:cNvPr>
           <p:cNvPicPr>
             <a:picLocks noChangeAspect="1"/>
           </p:cNvPicPr>
@@ -6038,7 +6038,7 @@
                 <a:ea typeface="Arial" pitchFamily="34" charset="-122"/>
                 <a:cs typeface="Arial" pitchFamily="34" charset="-120"/>
               </a:rPr>
-              <a:t>Caramel v7.0.0 · Présentation · septembre 2026</a:t>
+              <a:t>Caramel v7.0.1 · Présentation · septembre 2026</a:t>
             </a:r>
             <a:endParaRPr lang="en-US" sz="900" dirty="0"/>
           </a:p>
@@ -6229,7 +6229,7 @@
       </p:sp>
       <p:pic>
         <p:nvPicPr>
-          <p:cNvPr id="5" name="Image 0" descr="/var/folders/b7/tkzbyvzx72qcg9wb0t1jybvm0000gn/T/diaporama-oS58O7/barre.jpg">    </p:cNvPr>
+          <p:cNvPr id="5" name="Image 0" descr="/var/folders/b7/tkzbyvzx72qcg9wb0t1jybvm0000gn/T/diaporama-zLbeHS/barre.jpg">    </p:cNvPr>
           <p:cNvPicPr>
             <a:picLocks noChangeAspect="1"/>
           </p:cNvPicPr>
@@ -6309,7 +6309,7 @@
       </p:sp>
       <p:pic>
         <p:nvPicPr>
-          <p:cNvPr id="8" name="Image 1" descr="/var/folders/b7/tkzbyvzx72qcg9wb0t1jybvm0000gn/T/diaporama-oS58O7/icone-16.png">    </p:cNvPr>
+          <p:cNvPr id="8" name="Image 1" descr="/var/folders/b7/tkzbyvzx72qcg9wb0t1jybvm0000gn/T/diaporama-zLbeHS/icone-16.png">    </p:cNvPr>
           <p:cNvPicPr>
             <a:picLocks noChangeAspect="1"/>
           </p:cNvPicPr>
@@ -6467,7 +6467,7 @@
       </p:sp>
       <p:pic>
         <p:nvPicPr>
-          <p:cNvPr id="13" name="Image 2" descr="/var/folders/b7/tkzbyvzx72qcg9wb0t1jybvm0000gn/T/diaporama-oS58O7/icone-17.png">    </p:cNvPr>
+          <p:cNvPr id="13" name="Image 2" descr="/var/folders/b7/tkzbyvzx72qcg9wb0t1jybvm0000gn/T/diaporama-zLbeHS/icone-17.png">    </p:cNvPr>
           <p:cNvPicPr>
             <a:picLocks noChangeAspect="1"/>
           </p:cNvPicPr>
@@ -6625,7 +6625,7 @@
       </p:sp>
       <p:pic>
         <p:nvPicPr>
-          <p:cNvPr id="18" name="Image 3" descr="/var/folders/b7/tkzbyvzx72qcg9wb0t1jybvm0000gn/T/diaporama-oS58O7/icone-18.png">    </p:cNvPr>
+          <p:cNvPr id="18" name="Image 3" descr="/var/folders/b7/tkzbyvzx72qcg9wb0t1jybvm0000gn/T/diaporama-zLbeHS/icone-18.png">    </p:cNvPr>
           <p:cNvPicPr>
             <a:picLocks noChangeAspect="1"/>
           </p:cNvPicPr>
@@ -6758,7 +6758,7 @@
                 <a:ea typeface="Arial" pitchFamily="34" charset="-122"/>
                 <a:cs typeface="Arial" pitchFamily="34" charset="-120"/>
               </a:rPr>
-              <a:t>Caramel v7.0.0 · Présentation · septembre 2026</a:t>
+              <a:t>Caramel v7.0.1 · Présentation · septembre 2026</a:t>
             </a:r>
             <a:endParaRPr lang="en-US" sz="900" dirty="0"/>
           </a:p>
@@ -7381,7 +7381,7 @@
       </p:sp>
       <p:pic>
         <p:nvPicPr>
-          <p:cNvPr id="18" name="Image 0" descr="/var/folders/b7/tkzbyvzx72qcg9wb0t1jybvm0000gn/T/diaporama-oS58O7/icone-39.png">    </p:cNvPr>
+          <p:cNvPr id="18" name="Image 0" descr="/var/folders/b7/tkzbyvzx72qcg9wb0t1jybvm0000gn/T/diaporama-zLbeHS/icone-39.png">    </p:cNvPr>
           <p:cNvPicPr>
             <a:picLocks noChangeAspect="1"/>
           </p:cNvPicPr>
@@ -7664,7 +7664,7 @@
                 <a:ea typeface="Arial" pitchFamily="34" charset="-122"/>
                 <a:cs typeface="Arial" pitchFamily="34" charset="-120"/>
               </a:rPr>
-              <a:t>Caramel v7.0.0 · Présentation · septembre 2026</a:t>
+              <a:t>Caramel v7.0.1 · Présentation · septembre 2026</a:t>
             </a:r>
             <a:endParaRPr lang="en-US" sz="900" dirty="0"/>
           </a:p>
@@ -8538,7 +8538,7 @@
       </p:sp>
       <p:pic>
         <p:nvPicPr>
-          <p:cNvPr id="27" name="Image 0" descr="/var/folders/b7/tkzbyvzx72qcg9wb0t1jybvm0000gn/T/diaporama-oS58O7/cadrage.jpg">    </p:cNvPr>
+          <p:cNvPr id="27" name="Image 0" descr="/var/folders/b7/tkzbyvzx72qcg9wb0t1jybvm0000gn/T/diaporama-zLbeHS/cadrage.jpg">    </p:cNvPr>
           <p:cNvPicPr>
             <a:picLocks noChangeAspect="1"/>
           </p:cNvPicPr>
@@ -8747,7 +8747,7 @@
                 <a:ea typeface="Arial" pitchFamily="34" charset="-122"/>
                 <a:cs typeface="Arial" pitchFamily="34" charset="-120"/>
               </a:rPr>
-              <a:t>Caramel v7.0.0 · Présentation · septembre 2026</a:t>
+              <a:t>Caramel v7.0.1 · Présentation · septembre 2026</a:t>
             </a:r>
             <a:endParaRPr lang="en-US" sz="900" dirty="0"/>
           </a:p>
@@ -8938,7 +8938,7 @@
       </p:sp>
       <p:pic>
         <p:nvPicPr>
-          <p:cNvPr id="5" name="Image 0" descr="/var/folders/b7/tkzbyvzx72qcg9wb0t1jybvm0000gn/T/diaporama-oS58O7/plan.jpg">    </p:cNvPr>
+          <p:cNvPr id="5" name="Image 0" descr="/var/folders/b7/tkzbyvzx72qcg9wb0t1jybvm0000gn/T/diaporama-zLbeHS/plan.jpg">    </p:cNvPr>
           <p:cNvPicPr>
             <a:picLocks noChangeAspect="1"/>
           </p:cNvPicPr>
@@ -9191,7 +9191,7 @@
                 <a:ea typeface="Arial" pitchFamily="34" charset="-122"/>
                 <a:cs typeface="Arial" pitchFamily="34" charset="-120"/>
               </a:rPr>
-              <a:t>Caramel v7.0.0 · Présentation · septembre 2026</a:t>
+              <a:t>Caramel v7.0.1 · Présentation · septembre 2026</a:t>
             </a:r>
             <a:endParaRPr lang="en-US" sz="900" dirty="0"/>
           </a:p>
@@ -9382,7 +9382,7 @@
       </p:sp>
       <p:pic>
         <p:nvPicPr>
-          <p:cNvPr id="5" name="Image 0" descr="/var/folders/b7/tkzbyvzx72qcg9wb0t1jybvm0000gn/T/diaporama-oS58O7/fabrication.jpg">    </p:cNvPr>
+          <p:cNvPr id="5" name="Image 0" descr="/var/folders/b7/tkzbyvzx72qcg9wb0t1jybvm0000gn/T/diaporama-zLbeHS/fabrication.jpg">    </p:cNvPr>
           <p:cNvPicPr>
             <a:picLocks noChangeAspect="1"/>
           </p:cNvPicPr>
@@ -9440,7 +9440,7 @@
       </p:sp>
       <p:pic>
         <p:nvPicPr>
-          <p:cNvPr id="7" name="Image 1" descr="/var/folders/b7/tkzbyvzx72qcg9wb0t1jybvm0000gn/T/diaporama-oS58O7/livraison.jpg">    </p:cNvPr>
+          <p:cNvPr id="7" name="Image 1" descr="/var/folders/b7/tkzbyvzx72qcg9wb0t1jybvm0000gn/T/diaporama-zLbeHS/livraison.jpg">    </p:cNvPr>
           <p:cNvPicPr>
             <a:picLocks noChangeAspect="1"/>
           </p:cNvPicPr>
@@ -9651,7 +9651,7 @@
                 <a:ea typeface="Arial" pitchFamily="34" charset="-122"/>
                 <a:cs typeface="Arial" pitchFamily="34" charset="-120"/>
               </a:rPr>
-              <a:t>Caramel v7.0.0 · Présentation · septembre 2026</a:t>
+              <a:t>Caramel v7.0.1 · Présentation · septembre 2026</a:t>
             </a:r>
             <a:endParaRPr lang="en-US" sz="900" dirty="0"/>
           </a:p>
@@ -9808,7 +9808,7 @@
       </p:sp>
       <p:pic>
         <p:nvPicPr>
-          <p:cNvPr id="4" name="Image 0" descr="/var/folders/b7/tkzbyvzx72qcg9wb0t1jybvm0000gn/T/diaporama-oS58O7/logo-sucrerie.png">    </p:cNvPr>
+          <p:cNvPr id="4" name="Image 0" descr="/var/folders/b7/tkzbyvzx72qcg9wb0t1jybvm0000gn/T/diaporama-zLbeHS/logo-sucrerie.png">    </p:cNvPr>
           <p:cNvPicPr>
             <a:picLocks noChangeAspect="1"/>
           </p:cNvPicPr>
@@ -10109,7 +10109,7 @@
       </p:sp>
       <p:pic>
         <p:nvPicPr>
-          <p:cNvPr id="7" name="Image 1" descr="/var/folders/b7/tkzbyvzx72qcg9wb0t1jybvm0000gn/T/diaporama-oS58O7/qr-sucrerie.png">    </p:cNvPr>
+          <p:cNvPr id="7" name="Image 1" descr="/var/folders/b7/tkzbyvzx72qcg9wb0t1jybvm0000gn/T/diaporama-zLbeHS/qr-sucrerie.png">    </p:cNvPr>
           <p:cNvPicPr>
             <a:picLocks noChangeAspect="1"/>
           </p:cNvPicPr>
@@ -10228,7 +10228,7 @@
       </p:sp>
       <p:pic>
         <p:nvPicPr>
-          <p:cNvPr id="10" name="Image 2" descr="/var/folders/b7/tkzbyvzx72qcg9wb0t1jybvm0000gn/T/diaporama-oS58O7/sucrerie.jpg">    </p:cNvPr>
+          <p:cNvPr id="10" name="Image 2" descr="/var/folders/b7/tkzbyvzx72qcg9wb0t1jybvm0000gn/T/diaporama-zLbeHS/sucrerie.jpg">    </p:cNvPr>
           <p:cNvPicPr>
             <a:picLocks noChangeAspect="1"/>
           </p:cNvPicPr>
@@ -10342,7 +10342,7 @@
                 <a:ea typeface="Arial" pitchFamily="34" charset="-122"/>
                 <a:cs typeface="Arial" pitchFamily="34" charset="-120"/>
               </a:rPr>
-              <a:t>Caramel v7.0.0 · Présentation · septembre 2026</a:t>
+              <a:t>Caramel v7.0.1 · Présentation · septembre 2026</a:t>
             </a:r>
             <a:endParaRPr lang="en-US" sz="900" dirty="0"/>
           </a:p>
@@ -10697,7 +10697,7 @@
       </p:sp>
       <p:pic>
         <p:nvPicPr>
-          <p:cNvPr id="9" name="Image 1" descr="/var/folders/b7/tkzbyvzx72qcg9wb0t1jybvm0000gn/T/diaporama-oS58O7/icone-36.png">    </p:cNvPr>
+          <p:cNvPr id="9" name="Image 1" descr="/var/folders/b7/tkzbyvzx72qcg9wb0t1jybvm0000gn/T/diaporama-zLbeHS/icone-36.png">    </p:cNvPr>
           <p:cNvPicPr>
             <a:picLocks noChangeAspect="1"/>
           </p:cNvPicPr>
@@ -10985,7 +10985,7 @@
       </p:sp>
       <p:pic>
         <p:nvPicPr>
-          <p:cNvPr id="16" name="Image 3" descr="/var/folders/b7/tkzbyvzx72qcg9wb0t1jybvm0000gn/T/diaporama-oS58O7/icone-36.png">    </p:cNvPr>
+          <p:cNvPr id="16" name="Image 3" descr="/var/folders/b7/tkzbyvzx72qcg9wb0t1jybvm0000gn/T/diaporama-zLbeHS/icone-36.png">    </p:cNvPr>
           <p:cNvPicPr>
             <a:picLocks noChangeAspect="1"/>
           </p:cNvPicPr>
@@ -11077,7 +11077,7 @@
       </p:sp>
       <p:pic>
         <p:nvPicPr>
-          <p:cNvPr id="19" name="Image 4" descr="/var/folders/b7/tkzbyvzx72qcg9wb0t1jybvm0000gn/T/diaporama-oS58O7/icone-28.png">    </p:cNvPr>
+          <p:cNvPr id="19" name="Image 4" descr="/var/folders/b7/tkzbyvzx72qcg9wb0t1jybvm0000gn/T/diaporama-zLbeHS/icone-28.png">    </p:cNvPr>
           <p:cNvPicPr>
             <a:picLocks noChangeAspect="1"/>
           </p:cNvPicPr>
@@ -11201,7 +11201,7 @@
       </p:sp>
       <p:pic>
         <p:nvPicPr>
-          <p:cNvPr id="23" name="Image 5" descr="/var/folders/b7/tkzbyvzx72qcg9wb0t1jybvm0000gn/T/diaporama-oS58O7/icone-29.png">    </p:cNvPr>
+          <p:cNvPr id="23" name="Image 5" descr="/var/folders/b7/tkzbyvzx72qcg9wb0t1jybvm0000gn/T/diaporama-zLbeHS/icone-29.png">    </p:cNvPr>
           <p:cNvPicPr>
             <a:picLocks noChangeAspect="1"/>
           </p:cNvPicPr>
@@ -11325,7 +11325,7 @@
       </p:sp>
       <p:pic>
         <p:nvPicPr>
-          <p:cNvPr id="27" name="Image 6" descr="/var/folders/b7/tkzbyvzx72qcg9wb0t1jybvm0000gn/T/diaporama-oS58O7/icone-32.png">    </p:cNvPr>
+          <p:cNvPr id="27" name="Image 6" descr="/var/folders/b7/tkzbyvzx72qcg9wb0t1jybvm0000gn/T/diaporama-zLbeHS/icone-32.png">    </p:cNvPr>
           <p:cNvPicPr>
             <a:picLocks noChangeAspect="1"/>
           </p:cNvPicPr>
@@ -11458,7 +11458,7 @@
                 <a:ea typeface="Arial" pitchFamily="34" charset="-122"/>
                 <a:cs typeface="Arial" pitchFamily="34" charset="-120"/>
               </a:rPr>
-              <a:t>Caramel v7.0.0 · Présentation · septembre 2026</a:t>
+              <a:t>Caramel v7.0.1 · Présentation · septembre 2026</a:t>
             </a:r>
             <a:endParaRPr lang="en-US" sz="900" dirty="0"/>
           </a:p>
@@ -11649,7 +11649,7 @@
       </p:sp>
       <p:pic>
         <p:nvPicPr>
-          <p:cNvPr id="5" name="Image 0" descr="/var/folders/b7/tkzbyvzx72qcg9wb0t1jybvm0000gn/T/diaporama-oS58O7/caramelia.jpg">    </p:cNvPr>
+          <p:cNvPr id="5" name="Image 0" descr="/var/folders/b7/tkzbyvzx72qcg9wb0t1jybvm0000gn/T/diaporama-zLbeHS/caramelia.jpg">    </p:cNvPr>
           <p:cNvPicPr>
             <a:picLocks noChangeAspect="1"/>
           </p:cNvPicPr>
@@ -11695,7 +11695,7 @@
       </p:sp>
       <p:pic>
         <p:nvPicPr>
-          <p:cNvPr id="7" name="Image 1" descr="/var/folders/b7/tkzbyvzx72qcg9wb0t1jybvm0000gn/T/diaporama-oS58O7/logo-caramelia.png">    </p:cNvPr>
+          <p:cNvPr id="7" name="Image 1" descr="/var/folders/b7/tkzbyvzx72qcg9wb0t1jybvm0000gn/T/diaporama-zLbeHS/logo-caramelia.png">    </p:cNvPr>
           <p:cNvPicPr>
             <a:picLocks noChangeAspect="1"/>
           </p:cNvPicPr>
@@ -11819,7 +11819,7 @@
       </p:sp>
       <p:pic>
         <p:nvPicPr>
-          <p:cNvPr id="11" name="Image 2" descr="/var/folders/b7/tkzbyvzx72qcg9wb0t1jybvm0000gn/T/diaporama-oS58O7/icone-24.png">    </p:cNvPr>
+          <p:cNvPr id="11" name="Image 2" descr="/var/folders/b7/tkzbyvzx72qcg9wb0t1jybvm0000gn/T/diaporama-zLbeHS/icone-24.png">    </p:cNvPr>
           <p:cNvPicPr>
             <a:picLocks noChangeAspect="1"/>
           </p:cNvPicPr>
@@ -11943,7 +11943,7 @@
       </p:sp>
       <p:pic>
         <p:nvPicPr>
-          <p:cNvPr id="15" name="Image 3" descr="/var/folders/b7/tkzbyvzx72qcg9wb0t1jybvm0000gn/T/diaporama-oS58O7/icone-26.png">    </p:cNvPr>
+          <p:cNvPr id="15" name="Image 3" descr="/var/folders/b7/tkzbyvzx72qcg9wb0t1jybvm0000gn/T/diaporama-zLbeHS/icone-26.png">    </p:cNvPr>
           <p:cNvPicPr>
             <a:picLocks noChangeAspect="1"/>
           </p:cNvPicPr>
@@ -12067,7 +12067,7 @@
       </p:sp>
       <p:pic>
         <p:nvPicPr>
-          <p:cNvPr id="19" name="Image 4" descr="/var/folders/b7/tkzbyvzx72qcg9wb0t1jybvm0000gn/T/diaporama-oS58O7/logo-tchap.png">    </p:cNvPr>
+          <p:cNvPr id="19" name="Image 4" descr="/var/folders/b7/tkzbyvzx72qcg9wb0t1jybvm0000gn/T/diaporama-zLbeHS/logo-tchap.png">    </p:cNvPr>
           <p:cNvPicPr>
             <a:picLocks noChangeAspect="1"/>
           </p:cNvPicPr>
@@ -12200,7 +12200,7 @@
                 <a:ea typeface="Arial" pitchFamily="34" charset="-122"/>
                 <a:cs typeface="Arial" pitchFamily="34" charset="-120"/>
               </a:rPr>
-              <a:t>Caramel v7.0.0 · Présentation · septembre 2026</a:t>
+              <a:t>Caramel v7.0.1 · Présentation · septembre 2026</a:t>
             </a:r>
             <a:endParaRPr lang="en-US" sz="900" dirty="0"/>
           </a:p>
@@ -12413,7 +12413,7 @@
       </p:sp>
       <p:pic>
         <p:nvPicPr>
-          <p:cNvPr id="6" name="Image 0" descr="/var/folders/b7/tkzbyvzx72qcg9wb0t1jybvm0000gn/T/diaporama-oS58O7/icone-19.png">    </p:cNvPr>
+          <p:cNvPr id="6" name="Image 0" descr="/var/folders/b7/tkzbyvzx72qcg9wb0t1jybvm0000gn/T/diaporama-zLbeHS/icone-19.png">    </p:cNvPr>
           <p:cNvPicPr>
             <a:picLocks noChangeAspect="1"/>
           </p:cNvPicPr>
@@ -12571,7 +12571,7 @@
       </p:sp>
       <p:pic>
         <p:nvPicPr>
-          <p:cNvPr id="11" name="Image 1" descr="/var/folders/b7/tkzbyvzx72qcg9wb0t1jybvm0000gn/T/diaporama-oS58O7/icone-20.png">    </p:cNvPr>
+          <p:cNvPr id="11" name="Image 1" descr="/var/folders/b7/tkzbyvzx72qcg9wb0t1jybvm0000gn/T/diaporama-zLbeHS/icone-20.png">    </p:cNvPr>
           <p:cNvPicPr>
             <a:picLocks noChangeAspect="1"/>
           </p:cNvPicPr>
@@ -12729,7 +12729,7 @@
       </p:sp>
       <p:pic>
         <p:nvPicPr>
-          <p:cNvPr id="16" name="Image 2" descr="/var/folders/b7/tkzbyvzx72qcg9wb0t1jybvm0000gn/T/diaporama-oS58O7/icone-21.png">    </p:cNvPr>
+          <p:cNvPr id="16" name="Image 2" descr="/var/folders/b7/tkzbyvzx72qcg9wb0t1jybvm0000gn/T/diaporama-zLbeHS/icone-21.png">    </p:cNvPr>
           <p:cNvPicPr>
             <a:picLocks noChangeAspect="1"/>
           </p:cNvPicPr>
@@ -12887,7 +12887,7 @@
       </p:sp>
       <p:pic>
         <p:nvPicPr>
-          <p:cNvPr id="21" name="Image 3" descr="/var/folders/b7/tkzbyvzx72qcg9wb0t1jybvm0000gn/T/diaporama-oS58O7/icone-22.png">    </p:cNvPr>
+          <p:cNvPr id="21" name="Image 3" descr="/var/folders/b7/tkzbyvzx72qcg9wb0t1jybvm0000gn/T/diaporama-zLbeHS/icone-22.png">    </p:cNvPr>
           <p:cNvPicPr>
             <a:picLocks noChangeAspect="1"/>
           </p:cNvPicPr>
@@ -13045,7 +13045,7 @@
       </p:sp>
       <p:pic>
         <p:nvPicPr>
-          <p:cNvPr id="26" name="Image 4" descr="/var/folders/b7/tkzbyvzx72qcg9wb0t1jybvm0000gn/T/diaporama-oS58O7/icone-23.png">    </p:cNvPr>
+          <p:cNvPr id="26" name="Image 4" descr="/var/folders/b7/tkzbyvzx72qcg9wb0t1jybvm0000gn/T/diaporama-zLbeHS/icone-23.png">    </p:cNvPr>
           <p:cNvPicPr>
             <a:picLocks noChangeAspect="1"/>
           </p:cNvPicPr>
@@ -13244,7 +13244,7 @@
                 <a:ea typeface="Arial" pitchFamily="34" charset="-122"/>
                 <a:cs typeface="Arial" pitchFamily="34" charset="-120"/>
               </a:rPr>
-              <a:t>Caramel v7.0.0 · Présentation · septembre 2026</a:t>
+              <a:t>Caramel v7.0.1 · Présentation · septembre 2026</a:t>
             </a:r>
             <a:endParaRPr lang="en-US" sz="900" dirty="0"/>
           </a:p>
@@ -14103,7 +14103,7 @@
       </p:sp>
       <p:pic>
         <p:nvPicPr>
-          <p:cNvPr id="25" name="Image 0" descr="/var/folders/b7/tkzbyvzx72qcg9wb0t1jybvm0000gn/T/diaporama-oS58O7/icone-25.png">    </p:cNvPr>
+          <p:cNvPr id="25" name="Image 0" descr="/var/folders/b7/tkzbyvzx72qcg9wb0t1jybvm0000gn/T/diaporama-zLbeHS/icone-25.png">    </p:cNvPr>
           <p:cNvPicPr>
             <a:picLocks noChangeAspect="1"/>
           </p:cNvPicPr>
@@ -14212,7 +14212,7 @@
                 <a:ea typeface="Arial" pitchFamily="34" charset="-122"/>
                 <a:cs typeface="Arial" pitchFamily="34" charset="-120"/>
               </a:rPr>
-              <a:t>Caramel v7.0.0 · Présentation · septembre 2026</a:t>
+              <a:t>Caramel v7.0.1 · Présentation · septembre 2026</a:t>
             </a:r>
             <a:endParaRPr lang="en-US" sz="900" dirty="0"/>
           </a:p>
@@ -14386,7 +14386,7 @@
       </p:sp>
       <p:pic>
         <p:nvPicPr>
-          <p:cNvPr id="5" name="Image 0" descr="/var/folders/b7/tkzbyvzx72qcg9wb0t1jybvm0000gn/T/diaporama-oS58O7/icone-33.png">    </p:cNvPr>
+          <p:cNvPr id="5" name="Image 0" descr="/var/folders/b7/tkzbyvzx72qcg9wb0t1jybvm0000gn/T/diaporama-zLbeHS/icone-33.png">    </p:cNvPr>
           <p:cNvPicPr>
             <a:picLocks noChangeAspect="1"/>
           </p:cNvPicPr>
@@ -14493,7 +14493,7 @@
       </p:sp>
       <p:pic>
         <p:nvPicPr>
-          <p:cNvPr id="8" name="Image 1" descr="/var/folders/b7/tkzbyvzx72qcg9wb0t1jybvm0000gn/T/diaporama-oS58O7/icone-32.png">    </p:cNvPr>
+          <p:cNvPr id="8" name="Image 1" descr="/var/folders/b7/tkzbyvzx72qcg9wb0t1jybvm0000gn/T/diaporama-zLbeHS/icone-32.png">    </p:cNvPr>
           <p:cNvPicPr>
             <a:picLocks noChangeAspect="1"/>
           </p:cNvPicPr>
@@ -14600,7 +14600,7 @@
       </p:sp>
       <p:pic>
         <p:nvPicPr>
-          <p:cNvPr id="11" name="Image 2" descr="/var/folders/b7/tkzbyvzx72qcg9wb0t1jybvm0000gn/T/diaporama-oS58O7/icone-18.png">    </p:cNvPr>
+          <p:cNvPr id="11" name="Image 2" descr="/var/folders/b7/tkzbyvzx72qcg9wb0t1jybvm0000gn/T/diaporama-zLbeHS/icone-18.png">    </p:cNvPr>
           <p:cNvPicPr>
             <a:picLocks noChangeAspect="1"/>
           </p:cNvPicPr>
@@ -14742,7 +14742,7 @@
       </p:sp>
       <p:pic>
         <p:nvPicPr>
-          <p:cNvPr id="14" name="Image 3" descr="/var/folders/b7/tkzbyvzx72qcg9wb0t1jybvm0000gn/T/diaporama-oS58O7/icone-26.png">    </p:cNvPr>
+          <p:cNvPr id="14" name="Image 3" descr="/var/folders/b7/tkzbyvzx72qcg9wb0t1jybvm0000gn/T/diaporama-zLbeHS/icone-26.png">    </p:cNvPr>
           <p:cNvPicPr>
             <a:picLocks noChangeAspect="1"/>
           </p:cNvPicPr>
@@ -14849,7 +14849,7 @@
       </p:sp>
       <p:pic>
         <p:nvPicPr>
-          <p:cNvPr id="17" name="Image 4" descr="/var/folders/b7/tkzbyvzx72qcg9wb0t1jybvm0000gn/T/diaporama-oS58O7/icone-27.png">    </p:cNvPr>
+          <p:cNvPr id="17" name="Image 4" descr="/var/folders/b7/tkzbyvzx72qcg9wb0t1jybvm0000gn/T/diaporama-zLbeHS/icone-27.png">    </p:cNvPr>
           <p:cNvPicPr>
             <a:picLocks noChangeAspect="1"/>
           </p:cNvPicPr>
@@ -14956,7 +14956,7 @@
       </p:sp>
       <p:pic>
         <p:nvPicPr>
-          <p:cNvPr id="20" name="Image 5" descr="/var/folders/b7/tkzbyvzx72qcg9wb0t1jybvm0000gn/T/diaporama-oS58O7/icone-31.png">    </p:cNvPr>
+          <p:cNvPr id="20" name="Image 5" descr="/var/folders/b7/tkzbyvzx72qcg9wb0t1jybvm0000gn/T/diaporama-zLbeHS/icone-31.png">    </p:cNvPr>
           <p:cNvPicPr>
             <a:picLocks noChangeAspect="1"/>
           </p:cNvPicPr>
@@ -15063,7 +15063,7 @@
       </p:sp>
       <p:pic>
         <p:nvPicPr>
-          <p:cNvPr id="23" name="Image 6" descr="/var/folders/b7/tkzbyvzx72qcg9wb0t1jybvm0000gn/T/diaporama-oS58O7/icone-28.png">    </p:cNvPr>
+          <p:cNvPr id="23" name="Image 6" descr="/var/folders/b7/tkzbyvzx72qcg9wb0t1jybvm0000gn/T/diaporama-zLbeHS/icone-28.png">    </p:cNvPr>
           <p:cNvPicPr>
             <a:picLocks noChangeAspect="1"/>
           </p:cNvPicPr>
@@ -15170,7 +15170,7 @@
       </p:sp>
       <p:pic>
         <p:nvPicPr>
-          <p:cNvPr id="26" name="Image 7" descr="/var/folders/b7/tkzbyvzx72qcg9wb0t1jybvm0000gn/T/diaporama-oS58O7/icone-22.png">    </p:cNvPr>
+          <p:cNvPr id="26" name="Image 7" descr="/var/folders/b7/tkzbyvzx72qcg9wb0t1jybvm0000gn/T/diaporama-zLbeHS/icone-22.png">    </p:cNvPr>
           <p:cNvPicPr>
             <a:picLocks noChangeAspect="1"/>
           </p:cNvPicPr>
@@ -15289,7 +15289,7 @@
       </p:sp>
       <p:pic>
         <p:nvPicPr>
-          <p:cNvPr id="29" name="Image 8" descr="/var/folders/b7/tkzbyvzx72qcg9wb0t1jybvm0000gn/T/diaporama-oS58O7/qr-caramel.png">    </p:cNvPr>
+          <p:cNvPr id="29" name="Image 8" descr="/var/folders/b7/tkzbyvzx72qcg9wb0t1jybvm0000gn/T/diaporama-zLbeHS/qr-caramel.png">    </p:cNvPr>
           <p:cNvPicPr>
             <a:picLocks noChangeAspect="1"/>
           </p:cNvPicPr>
@@ -15425,7 +15425,7 @@
       </p:sp>
       <p:pic>
         <p:nvPicPr>
-          <p:cNvPr id="33" name="Image 9" descr="/var/folders/b7/tkzbyvzx72qcg9wb0t1jybvm0000gn/T/diaporama-oS58O7/qr-decouvrir.png">    </p:cNvPr>
+          <p:cNvPr id="33" name="Image 9" descr="/var/folders/b7/tkzbyvzx72qcg9wb0t1jybvm0000gn/T/diaporama-zLbeHS/qr-decouvrir.png">    </p:cNvPr>
           <p:cNvPicPr>
             <a:picLocks noChangeAspect="1"/>
           </p:cNvPicPr>
@@ -15558,7 +15558,7 @@
                 <a:ea typeface="Arial" pitchFamily="34" charset="-122"/>
                 <a:cs typeface="Arial" pitchFamily="34" charset="-120"/>
               </a:rPr>
-              <a:t>Caramel v7.0.0 · Présentation · septembre 2026</a:t>
+              <a:t>Caramel v7.0.1 · Présentation · septembre 2026</a:t>
             </a:r>
             <a:endParaRPr lang="en-US" sz="900" dirty="0"/>
           </a:p>
@@ -15637,7 +15637,7 @@
       </p:grpSpPr>
       <p:pic>
         <p:nvPicPr>
-          <p:cNvPr id="2" name="Image 0" descr="/var/folders/b7/tkzbyvzx72qcg9wb0t1jybvm0000gn/T/diaporama-oS58O7/logo-caramel.png">    </p:cNvPr>
+          <p:cNvPr id="2" name="Image 0" descr="/var/folders/b7/tkzbyvzx72qcg9wb0t1jybvm0000gn/T/diaporama-zLbeHS/logo-caramel.png">    </p:cNvPr>
           <p:cNvPicPr>
             <a:picLocks noChangeAspect="1"/>
           </p:cNvPicPr>
@@ -15739,7 +15739,7 @@
       </p:sp>
       <p:pic>
         <p:nvPicPr>
-          <p:cNvPr id="5" name="Image 1" descr="/var/folders/b7/tkzbyvzx72qcg9wb0t1jybvm0000gn/T/diaporama-oS58O7/qr-caramel.png">    </p:cNvPr>
+          <p:cNvPr id="5" name="Image 1" descr="/var/folders/b7/tkzbyvzx72qcg9wb0t1jybvm0000gn/T/diaporama-zLbeHS/qr-caramel.png">    </p:cNvPr>
           <p:cNvPicPr>
             <a:picLocks noChangeAspect="1"/>
           </p:cNvPicPr>
@@ -15935,7 +15935,7 @@
                 <a:ea typeface="Arial" pitchFamily="34" charset="-122"/>
                 <a:cs typeface="Arial" pitchFamily="34" charset="-120"/>
               </a:rPr>
-              <a:t>Caramel v7.0.0 · support mis à jour le 29 septembre 2026</a:t>
+              <a:t>Caramel v7.0.1 · support mis à jour le 30 septembre 2026</a:t>
             </a:r>
             <a:endParaRPr lang="en-US" sz="1100" dirty="0"/>
           </a:p>
@@ -16204,7 +16204,7 @@
       </p:sp>
       <p:pic>
         <p:nvPicPr>
-          <p:cNvPr id="8" name="Image 0" descr="/var/folders/b7/tkzbyvzx72qcg9wb0t1jybvm0000gn/T/diaporama-oS58O7/icone-35.png">    </p:cNvPr>
+          <p:cNvPr id="8" name="Image 0" descr="/var/folders/b7/tkzbyvzx72qcg9wb0t1jybvm0000gn/T/diaporama-zLbeHS/icone-35.png">    </p:cNvPr>
           <p:cNvPicPr>
             <a:picLocks noChangeAspect="1"/>
           </p:cNvPicPr>
@@ -16379,7 +16379,7 @@
       </p:sp>
       <p:pic>
         <p:nvPicPr>
-          <p:cNvPr id="13" name="Image 1" descr="/var/folders/b7/tkzbyvzx72qcg9wb0t1jybvm0000gn/T/diaporama-oS58O7/icone-35.png">    </p:cNvPr>
+          <p:cNvPr id="13" name="Image 1" descr="/var/folders/b7/tkzbyvzx72qcg9wb0t1jybvm0000gn/T/diaporama-zLbeHS/icone-35.png">    </p:cNvPr>
           <p:cNvPicPr>
             <a:picLocks noChangeAspect="1"/>
           </p:cNvPicPr>
@@ -16903,7 +16903,7 @@
                 <a:ea typeface="Arial" pitchFamily="34" charset="-122"/>
                 <a:cs typeface="Arial" pitchFamily="34" charset="-120"/>
               </a:rPr>
-              <a:t>Caramel v7.0.0 · Présentation · septembre 2026</a:t>
+              <a:t>Caramel v7.0.1 · Présentation · septembre 2026</a:t>
             </a:r>
             <a:endParaRPr lang="en-US" sz="900" dirty="0"/>
           </a:p>
@@ -18423,7 +18423,7 @@
                 <a:ea typeface="Arial" pitchFamily="34" charset="-122"/>
                 <a:cs typeface="Arial" pitchFamily="34" charset="-120"/>
               </a:rPr>
-              <a:t>Caramel v7.0.0 · Présentation · septembre 2026</a:t>
+              <a:t>Caramel v7.0.1 · Présentation · septembre 2026</a:t>
             </a:r>
             <a:endParaRPr lang="en-US" sz="900" dirty="0"/>
           </a:p>
@@ -19256,7 +19256,7 @@
                 <a:ea typeface="Arial" pitchFamily="34" charset="-122"/>
                 <a:cs typeface="Arial" pitchFamily="34" charset="-120"/>
               </a:rPr>
-              <a:t>Caramel v7.0.0 · Présentation · septembre 2026</a:t>
+              <a:t>Caramel v7.0.1 · Présentation · septembre 2026</a:t>
             </a:r>
             <a:endParaRPr lang="en-US" sz="900" dirty="0"/>
           </a:p>
@@ -19508,7 +19508,7 @@
       </p:sp>
       <p:pic>
         <p:nvPicPr>
-          <p:cNvPr id="7" name="Image 0" descr="/var/folders/b7/tkzbyvzx72qcg9wb0t1jybvm0000gn/T/diaporama-oS58O7/icone-0.png">    </p:cNvPr>
+          <p:cNvPr id="7" name="Image 0" descr="/var/folders/b7/tkzbyvzx72qcg9wb0t1jybvm0000gn/T/diaporama-zLbeHS/icone-0.png">    </p:cNvPr>
           <p:cNvPicPr>
             <a:picLocks noChangeAspect="1"/>
           </p:cNvPicPr>
@@ -19721,7 +19721,7 @@
       </p:sp>
       <p:pic>
         <p:nvPicPr>
-          <p:cNvPr id="12" name="Image 1" descr="/var/folders/b7/tkzbyvzx72qcg9wb0t1jybvm0000gn/T/diaporama-oS58O7/icone-1.png">    </p:cNvPr>
+          <p:cNvPr id="12" name="Image 1" descr="/var/folders/b7/tkzbyvzx72qcg9wb0t1jybvm0000gn/T/diaporama-zLbeHS/icone-1.png">    </p:cNvPr>
           <p:cNvPicPr>
             <a:picLocks noChangeAspect="1"/>
           </p:cNvPicPr>
@@ -19934,7 +19934,7 @@
       </p:sp>
       <p:pic>
         <p:nvPicPr>
-          <p:cNvPr id="17" name="Image 2" descr="/var/folders/b7/tkzbyvzx72qcg9wb0t1jybvm0000gn/T/diaporama-oS58O7/icone-2.png">    </p:cNvPr>
+          <p:cNvPr id="17" name="Image 2" descr="/var/folders/b7/tkzbyvzx72qcg9wb0t1jybvm0000gn/T/diaporama-zLbeHS/icone-2.png">    </p:cNvPr>
           <p:cNvPicPr>
             <a:picLocks noChangeAspect="1"/>
           </p:cNvPicPr>
@@ -20122,7 +20122,7 @@
                 <a:ea typeface="Arial" pitchFamily="34" charset="-122"/>
                 <a:cs typeface="Arial" pitchFamily="34" charset="-120"/>
               </a:rPr>
-              <a:t>Caramel v7.0.0 · Présentation · septembre 2026</a:t>
+              <a:t>Caramel v7.0.1 · Présentation · septembre 2026</a:t>
             </a:r>
             <a:endParaRPr lang="en-US" sz="900" dirty="0"/>
           </a:p>
@@ -20335,7 +20335,7 @@
       </p:sp>
       <p:pic>
         <p:nvPicPr>
-          <p:cNvPr id="6" name="Image 0" descr="/var/folders/b7/tkzbyvzx72qcg9wb0t1jybvm0000gn/T/diaporama-oS58O7/icone-3.png">    </p:cNvPr>
+          <p:cNvPr id="6" name="Image 0" descr="/var/folders/b7/tkzbyvzx72qcg9wb0t1jybvm0000gn/T/diaporama-zLbeHS/icone-3.png">    </p:cNvPr>
           <p:cNvPicPr>
             <a:picLocks noChangeAspect="1"/>
           </p:cNvPicPr>
@@ -20493,7 +20493,7 @@
       </p:sp>
       <p:pic>
         <p:nvPicPr>
-          <p:cNvPr id="11" name="Image 1" descr="/var/folders/b7/tkzbyvzx72qcg9wb0t1jybvm0000gn/T/diaporama-oS58O7/icone-4.png">    </p:cNvPr>
+          <p:cNvPr id="11" name="Image 1" descr="/var/folders/b7/tkzbyvzx72qcg9wb0t1jybvm0000gn/T/diaporama-zLbeHS/icone-4.png">    </p:cNvPr>
           <p:cNvPicPr>
             <a:picLocks noChangeAspect="1"/>
           </p:cNvPicPr>
@@ -20651,7 +20651,7 @@
       </p:sp>
       <p:pic>
         <p:nvPicPr>
-          <p:cNvPr id="16" name="Image 2" descr="/var/folders/b7/tkzbyvzx72qcg9wb0t1jybvm0000gn/T/diaporama-oS58O7/icone-5.png">    </p:cNvPr>
+          <p:cNvPr id="16" name="Image 2" descr="/var/folders/b7/tkzbyvzx72qcg9wb0t1jybvm0000gn/T/diaporama-zLbeHS/icone-5.png">    </p:cNvPr>
           <p:cNvPicPr>
             <a:picLocks noChangeAspect="1"/>
           </p:cNvPicPr>
@@ -20837,7 +20837,7 @@
       </p:sp>
       <p:pic>
         <p:nvPicPr>
-          <p:cNvPr id="21" name="Image 3" descr="/var/folders/b7/tkzbyvzx72qcg9wb0t1jybvm0000gn/T/diaporama-oS58O7/icone-6.png">    </p:cNvPr>
+          <p:cNvPr id="21" name="Image 3" descr="/var/folders/b7/tkzbyvzx72qcg9wb0t1jybvm0000gn/T/diaporama-zLbeHS/icone-6.png">    </p:cNvPr>
           <p:cNvPicPr>
             <a:picLocks noChangeAspect="1"/>
           </p:cNvPicPr>
@@ -20966,7 +20966,7 @@
       </p:sp>
       <p:pic>
         <p:nvPicPr>
-          <p:cNvPr id="25" name="Image 4" descr="/var/folders/b7/tkzbyvzx72qcg9wb0t1jybvm0000gn/T/diaporama-oS58O7/icone-7.png">    </p:cNvPr>
+          <p:cNvPr id="25" name="Image 4" descr="/var/folders/b7/tkzbyvzx72qcg9wb0t1jybvm0000gn/T/diaporama-zLbeHS/icone-7.png">    </p:cNvPr>
           <p:cNvPicPr>
             <a:picLocks noChangeAspect="1"/>
           </p:cNvPicPr>
@@ -21133,7 +21133,7 @@
                 <a:ea typeface="Arial" pitchFamily="34" charset="-122"/>
                 <a:cs typeface="Arial" pitchFamily="34" charset="-120"/>
               </a:rPr>
-              <a:t>Caramel v7.0.0 · Présentation · septembre 2026</a:t>
+              <a:t>Caramel v7.0.1 · Présentation · septembre 2026</a:t>
             </a:r>
             <a:endParaRPr lang="en-US" sz="900" dirty="0"/>
           </a:p>
@@ -21579,7 +21579,7 @@
       </p:sp>
       <p:pic>
         <p:nvPicPr>
-          <p:cNvPr id="12" name="Image 0" descr="/var/folders/b7/tkzbyvzx72qcg9wb0t1jybvm0000gn/T/diaporama-oS58O7/icone-8.png">    </p:cNvPr>
+          <p:cNvPr id="12" name="Image 0" descr="/var/folders/b7/tkzbyvzx72qcg9wb0t1jybvm0000gn/T/diaporama-zLbeHS/icone-8.png">    </p:cNvPr>
           <p:cNvPicPr>
             <a:picLocks noChangeAspect="1"/>
           </p:cNvPicPr>
@@ -21787,7 +21787,7 @@
       </p:sp>
       <p:pic>
         <p:nvPicPr>
-          <p:cNvPr id="18" name="Image 1" descr="/var/folders/b7/tkzbyvzx72qcg9wb0t1jybvm0000gn/T/diaporama-oS58O7/icone-9.png">    </p:cNvPr>
+          <p:cNvPr id="18" name="Image 1" descr="/var/folders/b7/tkzbyvzx72qcg9wb0t1jybvm0000gn/T/diaporama-zLbeHS/icone-9.png">    </p:cNvPr>
           <p:cNvPicPr>
             <a:picLocks noChangeAspect="1"/>
           </p:cNvPicPr>
@@ -21967,7 +21967,7 @@
       </p:sp>
       <p:pic>
         <p:nvPicPr>
-          <p:cNvPr id="24" name="Image 2" descr="/var/folders/b7/tkzbyvzx72qcg9wb0t1jybvm0000gn/T/diaporama-oS58O7/icone-10.png">    </p:cNvPr>
+          <p:cNvPr id="24" name="Image 2" descr="/var/folders/b7/tkzbyvzx72qcg9wb0t1jybvm0000gn/T/diaporama-zLbeHS/icone-10.png">    </p:cNvPr>
           <p:cNvPicPr>
             <a:picLocks noChangeAspect="1"/>
           </p:cNvPicPr>
@@ -22222,7 +22222,7 @@
                 <a:ea typeface="Arial" pitchFamily="34" charset="-122"/>
                 <a:cs typeface="Arial" pitchFamily="34" charset="-120"/>
               </a:rPr>
-              <a:t>Caramel v7.0.0 · Présentation · septembre 2026</a:t>
+              <a:t>Caramel v7.0.1 · Présentation · septembre 2026</a:t>
             </a:r>
             <a:endParaRPr lang="en-US" sz="900" dirty="0"/>
           </a:p>
@@ -22413,7 +22413,7 @@
       </p:sp>
       <p:pic>
         <p:nvPicPr>
-          <p:cNvPr id="5" name="Image 0" descr="/var/folders/b7/tkzbyvzx72qcg9wb0t1jybvm0000gn/T/diaporama-oS58O7/rapide.jpg">    </p:cNvPr>
+          <p:cNvPr id="5" name="Image 0" descr="/var/folders/b7/tkzbyvzx72qcg9wb0t1jybvm0000gn/T/diaporama-zLbeHS/rapide.jpg">    </p:cNvPr>
           <p:cNvPicPr>
             <a:picLocks noChangeAspect="1"/>
           </p:cNvPicPr>
@@ -22702,7 +22702,7 @@
                 <a:ea typeface="Arial" pitchFamily="34" charset="-122"/>
                 <a:cs typeface="Arial" pitchFamily="34" charset="-120"/>
               </a:rPr>
-              <a:t>Caramel v7.0.0 · Présentation · septembre 2026</a:t>
+              <a:t>Caramel v7.0.1 · Présentation · septembre 2026</a:t>
             </a:r>
             <a:endParaRPr lang="en-US" sz="900" dirty="0"/>
           </a:p>

--- a/assets/presentation/diaporama/caramel-presentation.pptx
+++ b/assets/presentation/diaporama/caramel-presentation.pptx
@@ -29,9 +29,10 @@
     <p:sldId id="277" r:id="rId23"/>
     <p:sldId id="278" r:id="rId24"/>
     <p:sldId id="279" r:id="rId25"/>
+    <p:sldId id="280" r:id="rId26"/>
   </p:sldIdLst>
   <p:notesMasterIdLst>
-    <p:notesMasterId r:id="rId26"/>
+    <p:notesMasterId r:id="rId27"/>
   </p:notesMasterIdLst>
   <p:sldSz cx="12192000" cy="6858000"/>
   <p:notesSz cx="6858000" cy="12192000"/>
@@ -525,7 +526,7 @@
           <a:p>
             <a:r>
               <a:rPr lang="en-US" dirty="0"/>
-              <a:t>Caramel est une application web gratuite, sans compte, qui prépare avec l'IA des activités interactives et des parcours complets pour Éléa, Magistère et Moodle. Ce diaporama présente ce qu'elle fait, comment elle fonctionne et ce à quoi nous tenons : la main laissée à l'enseignant et la protection des données. Il correspond à Caramel 7.0.1 ; il est mis à jour à chaque version.</a:t>
+              <a:t>Caramel est une application web gratuite, sans compte, qui prépare avec l'IA des activités interactives et des parcours complets pour Éléa, Magistère et Moodle. Ce diaporama présente ce qu'elle fait, comment elle fonctionne et ce à quoi nous tenons : la main laissée à l'enseignant et la protection des données. Il correspond à Caramel 7.1.0 ; il est mis à jour à chaque version.</a:t>
             </a:r>
             <a:endParaRPr lang="en-US" dirty="0"/>
           </a:p>
@@ -1141,7 +1142,7 @@
           <a:p>
             <a:r>
               <a:rPr lang="en-US" dirty="0"/>
-              <a:t>Au-delà d’une activité, Caramel prépare un parcours entier : plusieurs activités organisées en étapes, livrées dans un seul fichier de cours. Le commutateur « Un parcours », sous le formulaire, ouvre l’atelier. Le cadrage tient en trois questions : la plateforme, le déroulé — en classe, à distance ou les deux — et l’ampleur, d’une séance à une séquence entière. On peut aussi partir d’une trame toute faite.</a:t>
+              <a:t>Au-delà d’une activité, Caramel prépare un parcours entier : plusieurs activités organisées en étapes, livrées dans un seul fichier de cours. Le commutateur « Un parcours », sous le formulaire, ouvre l’atelier. Le cadrage tient en quatre questions : la plateforme, le déroulé — en classe, à distance ou les deux —, l’ampleur, d’une séance à une séquence entière, et le chemin des élèves : le même pour tous, ou des chemins selon les résultats d’un test. On peut aussi partir d’une trame toute faite : trois sont proposées, les autres sont à un clic.</a:t>
             </a:r>
             <a:endParaRPr lang="en-US" dirty="0"/>
           </a:p>
@@ -1317,7 +1318,7 @@
           <a:p>
             <a:r>
               <a:rPr lang="en-US" dirty="0"/>
-              <a:t>La fabrication génère les activités une à une, sous vos yeux. Chacune peut être relue, essayée, modifiée ou générée à nouveau. À la livraison, un seul fichier .mbz contient tout le cours : sections, activités, consignes. Il se restaure dans un cours existant de la plateforme. S’y ajoutent la fiche de séquence et le détail des activités en Word, LibreOffice ou PDF, et un fichier de scénario qui permet de rouvrir le parcours dans Caramel pour le reprendre plus tard.</a:t>
+              <a:t>Au cadrage, on peut choisir des chemins selon les résultats. Un test — un quiz ou un Test de la plateforme — oriente chaque élève, d’après sa note à la première tentative, vers l’un de deux à quatre chemins : reprendre les bases, renforcer, consolider, approfondir. Chaque élève ne voit que le sien, puis tous se retrouvent pour une étape commune. Dans le plan, les seuils se règlent en nombre de bonnes réponses, jamais en pourcentage, et « Voir comme un élève » montre la page du cours telle qu’un élève la verra, selon son score. Le cours pose lui-même les restrictions d’accès ; on l’importe dans un cours vide. Pour réorienter un élève, il suffit de modifier sa note au test.</a:t>
             </a:r>
             <a:endParaRPr lang="en-US" dirty="0"/>
           </a:p>
@@ -1405,7 +1406,7 @@
           <a:p>
             <a:r>
               <a:rPr lang="en-US" dirty="0"/>
-              <a:t>La Sucrerie est la bibliothèque publique qui accompagne Caramel. On y consulte et on y essaie les activités des collègues, on les télécharge dans de nombreux formats, et on y dépose les siennes — directement depuis Caramel avec le bouton « Vers la Sucrerie ». Déposer est un choix volontaire qui vaut publication : l’activité est diffusée sous licence libre CC BY-SA, et l’adresse académique sert seulement d’identifiant. On certifie détenir les droits et qu’aucune donnée personnelle n’y figure.</a:t>
+              <a:t>La fabrication génère les activités une à une, sous vos yeux. Chacune peut être relue, essayée, modifiée ou générée à nouveau. À la livraison, un seul fichier .mbz contient tout le cours : sections, activités, consignes. Il se restaure dans un cours de la plateforme — un cours vide pour un parcours à chemins. Chaque parcours se termine par une section « Fin du parcours », et chaque activité affiche sa durée estimée. S’y ajoutent la fiche de séquence et le détail des activités en Word, LibreOffice ou PDF, et un fichier de scénario qui permet de rouvrir le parcours dans Caramel pour le reprendre plus tard.</a:t>
             </a:r>
             <a:endParaRPr lang="en-US" dirty="0"/>
           </a:p>
@@ -1581,7 +1582,7 @@
           <a:p>
             <a:r>
               <a:rPr lang="en-US" dirty="0"/>
-              <a:t>Plusieurs appuis accompagnent les collègues après la formation. Caramelia, l’assistante intégrée — la bulle en bas à droite — répond aux questions sur l’outil et peut préparer une activité ou un parcours avec vous. Le tutoriel, en haut de l’écran, reprend chaque étape pas à pas. Le wiki est le guide complet. Et le salon Tchap réunit la communauté : questions, idées, entraide.</a:t>
+              <a:t>La Sucrerie est la bibliothèque publique qui accompagne Caramel. On y consulte et on y essaie les activités des collègues, on les télécharge dans de nombreux formats, et on y dépose les siennes — directement depuis Caramel avec le bouton « Vers la Sucrerie ». Déposer est un choix volontaire qui vaut publication : l’activité est diffusée sous licence libre CC BY-SA, et l’adresse académique sert seulement d’identifiant. On certifie détenir les droits et qu’aucune donnée personnelle n’y figure.</a:t>
             </a:r>
             <a:endParaRPr lang="en-US" dirty="0"/>
           </a:p>
@@ -1669,7 +1670,7 @@
           <a:p>
             <a:r>
               <a:rPr lang="en-US" dirty="0"/>
-              <a:t>Cinq réflexes à transmettre. Relire avant de diffuser : l’IA peut se tromper sur un fait, une réponse, une consigne ; l’enseignant reste l’auteur de ce qu’il donne aux élèves. Protéger les élèves : aucune donnée personnelle. Respecter les droits des documents et des images utilisés. Tester l’activité sur un espace de test avant la classe. Et signaler les problèmes : c’est ainsi que Caramel s’améliore.</a:t>
+              <a:t>Plusieurs appuis accompagnent les collègues après la formation. Caramelia, l’assistante intégrée — la bulle en bas à droite — répond aux questions sur l’outil et peut préparer une activité ou un parcours avec vous. Le tutoriel, en haut de l’écran, reprend chaque étape pas à pas. Le wiki est le guide complet. Et le salon Tchap réunit la communauté : questions, idées, entraide.</a:t>
             </a:r>
             <a:endParaRPr lang="en-US" dirty="0"/>
           </a:p>
@@ -1757,7 +1758,7 @@
           <a:p>
             <a:r>
               <a:rPr lang="en-US" dirty="0"/>
-              <a:t>Une proposition de déroulé pour une séance d’établissement. Cinq minutes de vidéo pour poser le décor, dix minutes de démonstration en direct sur une activité de la discipline du groupe, vingt minutes d’atelier où chacun prépare une activité pour sa classe, la relit et la corrige, puis dix minutes de retour collectif. Pour un format plus ludique, testé au MoodleMoot 2026 : chaque groupe prépare au moins trois activités sur un même thème et les rassemble dans une collection sur la Sucrerie, que les autres découvrent ensuite.</a:t>
+              <a:t>Cinq réflexes à transmettre. Relire avant de diffuser : l’IA peut se tromper sur un fait, une réponse, une consigne ; l’enseignant reste l’auteur de ce qu’il donne aux élèves. Protéger les élèves : aucune donnée personnelle. Respecter les droits des documents et des images utilisés. Tester l’activité sur un espace de test avant la classe. Et signaler les problèmes : c’est ainsi que Caramel s’améliore.</a:t>
             </a:r>
             <a:endParaRPr lang="en-US" dirty="0"/>
           </a:p>
@@ -1845,7 +1846,7 @@
           <a:p>
             <a:r>
               <a:rPr lang="en-US" dirty="0"/>
-              <a:t>Tous les liens utiles, cliquables dans le diaporama. Le premier QR code ouvre Caramel directement sur un téléphone ou une tablette ; le second mène à la page de présentation, où l’on retrouve ce diaporama, la vidéo et des activités à essayer. Le bac à sable permet aux curieux de tester les nouveautés avant tout le monde, et de les commenter sur Tchap.</a:t>
+              <a:t>Une proposition de déroulé pour une séance d’établissement. Cinq minutes de vidéo pour poser le décor, dix minutes de démonstration en direct sur une activité de la discipline du groupe, vingt minutes d’atelier où chacun prépare une activité pour sa classe, la relit et la corrige, puis dix minutes de retour collectif. Pour un format plus ludique, testé au MoodleMoot 2026 : chaque groupe prépare au moins trois activités sur un même thème et les rassemble dans une collection sur la Sucrerie, que les autres découvrent ensuite.</a:t>
             </a:r>
             <a:endParaRPr lang="en-US" dirty="0"/>
           </a:p>
@@ -1933,7 +1934,7 @@
           <a:p>
             <a:r>
               <a:rPr lang="en-US" dirty="0"/>
-              <a:t>Pour conclure : Caramel s’ouvre à l’adresse caramel.forge.apps.education.fr, gratuitement et sans compte. Invitez chacun à préparer une activité pour sa propre classe, à la relire dans l’éditeur, puis à la déposer sur un espace de test. Les contacts des deux co-créateurs figurent ici pour toute question. Ce support correspond à Caramel 7.0.1, dans sa version du 30 septembre 2026.</a:t>
+              <a:t>Tous les liens utiles, cliquables dans le diaporama. Le premier QR code ouvre Caramel directement sur un téléphone ou une tablette ; le second mène à la page de présentation, où l’on retrouve ce diaporama, la vidéo et des activités à essayer. Le bac à sable permet aux curieux de tester les nouveautés avant tout le monde, et de les commenter sur Tchap.</a:t>
             </a:r>
             <a:endParaRPr lang="en-US" dirty="0"/>
           </a:p>
@@ -1957,6 +1958,94 @@
             <a:fld id="{F7021451-1387-4CA6-816F-3879F97B5CBC}" type="slidenum">
               <a:rPr lang="en-US"/>
               <a:t>24</a:t>
+            </a:fld>
+            <a:endParaRPr lang="en-US"/>
+          </a:p>
+        </p:txBody>
+      </p:sp>
+    </p:spTree>
+    <p:extLst>
+      <p:ext uri="{BB962C8B-B14F-4D97-AF65-F5344CB8AC3E}">
+        <p14:creationId xmlns:p14="http://schemas.microsoft.com/office/powerpoint/2010/main" val="1024086991"/>
+      </p:ext>
+    </p:extLst>
+  </p:cSld>
+  <p:clrMapOvr>
+    <a:masterClrMapping/>
+  </p:clrMapOvr>
+</p:notes>
+</file>
+
+<file path=ppt/notesSlides/notesSlide25.xml><?xml version="1.0" encoding="utf-8"?>
+<p:notes xmlns:a="http://schemas.openxmlformats.org/drawingml/2006/main" xmlns:r="http://schemas.openxmlformats.org/officeDocument/2006/relationships" xmlns:p="http://schemas.openxmlformats.org/presentationml/2006/main">
+  <p:cSld>
+    <p:spTree>
+      <p:nvGrpSpPr>
+        <p:cNvPr id="1" name=""/>
+        <p:cNvGrpSpPr/>
+        <p:nvPr/>
+      </p:nvGrpSpPr>
+      <p:grpSpPr>
+        <a:xfrm>
+          <a:off x="0" y="0"/>
+          <a:ext cx="0" cy="0"/>
+          <a:chOff x="0" y="0"/>
+          <a:chExt cx="0" cy="0"/>
+        </a:xfrm>
+      </p:grpSpPr>
+      <p:sp>
+        <p:nvSpPr>
+          <p:cNvPr id="2" name="Slide Image Placeholder 1"/>
+          <p:cNvSpPr>
+            <a:spLocks noGrp="1" noRot="1" noChangeAspect="1"/>
+          </p:cNvSpPr>
+          <p:nvPr>
+            <p:ph type="sldImg"/>
+          </p:nvPr>
+        </p:nvSpPr>
+        <p:spPr/>
+      </p:sp>
+      <p:sp>
+        <p:nvSpPr>
+          <p:cNvPr id="3" name="Notes Placeholder 2"/>
+          <p:cNvSpPr>
+            <a:spLocks noGrp="1"/>
+          </p:cNvSpPr>
+          <p:nvPr>
+            <p:ph type="body" idx="1"/>
+          </p:nvPr>
+        </p:nvSpPr>
+        <p:spPr/>
+        <p:txBody>
+          <a:bodyPr/>
+          <a:lstStyle/>
+          <a:p>
+            <a:r>
+              <a:rPr lang="en-US" dirty="0"/>
+              <a:t>Pour conclure : Caramel s’ouvre à l’adresse caramel.forge.apps.education.fr, gratuitement et sans compte. Invitez chacun à préparer une activité pour sa propre classe, à la relire dans l’éditeur, puis à la déposer sur un espace de test. Les contacts des deux co-créateurs figurent ici pour toute question. Ce support correspond à Caramel 7.1.0, dans sa version du 30 septembre 2026.</a:t>
+            </a:r>
+            <a:endParaRPr lang="en-US" dirty="0"/>
+          </a:p>
+        </p:txBody>
+      </p:sp>
+      <p:sp>
+        <p:nvSpPr>
+          <p:cNvPr id="4" name="Slide Number Placeholder 3"/>
+          <p:cNvSpPr>
+            <a:spLocks noGrp="1"/>
+          </p:cNvSpPr>
+          <p:nvPr>
+            <p:ph type="sldNum" sz="quarter" idx="10"/>
+          </p:nvPr>
+        </p:nvSpPr>
+        <p:spPr/>
+        <p:txBody>
+          <a:bodyPr/>
+          <a:lstStyle/>
+          <a:p>
+            <a:fld id="{F7021451-1387-4CA6-816F-3879F97B5CBC}" type="slidenum">
+              <a:rPr lang="en-US"/>
+              <a:t>25</a:t>
             </a:fld>
             <a:endParaRPr lang="en-US"/>
           </a:p>
@@ -2924,7 +3013,7 @@
       </p:grpSpPr>
       <p:pic>
         <p:nvPicPr>
-          <p:cNvPr id="2" name="Image 0" descr="/var/folders/b7/tkzbyvzx72qcg9wb0t1jybvm0000gn/T/diaporama-zLbeHS/logo-caramel.png">    </p:cNvPr>
+          <p:cNvPr id="2" name="Image 0" descr="/var/folders/b7/tkzbyvzx72qcg9wb0t1jybvm0000gn/T/diaporama-4ZvB4P/logo-caramel.png">    </p:cNvPr>
           <p:cNvPicPr>
             <a:picLocks noChangeAspect="1"/>
           </p:cNvPicPr>
@@ -3145,7 +3234,7 @@
                 <a:ea typeface="Arial" pitchFamily="34" charset="-122"/>
                 <a:cs typeface="Arial" pitchFamily="34" charset="-120"/>
               </a:rPr>
-              <a:t>Support de présentation · Caramel v7.0.1 · 30 septembre 2026</a:t>
+              <a:t>Support de présentation · Caramel v7.1.0 · 30 septembre 2026</a:t>
             </a:r>
             <a:endParaRPr lang="en-US" sz="1200" dirty="0"/>
           </a:p>
@@ -3187,7 +3276,7 @@
       </p:sp>
       <p:pic>
         <p:nvPicPr>
-          <p:cNvPr id="9" name="Image 1" descr="/var/folders/b7/tkzbyvzx72qcg9wb0t1jybvm0000gn/T/diaporama-zLbeHS/accueil.jpg">    </p:cNvPr>
+          <p:cNvPr id="9" name="Image 1" descr="/var/folders/b7/tkzbyvzx72qcg9wb0t1jybvm0000gn/T/diaporama-4ZvB4P/accueil.jpg">    </p:cNvPr>
           <p:cNvPicPr>
             <a:picLocks noChangeAspect="1"/>
           </p:cNvPicPr>
@@ -3382,7 +3471,7 @@
       </p:sp>
       <p:pic>
         <p:nvPicPr>
-          <p:cNvPr id="6" name="Image 0" descr="/var/folders/b7/tkzbyvzx72qcg9wb0t1jybvm0000gn/T/diaporama-zLbeHS/icone-11.png">    </p:cNvPr>
+          <p:cNvPr id="6" name="Image 0" descr="/var/folders/b7/tkzbyvzx72qcg9wb0t1jybvm0000gn/T/diaporama-4ZvB4P/icone-11.png">    </p:cNvPr>
           <p:cNvPicPr>
             <a:picLocks noChangeAspect="1"/>
           </p:cNvPicPr>
@@ -3481,7 +3570,7 @@
       </p:sp>
       <p:pic>
         <p:nvPicPr>
-          <p:cNvPr id="9" name="Image 1" descr="/var/folders/b7/tkzbyvzx72qcg9wb0t1jybvm0000gn/T/diaporama-zLbeHS/icone-12.png">    </p:cNvPr>
+          <p:cNvPr id="9" name="Image 1" descr="/var/folders/b7/tkzbyvzx72qcg9wb0t1jybvm0000gn/T/diaporama-4ZvB4P/icone-12.png">    </p:cNvPr>
           <p:cNvPicPr>
             <a:picLocks noChangeAspect="1"/>
           </p:cNvPicPr>
@@ -3580,7 +3669,7 @@
       </p:sp>
       <p:pic>
         <p:nvPicPr>
-          <p:cNvPr id="12" name="Image 2" descr="/var/folders/b7/tkzbyvzx72qcg9wb0t1jybvm0000gn/T/diaporama-zLbeHS/icone-13.png">    </p:cNvPr>
+          <p:cNvPr id="12" name="Image 2" descr="/var/folders/b7/tkzbyvzx72qcg9wb0t1jybvm0000gn/T/diaporama-4ZvB4P/icone-13.png">    </p:cNvPr>
           <p:cNvPicPr>
             <a:picLocks noChangeAspect="1"/>
           </p:cNvPicPr>
@@ -3679,7 +3768,7 @@
       </p:sp>
       <p:pic>
         <p:nvPicPr>
-          <p:cNvPr id="15" name="Image 3" descr="/var/folders/b7/tkzbyvzx72qcg9wb0t1jybvm0000gn/T/diaporama-zLbeHS/icone-14.png">    </p:cNvPr>
+          <p:cNvPr id="15" name="Image 3" descr="/var/folders/b7/tkzbyvzx72qcg9wb0t1jybvm0000gn/T/diaporama-4ZvB4P/icone-14.png">    </p:cNvPr>
           <p:cNvPicPr>
             <a:picLocks noChangeAspect="1"/>
           </p:cNvPicPr>
@@ -3778,7 +3867,7 @@
       </p:sp>
       <p:pic>
         <p:nvPicPr>
-          <p:cNvPr id="18" name="Image 4" descr="/var/folders/b7/tkzbyvzx72qcg9wb0t1jybvm0000gn/T/diaporama-zLbeHS/icone-15.png">    </p:cNvPr>
+          <p:cNvPr id="18" name="Image 4" descr="/var/folders/b7/tkzbyvzx72qcg9wb0t1jybvm0000gn/T/diaporama-4ZvB4P/icone-15.png">    </p:cNvPr>
           <p:cNvPicPr>
             <a:picLocks noChangeAspect="1"/>
           </p:cNvPicPr>
@@ -3889,7 +3978,7 @@
       </p:sp>
       <p:pic>
         <p:nvPicPr>
-          <p:cNvPr id="21" name="Image 5" descr="/var/folders/b7/tkzbyvzx72qcg9wb0t1jybvm0000gn/T/diaporama-zLbeHS/avance.jpg">    </p:cNvPr>
+          <p:cNvPr id="21" name="Image 5" descr="/var/folders/b7/tkzbyvzx72qcg9wb0t1jybvm0000gn/T/diaporama-4ZvB4P/avance.jpg">    </p:cNvPr>
           <p:cNvPicPr>
             <a:picLocks noChangeAspect="1"/>
           </p:cNvPicPr>
@@ -3944,7 +4033,7 @@
                 <a:ea typeface="Arial" pitchFamily="34" charset="-122"/>
                 <a:cs typeface="Arial" pitchFamily="34" charset="-120"/>
               </a:rPr>
-              <a:t>Caramel v7.0.1 · Présentation · septembre 2026</a:t>
+              <a:t>Caramel v7.1.0 · Présentation · septembre 2026</a:t>
             </a:r>
             <a:endParaRPr lang="en-US" sz="900" dirty="0"/>
           </a:p>
@@ -3983,7 +4072,7 @@
                 <a:ea typeface="Arial" pitchFamily="34" charset="-122"/>
                 <a:cs typeface="Arial" pitchFamily="34" charset="-120"/>
               </a:rPr>
-              <a:t>10 / 24</a:t>
+              <a:t>10 / 25</a:t>
             </a:r>
             <a:endParaRPr lang="en-US" sz="900" dirty="0"/>
           </a:p>
@@ -4135,7 +4224,7 @@
       </p:sp>
       <p:pic>
         <p:nvPicPr>
-          <p:cNvPr id="5" name="Image 0" descr="/var/folders/b7/tkzbyvzx72qcg9wb0t1jybvm0000gn/T/diaporama-zLbeHS/activites.jpg">    </p:cNvPr>
+          <p:cNvPr id="5" name="Image 0" descr="/var/folders/b7/tkzbyvzx72qcg9wb0t1jybvm0000gn/T/diaporama-4ZvB4P/activites.jpg">    </p:cNvPr>
           <p:cNvPicPr>
             <a:picLocks noChangeAspect="1"/>
           </p:cNvPicPr>
@@ -4977,7 +5066,7 @@
                 <a:ea typeface="Arial" pitchFamily="34" charset="-122"/>
                 <a:cs typeface="Arial" pitchFamily="34" charset="-120"/>
               </a:rPr>
-              <a:t>Caramel v7.0.1 · Présentation · septembre 2026</a:t>
+              <a:t>Caramel v7.1.0 · Présentation · septembre 2026</a:t>
             </a:r>
             <a:endParaRPr lang="en-US" sz="900" dirty="0"/>
           </a:p>
@@ -5016,7 +5105,7 @@
                 <a:ea typeface="Arial" pitchFamily="34" charset="-122"/>
                 <a:cs typeface="Arial" pitchFamily="34" charset="-120"/>
               </a:rPr>
-              <a:t>11 / 24</a:t>
+              <a:t>11 / 25</a:t>
             </a:r>
             <a:endParaRPr lang="en-US" sz="900" dirty="0"/>
           </a:p>
@@ -5367,7 +5456,7 @@
       </p:sp>
       <p:pic>
         <p:nvPicPr>
-          <p:cNvPr id="10" name="Image 0" descr="/var/folders/b7/tkzbyvzx72qcg9wb0t1jybvm0000gn/T/diaporama-zLbeHS/icone-1.png">    </p:cNvPr>
+          <p:cNvPr id="10" name="Image 0" descr="/var/folders/b7/tkzbyvzx72qcg9wb0t1jybvm0000gn/T/diaporama-4ZvB4P/icone-1.png">    </p:cNvPr>
           <p:cNvPicPr>
             <a:picLocks noChangeAspect="1"/>
           </p:cNvPicPr>
@@ -5464,7 +5553,7 @@
       </p:sp>
       <p:pic>
         <p:nvPicPr>
-          <p:cNvPr id="13" name="Image 1" descr="/var/folders/b7/tkzbyvzx72qcg9wb0t1jybvm0000gn/T/diaporama-zLbeHS/generation.jpg">    </p:cNvPr>
+          <p:cNvPr id="13" name="Image 1" descr="/var/folders/b7/tkzbyvzx72qcg9wb0t1jybvm0000gn/T/diaporama-4ZvB4P/generation.jpg">    </p:cNvPr>
           <p:cNvPicPr>
             <a:picLocks noChangeAspect="1"/>
           </p:cNvPicPr>
@@ -5578,7 +5667,7 @@
                 <a:ea typeface="Arial" pitchFamily="34" charset="-122"/>
                 <a:cs typeface="Arial" pitchFamily="34" charset="-120"/>
               </a:rPr>
-              <a:t>Caramel v7.0.1 · Présentation · septembre 2026</a:t>
+              <a:t>Caramel v7.1.0 · Présentation · septembre 2026</a:t>
             </a:r>
             <a:endParaRPr lang="en-US" sz="900" dirty="0"/>
           </a:p>
@@ -5617,7 +5706,7 @@
                 <a:ea typeface="Arial" pitchFamily="34" charset="-122"/>
                 <a:cs typeface="Arial" pitchFamily="34" charset="-120"/>
               </a:rPr>
-              <a:t>12 / 24</a:t>
+              <a:t>12 / 25</a:t>
             </a:r>
             <a:endParaRPr lang="en-US" sz="900" dirty="0"/>
           </a:p>
@@ -5769,7 +5858,7 @@
       </p:sp>
       <p:pic>
         <p:nvPicPr>
-          <p:cNvPr id="5" name="Image 0" descr="/var/folders/b7/tkzbyvzx72qcg9wb0t1jybvm0000gn/T/diaporama-zLbeHS/apercu.jpg">    </p:cNvPr>
+          <p:cNvPr id="5" name="Image 0" descr="/var/folders/b7/tkzbyvzx72qcg9wb0t1jybvm0000gn/T/diaporama-4ZvB4P/apercu.jpg">    </p:cNvPr>
           <p:cNvPicPr>
             <a:picLocks noChangeAspect="1"/>
           </p:cNvPicPr>
@@ -5827,7 +5916,7 @@
       </p:sp>
       <p:pic>
         <p:nvPicPr>
-          <p:cNvPr id="7" name="Image 1" descr="/var/folders/b7/tkzbyvzx72qcg9wb0t1jybvm0000gn/T/diaporama-zLbeHS/editeur.jpg">    </p:cNvPr>
+          <p:cNvPr id="7" name="Image 1" descr="/var/folders/b7/tkzbyvzx72qcg9wb0t1jybvm0000gn/T/diaporama-4ZvB4P/editeur.jpg">    </p:cNvPr>
           <p:cNvPicPr>
             <a:picLocks noChangeAspect="1"/>
           </p:cNvPicPr>
@@ -6038,7 +6127,7 @@
                 <a:ea typeface="Arial" pitchFamily="34" charset="-122"/>
                 <a:cs typeface="Arial" pitchFamily="34" charset="-120"/>
               </a:rPr>
-              <a:t>Caramel v7.0.1 · Présentation · septembre 2026</a:t>
+              <a:t>Caramel v7.1.0 · Présentation · septembre 2026</a:t>
             </a:r>
             <a:endParaRPr lang="en-US" sz="900" dirty="0"/>
           </a:p>
@@ -6077,7 +6166,7 @@
                 <a:ea typeface="Arial" pitchFamily="34" charset="-122"/>
                 <a:cs typeface="Arial" pitchFamily="34" charset="-120"/>
               </a:rPr>
-              <a:t>13 / 24</a:t>
+              <a:t>13 / 25</a:t>
             </a:r>
             <a:endParaRPr lang="en-US" sz="900" dirty="0"/>
           </a:p>
@@ -6229,7 +6318,7 @@
       </p:sp>
       <p:pic>
         <p:nvPicPr>
-          <p:cNvPr id="5" name="Image 0" descr="/var/folders/b7/tkzbyvzx72qcg9wb0t1jybvm0000gn/T/diaporama-zLbeHS/barre.jpg">    </p:cNvPr>
+          <p:cNvPr id="5" name="Image 0" descr="/var/folders/b7/tkzbyvzx72qcg9wb0t1jybvm0000gn/T/diaporama-4ZvB4P/barre.jpg">    </p:cNvPr>
           <p:cNvPicPr>
             <a:picLocks noChangeAspect="1"/>
           </p:cNvPicPr>
@@ -6309,7 +6398,7 @@
       </p:sp>
       <p:pic>
         <p:nvPicPr>
-          <p:cNvPr id="8" name="Image 1" descr="/var/folders/b7/tkzbyvzx72qcg9wb0t1jybvm0000gn/T/diaporama-zLbeHS/icone-16.png">    </p:cNvPr>
+          <p:cNvPr id="8" name="Image 1" descr="/var/folders/b7/tkzbyvzx72qcg9wb0t1jybvm0000gn/T/diaporama-4ZvB4P/icone-16.png">    </p:cNvPr>
           <p:cNvPicPr>
             <a:picLocks noChangeAspect="1"/>
           </p:cNvPicPr>
@@ -6467,7 +6556,7 @@
       </p:sp>
       <p:pic>
         <p:nvPicPr>
-          <p:cNvPr id="13" name="Image 2" descr="/var/folders/b7/tkzbyvzx72qcg9wb0t1jybvm0000gn/T/diaporama-zLbeHS/icone-17.png">    </p:cNvPr>
+          <p:cNvPr id="13" name="Image 2" descr="/var/folders/b7/tkzbyvzx72qcg9wb0t1jybvm0000gn/T/diaporama-4ZvB4P/icone-17.png">    </p:cNvPr>
           <p:cNvPicPr>
             <a:picLocks noChangeAspect="1"/>
           </p:cNvPicPr>
@@ -6625,7 +6714,7 @@
       </p:sp>
       <p:pic>
         <p:nvPicPr>
-          <p:cNvPr id="18" name="Image 3" descr="/var/folders/b7/tkzbyvzx72qcg9wb0t1jybvm0000gn/T/diaporama-zLbeHS/icone-18.png">    </p:cNvPr>
+          <p:cNvPr id="18" name="Image 3" descr="/var/folders/b7/tkzbyvzx72qcg9wb0t1jybvm0000gn/T/diaporama-4ZvB4P/icone-18.png">    </p:cNvPr>
           <p:cNvPicPr>
             <a:picLocks noChangeAspect="1"/>
           </p:cNvPicPr>
@@ -6758,7 +6847,7 @@
                 <a:ea typeface="Arial" pitchFamily="34" charset="-122"/>
                 <a:cs typeface="Arial" pitchFamily="34" charset="-120"/>
               </a:rPr>
-              <a:t>Caramel v7.0.1 · Présentation · septembre 2026</a:t>
+              <a:t>Caramel v7.1.0 · Présentation · septembre 2026</a:t>
             </a:r>
             <a:endParaRPr lang="en-US" sz="900" dirty="0"/>
           </a:p>
@@ -6797,7 +6886,7 @@
                 <a:ea typeface="Arial" pitchFamily="34" charset="-122"/>
                 <a:cs typeface="Arial" pitchFamily="34" charset="-120"/>
               </a:rPr>
-              <a:t>14 / 24</a:t>
+              <a:t>14 / 25</a:t>
             </a:r>
             <a:endParaRPr lang="en-US" sz="900" dirty="0"/>
           </a:p>
@@ -7381,7 +7470,7 @@
       </p:sp>
       <p:pic>
         <p:nvPicPr>
-          <p:cNvPr id="18" name="Image 0" descr="/var/folders/b7/tkzbyvzx72qcg9wb0t1jybvm0000gn/T/diaporama-zLbeHS/icone-39.png">    </p:cNvPr>
+          <p:cNvPr id="18" name="Image 0" descr="/var/folders/b7/tkzbyvzx72qcg9wb0t1jybvm0000gn/T/diaporama-4ZvB4P/icone-39.png">    </p:cNvPr>
           <p:cNvPicPr>
             <a:picLocks noChangeAspect="1"/>
           </p:cNvPicPr>
@@ -7664,7 +7753,7 @@
                 <a:ea typeface="Arial" pitchFamily="34" charset="-122"/>
                 <a:cs typeface="Arial" pitchFamily="34" charset="-120"/>
               </a:rPr>
-              <a:t>Caramel v7.0.1 · Présentation · septembre 2026</a:t>
+              <a:t>Caramel v7.1.0 · Présentation · septembre 2026</a:t>
             </a:r>
             <a:endParaRPr lang="en-US" sz="900" dirty="0"/>
           </a:p>
@@ -7703,7 +7792,7 @@
                 <a:ea typeface="Arial" pitchFamily="34" charset="-122"/>
                 <a:cs typeface="Arial" pitchFamily="34" charset="-120"/>
               </a:rPr>
-              <a:t>15 / 24</a:t>
+              <a:t>15 / 25</a:t>
             </a:r>
             <a:endParaRPr lang="en-US" sz="900" dirty="0"/>
           </a:p>
@@ -8511,7 +8600,7 @@
         <p:spPr>
           <a:xfrm>
             <a:off x="548640" y="2350008"/>
-            <a:ext cx="6207524" cy="3392424"/>
+            <a:ext cx="4858414" cy="3392424"/>
           </a:xfrm>
           <a:prstGeom prst="roundRect">
             <a:avLst>
@@ -8538,7 +8627,7 @@
       </p:sp>
       <p:pic>
         <p:nvPicPr>
-          <p:cNvPr id="27" name="Image 0" descr="/var/folders/b7/tkzbyvzx72qcg9wb0t1jybvm0000gn/T/diaporama-zLbeHS/cadrage.jpg">    </p:cNvPr>
+          <p:cNvPr id="27" name="Image 0" descr="/var/folders/b7/tkzbyvzx72qcg9wb0t1jybvm0000gn/T/diaporama-4ZvB4P/cadrage.jpg">    </p:cNvPr>
           <p:cNvPicPr>
             <a:picLocks noChangeAspect="1"/>
           </p:cNvPicPr>
@@ -8553,7 +8642,7 @@
         <p:spPr>
           <a:xfrm>
             <a:off x="621792" y="2423160"/>
-            <a:ext cx="6061220" cy="3246120"/>
+            <a:ext cx="4712110" cy="3246120"/>
           </a:xfrm>
           <a:prstGeom prst="rect">
             <a:avLst/>
@@ -8568,8 +8657,8 @@
         </p:nvSpPr>
         <p:spPr>
           <a:xfrm>
-            <a:off x="7140212" y="2423160"/>
-            <a:ext cx="4502843" cy="3291840"/>
+            <a:off x="5791102" y="2423160"/>
+            <a:ext cx="5851954" cy="3291840"/>
           </a:xfrm>
           <a:prstGeom prst="rect">
             <a:avLst/>
@@ -8644,7 +8733,7 @@
                 <a:ea typeface="Arial" pitchFamily="34" charset="-122"/>
                 <a:cs typeface="Arial" pitchFamily="34" charset="-120"/>
               </a:rPr>
-              <a:t>Trois réglages</a:t>
+              <a:t>Quatre réglages</a:t>
             </a:r>
             <a:pPr indent="0" marL="0">
               <a:lnSpc>
@@ -8664,7 +8753,7 @@
                 <a:ea typeface="Arial" pitchFamily="34" charset="-122"/>
                 <a:cs typeface="Arial" pitchFamily="34" charset="-120"/>
               </a:rPr>
-              <a:t> : la plateforme, le déroulé (en classe, à distance, les deux), l’ampleur (d’une séance à une séquence).</a:t>
+              <a:t> : la plateforme, le déroulé (en classe, à distance, les deux), l’ampleur (d’une séance à une séquence), un même chemin pour tous ou des chemins selon les résultats.</a:t>
             </a:r>
             <a:endParaRPr lang="en-US" sz="1450" dirty="0"/>
           </a:p>
@@ -8747,7 +8836,7 @@
                 <a:ea typeface="Arial" pitchFamily="34" charset="-122"/>
                 <a:cs typeface="Arial" pitchFamily="34" charset="-120"/>
               </a:rPr>
-              <a:t>Caramel v7.0.1 · Présentation · septembre 2026</a:t>
+              <a:t>Caramel v7.1.0 · Présentation · septembre 2026</a:t>
             </a:r>
             <a:endParaRPr lang="en-US" sz="900" dirty="0"/>
           </a:p>
@@ -8786,7 +8875,7 @@
                 <a:ea typeface="Arial" pitchFamily="34" charset="-122"/>
                 <a:cs typeface="Arial" pitchFamily="34" charset="-120"/>
               </a:rPr>
-              <a:t>16 / 24</a:t>
+              <a:t>16 / 25</a:t>
             </a:r>
             <a:endParaRPr lang="en-US" sz="900" dirty="0"/>
           </a:p>
@@ -8938,7 +9027,7 @@
       </p:sp>
       <p:pic>
         <p:nvPicPr>
-          <p:cNvPr id="5" name="Image 0" descr="/var/folders/b7/tkzbyvzx72qcg9wb0t1jybvm0000gn/T/diaporama-zLbeHS/plan.jpg">    </p:cNvPr>
+          <p:cNvPr id="5" name="Image 0" descr="/var/folders/b7/tkzbyvzx72qcg9wb0t1jybvm0000gn/T/diaporama-4ZvB4P/plan.jpg">    </p:cNvPr>
           <p:cNvPicPr>
             <a:picLocks noChangeAspect="1"/>
           </p:cNvPicPr>
@@ -9191,7 +9280,7 @@
                 <a:ea typeface="Arial" pitchFamily="34" charset="-122"/>
                 <a:cs typeface="Arial" pitchFamily="34" charset="-120"/>
               </a:rPr>
-              <a:t>Caramel v7.0.1 · Présentation · septembre 2026</a:t>
+              <a:t>Caramel v7.1.0 · Présentation · septembre 2026</a:t>
             </a:r>
             <a:endParaRPr lang="en-US" sz="900" dirty="0"/>
           </a:p>
@@ -9230,7 +9319,7 @@
                 <a:ea typeface="Arial" pitchFamily="34" charset="-122"/>
                 <a:cs typeface="Arial" pitchFamily="34" charset="-120"/>
               </a:rPr>
-              <a:t>17 / 24</a:t>
+              <a:t>17 / 25</a:t>
             </a:r>
             <a:endParaRPr lang="en-US" sz="900" dirty="0"/>
           </a:p>
@@ -9340,7 +9429,7 @@
                 <a:ea typeface="Arial" pitchFamily="34" charset="-122"/>
                 <a:cs typeface="Arial" pitchFamily="34" charset="-120"/>
               </a:rPr>
-              <a:t>Fabrication et livraison : un seul fichier de cours</a:t>
+              <a:t>Des chemins selon les résultats</a:t>
             </a:r>
             <a:endParaRPr lang="en-US" sz="3000" dirty="0"/>
           </a:p>
@@ -9354,12 +9443,12 @@
         </p:nvSpPr>
         <p:spPr>
           <a:xfrm>
-            <a:off x="548640" y="1527048"/>
-            <a:ext cx="5065883" cy="3300984"/>
+            <a:off x="7079095" y="1481328"/>
+            <a:ext cx="4563960" cy="4352544"/>
           </a:xfrm>
           <a:prstGeom prst="roundRect">
             <a:avLst>
-              <a:gd name="adj" fmla="val 3324"/>
+              <a:gd name="adj" fmla="val 2521"/>
             </a:avLst>
           </a:prstGeom>
           <a:solidFill>
@@ -9382,7 +9471,7 @@
       </p:sp>
       <p:pic>
         <p:nvPicPr>
-          <p:cNvPr id="5" name="Image 0" descr="/var/folders/b7/tkzbyvzx72qcg9wb0t1jybvm0000gn/T/diaporama-zLbeHS/fabrication.jpg">    </p:cNvPr>
+          <p:cNvPr id="5" name="Image 0" descr="/var/folders/b7/tkzbyvzx72qcg9wb0t1jybvm0000gn/T/diaporama-4ZvB4P/eleve.jpg">    </p:cNvPr>
           <p:cNvPicPr>
             <a:picLocks noChangeAspect="1"/>
           </p:cNvPicPr>
@@ -9396,8 +9485,8 @@
         </p:blipFill>
         <p:spPr>
           <a:xfrm>
-            <a:off x="621792" y="1600200"/>
-            <a:ext cx="4919579" cy="3154680"/>
+            <a:off x="7152247" y="1554480"/>
+            <a:ext cx="4417656" cy="4206240"/>
           </a:xfrm>
           <a:prstGeom prst="rect">
             <a:avLst/>
@@ -9412,12 +9501,12 @@
         </p:nvSpPr>
         <p:spPr>
           <a:xfrm>
-            <a:off x="7204670" y="1527048"/>
-            <a:ext cx="4438386" cy="3300984"/>
+            <a:off x="548640" y="1481328"/>
+            <a:ext cx="6173839" cy="2795071"/>
           </a:xfrm>
           <a:prstGeom prst="roundRect">
             <a:avLst>
-              <a:gd name="adj" fmla="val 3324"/>
+              <a:gd name="adj" fmla="val 3926"/>
             </a:avLst>
           </a:prstGeom>
           <a:solidFill>
@@ -9440,7 +9529,7 @@
       </p:sp>
       <p:pic>
         <p:nvPicPr>
-          <p:cNvPr id="7" name="Image 1" descr="/var/folders/b7/tkzbyvzx72qcg9wb0t1jybvm0000gn/T/diaporama-zLbeHS/livraison.jpg">    </p:cNvPr>
+          <p:cNvPr id="7" name="Image 1" descr="/var/folders/b7/tkzbyvzx72qcg9wb0t1jybvm0000gn/T/diaporama-4ZvB4P/chemins.jpg">    </p:cNvPr>
           <p:cNvPicPr>
             <a:picLocks noChangeAspect="1"/>
           </p:cNvPicPr>
@@ -9454,8 +9543,8 @@
         </p:blipFill>
         <p:spPr>
           <a:xfrm>
-            <a:off x="7277822" y="1600200"/>
-            <a:ext cx="4292082" cy="3154680"/>
+            <a:off x="621792" y="1554480"/>
+            <a:ext cx="6027535" cy="2648767"/>
           </a:xfrm>
           <a:prstGeom prst="rect">
             <a:avLst/>
@@ -9470,24 +9559,31 @@
         </p:nvSpPr>
         <p:spPr>
           <a:xfrm>
-            <a:off x="621792" y="4937760"/>
-            <a:ext cx="4919579" cy="320040"/>
-          </a:xfrm>
-          <a:prstGeom prst="rect">
-            <a:avLst/>
-          </a:prstGeom>
-          <a:noFill/>
-          <a:ln/>
-        </p:spPr>
-        <p:txBody>
-          <a:bodyPr wrap="square" lIns="0" tIns="0" rIns="0" bIns="0" rtlCol="0" anchor="t"/>
-          <a:lstStyle/>
-          <a:p>
-            <a:pPr indent="0" marL="0">
-              <a:buNone/>
-            </a:pPr>
-            <a:r>
-              <a:rPr lang="en-US" sz="1700" b="1" dirty="0">
+            <a:off x="621792" y="4523287"/>
+            <a:ext cx="6027535" cy="1831793"/>
+          </a:xfrm>
+          <a:prstGeom prst="rect">
+            <a:avLst/>
+          </a:prstGeom>
+          <a:noFill/>
+          <a:ln/>
+        </p:spPr>
+        <p:txBody>
+          <a:bodyPr wrap="square" lIns="0" tIns="0" rIns="0" bIns="0" rtlCol="0" anchor="t"/>
+          <a:lstStyle/>
+          <a:p>
+            <a:pPr marL="186690" indent="-186690">
+              <a:lnSpc>
+                <a:spcPct val="105000"/>
+              </a:lnSpc>
+              <a:spcAft>
+                <a:spcPts val="800"/>
+              </a:spcAft>
+              <a:buSzPct val="100000"/>
+              <a:buChar char="•"/>
+            </a:pPr>
+            <a:r>
+              <a:rPr lang="en-US" sz="1400" b="1" dirty="0">
                 <a:solidFill>
                   <a:srgbClr val="1D1D1F"/>
                 </a:solidFill>
@@ -9495,132 +9591,123 @@
                 <a:ea typeface="Arial" pitchFamily="34" charset="-122"/>
                 <a:cs typeface="Arial" pitchFamily="34" charset="-120"/>
               </a:rPr>
-              <a:t>Fabrication</a:t>
-            </a:r>
-            <a:endParaRPr lang="en-US" sz="1700" dirty="0"/>
+              <a:t>Un test oriente</a:t>
+            </a:r>
+            <a:pPr indent="0" marL="0">
+              <a:lnSpc>
+                <a:spcPct val="105000"/>
+              </a:lnSpc>
+              <a:spcAft>
+                <a:spcPts val="800"/>
+              </a:spcAft>
+              <a:buNone/>
+            </a:pPr>
+            <a:r>
+              <a:rPr lang="en-US" sz="1400" dirty="0">
+                <a:solidFill>
+                  <a:srgbClr val="4A4A4F"/>
+                </a:solidFill>
+                <a:latin typeface="Arial" pitchFamily="34" charset="0"/>
+                <a:ea typeface="Arial" pitchFamily="34" charset="-122"/>
+                <a:cs typeface="Arial" pitchFamily="34" charset="-120"/>
+              </a:rPr>
+              <a:t> : sa note, à la première tentative, ouvre à chaque élève l’un de 2 à 4 chemins.</a:t>
+            </a:r>
+            <a:endParaRPr lang="en-US" sz="1400" dirty="0"/>
+          </a:p>
+          <a:p>
+            <a:pPr marL="186690" indent="-186690">
+              <a:lnSpc>
+                <a:spcPct val="105000"/>
+              </a:lnSpc>
+              <a:spcAft>
+                <a:spcPts val="800"/>
+              </a:spcAft>
+              <a:buSzPct val="100000"/>
+              <a:buChar char="•"/>
+            </a:pPr>
+            <a:r>
+              <a:rPr lang="en-US" sz="1400" b="1" dirty="0">
+                <a:solidFill>
+                  <a:srgbClr val="1D1D1F"/>
+                </a:solidFill>
+                <a:latin typeface="Arial" pitchFamily="34" charset="0"/>
+                <a:ea typeface="Arial" pitchFamily="34" charset="-122"/>
+                <a:cs typeface="Arial" pitchFamily="34" charset="-120"/>
+              </a:rPr>
+              <a:t>Chacun ne voit que le sien</a:t>
+            </a:r>
+            <a:pPr indent="0" marL="0">
+              <a:lnSpc>
+                <a:spcPct val="105000"/>
+              </a:lnSpc>
+              <a:spcAft>
+                <a:spcPts val="800"/>
+              </a:spcAft>
+              <a:buNone/>
+            </a:pPr>
+            <a:r>
+              <a:rPr lang="en-US" sz="1400" dirty="0">
+                <a:solidFill>
+                  <a:srgbClr val="4A4A4F"/>
+                </a:solidFill>
+                <a:latin typeface="Arial" pitchFamily="34" charset="0"/>
+                <a:ea typeface="Arial" pitchFamily="34" charset="-122"/>
+                <a:cs typeface="Arial" pitchFamily="34" charset="-120"/>
+              </a:rPr>
+              <a:t>, puis tous se retrouvent ; les seuils se règlent en bonnes réponses.</a:t>
+            </a:r>
+            <a:endParaRPr lang="en-US" sz="1400" dirty="0"/>
+          </a:p>
+          <a:p>
+            <a:pPr marL="186690" indent="-186690">
+              <a:lnSpc>
+                <a:spcPct val="105000"/>
+              </a:lnSpc>
+              <a:spcAft>
+                <a:spcPts val="800"/>
+              </a:spcAft>
+              <a:buSzPct val="100000"/>
+              <a:buChar char="•"/>
+            </a:pPr>
+            <a:r>
+              <a:rPr lang="en-US" sz="1400" b="1" dirty="0">
+                <a:solidFill>
+                  <a:srgbClr val="1D1D1F"/>
+                </a:solidFill>
+                <a:latin typeface="Arial" pitchFamily="34" charset="0"/>
+                <a:ea typeface="Arial" pitchFamily="34" charset="-122"/>
+                <a:cs typeface="Arial" pitchFamily="34" charset="-120"/>
+              </a:rPr>
+              <a:t>Voir comme un élève</a:t>
+            </a:r>
+            <a:pPr indent="0" marL="0">
+              <a:lnSpc>
+                <a:spcPct val="105000"/>
+              </a:lnSpc>
+              <a:spcAft>
+                <a:spcPts val="800"/>
+              </a:spcAft>
+              <a:buNone/>
+            </a:pPr>
+            <a:r>
+              <a:rPr lang="en-US" sz="1400" dirty="0">
+                <a:solidFill>
+                  <a:srgbClr val="4A4A4F"/>
+                </a:solidFill>
+                <a:latin typeface="Arial" pitchFamily="34" charset="0"/>
+                <a:ea typeface="Arial" pitchFamily="34" charset="-122"/>
+                <a:cs typeface="Arial" pitchFamily="34" charset="-120"/>
+              </a:rPr>
+              <a:t> : la page du cours telle qu’il la verra, selon son score.</a:t>
+            </a:r>
+            <a:endParaRPr lang="en-US" sz="1400" dirty="0"/>
           </a:p>
         </p:txBody>
       </p:sp>
       <p:sp>
         <p:nvSpPr>
           <p:cNvPr id="9" name="Text 5"/>
-          <p:cNvSpPr txBox="1"/>
-          <p:nvPr/>
-        </p:nvSpPr>
-        <p:spPr>
-          <a:xfrm>
-            <a:off x="621792" y="5276088"/>
-            <a:ext cx="4919579" cy="594360"/>
-          </a:xfrm>
-          <a:prstGeom prst="rect">
-            <a:avLst/>
-          </a:prstGeom>
-          <a:noFill/>
-          <a:ln/>
-        </p:spPr>
-        <p:txBody>
-          <a:bodyPr wrap="square" lIns="0" tIns="0" rIns="0" bIns="0" rtlCol="0" anchor="t"/>
-          <a:lstStyle/>
-          <a:p>
-            <a:pPr indent="0" marL="0">
-              <a:buNone/>
-            </a:pPr>
-            <a:r>
-              <a:rPr lang="en-US" sz="1350" dirty="0">
-                <a:solidFill>
-                  <a:srgbClr val="4A4A4F"/>
-                </a:solidFill>
-                <a:latin typeface="Arial" pitchFamily="34" charset="0"/>
-                <a:ea typeface="Arial" pitchFamily="34" charset="-122"/>
-                <a:cs typeface="Arial" pitchFamily="34" charset="-120"/>
-              </a:rPr>
-              <a:t>Chaque activité est générée, puis relue, essayée, modifiée ou générée à nouveau.</a:t>
-            </a:r>
-            <a:endParaRPr lang="en-US" sz="1350" dirty="0"/>
-          </a:p>
-        </p:txBody>
-      </p:sp>
-      <p:sp>
-        <p:nvSpPr>
-          <p:cNvPr id="10" name="Text 6"/>
-          <p:cNvSpPr txBox="1"/>
-          <p:nvPr/>
-        </p:nvSpPr>
-        <p:spPr>
-          <a:xfrm>
-            <a:off x="7277822" y="4937760"/>
-            <a:ext cx="4292082" cy="320040"/>
-          </a:xfrm>
-          <a:prstGeom prst="rect">
-            <a:avLst/>
-          </a:prstGeom>
-          <a:noFill/>
-          <a:ln/>
-        </p:spPr>
-        <p:txBody>
-          <a:bodyPr wrap="square" lIns="0" tIns="0" rIns="0" bIns="0" rtlCol="0" anchor="t"/>
-          <a:lstStyle/>
-          <a:p>
-            <a:pPr indent="0" marL="0">
-              <a:buNone/>
-            </a:pPr>
-            <a:r>
-              <a:rPr lang="en-US" sz="1700" b="1" dirty="0">
-                <a:solidFill>
-                  <a:srgbClr val="1D1D1F"/>
-                </a:solidFill>
-                <a:latin typeface="Arial" pitchFamily="34" charset="0"/>
-                <a:ea typeface="Arial" pitchFamily="34" charset="-122"/>
-                <a:cs typeface="Arial" pitchFamily="34" charset="-120"/>
-              </a:rPr>
-              <a:t>Livraison</a:t>
-            </a:r>
-            <a:endParaRPr lang="en-US" sz="1700" dirty="0"/>
-          </a:p>
-        </p:txBody>
-      </p:sp>
-      <p:sp>
-        <p:nvSpPr>
-          <p:cNvPr id="11" name="Text 7"/>
-          <p:cNvSpPr txBox="1"/>
-          <p:nvPr/>
-        </p:nvSpPr>
-        <p:spPr>
-          <a:xfrm>
-            <a:off x="7277822" y="5276088"/>
-            <a:ext cx="4292082" cy="594360"/>
-          </a:xfrm>
-          <a:prstGeom prst="rect">
-            <a:avLst/>
-          </a:prstGeom>
-          <a:noFill/>
-          <a:ln/>
-        </p:spPr>
-        <p:txBody>
-          <a:bodyPr wrap="square" lIns="0" tIns="0" rIns="0" bIns="0" rtlCol="0" anchor="t"/>
-          <a:lstStyle/>
-          <a:p>
-            <a:pPr indent="0" marL="0">
-              <a:buNone/>
-            </a:pPr>
-            <a:r>
-              <a:rPr lang="en-US" sz="1350" dirty="0">
-                <a:solidFill>
-                  <a:srgbClr val="4A4A4F"/>
-                </a:solidFill>
-                <a:latin typeface="Arial" pitchFamily="34" charset="0"/>
-                <a:ea typeface="Arial" pitchFamily="34" charset="-122"/>
-                <a:cs typeface="Arial" pitchFamily="34" charset="-120"/>
-              </a:rPr>
-              <a:t>Un .mbz contient tout le cours. En plus : la fiche de séquence (DOCX, ODT, PDF) et le scénario pour reprendre plus tard.</a:t>
-            </a:r>
-            <a:endParaRPr lang="en-US" sz="1350" dirty="0"/>
-          </a:p>
-        </p:txBody>
-      </p:sp>
-      <p:sp>
-        <p:nvSpPr>
-          <p:cNvPr id="12" name="Text 8"/>
           <p:cNvSpPr txBox="1"/>
           <p:nvPr/>
         </p:nvSpPr>
@@ -9651,7 +9738,7 @@
                 <a:ea typeface="Arial" pitchFamily="34" charset="-122"/>
                 <a:cs typeface="Arial" pitchFamily="34" charset="-120"/>
               </a:rPr>
-              <a:t>Caramel v7.0.1 · Présentation · septembre 2026</a:t>
+              <a:t>Caramel v7.1.0 · Présentation · septembre 2026</a:t>
             </a:r>
             <a:endParaRPr lang="en-US" sz="900" dirty="0"/>
           </a:p>
@@ -9659,7 +9746,7 @@
       </p:sp>
       <p:sp>
         <p:nvSpPr>
-          <p:cNvPr id="13" name="Text 9"/>
+          <p:cNvPr id="10" name="Text 6"/>
           <p:cNvSpPr txBox="1"/>
           <p:nvPr/>
         </p:nvSpPr>
@@ -9690,7 +9777,7 @@
                 <a:ea typeface="Arial" pitchFamily="34" charset="-122"/>
                 <a:cs typeface="Arial" pitchFamily="34" charset="-120"/>
               </a:rPr>
-              <a:t>18 / 24</a:t>
+              <a:t>18 / 25</a:t>
             </a:r>
             <a:endParaRPr lang="en-US" sz="900" dirty="0"/>
           </a:p>
@@ -9761,7 +9848,7 @@
                 <a:ea typeface="Arial" pitchFamily="34" charset="-122"/>
                 <a:cs typeface="Arial" pitchFamily="34" charset="-120"/>
               </a:rPr>
-              <a:t>4 · Partager et se faire aider</a:t>
+              <a:t>3 · Créer un parcours</a:t>
             </a:r>
             <a:endParaRPr lang="en-US" sz="1200" dirty="0"/>
           </a:p>
@@ -9800,412 +9887,26 @@
                 <a:ea typeface="Arial" pitchFamily="34" charset="-122"/>
                 <a:cs typeface="Arial" pitchFamily="34" charset="-120"/>
               </a:rPr>
-              <a:t>La Sucrerie : partager et piocher</a:t>
+              <a:t>Fabrication et livraison : un seul fichier de cours</a:t>
             </a:r>
             <a:endParaRPr lang="en-US" sz="3000" dirty="0"/>
           </a:p>
         </p:txBody>
       </p:sp>
-      <p:pic>
-        <p:nvPicPr>
-          <p:cNvPr id="4" name="Image 0" descr="/var/folders/b7/tkzbyvzx72qcg9wb0t1jybvm0000gn/T/diaporama-zLbeHS/logo-sucrerie.png">    </p:cNvPr>
-          <p:cNvPicPr>
-            <a:picLocks noChangeAspect="1"/>
-          </p:cNvPicPr>
-          <p:nvPr/>
-        </p:nvPicPr>
-        <p:blipFill>
-          <a:blip r:embed="rId1"/>
-          <a:stretch>
-            <a:fillRect/>
-          </a:stretch>
-        </p:blipFill>
-        <p:spPr>
-          <a:xfrm>
-            <a:off x="548640" y="1554480"/>
-            <a:ext cx="685800" cy="685800"/>
-          </a:xfrm>
-          <a:prstGeom prst="rect">
-            <a:avLst/>
-          </a:prstGeom>
-        </p:spPr>
-      </p:pic>
-      <p:sp>
-        <p:nvSpPr>
-          <p:cNvPr id="5" name="Text 2"/>
-          <p:cNvSpPr txBox="1"/>
-          <p:nvPr/>
-        </p:nvSpPr>
-        <p:spPr>
-          <a:xfrm>
-            <a:off x="1417320" y="1536192"/>
-            <a:ext cx="3886200" cy="731520"/>
-          </a:xfrm>
-          <a:prstGeom prst="rect">
-            <a:avLst/>
-          </a:prstGeom>
-          <a:noFill/>
-          <a:ln/>
-        </p:spPr>
-        <p:txBody>
-          <a:bodyPr wrap="square" lIns="0" tIns="0" rIns="0" bIns="0" rtlCol="0" anchor="ctr"/>
-          <a:lstStyle/>
-          <a:p>
-            <a:pPr indent="0" marL="0">
-              <a:buNone/>
-            </a:pPr>
-            <a:r>
-              <a:rPr lang="en-US" sz="1500" dirty="0">
-                <a:solidFill>
-                  <a:srgbClr val="4A4A4F"/>
-                </a:solidFill>
-                <a:latin typeface="Arial" pitchFamily="34" charset="0"/>
-                <a:ea typeface="Arial" pitchFamily="34" charset="-122"/>
-                <a:cs typeface="Arial" pitchFamily="34" charset="-120"/>
-              </a:rPr>
-              <a:t>Une bibliothèque publique d’activités pédagogiques, en grande partie créées avec Caramel.</a:t>
-            </a:r>
-            <a:endParaRPr lang="en-US" sz="1500" dirty="0"/>
-          </a:p>
-        </p:txBody>
-      </p:sp>
-      <p:sp>
-        <p:nvSpPr>
-          <p:cNvPr id="6" name="Text 3"/>
-          <p:cNvSpPr txBox="1"/>
-          <p:nvPr/>
-        </p:nvSpPr>
-        <p:spPr>
-          <a:xfrm>
-            <a:off x="548640" y="2423160"/>
-            <a:ext cx="4754880" cy="1920240"/>
-          </a:xfrm>
-          <a:prstGeom prst="rect">
-            <a:avLst/>
-          </a:prstGeom>
-          <a:noFill/>
-          <a:ln/>
-        </p:spPr>
-        <p:txBody>
-          <a:bodyPr wrap="square" lIns="0" tIns="0" rIns="0" bIns="0" rtlCol="0" anchor="t"/>
-          <a:lstStyle/>
-          <a:p>
-            <a:pPr marL="186690" indent="-186690">
-              <a:lnSpc>
-                <a:spcPct val="105000"/>
-              </a:lnSpc>
-              <a:spcAft>
-                <a:spcPts val="700"/>
-              </a:spcAft>
-              <a:buSzPct val="100000"/>
-              <a:buChar char="•"/>
-            </a:pPr>
-            <a:r>
-              <a:rPr lang="en-US" sz="1400" b="1" dirty="0">
-                <a:solidFill>
-                  <a:srgbClr val="1D1D1F"/>
-                </a:solidFill>
-                <a:latin typeface="Arial" pitchFamily="34" charset="0"/>
-                <a:ea typeface="Arial" pitchFamily="34" charset="-122"/>
-                <a:cs typeface="Arial" pitchFamily="34" charset="-120"/>
-              </a:rPr>
-              <a:t>Consulter</a:t>
-            </a:r>
-            <a:pPr indent="0" marL="0">
-              <a:lnSpc>
-                <a:spcPct val="105000"/>
-              </a:lnSpc>
-              <a:spcAft>
-                <a:spcPts val="700"/>
-              </a:spcAft>
-              <a:buNone/>
-            </a:pPr>
-            <a:r>
-              <a:rPr lang="en-US" sz="1400" dirty="0">
-                <a:solidFill>
-                  <a:srgbClr val="4A4A4F"/>
-                </a:solidFill>
-                <a:latin typeface="Arial" pitchFamily="34" charset="0"/>
-                <a:ea typeface="Arial" pitchFamily="34" charset="-122"/>
-                <a:cs typeface="Arial" pitchFamily="34" charset="-120"/>
-              </a:rPr>
-              <a:t> et essayer les activités des collègues.</a:t>
-            </a:r>
-            <a:endParaRPr lang="en-US" sz="1400" dirty="0"/>
-          </a:p>
-          <a:p>
-            <a:pPr marL="186690" indent="-186690">
-              <a:lnSpc>
-                <a:spcPct val="105000"/>
-              </a:lnSpc>
-              <a:spcAft>
-                <a:spcPts val="700"/>
-              </a:spcAft>
-              <a:buSzPct val="100000"/>
-              <a:buChar char="•"/>
-            </a:pPr>
-            <a:r>
-              <a:rPr lang="en-US" sz="1400" b="1" dirty="0">
-                <a:solidFill>
-                  <a:srgbClr val="1D1D1F"/>
-                </a:solidFill>
-                <a:latin typeface="Arial" pitchFamily="34" charset="0"/>
-                <a:ea typeface="Arial" pitchFamily="34" charset="-122"/>
-                <a:cs typeface="Arial" pitchFamily="34" charset="-120"/>
-              </a:rPr>
-              <a:t>Télécharger</a:t>
-            </a:r>
-            <a:pPr indent="0" marL="0">
-              <a:lnSpc>
-                <a:spcPct val="105000"/>
-              </a:lnSpc>
-              <a:spcAft>
-                <a:spcPts val="700"/>
-              </a:spcAft>
-              <a:buNone/>
-            </a:pPr>
-            <a:r>
-              <a:rPr lang="en-US" sz="1400" dirty="0">
-                <a:solidFill>
-                  <a:srgbClr val="4A4A4F"/>
-                </a:solidFill>
-                <a:latin typeface="Arial" pitchFamily="34" charset="0"/>
-                <a:ea typeface="Arial" pitchFamily="34" charset="-122"/>
-                <a:cs typeface="Arial" pitchFamily="34" charset="-120"/>
-              </a:rPr>
-              <a:t> en version numérique ou papier : H5P, MBZ, DOCX, ODT, PDF…</a:t>
-            </a:r>
-            <a:endParaRPr lang="en-US" sz="1400" dirty="0"/>
-          </a:p>
-          <a:p>
-            <a:pPr marL="186690" indent="-186690">
-              <a:lnSpc>
-                <a:spcPct val="105000"/>
-              </a:lnSpc>
-              <a:spcAft>
-                <a:spcPts val="700"/>
-              </a:spcAft>
-              <a:buSzPct val="100000"/>
-              <a:buChar char="•"/>
-            </a:pPr>
-            <a:r>
-              <a:rPr lang="en-US" sz="1400" b="1" dirty="0">
-                <a:solidFill>
-                  <a:srgbClr val="1D1D1F"/>
-                </a:solidFill>
-                <a:latin typeface="Arial" pitchFamily="34" charset="0"/>
-                <a:ea typeface="Arial" pitchFamily="34" charset="-122"/>
-                <a:cs typeface="Arial" pitchFamily="34" charset="-120"/>
-              </a:rPr>
-              <a:t>Déposer</a:t>
-            </a:r>
-            <a:pPr indent="0" marL="0">
-              <a:lnSpc>
-                <a:spcPct val="105000"/>
-              </a:lnSpc>
-              <a:spcAft>
-                <a:spcPts val="700"/>
-              </a:spcAft>
-              <a:buNone/>
-            </a:pPr>
-            <a:r>
-              <a:rPr lang="en-US" sz="1400" dirty="0">
-                <a:solidFill>
-                  <a:srgbClr val="4A4A4F"/>
-                </a:solidFill>
-                <a:latin typeface="Arial" pitchFamily="34" charset="0"/>
-                <a:ea typeface="Arial" pitchFamily="34" charset="-122"/>
-                <a:cs typeface="Arial" pitchFamily="34" charset="-120"/>
-              </a:rPr>
-              <a:t> les vôtres, depuis Caramel avec « Vers la Sucrerie »</a:t>
-            </a:r>
-            <a:pPr indent="0" marL="0">
-              <a:lnSpc>
-                <a:spcPct val="105000"/>
-              </a:lnSpc>
-              <a:spcAft>
-                <a:spcPts val="700"/>
-              </a:spcAft>
-              <a:buNone/>
-            </a:pPr>
-            <a:r>
-              <a:rPr lang="en-US" sz="1400" baseline="30000" dirty="0">
-                <a:solidFill>
-                  <a:srgbClr val="4A4A4F"/>
-                </a:solidFill>
-                <a:latin typeface="Arial" pitchFamily="34" charset="0"/>
-                <a:ea typeface="Arial" pitchFamily="34" charset="-122"/>
-                <a:cs typeface="Arial" pitchFamily="34" charset="-120"/>
-              </a:rPr>
-              <a:t>1</a:t>
-            </a:r>
-            <a:pPr indent="0" marL="0">
-              <a:lnSpc>
-                <a:spcPct val="105000"/>
-              </a:lnSpc>
-              <a:spcAft>
-                <a:spcPts val="700"/>
-              </a:spcAft>
-              <a:buNone/>
-            </a:pPr>
-            <a:r>
-              <a:rPr lang="en-US" sz="1400" dirty="0">
-                <a:solidFill>
-                  <a:srgbClr val="4A4A4F"/>
-                </a:solidFill>
-                <a:latin typeface="Arial" pitchFamily="34" charset="0"/>
-                <a:ea typeface="Arial" pitchFamily="34" charset="-122"/>
-                <a:cs typeface="Arial" pitchFamily="34" charset="-120"/>
-              </a:rPr>
-              <a:t>.</a:t>
-            </a:r>
-            <a:endParaRPr lang="en-US" sz="1400" dirty="0"/>
-          </a:p>
-          <a:p>
-            <a:pPr marL="186690" indent="-186690">
-              <a:lnSpc>
-                <a:spcPct val="105000"/>
-              </a:lnSpc>
-              <a:spcAft>
-                <a:spcPts val="700"/>
-              </a:spcAft>
-              <a:buSzPct val="100000"/>
-              <a:buChar char="•"/>
-            </a:pPr>
-            <a:r>
-              <a:rPr lang="en-US" sz="1400" b="1" dirty="0">
-                <a:solidFill>
-                  <a:srgbClr val="1D1D1F"/>
-                </a:solidFill>
-                <a:latin typeface="Arial" pitchFamily="34" charset="0"/>
-                <a:ea typeface="Arial" pitchFamily="34" charset="-122"/>
-                <a:cs typeface="Arial" pitchFamily="34" charset="-120"/>
-              </a:rPr>
-              <a:t>Regrouper</a:t>
-            </a:r>
-            <a:pPr indent="0" marL="0">
-              <a:lnSpc>
-                <a:spcPct val="105000"/>
-              </a:lnSpc>
-              <a:spcAft>
-                <a:spcPts val="700"/>
-              </a:spcAft>
-              <a:buNone/>
-            </a:pPr>
-            <a:r>
-              <a:rPr lang="en-US" sz="1400" dirty="0">
-                <a:solidFill>
-                  <a:srgbClr val="4A4A4F"/>
-                </a:solidFill>
-                <a:latin typeface="Arial" pitchFamily="34" charset="0"/>
-                <a:ea typeface="Arial" pitchFamily="34" charset="-122"/>
-                <a:cs typeface="Arial" pitchFamily="34" charset="-120"/>
-              </a:rPr>
-              <a:t> en collections thématiques, partagées par un seul lien.</a:t>
-            </a:r>
-            <a:endParaRPr lang="en-US" sz="1400" dirty="0"/>
-          </a:p>
-        </p:txBody>
-      </p:sp>
-      <p:pic>
-        <p:nvPicPr>
-          <p:cNvPr id="7" name="Image 1" descr="/var/folders/b7/tkzbyvzx72qcg9wb0t1jybvm0000gn/T/diaporama-zLbeHS/qr-sucrerie.png">    </p:cNvPr>
-          <p:cNvPicPr>
-            <a:picLocks noChangeAspect="1"/>
-          </p:cNvPicPr>
-          <p:nvPr/>
-        </p:nvPicPr>
-        <p:blipFill>
-          <a:blip r:embed="rId2"/>
-          <a:stretch>
-            <a:fillRect/>
-          </a:stretch>
-        </p:blipFill>
-        <p:spPr>
-          <a:xfrm>
-            <a:off x="548640" y="4315968"/>
-            <a:ext cx="1097280" cy="1097280"/>
-          </a:xfrm>
-          <a:prstGeom prst="rect">
-            <a:avLst/>
-          </a:prstGeom>
-        </p:spPr>
-      </p:pic>
-      <p:sp>
-        <p:nvSpPr>
-          <p:cNvPr id="8" name="Text 4"/>
-          <p:cNvSpPr txBox="1"/>
-          <p:nvPr/>
-        </p:nvSpPr>
-        <p:spPr>
-          <a:xfrm>
-            <a:off x="1828800" y="4480560"/>
-            <a:ext cx="3474720" cy="731520"/>
-          </a:xfrm>
-          <a:prstGeom prst="rect">
-            <a:avLst/>
-          </a:prstGeom>
-          <a:noFill/>
-          <a:ln/>
-        </p:spPr>
-        <p:txBody>
-          <a:bodyPr wrap="square" lIns="0" tIns="0" rIns="0" bIns="0" rtlCol="0" anchor="t"/>
-          <a:lstStyle/>
-          <a:p>
-            <a:pPr indent="0" marL="0">
-              <a:buNone/>
-            </a:pPr>
-            <a:r>
-              <a:rPr lang="en-US" sz="1200" dirty="0">
-                <a:solidFill>
-                  <a:srgbClr val="6E6E73"/>
-                </a:solidFill>
-                <a:latin typeface="Arial" pitchFamily="34" charset="0"/>
-                <a:ea typeface="Arial" pitchFamily="34" charset="-122"/>
-                <a:cs typeface="Arial" pitchFamily="34" charset="-120"/>
-              </a:rPr>
-              <a:t>Scannez ou ouvrez
-</a:t>
-            </a:r>
-            <a:pPr indent="0" marL="0">
-              <a:buNone/>
-            </a:pPr>
-            <a:r>
-              <a:rPr lang="en-US" sz="1400" b="1" u="sng" dirty="0">
-                <a:solidFill>
-                  <a:srgbClr val="0056B3"/>
-                </a:solidFill>
-                <a:latin typeface="Arial" pitchFamily="34" charset="0"/>
-                <a:ea typeface="Arial" pitchFamily="34" charset="-122"/>
-                <a:cs typeface="Arial" pitchFamily="34" charset="-120"/>
-                <a:hlinkClick r:id="rId3" invalidUrl="" action="" tgtFrame="" tooltip="https://sucrerie.forge.apps.education.fr/" history="1" highlightClick="0" endSnd="0">
-                  <a:extLst>
-                    <a:ext uri="{A12FA001-AC4F-418D-AE19-62706E023703}">
-                      <ahyp:hlinkClr xmlns:ahyp="http://schemas.microsoft.com/office/drawing/2018/hyperlinkcolor" val="tx"/>
-                    </a:ext>
-                  </a:extLst>
-                </a:hlinkClick>
-              </a:rPr>
-              <a:t>sucrerie.forge.apps.education.fr</a:t>
-            </a:r>
-            <a:endParaRPr lang="en-US" sz="1200" dirty="0"/>
-          </a:p>
-        </p:txBody>
-      </p:sp>
-      <p:sp>
-        <p:nvSpPr>
-          <p:cNvPr id="9" name="Shape 5"/>
+      <p:sp>
+        <p:nvSpPr>
+          <p:cNvPr id="4" name="Shape 2"/>
           <p:cNvSpPr/>
           <p:nvPr/>
         </p:nvSpPr>
         <p:spPr>
           <a:xfrm>
-            <a:off x="5733288" y="1481328"/>
-            <a:ext cx="5982919" cy="3469932"/>
+            <a:off x="548640" y="1527048"/>
+            <a:ext cx="5065883" cy="3300984"/>
           </a:xfrm>
           <a:prstGeom prst="roundRect">
             <a:avLst>
-              <a:gd name="adj" fmla="val 3162"/>
+              <a:gd name="adj" fmla="val 3324"/>
             </a:avLst>
           </a:prstGeom>
           <a:solidFill>
@@ -10228,22 +9929,22 @@
       </p:sp>
       <p:pic>
         <p:nvPicPr>
-          <p:cNvPr id="10" name="Image 2" descr="/var/folders/b7/tkzbyvzx72qcg9wb0t1jybvm0000gn/T/diaporama-zLbeHS/sucrerie.jpg">    </p:cNvPr>
+          <p:cNvPr id="5" name="Image 0" descr="/var/folders/b7/tkzbyvzx72qcg9wb0t1jybvm0000gn/T/diaporama-4ZvB4P/fabrication.jpg">    </p:cNvPr>
           <p:cNvPicPr>
             <a:picLocks noChangeAspect="1"/>
           </p:cNvPicPr>
           <p:nvPr/>
         </p:nvPicPr>
         <p:blipFill>
-          <a:blip r:embed="rId4"/>
+          <a:blip r:embed="rId1"/>
           <a:stretch>
             <a:fillRect/>
           </a:stretch>
         </p:blipFill>
         <p:spPr>
           <a:xfrm>
-            <a:off x="5806440" y="1554480"/>
-            <a:ext cx="5836615" cy="3323628"/>
+            <a:off x="621792" y="1600200"/>
+            <a:ext cx="4919579" cy="3154680"/>
           </a:xfrm>
           <a:prstGeom prst="rect">
             <a:avLst/>
@@ -10252,66 +9953,221 @@
       </p:pic>
       <p:sp>
         <p:nvSpPr>
-          <p:cNvPr id="11" name="Text 6"/>
-          <p:cNvSpPr txBox="1"/>
-          <p:nvPr/>
-        </p:nvSpPr>
-        <p:spPr>
-          <a:xfrm>
-            <a:off x="548640" y="5742432"/>
-            <a:ext cx="11094415" cy="603504"/>
-          </a:xfrm>
-          <a:prstGeom prst="rect">
-            <a:avLst/>
-          </a:prstGeom>
-          <a:noFill/>
-          <a:ln/>
-        </p:spPr>
-        <p:txBody>
-          <a:bodyPr wrap="square" lIns="0" tIns="0" rIns="0" bIns="0" rtlCol="0" anchor="b"/>
-          <a:lstStyle/>
-          <a:p>
-            <a:pPr indent="0" marL="0">
-              <a:lnSpc>
-                <a:spcPct val="105000"/>
-              </a:lnSpc>
-              <a:buNone/>
-            </a:pPr>
-            <a:r>
-              <a:rPr lang="en-US" sz="950" baseline="30000" dirty="0">
-                <a:solidFill>
-                  <a:srgbClr val="6E6E73"/>
-                </a:solidFill>
-                <a:latin typeface="Arial" pitchFamily="34" charset="0"/>
-                <a:ea typeface="Arial" pitchFamily="34" charset="-122"/>
-                <a:cs typeface="Arial" pitchFamily="34" charset="-120"/>
-              </a:rPr>
-              <a:t>1</a:t>
-            </a:r>
-            <a:pPr indent="0" marL="0">
-              <a:lnSpc>
-                <a:spcPct val="105000"/>
-              </a:lnSpc>
-              <a:buNone/>
-            </a:pPr>
-            <a:r>
-              <a:rPr lang="en-US" sz="950" dirty="0">
-                <a:solidFill>
-                  <a:srgbClr val="6E6E73"/>
-                </a:solidFill>
-                <a:latin typeface="Arial" pitchFamily="34" charset="0"/>
-                <a:ea typeface="Arial" pitchFamily="34" charset="-122"/>
-                <a:cs typeface="Arial" pitchFamily="34" charset="-120"/>
-              </a:rPr>
-              <a:t> Déposer est volontaire et vaut publication, sous licence CC BY-SA 4.0. On se connecte avec son adresse académique (les adresses personnelles ne sont pas acceptées), qui sert uniquement d’identifiant. Vous certifiez détenir les droits et qu’aucune donnée personnelle ne figure dans l’activité.</a:t>
-            </a:r>
-            <a:endParaRPr lang="en-US" sz="950" dirty="0"/>
-          </a:p>
-        </p:txBody>
-      </p:sp>
-      <p:sp>
-        <p:nvSpPr>
-          <p:cNvPr id="12" name="Text 7"/>
+          <p:cNvPr id="6" name="Shape 3"/>
+          <p:cNvSpPr/>
+          <p:nvPr/>
+        </p:nvSpPr>
+        <p:spPr>
+          <a:xfrm>
+            <a:off x="7204670" y="1527048"/>
+            <a:ext cx="4438386" cy="3300984"/>
+          </a:xfrm>
+          <a:prstGeom prst="roundRect">
+            <a:avLst>
+              <a:gd name="adj" fmla="val 3324"/>
+            </a:avLst>
+          </a:prstGeom>
+          <a:solidFill>
+            <a:srgbClr val="FFFFFF"/>
+          </a:solidFill>
+          <a:ln w="9525">
+            <a:solidFill>
+              <a:srgbClr val="E5E5EA"/>
+            </a:solidFill>
+            <a:prstDash val="solid"/>
+          </a:ln>
+          <a:effectLst>
+            <a:outerShdw sx="100000" sy="100000" kx="0" ky="0" algn="bl" rotWithShape="0" blurRad="114300" dist="25400" dir="5400000">
+              <a:srgbClr val="000000">
+                <a:alpha val="9000"/>
+              </a:srgbClr>
+            </a:outerShdw>
+          </a:effectLst>
+        </p:spPr>
+      </p:sp>
+      <p:pic>
+        <p:nvPicPr>
+          <p:cNvPr id="7" name="Image 1" descr="/var/folders/b7/tkzbyvzx72qcg9wb0t1jybvm0000gn/T/diaporama-4ZvB4P/livraison.jpg">    </p:cNvPr>
+          <p:cNvPicPr>
+            <a:picLocks noChangeAspect="1"/>
+          </p:cNvPicPr>
+          <p:nvPr/>
+        </p:nvPicPr>
+        <p:blipFill>
+          <a:blip r:embed="rId2"/>
+          <a:stretch>
+            <a:fillRect/>
+          </a:stretch>
+        </p:blipFill>
+        <p:spPr>
+          <a:xfrm>
+            <a:off x="7277822" y="1600200"/>
+            <a:ext cx="4292082" cy="3154680"/>
+          </a:xfrm>
+          <a:prstGeom prst="rect">
+            <a:avLst/>
+          </a:prstGeom>
+        </p:spPr>
+      </p:pic>
+      <p:sp>
+        <p:nvSpPr>
+          <p:cNvPr id="8" name="Text 4"/>
+          <p:cNvSpPr txBox="1"/>
+          <p:nvPr/>
+        </p:nvSpPr>
+        <p:spPr>
+          <a:xfrm>
+            <a:off x="621792" y="4937760"/>
+            <a:ext cx="4919579" cy="320040"/>
+          </a:xfrm>
+          <a:prstGeom prst="rect">
+            <a:avLst/>
+          </a:prstGeom>
+          <a:noFill/>
+          <a:ln/>
+        </p:spPr>
+        <p:txBody>
+          <a:bodyPr wrap="square" lIns="0" tIns="0" rIns="0" bIns="0" rtlCol="0" anchor="t"/>
+          <a:lstStyle/>
+          <a:p>
+            <a:pPr indent="0" marL="0">
+              <a:buNone/>
+            </a:pPr>
+            <a:r>
+              <a:rPr lang="en-US" sz="1700" b="1" dirty="0">
+                <a:solidFill>
+                  <a:srgbClr val="1D1D1F"/>
+                </a:solidFill>
+                <a:latin typeface="Arial" pitchFamily="34" charset="0"/>
+                <a:ea typeface="Arial" pitchFamily="34" charset="-122"/>
+                <a:cs typeface="Arial" pitchFamily="34" charset="-120"/>
+              </a:rPr>
+              <a:t>Fabrication</a:t>
+            </a:r>
+            <a:endParaRPr lang="en-US" sz="1700" dirty="0"/>
+          </a:p>
+        </p:txBody>
+      </p:sp>
+      <p:sp>
+        <p:nvSpPr>
+          <p:cNvPr id="9" name="Text 5"/>
+          <p:cNvSpPr txBox="1"/>
+          <p:nvPr/>
+        </p:nvSpPr>
+        <p:spPr>
+          <a:xfrm>
+            <a:off x="621792" y="5276088"/>
+            <a:ext cx="4919579" cy="594360"/>
+          </a:xfrm>
+          <a:prstGeom prst="rect">
+            <a:avLst/>
+          </a:prstGeom>
+          <a:noFill/>
+          <a:ln/>
+        </p:spPr>
+        <p:txBody>
+          <a:bodyPr wrap="square" lIns="0" tIns="0" rIns="0" bIns="0" rtlCol="0" anchor="t"/>
+          <a:lstStyle/>
+          <a:p>
+            <a:pPr indent="0" marL="0">
+              <a:buNone/>
+            </a:pPr>
+            <a:r>
+              <a:rPr lang="en-US" sz="1350" dirty="0">
+                <a:solidFill>
+                  <a:srgbClr val="4A4A4F"/>
+                </a:solidFill>
+                <a:latin typeface="Arial" pitchFamily="34" charset="0"/>
+                <a:ea typeface="Arial" pitchFamily="34" charset="-122"/>
+                <a:cs typeface="Arial" pitchFamily="34" charset="-120"/>
+              </a:rPr>
+              <a:t>Chaque activité est générée, puis relue, essayée, modifiée ou générée à nouveau.</a:t>
+            </a:r>
+            <a:endParaRPr lang="en-US" sz="1350" dirty="0"/>
+          </a:p>
+        </p:txBody>
+      </p:sp>
+      <p:sp>
+        <p:nvSpPr>
+          <p:cNvPr id="10" name="Text 6"/>
+          <p:cNvSpPr txBox="1"/>
+          <p:nvPr/>
+        </p:nvSpPr>
+        <p:spPr>
+          <a:xfrm>
+            <a:off x="7277822" y="4937760"/>
+            <a:ext cx="4292082" cy="320040"/>
+          </a:xfrm>
+          <a:prstGeom prst="rect">
+            <a:avLst/>
+          </a:prstGeom>
+          <a:noFill/>
+          <a:ln/>
+        </p:spPr>
+        <p:txBody>
+          <a:bodyPr wrap="square" lIns="0" tIns="0" rIns="0" bIns="0" rtlCol="0" anchor="t"/>
+          <a:lstStyle/>
+          <a:p>
+            <a:pPr indent="0" marL="0">
+              <a:buNone/>
+            </a:pPr>
+            <a:r>
+              <a:rPr lang="en-US" sz="1700" b="1" dirty="0">
+                <a:solidFill>
+                  <a:srgbClr val="1D1D1F"/>
+                </a:solidFill>
+                <a:latin typeface="Arial" pitchFamily="34" charset="0"/>
+                <a:ea typeface="Arial" pitchFamily="34" charset="-122"/>
+                <a:cs typeface="Arial" pitchFamily="34" charset="-120"/>
+              </a:rPr>
+              <a:t>Livraison</a:t>
+            </a:r>
+            <a:endParaRPr lang="en-US" sz="1700" dirty="0"/>
+          </a:p>
+        </p:txBody>
+      </p:sp>
+      <p:sp>
+        <p:nvSpPr>
+          <p:cNvPr id="11" name="Text 7"/>
+          <p:cNvSpPr txBox="1"/>
+          <p:nvPr/>
+        </p:nvSpPr>
+        <p:spPr>
+          <a:xfrm>
+            <a:off x="7277822" y="5276088"/>
+            <a:ext cx="4292082" cy="594360"/>
+          </a:xfrm>
+          <a:prstGeom prst="rect">
+            <a:avLst/>
+          </a:prstGeom>
+          <a:noFill/>
+          <a:ln/>
+        </p:spPr>
+        <p:txBody>
+          <a:bodyPr wrap="square" lIns="0" tIns="0" rIns="0" bIns="0" rtlCol="0" anchor="t"/>
+          <a:lstStyle/>
+          <a:p>
+            <a:pPr indent="0" marL="0">
+              <a:buNone/>
+            </a:pPr>
+            <a:r>
+              <a:rPr lang="en-US" sz="1350" dirty="0">
+                <a:solidFill>
+                  <a:srgbClr val="4A4A4F"/>
+                </a:solidFill>
+                <a:latin typeface="Arial" pitchFamily="34" charset="0"/>
+                <a:ea typeface="Arial" pitchFamily="34" charset="-122"/>
+                <a:cs typeface="Arial" pitchFamily="34" charset="-120"/>
+              </a:rPr>
+              <a:t>Un .mbz contient tout le cours. En plus : la fiche de séquence (DOCX, ODT, PDF) et le scénario pour reprendre plus tard.</a:t>
+            </a:r>
+            <a:endParaRPr lang="en-US" sz="1350" dirty="0"/>
+          </a:p>
+        </p:txBody>
+      </p:sp>
+      <p:sp>
+        <p:nvSpPr>
+          <p:cNvPr id="12" name="Text 8"/>
           <p:cNvSpPr txBox="1"/>
           <p:nvPr/>
         </p:nvSpPr>
@@ -10342,7 +10198,7 @@
                 <a:ea typeface="Arial" pitchFamily="34" charset="-122"/>
                 <a:cs typeface="Arial" pitchFamily="34" charset="-120"/>
               </a:rPr>
-              <a:t>Caramel v7.0.1 · Présentation · septembre 2026</a:t>
+              <a:t>Caramel v7.1.0 · Présentation · septembre 2026</a:t>
             </a:r>
             <a:endParaRPr lang="en-US" sz="900" dirty="0"/>
           </a:p>
@@ -10350,7 +10206,7 @@
       </p:sp>
       <p:sp>
         <p:nvSpPr>
-          <p:cNvPr id="13" name="Text 8"/>
+          <p:cNvPr id="13" name="Text 9"/>
           <p:cNvSpPr txBox="1"/>
           <p:nvPr/>
         </p:nvSpPr>
@@ -10381,7 +10237,7 @@
                 <a:ea typeface="Arial" pitchFamily="34" charset="-122"/>
                 <a:cs typeface="Arial" pitchFamily="34" charset="-120"/>
               </a:rPr>
-              <a:t>19 / 24</a:t>
+              <a:t>19 / 25</a:t>
             </a:r>
             <a:endParaRPr lang="en-US" sz="900" dirty="0"/>
           </a:p>
@@ -10697,7 +10553,7 @@
       </p:sp>
       <p:pic>
         <p:nvPicPr>
-          <p:cNvPr id="9" name="Image 1" descr="/var/folders/b7/tkzbyvzx72qcg9wb0t1jybvm0000gn/T/diaporama-zLbeHS/icone-36.png">    </p:cNvPr>
+          <p:cNvPr id="9" name="Image 1" descr="/var/folders/b7/tkzbyvzx72qcg9wb0t1jybvm0000gn/T/diaporama-4ZvB4P/icone-36.png">    </p:cNvPr>
           <p:cNvPicPr>
             <a:picLocks noChangeAspect="1"/>
           </p:cNvPicPr>
@@ -10985,7 +10841,7 @@
       </p:sp>
       <p:pic>
         <p:nvPicPr>
-          <p:cNvPr id="16" name="Image 3" descr="/var/folders/b7/tkzbyvzx72qcg9wb0t1jybvm0000gn/T/diaporama-zLbeHS/icone-36.png">    </p:cNvPr>
+          <p:cNvPr id="16" name="Image 3" descr="/var/folders/b7/tkzbyvzx72qcg9wb0t1jybvm0000gn/T/diaporama-4ZvB4P/icone-36.png">    </p:cNvPr>
           <p:cNvPicPr>
             <a:picLocks noChangeAspect="1"/>
           </p:cNvPicPr>
@@ -11077,7 +10933,7 @@
       </p:sp>
       <p:pic>
         <p:nvPicPr>
-          <p:cNvPr id="19" name="Image 4" descr="/var/folders/b7/tkzbyvzx72qcg9wb0t1jybvm0000gn/T/diaporama-zLbeHS/icone-28.png">    </p:cNvPr>
+          <p:cNvPr id="19" name="Image 4" descr="/var/folders/b7/tkzbyvzx72qcg9wb0t1jybvm0000gn/T/diaporama-4ZvB4P/icone-28.png">    </p:cNvPr>
           <p:cNvPicPr>
             <a:picLocks noChangeAspect="1"/>
           </p:cNvPicPr>
@@ -11201,7 +11057,7 @@
       </p:sp>
       <p:pic>
         <p:nvPicPr>
-          <p:cNvPr id="23" name="Image 5" descr="/var/folders/b7/tkzbyvzx72qcg9wb0t1jybvm0000gn/T/diaporama-zLbeHS/icone-29.png">    </p:cNvPr>
+          <p:cNvPr id="23" name="Image 5" descr="/var/folders/b7/tkzbyvzx72qcg9wb0t1jybvm0000gn/T/diaporama-4ZvB4P/icone-29.png">    </p:cNvPr>
           <p:cNvPicPr>
             <a:picLocks noChangeAspect="1"/>
           </p:cNvPicPr>
@@ -11325,7 +11181,7 @@
       </p:sp>
       <p:pic>
         <p:nvPicPr>
-          <p:cNvPr id="27" name="Image 6" descr="/var/folders/b7/tkzbyvzx72qcg9wb0t1jybvm0000gn/T/diaporama-zLbeHS/icone-32.png">    </p:cNvPr>
+          <p:cNvPr id="27" name="Image 6" descr="/var/folders/b7/tkzbyvzx72qcg9wb0t1jybvm0000gn/T/diaporama-4ZvB4P/icone-32.png">    </p:cNvPr>
           <p:cNvPicPr>
             <a:picLocks noChangeAspect="1"/>
           </p:cNvPicPr>
@@ -11458,7 +11314,7 @@
                 <a:ea typeface="Arial" pitchFamily="34" charset="-122"/>
                 <a:cs typeface="Arial" pitchFamily="34" charset="-120"/>
               </a:rPr>
-              <a:t>Caramel v7.0.1 · Présentation · septembre 2026</a:t>
+              <a:t>Caramel v7.1.0 · Présentation · septembre 2026</a:t>
             </a:r>
             <a:endParaRPr lang="en-US" sz="900" dirty="0"/>
           </a:p>
@@ -11497,7 +11353,7 @@
                 <a:ea typeface="Arial" pitchFamily="34" charset="-122"/>
                 <a:cs typeface="Arial" pitchFamily="34" charset="-120"/>
               </a:rPr>
-              <a:t>2 / 24</a:t>
+              <a:t>2 / 25</a:t>
             </a:r>
             <a:endParaRPr lang="en-US" sz="900" dirty="0"/>
           </a:p>
@@ -11607,26 +11463,412 @@
                 <a:ea typeface="Arial" pitchFamily="34" charset="-122"/>
                 <a:cs typeface="Arial" pitchFamily="34" charset="-120"/>
               </a:rPr>
-              <a:t>Vous n’êtes jamais seul</a:t>
+              <a:t>La Sucrerie : partager et piocher</a:t>
             </a:r>
             <a:endParaRPr lang="en-US" sz="3000" dirty="0"/>
           </a:p>
         </p:txBody>
       </p:sp>
-      <p:sp>
-        <p:nvSpPr>
-          <p:cNvPr id="4" name="Shape 2"/>
+      <p:pic>
+        <p:nvPicPr>
+          <p:cNvPr id="4" name="Image 0" descr="/var/folders/b7/tkzbyvzx72qcg9wb0t1jybvm0000gn/T/diaporama-4ZvB4P/logo-sucrerie.png">    </p:cNvPr>
+          <p:cNvPicPr>
+            <a:picLocks noChangeAspect="1"/>
+          </p:cNvPicPr>
+          <p:nvPr/>
+        </p:nvPicPr>
+        <p:blipFill>
+          <a:blip r:embed="rId1"/>
+          <a:stretch>
+            <a:fillRect/>
+          </a:stretch>
+        </p:blipFill>
+        <p:spPr>
+          <a:xfrm>
+            <a:off x="548640" y="1554480"/>
+            <a:ext cx="685800" cy="685800"/>
+          </a:xfrm>
+          <a:prstGeom prst="rect">
+            <a:avLst/>
+          </a:prstGeom>
+        </p:spPr>
+      </p:pic>
+      <p:sp>
+        <p:nvSpPr>
+          <p:cNvPr id="5" name="Text 2"/>
+          <p:cNvSpPr txBox="1"/>
+          <p:nvPr/>
+        </p:nvSpPr>
+        <p:spPr>
+          <a:xfrm>
+            <a:off x="1417320" y="1536192"/>
+            <a:ext cx="3886200" cy="731520"/>
+          </a:xfrm>
+          <a:prstGeom prst="rect">
+            <a:avLst/>
+          </a:prstGeom>
+          <a:noFill/>
+          <a:ln/>
+        </p:spPr>
+        <p:txBody>
+          <a:bodyPr wrap="square" lIns="0" tIns="0" rIns="0" bIns="0" rtlCol="0" anchor="ctr"/>
+          <a:lstStyle/>
+          <a:p>
+            <a:pPr indent="0" marL="0">
+              <a:buNone/>
+            </a:pPr>
+            <a:r>
+              <a:rPr lang="en-US" sz="1500" dirty="0">
+                <a:solidFill>
+                  <a:srgbClr val="4A4A4F"/>
+                </a:solidFill>
+                <a:latin typeface="Arial" pitchFamily="34" charset="0"/>
+                <a:ea typeface="Arial" pitchFamily="34" charset="-122"/>
+                <a:cs typeface="Arial" pitchFamily="34" charset="-120"/>
+              </a:rPr>
+              <a:t>Une bibliothèque publique d’activités pédagogiques, en grande partie créées avec Caramel.</a:t>
+            </a:r>
+            <a:endParaRPr lang="en-US" sz="1500" dirty="0"/>
+          </a:p>
+        </p:txBody>
+      </p:sp>
+      <p:sp>
+        <p:nvSpPr>
+          <p:cNvPr id="6" name="Text 3"/>
+          <p:cNvSpPr txBox="1"/>
+          <p:nvPr/>
+        </p:nvSpPr>
+        <p:spPr>
+          <a:xfrm>
+            <a:off x="548640" y="2423160"/>
+            <a:ext cx="4754880" cy="1920240"/>
+          </a:xfrm>
+          <a:prstGeom prst="rect">
+            <a:avLst/>
+          </a:prstGeom>
+          <a:noFill/>
+          <a:ln/>
+        </p:spPr>
+        <p:txBody>
+          <a:bodyPr wrap="square" lIns="0" tIns="0" rIns="0" bIns="0" rtlCol="0" anchor="t"/>
+          <a:lstStyle/>
+          <a:p>
+            <a:pPr marL="186690" indent="-186690">
+              <a:lnSpc>
+                <a:spcPct val="105000"/>
+              </a:lnSpc>
+              <a:spcAft>
+                <a:spcPts val="700"/>
+              </a:spcAft>
+              <a:buSzPct val="100000"/>
+              <a:buChar char="•"/>
+            </a:pPr>
+            <a:r>
+              <a:rPr lang="en-US" sz="1400" b="1" dirty="0">
+                <a:solidFill>
+                  <a:srgbClr val="1D1D1F"/>
+                </a:solidFill>
+                <a:latin typeface="Arial" pitchFamily="34" charset="0"/>
+                <a:ea typeface="Arial" pitchFamily="34" charset="-122"/>
+                <a:cs typeface="Arial" pitchFamily="34" charset="-120"/>
+              </a:rPr>
+              <a:t>Consulter</a:t>
+            </a:r>
+            <a:pPr indent="0" marL="0">
+              <a:lnSpc>
+                <a:spcPct val="105000"/>
+              </a:lnSpc>
+              <a:spcAft>
+                <a:spcPts val="700"/>
+              </a:spcAft>
+              <a:buNone/>
+            </a:pPr>
+            <a:r>
+              <a:rPr lang="en-US" sz="1400" dirty="0">
+                <a:solidFill>
+                  <a:srgbClr val="4A4A4F"/>
+                </a:solidFill>
+                <a:latin typeface="Arial" pitchFamily="34" charset="0"/>
+                <a:ea typeface="Arial" pitchFamily="34" charset="-122"/>
+                <a:cs typeface="Arial" pitchFamily="34" charset="-120"/>
+              </a:rPr>
+              <a:t> et essayer les activités des collègues.</a:t>
+            </a:r>
+            <a:endParaRPr lang="en-US" sz="1400" dirty="0"/>
+          </a:p>
+          <a:p>
+            <a:pPr marL="186690" indent="-186690">
+              <a:lnSpc>
+                <a:spcPct val="105000"/>
+              </a:lnSpc>
+              <a:spcAft>
+                <a:spcPts val="700"/>
+              </a:spcAft>
+              <a:buSzPct val="100000"/>
+              <a:buChar char="•"/>
+            </a:pPr>
+            <a:r>
+              <a:rPr lang="en-US" sz="1400" b="1" dirty="0">
+                <a:solidFill>
+                  <a:srgbClr val="1D1D1F"/>
+                </a:solidFill>
+                <a:latin typeface="Arial" pitchFamily="34" charset="0"/>
+                <a:ea typeface="Arial" pitchFamily="34" charset="-122"/>
+                <a:cs typeface="Arial" pitchFamily="34" charset="-120"/>
+              </a:rPr>
+              <a:t>Télécharger</a:t>
+            </a:r>
+            <a:pPr indent="0" marL="0">
+              <a:lnSpc>
+                <a:spcPct val="105000"/>
+              </a:lnSpc>
+              <a:spcAft>
+                <a:spcPts val="700"/>
+              </a:spcAft>
+              <a:buNone/>
+            </a:pPr>
+            <a:r>
+              <a:rPr lang="en-US" sz="1400" dirty="0">
+                <a:solidFill>
+                  <a:srgbClr val="4A4A4F"/>
+                </a:solidFill>
+                <a:latin typeface="Arial" pitchFamily="34" charset="0"/>
+                <a:ea typeface="Arial" pitchFamily="34" charset="-122"/>
+                <a:cs typeface="Arial" pitchFamily="34" charset="-120"/>
+              </a:rPr>
+              <a:t> en version numérique ou papier : H5P, MBZ, DOCX, ODT, PDF…</a:t>
+            </a:r>
+            <a:endParaRPr lang="en-US" sz="1400" dirty="0"/>
+          </a:p>
+          <a:p>
+            <a:pPr marL="186690" indent="-186690">
+              <a:lnSpc>
+                <a:spcPct val="105000"/>
+              </a:lnSpc>
+              <a:spcAft>
+                <a:spcPts val="700"/>
+              </a:spcAft>
+              <a:buSzPct val="100000"/>
+              <a:buChar char="•"/>
+            </a:pPr>
+            <a:r>
+              <a:rPr lang="en-US" sz="1400" b="1" dirty="0">
+                <a:solidFill>
+                  <a:srgbClr val="1D1D1F"/>
+                </a:solidFill>
+                <a:latin typeface="Arial" pitchFamily="34" charset="0"/>
+                <a:ea typeface="Arial" pitchFamily="34" charset="-122"/>
+                <a:cs typeface="Arial" pitchFamily="34" charset="-120"/>
+              </a:rPr>
+              <a:t>Déposer</a:t>
+            </a:r>
+            <a:pPr indent="0" marL="0">
+              <a:lnSpc>
+                <a:spcPct val="105000"/>
+              </a:lnSpc>
+              <a:spcAft>
+                <a:spcPts val="700"/>
+              </a:spcAft>
+              <a:buNone/>
+            </a:pPr>
+            <a:r>
+              <a:rPr lang="en-US" sz="1400" dirty="0">
+                <a:solidFill>
+                  <a:srgbClr val="4A4A4F"/>
+                </a:solidFill>
+                <a:latin typeface="Arial" pitchFamily="34" charset="0"/>
+                <a:ea typeface="Arial" pitchFamily="34" charset="-122"/>
+                <a:cs typeface="Arial" pitchFamily="34" charset="-120"/>
+              </a:rPr>
+              <a:t> les vôtres, depuis Caramel avec « Vers la Sucrerie »</a:t>
+            </a:r>
+            <a:pPr indent="0" marL="0">
+              <a:lnSpc>
+                <a:spcPct val="105000"/>
+              </a:lnSpc>
+              <a:spcAft>
+                <a:spcPts val="700"/>
+              </a:spcAft>
+              <a:buNone/>
+            </a:pPr>
+            <a:r>
+              <a:rPr lang="en-US" sz="1400" baseline="30000" dirty="0">
+                <a:solidFill>
+                  <a:srgbClr val="4A4A4F"/>
+                </a:solidFill>
+                <a:latin typeface="Arial" pitchFamily="34" charset="0"/>
+                <a:ea typeface="Arial" pitchFamily="34" charset="-122"/>
+                <a:cs typeface="Arial" pitchFamily="34" charset="-120"/>
+              </a:rPr>
+              <a:t>1</a:t>
+            </a:r>
+            <a:pPr indent="0" marL="0">
+              <a:lnSpc>
+                <a:spcPct val="105000"/>
+              </a:lnSpc>
+              <a:spcAft>
+                <a:spcPts val="700"/>
+              </a:spcAft>
+              <a:buNone/>
+            </a:pPr>
+            <a:r>
+              <a:rPr lang="en-US" sz="1400" dirty="0">
+                <a:solidFill>
+                  <a:srgbClr val="4A4A4F"/>
+                </a:solidFill>
+                <a:latin typeface="Arial" pitchFamily="34" charset="0"/>
+                <a:ea typeface="Arial" pitchFamily="34" charset="-122"/>
+                <a:cs typeface="Arial" pitchFamily="34" charset="-120"/>
+              </a:rPr>
+              <a:t>.</a:t>
+            </a:r>
+            <a:endParaRPr lang="en-US" sz="1400" dirty="0"/>
+          </a:p>
+          <a:p>
+            <a:pPr marL="186690" indent="-186690">
+              <a:lnSpc>
+                <a:spcPct val="105000"/>
+              </a:lnSpc>
+              <a:spcAft>
+                <a:spcPts val="700"/>
+              </a:spcAft>
+              <a:buSzPct val="100000"/>
+              <a:buChar char="•"/>
+            </a:pPr>
+            <a:r>
+              <a:rPr lang="en-US" sz="1400" b="1" dirty="0">
+                <a:solidFill>
+                  <a:srgbClr val="1D1D1F"/>
+                </a:solidFill>
+                <a:latin typeface="Arial" pitchFamily="34" charset="0"/>
+                <a:ea typeface="Arial" pitchFamily="34" charset="-122"/>
+                <a:cs typeface="Arial" pitchFamily="34" charset="-120"/>
+              </a:rPr>
+              <a:t>Regrouper</a:t>
+            </a:r>
+            <a:pPr indent="0" marL="0">
+              <a:lnSpc>
+                <a:spcPct val="105000"/>
+              </a:lnSpc>
+              <a:spcAft>
+                <a:spcPts val="700"/>
+              </a:spcAft>
+              <a:buNone/>
+            </a:pPr>
+            <a:r>
+              <a:rPr lang="en-US" sz="1400" dirty="0">
+                <a:solidFill>
+                  <a:srgbClr val="4A4A4F"/>
+                </a:solidFill>
+                <a:latin typeface="Arial" pitchFamily="34" charset="0"/>
+                <a:ea typeface="Arial" pitchFamily="34" charset="-122"/>
+                <a:cs typeface="Arial" pitchFamily="34" charset="-120"/>
+              </a:rPr>
+              <a:t> en collections thématiques, partagées par un seul lien.</a:t>
+            </a:r>
+            <a:endParaRPr lang="en-US" sz="1400" dirty="0"/>
+          </a:p>
+        </p:txBody>
+      </p:sp>
+      <p:pic>
+        <p:nvPicPr>
+          <p:cNvPr id="7" name="Image 1" descr="/var/folders/b7/tkzbyvzx72qcg9wb0t1jybvm0000gn/T/diaporama-4ZvB4P/qr-sucrerie.png">    </p:cNvPr>
+          <p:cNvPicPr>
+            <a:picLocks noChangeAspect="1"/>
+          </p:cNvPicPr>
+          <p:nvPr/>
+        </p:nvPicPr>
+        <p:blipFill>
+          <a:blip r:embed="rId2"/>
+          <a:stretch>
+            <a:fillRect/>
+          </a:stretch>
+        </p:blipFill>
+        <p:spPr>
+          <a:xfrm>
+            <a:off x="548640" y="4315968"/>
+            <a:ext cx="1097280" cy="1097280"/>
+          </a:xfrm>
+          <a:prstGeom prst="rect">
+            <a:avLst/>
+          </a:prstGeom>
+        </p:spPr>
+      </p:pic>
+      <p:sp>
+        <p:nvSpPr>
+          <p:cNvPr id="8" name="Text 4"/>
+          <p:cNvSpPr txBox="1"/>
+          <p:nvPr/>
+        </p:nvSpPr>
+        <p:spPr>
+          <a:xfrm>
+            <a:off x="1828800" y="4480560"/>
+            <a:ext cx="3474720" cy="731520"/>
+          </a:xfrm>
+          <a:prstGeom prst="rect">
+            <a:avLst/>
+          </a:prstGeom>
+          <a:noFill/>
+          <a:ln/>
+        </p:spPr>
+        <p:txBody>
+          <a:bodyPr wrap="square" lIns="0" tIns="0" rIns="0" bIns="0" rtlCol="0" anchor="t"/>
+          <a:lstStyle/>
+          <a:p>
+            <a:pPr indent="0" marL="0">
+              <a:buNone/>
+            </a:pPr>
+            <a:r>
+              <a:rPr lang="en-US" sz="1200" dirty="0">
+                <a:solidFill>
+                  <a:srgbClr val="6E6E73"/>
+                </a:solidFill>
+                <a:latin typeface="Arial" pitchFamily="34" charset="0"/>
+                <a:ea typeface="Arial" pitchFamily="34" charset="-122"/>
+                <a:cs typeface="Arial" pitchFamily="34" charset="-120"/>
+              </a:rPr>
+              <a:t>Scannez ou ouvrez
+</a:t>
+            </a:r>
+            <a:pPr indent="0" marL="0">
+              <a:buNone/>
+            </a:pPr>
+            <a:r>
+              <a:rPr lang="en-US" sz="1400" b="1" u="sng" dirty="0">
+                <a:solidFill>
+                  <a:srgbClr val="0056B3"/>
+                </a:solidFill>
+                <a:latin typeface="Arial" pitchFamily="34" charset="0"/>
+                <a:ea typeface="Arial" pitchFamily="34" charset="-122"/>
+                <a:cs typeface="Arial" pitchFamily="34" charset="-120"/>
+                <a:hlinkClick r:id="rId3" invalidUrl="" action="" tgtFrame="" tooltip="https://sucrerie.forge.apps.education.fr/" history="1" highlightClick="0" endSnd="0">
+                  <a:extLst>
+                    <a:ext uri="{A12FA001-AC4F-418D-AE19-62706E023703}">
+                      <ahyp:hlinkClr xmlns:ahyp="http://schemas.microsoft.com/office/drawing/2018/hyperlinkcolor" val="tx"/>
+                    </a:ext>
+                  </a:extLst>
+                </a:hlinkClick>
+              </a:rPr>
+              <a:t>sucrerie.forge.apps.education.fr</a:t>
+            </a:r>
+            <a:endParaRPr lang="en-US" sz="1200" dirty="0"/>
+          </a:p>
+        </p:txBody>
+      </p:sp>
+      <p:sp>
+        <p:nvSpPr>
+          <p:cNvPr id="9" name="Shape 5"/>
           <p:cNvSpPr/>
           <p:nvPr/>
         </p:nvSpPr>
         <p:spPr>
           <a:xfrm>
-            <a:off x="548640" y="1527048"/>
-            <a:ext cx="6135624" cy="3775183"/>
+            <a:off x="5733288" y="1481328"/>
+            <a:ext cx="5982919" cy="3469932"/>
           </a:xfrm>
           <a:prstGeom prst="roundRect">
             <a:avLst>
-              <a:gd name="adj" fmla="val 2907"/>
+              <a:gd name="adj" fmla="val 3162"/>
             </a:avLst>
           </a:prstGeom>
           <a:solidFill>
@@ -11649,301 +11891,7 @@
       </p:sp>
       <p:pic>
         <p:nvPicPr>
-          <p:cNvPr id="5" name="Image 0" descr="/var/folders/b7/tkzbyvzx72qcg9wb0t1jybvm0000gn/T/diaporama-zLbeHS/caramelia.jpg">    </p:cNvPr>
-          <p:cNvPicPr>
-            <a:picLocks noChangeAspect="1"/>
-          </p:cNvPicPr>
-          <p:nvPr/>
-        </p:nvPicPr>
-        <p:blipFill>
-          <a:blip r:embed="rId1"/>
-          <a:stretch>
-            <a:fillRect/>
-          </a:stretch>
-        </p:blipFill>
-        <p:spPr>
-          <a:xfrm>
-            <a:off x="621792" y="1600200"/>
-            <a:ext cx="5989320" cy="3628879"/>
-          </a:xfrm>
-          <a:prstGeom prst="rect">
-            <a:avLst/>
-          </a:prstGeom>
-        </p:spPr>
-      </p:pic>
-      <p:sp>
-        <p:nvSpPr>
-          <p:cNvPr id="6" name="Shape 3"/>
-          <p:cNvSpPr/>
-          <p:nvPr/>
-        </p:nvSpPr>
-        <p:spPr>
-          <a:xfrm>
-            <a:off x="7114032" y="1600200"/>
-            <a:ext cx="512064" cy="512064"/>
-          </a:xfrm>
-          <a:prstGeom prst="roundRect">
-            <a:avLst>
-              <a:gd name="adj" fmla="val 28571"/>
-            </a:avLst>
-          </a:prstGeom>
-          <a:solidFill>
-            <a:srgbClr val="FFECD4"/>
-          </a:solidFill>
-          <a:ln/>
-        </p:spPr>
-      </p:sp>
-      <p:pic>
-        <p:nvPicPr>
-          <p:cNvPr id="7" name="Image 1" descr="/var/folders/b7/tkzbyvzx72qcg9wb0t1jybvm0000gn/T/diaporama-zLbeHS/logo-caramelia.png">    </p:cNvPr>
-          <p:cNvPicPr>
-            <a:picLocks noChangeAspect="1"/>
-          </p:cNvPicPr>
-          <p:nvPr/>
-        </p:nvPicPr>
-        <p:blipFill>
-          <a:blip r:embed="rId2"/>
-          <a:stretch>
-            <a:fillRect/>
-          </a:stretch>
-        </p:blipFill>
-        <p:spPr>
-          <a:xfrm>
-            <a:off x="7205472" y="1691640"/>
-            <a:ext cx="329184" cy="329184"/>
-          </a:xfrm>
-          <a:prstGeom prst="rect">
-            <a:avLst/>
-          </a:prstGeom>
-        </p:spPr>
-      </p:pic>
-      <p:sp>
-        <p:nvSpPr>
-          <p:cNvPr id="8" name="Text 4"/>
-          <p:cNvSpPr txBox="1"/>
-          <p:nvPr/>
-        </p:nvSpPr>
-        <p:spPr>
-          <a:xfrm>
-            <a:off x="7799832" y="1572768"/>
-            <a:ext cx="3843223" cy="292608"/>
-          </a:xfrm>
-          <a:prstGeom prst="rect">
-            <a:avLst/>
-          </a:prstGeom>
-          <a:noFill/>
-          <a:ln/>
-        </p:spPr>
-        <p:txBody>
-          <a:bodyPr wrap="square" lIns="0" tIns="0" rIns="0" bIns="0" rtlCol="0" anchor="t"/>
-          <a:lstStyle/>
-          <a:p>
-            <a:pPr indent="0" marL="0">
-              <a:buNone/>
-            </a:pPr>
-            <a:r>
-              <a:rPr lang="en-US" sz="1600" b="1" dirty="0">
-                <a:solidFill>
-                  <a:srgbClr val="1D1D1F"/>
-                </a:solidFill>
-                <a:latin typeface="Arial" pitchFamily="34" charset="0"/>
-                <a:ea typeface="Arial" pitchFamily="34" charset="-122"/>
-                <a:cs typeface="Arial" pitchFamily="34" charset="-120"/>
-              </a:rPr>
-              <a:t>Caramelia</a:t>
-            </a:r>
-            <a:endParaRPr lang="en-US" sz="1600" dirty="0"/>
-          </a:p>
-        </p:txBody>
-      </p:sp>
-      <p:sp>
-        <p:nvSpPr>
-          <p:cNvPr id="9" name="Text 5"/>
-          <p:cNvSpPr txBox="1"/>
-          <p:nvPr/>
-        </p:nvSpPr>
-        <p:spPr>
-          <a:xfrm>
-            <a:off x="7799832" y="1874520"/>
-            <a:ext cx="3843223" cy="640080"/>
-          </a:xfrm>
-          <a:prstGeom prst="rect">
-            <a:avLst/>
-          </a:prstGeom>
-          <a:noFill/>
-          <a:ln/>
-        </p:spPr>
-        <p:txBody>
-          <a:bodyPr wrap="square" lIns="0" tIns="0" rIns="0" bIns="0" rtlCol="0" anchor="t"/>
-          <a:lstStyle/>
-          <a:p>
-            <a:pPr indent="0" marL="0">
-              <a:buNone/>
-            </a:pPr>
-            <a:r>
-              <a:rPr lang="en-US" sz="1300" dirty="0">
-                <a:solidFill>
-                  <a:srgbClr val="4A4A4F"/>
-                </a:solidFill>
-                <a:latin typeface="Arial" pitchFamily="34" charset="0"/>
-                <a:ea typeface="Arial" pitchFamily="34" charset="-122"/>
-                <a:cs typeface="Arial" pitchFamily="34" charset="-120"/>
-              </a:rPr>
-              <a:t>L’assistante intégrée répond sur l’outil et peut préparer une activité ou un parcours avec vous.</a:t>
-            </a:r>
-            <a:endParaRPr lang="en-US" sz="1300" dirty="0"/>
-          </a:p>
-        </p:txBody>
-      </p:sp>
-      <p:sp>
-        <p:nvSpPr>
-          <p:cNvPr id="10" name="Shape 6"/>
-          <p:cNvSpPr/>
-          <p:nvPr/>
-        </p:nvSpPr>
-        <p:spPr>
-          <a:xfrm>
-            <a:off x="7114032" y="2606040"/>
-            <a:ext cx="512064" cy="512064"/>
-          </a:xfrm>
-          <a:prstGeom prst="roundRect">
-            <a:avLst>
-              <a:gd name="adj" fmla="val 28000"/>
-            </a:avLst>
-          </a:prstGeom>
-          <a:solidFill>
-            <a:srgbClr val="FFECD4"/>
-          </a:solidFill>
-          <a:ln/>
-        </p:spPr>
-      </p:sp>
-      <p:pic>
-        <p:nvPicPr>
-          <p:cNvPr id="11" name="Image 2" descr="/var/folders/b7/tkzbyvzx72qcg9wb0t1jybvm0000gn/T/diaporama-zLbeHS/icone-24.png">    </p:cNvPr>
-          <p:cNvPicPr>
-            <a:picLocks noChangeAspect="1"/>
-          </p:cNvPicPr>
-          <p:nvPr/>
-        </p:nvPicPr>
-        <p:blipFill>
-          <a:blip r:embed="rId3"/>
-          <a:stretch>
-            <a:fillRect/>
-          </a:stretch>
-        </p:blipFill>
-        <p:spPr>
-          <a:xfrm>
-            <a:off x="7236927" y="2728935"/>
-            <a:ext cx="266273" cy="266273"/>
-          </a:xfrm>
-          <a:prstGeom prst="rect">
-            <a:avLst/>
-          </a:prstGeom>
-        </p:spPr>
-      </p:pic>
-      <p:sp>
-        <p:nvSpPr>
-          <p:cNvPr id="12" name="Text 7"/>
-          <p:cNvSpPr txBox="1"/>
-          <p:nvPr/>
-        </p:nvSpPr>
-        <p:spPr>
-          <a:xfrm>
-            <a:off x="7799832" y="2578608"/>
-            <a:ext cx="3843223" cy="292608"/>
-          </a:xfrm>
-          <a:prstGeom prst="rect">
-            <a:avLst/>
-          </a:prstGeom>
-          <a:noFill/>
-          <a:ln/>
-        </p:spPr>
-        <p:txBody>
-          <a:bodyPr wrap="square" lIns="0" tIns="0" rIns="0" bIns="0" rtlCol="0" anchor="t"/>
-          <a:lstStyle/>
-          <a:p>
-            <a:pPr indent="0" marL="0">
-              <a:buNone/>
-            </a:pPr>
-            <a:r>
-              <a:rPr lang="en-US" sz="1600" b="1" dirty="0">
-                <a:solidFill>
-                  <a:srgbClr val="1D1D1F"/>
-                </a:solidFill>
-                <a:latin typeface="Arial" pitchFamily="34" charset="0"/>
-                <a:ea typeface="Arial" pitchFamily="34" charset="-122"/>
-                <a:cs typeface="Arial" pitchFamily="34" charset="-120"/>
-              </a:rPr>
-              <a:t>Le tutoriel</a:t>
-            </a:r>
-            <a:endParaRPr lang="en-US" sz="1600" dirty="0"/>
-          </a:p>
-        </p:txBody>
-      </p:sp>
-      <p:sp>
-        <p:nvSpPr>
-          <p:cNvPr id="13" name="Text 8"/>
-          <p:cNvSpPr txBox="1"/>
-          <p:nvPr/>
-        </p:nvSpPr>
-        <p:spPr>
-          <a:xfrm>
-            <a:off x="7799832" y="2880360"/>
-            <a:ext cx="3843223" cy="640080"/>
-          </a:xfrm>
-          <a:prstGeom prst="rect">
-            <a:avLst/>
-          </a:prstGeom>
-          <a:noFill/>
-          <a:ln/>
-        </p:spPr>
-        <p:txBody>
-          <a:bodyPr wrap="square" lIns="0" tIns="0" rIns="0" bIns="0" rtlCol="0" anchor="t"/>
-          <a:lstStyle/>
-          <a:p>
-            <a:pPr indent="0" marL="0">
-              <a:buNone/>
-            </a:pPr>
-            <a:r>
-              <a:rPr lang="en-US" sz="1300" dirty="0">
-                <a:solidFill>
-                  <a:srgbClr val="4A4A4F"/>
-                </a:solidFill>
-                <a:latin typeface="Arial" pitchFamily="34" charset="0"/>
-                <a:ea typeface="Arial" pitchFamily="34" charset="-122"/>
-                <a:cs typeface="Arial" pitchFamily="34" charset="-120"/>
-              </a:rPr>
-              <a:t>Bouton « Tutoriel » en haut de Caramel : pas à pas, imports compris.</a:t>
-            </a:r>
-            <a:endParaRPr lang="en-US" sz="1300" dirty="0"/>
-          </a:p>
-        </p:txBody>
-      </p:sp>
-      <p:sp>
-        <p:nvSpPr>
-          <p:cNvPr id="14" name="Shape 9"/>
-          <p:cNvSpPr/>
-          <p:nvPr/>
-        </p:nvSpPr>
-        <p:spPr>
-          <a:xfrm>
-            <a:off x="7114032" y="3611880"/>
-            <a:ext cx="512064" cy="512064"/>
-          </a:xfrm>
-          <a:prstGeom prst="roundRect">
-            <a:avLst>
-              <a:gd name="adj" fmla="val 28000"/>
-            </a:avLst>
-          </a:prstGeom>
-          <a:solidFill>
-            <a:srgbClr val="FFECD4"/>
-          </a:solidFill>
-          <a:ln/>
-        </p:spPr>
-      </p:sp>
-      <p:pic>
-        <p:nvPicPr>
-          <p:cNvPr id="15" name="Image 3" descr="/var/folders/b7/tkzbyvzx72qcg9wb0t1jybvm0000gn/T/diaporama-zLbeHS/icone-26.png">    </p:cNvPr>
+          <p:cNvPr id="10" name="Image 2" descr="/var/folders/b7/tkzbyvzx72qcg9wb0t1jybvm0000gn/T/diaporama-4ZvB4P/sucrerie.jpg">    </p:cNvPr>
           <p:cNvPicPr>
             <a:picLocks noChangeAspect="1"/>
           </p:cNvPicPr>
@@ -11957,8 +11905,8 @@
         </p:blipFill>
         <p:spPr>
           <a:xfrm>
-            <a:off x="7236927" y="3734775"/>
-            <a:ext cx="266273" cy="266273"/>
+            <a:off x="5806440" y="1554480"/>
+            <a:ext cx="5836615" cy="3323628"/>
           </a:xfrm>
           <a:prstGeom prst="rect">
             <a:avLst/>
@@ -11967,209 +11915,66 @@
       </p:pic>
       <p:sp>
         <p:nvSpPr>
-          <p:cNvPr id="16" name="Text 10"/>
-          <p:cNvSpPr txBox="1"/>
-          <p:nvPr/>
-        </p:nvSpPr>
-        <p:spPr>
-          <a:xfrm>
-            <a:off x="7799832" y="3584448"/>
-            <a:ext cx="3843223" cy="292608"/>
-          </a:xfrm>
-          <a:prstGeom prst="rect">
-            <a:avLst/>
-          </a:prstGeom>
-          <a:noFill/>
-          <a:ln/>
-        </p:spPr>
-        <p:txBody>
-          <a:bodyPr wrap="square" lIns="0" tIns="0" rIns="0" bIns="0" rtlCol="0" anchor="t"/>
-          <a:lstStyle/>
-          <a:p>
-            <a:pPr indent="0" marL="0">
-              <a:buNone/>
-            </a:pPr>
-            <a:r>
-              <a:rPr lang="en-US" sz="1600" b="1" dirty="0">
-                <a:solidFill>
-                  <a:srgbClr val="1D1D1F"/>
-                </a:solidFill>
-                <a:latin typeface="Arial" pitchFamily="34" charset="0"/>
-                <a:ea typeface="Arial" pitchFamily="34" charset="-122"/>
-                <a:cs typeface="Arial" pitchFamily="34" charset="-120"/>
-              </a:rPr>
-              <a:t>Le wiki</a:t>
-            </a:r>
-            <a:endParaRPr lang="en-US" sz="1600" dirty="0"/>
-          </a:p>
-        </p:txBody>
-      </p:sp>
-      <p:sp>
-        <p:nvSpPr>
-          <p:cNvPr id="17" name="Text 11"/>
-          <p:cNvSpPr txBox="1"/>
-          <p:nvPr/>
-        </p:nvSpPr>
-        <p:spPr>
-          <a:xfrm>
-            <a:off x="7799832" y="3886200"/>
-            <a:ext cx="3843223" cy="640080"/>
-          </a:xfrm>
-          <a:prstGeom prst="rect">
-            <a:avLst/>
-          </a:prstGeom>
-          <a:noFill/>
-          <a:ln/>
-        </p:spPr>
-        <p:txBody>
-          <a:bodyPr wrap="square" lIns="0" tIns="0" rIns="0" bIns="0" rtlCol="0" anchor="t"/>
-          <a:lstStyle/>
-          <a:p>
-            <a:pPr indent="0" marL="0">
-              <a:buNone/>
-            </a:pPr>
-            <a:r>
-              <a:rPr lang="en-US" sz="1300" dirty="0">
-                <a:solidFill>
-                  <a:srgbClr val="4A4A4F"/>
-                </a:solidFill>
-                <a:latin typeface="Arial" pitchFamily="34" charset="0"/>
-                <a:ea typeface="Arial" pitchFamily="34" charset="-122"/>
-                <a:cs typeface="Arial" pitchFamily="34" charset="-120"/>
-              </a:rPr>
-              <a:t>Le guide complet, captures à l’appui.</a:t>
-            </a:r>
-            <a:endParaRPr lang="en-US" sz="1300" dirty="0"/>
-          </a:p>
-        </p:txBody>
-      </p:sp>
-      <p:sp>
-        <p:nvSpPr>
-          <p:cNvPr id="18" name="Shape 12"/>
-          <p:cNvSpPr/>
-          <p:nvPr/>
-        </p:nvSpPr>
-        <p:spPr>
-          <a:xfrm>
-            <a:off x="7114032" y="4617720"/>
-            <a:ext cx="512064" cy="512064"/>
-          </a:xfrm>
-          <a:prstGeom prst="roundRect">
-            <a:avLst>
-              <a:gd name="adj" fmla="val 28571"/>
-            </a:avLst>
-          </a:prstGeom>
-          <a:solidFill>
-            <a:srgbClr val="FFECD4"/>
-          </a:solidFill>
-          <a:ln/>
-        </p:spPr>
-      </p:sp>
-      <p:pic>
-        <p:nvPicPr>
-          <p:cNvPr id="19" name="Image 4" descr="/var/folders/b7/tkzbyvzx72qcg9wb0t1jybvm0000gn/T/diaporama-zLbeHS/logo-tchap.png">    </p:cNvPr>
-          <p:cNvPicPr>
-            <a:picLocks noChangeAspect="1"/>
-          </p:cNvPicPr>
-          <p:nvPr/>
-        </p:nvPicPr>
-        <p:blipFill>
-          <a:blip r:embed="rId5"/>
-          <a:stretch>
-            <a:fillRect/>
-          </a:stretch>
-        </p:blipFill>
-        <p:spPr>
-          <a:xfrm>
-            <a:off x="7205472" y="4709160"/>
-            <a:ext cx="329184" cy="329184"/>
-          </a:xfrm>
-          <a:prstGeom prst="rect">
-            <a:avLst/>
-          </a:prstGeom>
-        </p:spPr>
-      </p:pic>
-      <p:sp>
-        <p:nvSpPr>
-          <p:cNvPr id="20" name="Text 13"/>
-          <p:cNvSpPr txBox="1"/>
-          <p:nvPr/>
-        </p:nvSpPr>
-        <p:spPr>
-          <a:xfrm>
-            <a:off x="7799832" y="4590288"/>
-            <a:ext cx="3843223" cy="292608"/>
-          </a:xfrm>
-          <a:prstGeom prst="rect">
-            <a:avLst/>
-          </a:prstGeom>
-          <a:noFill/>
-          <a:ln/>
-        </p:spPr>
-        <p:txBody>
-          <a:bodyPr wrap="square" lIns="0" tIns="0" rIns="0" bIns="0" rtlCol="0" anchor="t"/>
-          <a:lstStyle/>
-          <a:p>
-            <a:pPr indent="0" marL="0">
-              <a:buNone/>
-            </a:pPr>
-            <a:r>
-              <a:rPr lang="en-US" sz="1600" b="1" dirty="0">
-                <a:solidFill>
-                  <a:srgbClr val="1D1D1F"/>
-                </a:solidFill>
-                <a:latin typeface="Arial" pitchFamily="34" charset="0"/>
-                <a:ea typeface="Arial" pitchFamily="34" charset="-122"/>
-                <a:cs typeface="Arial" pitchFamily="34" charset="-120"/>
-              </a:rPr>
-              <a:t>Tchap</a:t>
-            </a:r>
-            <a:endParaRPr lang="en-US" sz="1600" dirty="0"/>
-          </a:p>
-        </p:txBody>
-      </p:sp>
-      <p:sp>
-        <p:nvSpPr>
-          <p:cNvPr id="21" name="Text 14"/>
-          <p:cNvSpPr txBox="1"/>
-          <p:nvPr/>
-        </p:nvSpPr>
-        <p:spPr>
-          <a:xfrm>
-            <a:off x="7799832" y="4892040"/>
-            <a:ext cx="3843223" cy="640080"/>
-          </a:xfrm>
-          <a:prstGeom prst="rect">
-            <a:avLst/>
-          </a:prstGeom>
-          <a:noFill/>
-          <a:ln/>
-        </p:spPr>
-        <p:txBody>
-          <a:bodyPr wrap="square" lIns="0" tIns="0" rIns="0" bIns="0" rtlCol="0" anchor="t"/>
-          <a:lstStyle/>
-          <a:p>
-            <a:pPr indent="0" marL="0">
-              <a:buNone/>
-            </a:pPr>
-            <a:r>
-              <a:rPr lang="en-US" sz="1300" dirty="0">
-                <a:solidFill>
-                  <a:srgbClr val="4A4A4F"/>
-                </a:solidFill>
-                <a:latin typeface="Arial" pitchFamily="34" charset="0"/>
-                <a:ea typeface="Arial" pitchFamily="34" charset="-122"/>
-                <a:cs typeface="Arial" pitchFamily="34" charset="-120"/>
-              </a:rPr>
-              <a:t>Le salon de la communauté : questions, idées, entraide.</a:t>
-            </a:r>
-            <a:endParaRPr lang="en-US" sz="1300" dirty="0"/>
-          </a:p>
-        </p:txBody>
-      </p:sp>
-      <p:sp>
-        <p:nvSpPr>
-          <p:cNvPr id="22" name="Text 15"/>
+          <p:cNvPr id="11" name="Text 6"/>
+          <p:cNvSpPr txBox="1"/>
+          <p:nvPr/>
+        </p:nvSpPr>
+        <p:spPr>
+          <a:xfrm>
+            <a:off x="548640" y="5742432"/>
+            <a:ext cx="11094415" cy="603504"/>
+          </a:xfrm>
+          <a:prstGeom prst="rect">
+            <a:avLst/>
+          </a:prstGeom>
+          <a:noFill/>
+          <a:ln/>
+        </p:spPr>
+        <p:txBody>
+          <a:bodyPr wrap="square" lIns="0" tIns="0" rIns="0" bIns="0" rtlCol="0" anchor="b"/>
+          <a:lstStyle/>
+          <a:p>
+            <a:pPr indent="0" marL="0">
+              <a:lnSpc>
+                <a:spcPct val="105000"/>
+              </a:lnSpc>
+              <a:buNone/>
+            </a:pPr>
+            <a:r>
+              <a:rPr lang="en-US" sz="950" baseline="30000" dirty="0">
+                <a:solidFill>
+                  <a:srgbClr val="6E6E73"/>
+                </a:solidFill>
+                <a:latin typeface="Arial" pitchFamily="34" charset="0"/>
+                <a:ea typeface="Arial" pitchFamily="34" charset="-122"/>
+                <a:cs typeface="Arial" pitchFamily="34" charset="-120"/>
+              </a:rPr>
+              <a:t>1</a:t>
+            </a:r>
+            <a:pPr indent="0" marL="0">
+              <a:lnSpc>
+                <a:spcPct val="105000"/>
+              </a:lnSpc>
+              <a:buNone/>
+            </a:pPr>
+            <a:r>
+              <a:rPr lang="en-US" sz="950" dirty="0">
+                <a:solidFill>
+                  <a:srgbClr val="6E6E73"/>
+                </a:solidFill>
+                <a:latin typeface="Arial" pitchFamily="34" charset="0"/>
+                <a:ea typeface="Arial" pitchFamily="34" charset="-122"/>
+                <a:cs typeface="Arial" pitchFamily="34" charset="-120"/>
+              </a:rPr>
+              <a:t> Déposer est volontaire et vaut publication, sous licence CC BY-SA 4.0. On se connecte avec son adresse académique (les adresses personnelles ne sont pas acceptées), qui sert uniquement d’identifiant. Vous certifiez détenir les droits et qu’aucune donnée personnelle ne figure dans l’activité.</a:t>
+            </a:r>
+            <a:endParaRPr lang="en-US" sz="950" dirty="0"/>
+          </a:p>
+        </p:txBody>
+      </p:sp>
+      <p:sp>
+        <p:nvSpPr>
+          <p:cNvPr id="12" name="Text 7"/>
           <p:cNvSpPr txBox="1"/>
           <p:nvPr/>
         </p:nvSpPr>
@@ -12200,7 +12005,7 @@
                 <a:ea typeface="Arial" pitchFamily="34" charset="-122"/>
                 <a:cs typeface="Arial" pitchFamily="34" charset="-120"/>
               </a:rPr>
-              <a:t>Caramel v7.0.1 · Présentation · septembre 2026</a:t>
+              <a:t>Caramel v7.1.0 · Présentation · septembre 2026</a:t>
             </a:r>
             <a:endParaRPr lang="en-US" sz="900" dirty="0"/>
           </a:p>
@@ -12208,7 +12013,7 @@
       </p:sp>
       <p:sp>
         <p:nvSpPr>
-          <p:cNvPr id="23" name="Text 16"/>
+          <p:cNvPr id="13" name="Text 8"/>
           <p:cNvSpPr txBox="1"/>
           <p:nvPr/>
         </p:nvSpPr>
@@ -12239,7 +12044,7 @@
                 <a:ea typeface="Arial" pitchFamily="34" charset="-122"/>
                 <a:cs typeface="Arial" pitchFamily="34" charset="-120"/>
               </a:rPr>
-              <a:t>20 / 24</a:t>
+              <a:t>20 / 25</a:t>
             </a:r>
             <a:endParaRPr lang="en-US" sz="900" dirty="0"/>
           </a:p>
@@ -12349,7 +12154,7 @@
                 <a:ea typeface="Arial" pitchFamily="34" charset="-122"/>
                 <a:cs typeface="Arial" pitchFamily="34" charset="-120"/>
               </a:rPr>
-              <a:t>Les bons réflexes</a:t>
+              <a:t>Vous n’êtes jamais seul</a:t>
             </a:r>
             <a:endParaRPr lang="en-US" sz="3000" dirty="0"/>
           </a:p>
@@ -12363,12 +12168,12 @@
         </p:nvSpPr>
         <p:spPr>
           <a:xfrm>
-            <a:off x="548640" y="1508760"/>
-            <a:ext cx="5410048" cy="1371600"/>
+            <a:off x="548640" y="1527048"/>
+            <a:ext cx="6135624" cy="3775183"/>
           </a:xfrm>
           <a:prstGeom prst="roundRect">
             <a:avLst>
-              <a:gd name="adj" fmla="val 10667"/>
+              <a:gd name="adj" fmla="val 2907"/>
             </a:avLst>
           </a:prstGeom>
           <a:solidFill>
@@ -12389,31 +12194,9 @@
           </a:effectLst>
         </p:spPr>
       </p:sp>
-      <p:sp>
-        <p:nvSpPr>
-          <p:cNvPr id="5" name="Shape 3"/>
-          <p:cNvSpPr/>
-          <p:nvPr/>
-        </p:nvSpPr>
-        <p:spPr>
-          <a:xfrm>
-            <a:off x="822960" y="1819656"/>
-            <a:ext cx="566928" cy="566928"/>
-          </a:xfrm>
-          <a:prstGeom prst="roundRect">
-            <a:avLst>
-              <a:gd name="adj" fmla="val 28000"/>
-            </a:avLst>
-          </a:prstGeom>
-          <a:solidFill>
-            <a:srgbClr val="FFECD4"/>
-          </a:solidFill>
-          <a:ln/>
-        </p:spPr>
-      </p:sp>
       <p:pic>
         <p:nvPicPr>
-          <p:cNvPr id="6" name="Image 0" descr="/var/folders/b7/tkzbyvzx72qcg9wb0t1jybvm0000gn/T/diaporama-zLbeHS/icone-19.png">    </p:cNvPr>
+          <p:cNvPr id="5" name="Image 0" descr="/var/folders/b7/tkzbyvzx72qcg9wb0t1jybvm0000gn/T/diaporama-4ZvB4P/caramelia.jpg">    </p:cNvPr>
           <p:cNvPicPr>
             <a:picLocks noChangeAspect="1"/>
           </p:cNvPicPr>
@@ -12427,8 +12210,8 @@
         </p:blipFill>
         <p:spPr>
           <a:xfrm>
-            <a:off x="959023" y="1955719"/>
-            <a:ext cx="294803" cy="294803"/>
+            <a:off x="621792" y="1600200"/>
+            <a:ext cx="5989320" cy="3628879"/>
           </a:xfrm>
           <a:prstGeom prst="rect">
             <a:avLst/>
@@ -12437,130 +12220,18 @@
       </p:pic>
       <p:sp>
         <p:nvSpPr>
-          <p:cNvPr id="7" name="Text 4"/>
-          <p:cNvSpPr txBox="1"/>
-          <p:nvPr/>
-        </p:nvSpPr>
-        <p:spPr>
-          <a:xfrm>
-            <a:off x="1600200" y="1746504"/>
-            <a:ext cx="4129888" cy="329184"/>
-          </a:xfrm>
-          <a:prstGeom prst="rect">
-            <a:avLst/>
-          </a:prstGeom>
-          <a:noFill/>
-          <a:ln/>
-        </p:spPr>
-        <p:txBody>
-          <a:bodyPr wrap="square" lIns="0" tIns="0" rIns="0" bIns="0" rtlCol="0" anchor="t"/>
-          <a:lstStyle/>
-          <a:p>
-            <a:pPr indent="0" marL="0">
-              <a:buNone/>
-            </a:pPr>
-            <a:r>
-              <a:rPr lang="en-US" sz="1700" b="1" dirty="0">
-                <a:solidFill>
-                  <a:srgbClr val="1D1D1F"/>
-                </a:solidFill>
-                <a:latin typeface="Arial" pitchFamily="34" charset="0"/>
-                <a:ea typeface="Arial" pitchFamily="34" charset="-122"/>
-                <a:cs typeface="Arial" pitchFamily="34" charset="-120"/>
-              </a:rPr>
-              <a:t>Relire avant de diffuser</a:t>
-            </a:r>
-            <a:endParaRPr lang="en-US" sz="1700" dirty="0"/>
-          </a:p>
-        </p:txBody>
-      </p:sp>
-      <p:sp>
-        <p:nvSpPr>
-          <p:cNvPr id="8" name="Text 5"/>
-          <p:cNvSpPr txBox="1"/>
-          <p:nvPr/>
-        </p:nvSpPr>
-        <p:spPr>
-          <a:xfrm>
-            <a:off x="1600200" y="2112264"/>
-            <a:ext cx="4129888" cy="685800"/>
-          </a:xfrm>
-          <a:prstGeom prst="rect">
-            <a:avLst/>
-          </a:prstGeom>
-          <a:noFill/>
-          <a:ln/>
-        </p:spPr>
-        <p:txBody>
-          <a:bodyPr wrap="square" lIns="0" tIns="0" rIns="0" bIns="0" rtlCol="0" anchor="t"/>
-          <a:lstStyle/>
-          <a:p>
-            <a:pPr indent="0" marL="0">
-              <a:buNone/>
-            </a:pPr>
-            <a:r>
-              <a:rPr lang="en-US" sz="1350" dirty="0">
-                <a:solidFill>
-                  <a:srgbClr val="4A4A4F"/>
-                </a:solidFill>
-                <a:latin typeface="Arial" pitchFamily="34" charset="0"/>
-                <a:ea typeface="Arial" pitchFamily="34" charset="-122"/>
-                <a:cs typeface="Arial" pitchFamily="34" charset="-120"/>
-              </a:rPr>
-              <a:t>L’IA peut se tromper : un fait, une réponse, une consigne ambiguë. Vous restez l’auteur de ce que vous donnez aux élèves.</a:t>
-            </a:r>
-            <a:endParaRPr lang="en-US" sz="1350" dirty="0"/>
-          </a:p>
-        </p:txBody>
-      </p:sp>
-      <p:sp>
-        <p:nvSpPr>
-          <p:cNvPr id="9" name="Shape 6"/>
+          <p:cNvPr id="6" name="Shape 3"/>
           <p:cNvSpPr/>
           <p:nvPr/>
         </p:nvSpPr>
         <p:spPr>
           <a:xfrm>
-            <a:off x="6233008" y="1508760"/>
-            <a:ext cx="5410048" cy="1371600"/>
+            <a:off x="7114032" y="1600200"/>
+            <a:ext cx="512064" cy="512064"/>
           </a:xfrm>
           <a:prstGeom prst="roundRect">
             <a:avLst>
-              <a:gd name="adj" fmla="val 10667"/>
-            </a:avLst>
-          </a:prstGeom>
-          <a:solidFill>
-            <a:srgbClr val="FFFFFF"/>
-          </a:solidFill>
-          <a:ln w="9525">
-            <a:solidFill>
-              <a:srgbClr val="E5E5EA"/>
-            </a:solidFill>
-            <a:prstDash val="solid"/>
-          </a:ln>
-          <a:effectLst>
-            <a:outerShdw sx="100000" sy="100000" kx="0" ky="0" algn="bl" rotWithShape="0" blurRad="114300" dist="25400" dir="5400000">
-              <a:srgbClr val="000000">
-                <a:alpha val="9000"/>
-              </a:srgbClr>
-            </a:outerShdw>
-          </a:effectLst>
-        </p:spPr>
-      </p:sp>
-      <p:sp>
-        <p:nvSpPr>
-          <p:cNvPr id="10" name="Shape 7"/>
-          <p:cNvSpPr/>
-          <p:nvPr/>
-        </p:nvSpPr>
-        <p:spPr>
-          <a:xfrm>
-            <a:off x="6507328" y="1819656"/>
-            <a:ext cx="566928" cy="566928"/>
-          </a:xfrm>
-          <a:prstGeom prst="roundRect">
-            <a:avLst>
-              <a:gd name="adj" fmla="val 28000"/>
+              <a:gd name="adj" fmla="val 28571"/>
             </a:avLst>
           </a:prstGeom>
           <a:solidFill>
@@ -12571,7 +12242,7 @@
       </p:sp>
       <p:pic>
         <p:nvPicPr>
-          <p:cNvPr id="11" name="Image 1" descr="/var/folders/b7/tkzbyvzx72qcg9wb0t1jybvm0000gn/T/diaporama-zLbeHS/icone-20.png">    </p:cNvPr>
+          <p:cNvPr id="7" name="Image 1" descr="/var/folders/b7/tkzbyvzx72qcg9wb0t1jybvm0000gn/T/diaporama-4ZvB4P/logo-caramelia.png">    </p:cNvPr>
           <p:cNvPicPr>
             <a:picLocks noChangeAspect="1"/>
           </p:cNvPicPr>
@@ -12585,8 +12256,8 @@
         </p:blipFill>
         <p:spPr>
           <a:xfrm>
-            <a:off x="6643390" y="1955719"/>
-            <a:ext cx="294803" cy="294803"/>
+            <a:off x="7205472" y="1691640"/>
+            <a:ext cx="329184" cy="329184"/>
           </a:xfrm>
           <a:prstGeom prst="rect">
             <a:avLst/>
@@ -12595,30 +12266,30 @@
       </p:pic>
       <p:sp>
         <p:nvSpPr>
-          <p:cNvPr id="12" name="Text 8"/>
-          <p:cNvSpPr txBox="1"/>
-          <p:nvPr/>
-        </p:nvSpPr>
-        <p:spPr>
-          <a:xfrm>
-            <a:off x="7284568" y="1746504"/>
-            <a:ext cx="4129888" cy="329184"/>
-          </a:xfrm>
-          <a:prstGeom prst="rect">
-            <a:avLst/>
-          </a:prstGeom>
-          <a:noFill/>
-          <a:ln/>
-        </p:spPr>
-        <p:txBody>
-          <a:bodyPr wrap="square" lIns="0" tIns="0" rIns="0" bIns="0" rtlCol="0" anchor="t"/>
-          <a:lstStyle/>
-          <a:p>
-            <a:pPr indent="0" marL="0">
-              <a:buNone/>
-            </a:pPr>
-            <a:r>
-              <a:rPr lang="en-US" sz="1700" b="1" dirty="0">
+          <p:cNvPr id="8" name="Text 4"/>
+          <p:cNvSpPr txBox="1"/>
+          <p:nvPr/>
+        </p:nvSpPr>
+        <p:spPr>
+          <a:xfrm>
+            <a:off x="7799832" y="1572768"/>
+            <a:ext cx="3843223" cy="292608"/>
+          </a:xfrm>
+          <a:prstGeom prst="rect">
+            <a:avLst/>
+          </a:prstGeom>
+          <a:noFill/>
+          <a:ln/>
+        </p:spPr>
+        <p:txBody>
+          <a:bodyPr wrap="square" lIns="0" tIns="0" rIns="0" bIns="0" rtlCol="0" anchor="t"/>
+          <a:lstStyle/>
+          <a:p>
+            <a:pPr indent="0" marL="0">
+              <a:buNone/>
+            </a:pPr>
+            <a:r>
+              <a:rPr lang="en-US" sz="1600" b="1" dirty="0">
                 <a:solidFill>
                   <a:srgbClr val="1D1D1F"/>
                 </a:solidFill>
@@ -12626,38 +12297,38 @@
                 <a:ea typeface="Arial" pitchFamily="34" charset="-122"/>
                 <a:cs typeface="Arial" pitchFamily="34" charset="-120"/>
               </a:rPr>
-              <a:t>Protéger les élèves</a:t>
-            </a:r>
-            <a:endParaRPr lang="en-US" sz="1700" dirty="0"/>
-          </a:p>
-        </p:txBody>
-      </p:sp>
-      <p:sp>
-        <p:nvSpPr>
-          <p:cNvPr id="13" name="Text 9"/>
-          <p:cNvSpPr txBox="1"/>
-          <p:nvPr/>
-        </p:nvSpPr>
-        <p:spPr>
-          <a:xfrm>
-            <a:off x="7284568" y="2112264"/>
-            <a:ext cx="4129888" cy="685800"/>
-          </a:xfrm>
-          <a:prstGeom prst="rect">
-            <a:avLst/>
-          </a:prstGeom>
-          <a:noFill/>
-          <a:ln/>
-        </p:spPr>
-        <p:txBody>
-          <a:bodyPr wrap="square" lIns="0" tIns="0" rIns="0" bIns="0" rtlCol="0" anchor="t"/>
-          <a:lstStyle/>
-          <a:p>
-            <a:pPr indent="0" marL="0">
-              <a:buNone/>
-            </a:pPr>
-            <a:r>
-              <a:rPr lang="en-US" sz="1350" dirty="0">
+              <a:t>Caramelia</a:t>
+            </a:r>
+            <a:endParaRPr lang="en-US" sz="1600" dirty="0"/>
+          </a:p>
+        </p:txBody>
+      </p:sp>
+      <p:sp>
+        <p:nvSpPr>
+          <p:cNvPr id="9" name="Text 5"/>
+          <p:cNvSpPr txBox="1"/>
+          <p:nvPr/>
+        </p:nvSpPr>
+        <p:spPr>
+          <a:xfrm>
+            <a:off x="7799832" y="1874520"/>
+            <a:ext cx="3843223" cy="640080"/>
+          </a:xfrm>
+          <a:prstGeom prst="rect">
+            <a:avLst/>
+          </a:prstGeom>
+          <a:noFill/>
+          <a:ln/>
+        </p:spPr>
+        <p:txBody>
+          <a:bodyPr wrap="square" lIns="0" tIns="0" rIns="0" bIns="0" rtlCol="0" anchor="t"/>
+          <a:lstStyle/>
+          <a:p>
+            <a:pPr indent="0" marL="0">
+              <a:buNone/>
+            </a:pPr>
+            <a:r>
+              <a:rPr lang="en-US" sz="1300" dirty="0">
                 <a:solidFill>
                   <a:srgbClr val="4A4A4F"/>
                 </a:solidFill>
@@ -12665,56 +12336,22 @@
                 <a:ea typeface="Arial" pitchFamily="34" charset="-122"/>
                 <a:cs typeface="Arial" pitchFamily="34" charset="-120"/>
               </a:rPr>
-              <a:t>Aucun nom, aucune donnée personnelle, ni dans les champs, ni dans les documents.</a:t>
-            </a:r>
-            <a:endParaRPr lang="en-US" sz="1350" dirty="0"/>
-          </a:p>
-        </p:txBody>
-      </p:sp>
-      <p:sp>
-        <p:nvSpPr>
-          <p:cNvPr id="14" name="Shape 10"/>
+              <a:t>L’assistante intégrée répond sur l’outil et peut préparer une activité ou un parcours avec vous.</a:t>
+            </a:r>
+            <a:endParaRPr lang="en-US" sz="1300" dirty="0"/>
+          </a:p>
+        </p:txBody>
+      </p:sp>
+      <p:sp>
+        <p:nvSpPr>
+          <p:cNvPr id="10" name="Shape 6"/>
           <p:cNvSpPr/>
           <p:nvPr/>
         </p:nvSpPr>
         <p:spPr>
           <a:xfrm>
-            <a:off x="548640" y="3081528"/>
-            <a:ext cx="5410048" cy="1371600"/>
-          </a:xfrm>
-          <a:prstGeom prst="roundRect">
-            <a:avLst>
-              <a:gd name="adj" fmla="val 10667"/>
-            </a:avLst>
-          </a:prstGeom>
-          <a:solidFill>
-            <a:srgbClr val="FFFFFF"/>
-          </a:solidFill>
-          <a:ln w="9525">
-            <a:solidFill>
-              <a:srgbClr val="E5E5EA"/>
-            </a:solidFill>
-            <a:prstDash val="solid"/>
-          </a:ln>
-          <a:effectLst>
-            <a:outerShdw sx="100000" sy="100000" kx="0" ky="0" algn="bl" rotWithShape="0" blurRad="114300" dist="25400" dir="5400000">
-              <a:srgbClr val="000000">
-                <a:alpha val="9000"/>
-              </a:srgbClr>
-            </a:outerShdw>
-          </a:effectLst>
-        </p:spPr>
-      </p:sp>
-      <p:sp>
-        <p:nvSpPr>
-          <p:cNvPr id="15" name="Shape 11"/>
-          <p:cNvSpPr/>
-          <p:nvPr/>
-        </p:nvSpPr>
-        <p:spPr>
-          <a:xfrm>
-            <a:off x="822960" y="3392424"/>
-            <a:ext cx="566928" cy="566928"/>
+            <a:off x="7114032" y="2606040"/>
+            <a:ext cx="512064" cy="512064"/>
           </a:xfrm>
           <a:prstGeom prst="roundRect">
             <a:avLst>
@@ -12729,7 +12366,7 @@
       </p:sp>
       <p:pic>
         <p:nvPicPr>
-          <p:cNvPr id="16" name="Image 2" descr="/var/folders/b7/tkzbyvzx72qcg9wb0t1jybvm0000gn/T/diaporama-zLbeHS/icone-21.png">    </p:cNvPr>
+          <p:cNvPr id="11" name="Image 2" descr="/var/folders/b7/tkzbyvzx72qcg9wb0t1jybvm0000gn/T/diaporama-4ZvB4P/icone-24.png">    </p:cNvPr>
           <p:cNvPicPr>
             <a:picLocks noChangeAspect="1"/>
           </p:cNvPicPr>
@@ -12743,8 +12380,8 @@
         </p:blipFill>
         <p:spPr>
           <a:xfrm>
-            <a:off x="959023" y="3528487"/>
-            <a:ext cx="294803" cy="294803"/>
+            <a:off x="7236927" y="2728935"/>
+            <a:ext cx="266273" cy="266273"/>
           </a:xfrm>
           <a:prstGeom prst="rect">
             <a:avLst/>
@@ -12753,30 +12390,30 @@
       </p:pic>
       <p:sp>
         <p:nvSpPr>
-          <p:cNvPr id="17" name="Text 12"/>
-          <p:cNvSpPr txBox="1"/>
-          <p:nvPr/>
-        </p:nvSpPr>
-        <p:spPr>
-          <a:xfrm>
-            <a:off x="1600200" y="3319272"/>
-            <a:ext cx="4129888" cy="329184"/>
-          </a:xfrm>
-          <a:prstGeom prst="rect">
-            <a:avLst/>
-          </a:prstGeom>
-          <a:noFill/>
-          <a:ln/>
-        </p:spPr>
-        <p:txBody>
-          <a:bodyPr wrap="square" lIns="0" tIns="0" rIns="0" bIns="0" rtlCol="0" anchor="t"/>
-          <a:lstStyle/>
-          <a:p>
-            <a:pPr indent="0" marL="0">
-              <a:buNone/>
-            </a:pPr>
-            <a:r>
-              <a:rPr lang="en-US" sz="1700" b="1" dirty="0">
+          <p:cNvPr id="12" name="Text 7"/>
+          <p:cNvSpPr txBox="1"/>
+          <p:nvPr/>
+        </p:nvSpPr>
+        <p:spPr>
+          <a:xfrm>
+            <a:off x="7799832" y="2578608"/>
+            <a:ext cx="3843223" cy="292608"/>
+          </a:xfrm>
+          <a:prstGeom prst="rect">
+            <a:avLst/>
+          </a:prstGeom>
+          <a:noFill/>
+          <a:ln/>
+        </p:spPr>
+        <p:txBody>
+          <a:bodyPr wrap="square" lIns="0" tIns="0" rIns="0" bIns="0" rtlCol="0" anchor="t"/>
+          <a:lstStyle/>
+          <a:p>
+            <a:pPr indent="0" marL="0">
+              <a:buNone/>
+            </a:pPr>
+            <a:r>
+              <a:rPr lang="en-US" sz="1600" b="1" dirty="0">
                 <a:solidFill>
                   <a:srgbClr val="1D1D1F"/>
                 </a:solidFill>
@@ -12784,38 +12421,38 @@
                 <a:ea typeface="Arial" pitchFamily="34" charset="-122"/>
                 <a:cs typeface="Arial" pitchFamily="34" charset="-120"/>
               </a:rPr>
-              <a:t>Respecter les droits</a:t>
-            </a:r>
-            <a:endParaRPr lang="en-US" sz="1700" dirty="0"/>
-          </a:p>
-        </p:txBody>
-      </p:sp>
-      <p:sp>
-        <p:nvSpPr>
-          <p:cNvPr id="18" name="Text 13"/>
-          <p:cNvSpPr txBox="1"/>
-          <p:nvPr/>
-        </p:nvSpPr>
-        <p:spPr>
-          <a:xfrm>
-            <a:off x="1600200" y="3685032"/>
-            <a:ext cx="4129888" cy="685800"/>
-          </a:xfrm>
-          <a:prstGeom prst="rect">
-            <a:avLst/>
-          </a:prstGeom>
-          <a:noFill/>
-          <a:ln/>
-        </p:spPr>
-        <p:txBody>
-          <a:bodyPr wrap="square" lIns="0" tIns="0" rIns="0" bIns="0" rtlCol="0" anchor="t"/>
-          <a:lstStyle/>
-          <a:p>
-            <a:pPr indent="0" marL="0">
-              <a:buNone/>
-            </a:pPr>
-            <a:r>
-              <a:rPr lang="en-US" sz="1350" dirty="0">
+              <a:t>Le tutoriel</a:t>
+            </a:r>
+            <a:endParaRPr lang="en-US" sz="1600" dirty="0"/>
+          </a:p>
+        </p:txBody>
+      </p:sp>
+      <p:sp>
+        <p:nvSpPr>
+          <p:cNvPr id="13" name="Text 8"/>
+          <p:cNvSpPr txBox="1"/>
+          <p:nvPr/>
+        </p:nvSpPr>
+        <p:spPr>
+          <a:xfrm>
+            <a:off x="7799832" y="2880360"/>
+            <a:ext cx="3843223" cy="640080"/>
+          </a:xfrm>
+          <a:prstGeom prst="rect">
+            <a:avLst/>
+          </a:prstGeom>
+          <a:noFill/>
+          <a:ln/>
+        </p:spPr>
+        <p:txBody>
+          <a:bodyPr wrap="square" lIns="0" tIns="0" rIns="0" bIns="0" rtlCol="0" anchor="t"/>
+          <a:lstStyle/>
+          <a:p>
+            <a:pPr indent="0" marL="0">
+              <a:buNone/>
+            </a:pPr>
+            <a:r>
+              <a:rPr lang="en-US" sz="1300" dirty="0">
                 <a:solidFill>
                   <a:srgbClr val="4A4A4F"/>
                 </a:solidFill>
@@ -12823,56 +12460,22 @@
                 <a:ea typeface="Arial" pitchFamily="34" charset="-122"/>
                 <a:cs typeface="Arial" pitchFamily="34" charset="-120"/>
               </a:rPr>
-              <a:t>Documents, images et textes utilisés doivent pouvoir l’être. En déposant sur la Sucrerie, vous le certifiez.</a:t>
-            </a:r>
-            <a:endParaRPr lang="en-US" sz="1350" dirty="0"/>
-          </a:p>
-        </p:txBody>
-      </p:sp>
-      <p:sp>
-        <p:nvSpPr>
-          <p:cNvPr id="19" name="Shape 14"/>
+              <a:t>Bouton « Tutoriel » en haut de Caramel : pas à pas, imports compris.</a:t>
+            </a:r>
+            <a:endParaRPr lang="en-US" sz="1300" dirty="0"/>
+          </a:p>
+        </p:txBody>
+      </p:sp>
+      <p:sp>
+        <p:nvSpPr>
+          <p:cNvPr id="14" name="Shape 9"/>
           <p:cNvSpPr/>
           <p:nvPr/>
         </p:nvSpPr>
         <p:spPr>
           <a:xfrm>
-            <a:off x="6233008" y="3081528"/>
-            <a:ext cx="5410048" cy="1371600"/>
-          </a:xfrm>
-          <a:prstGeom prst="roundRect">
-            <a:avLst>
-              <a:gd name="adj" fmla="val 10667"/>
-            </a:avLst>
-          </a:prstGeom>
-          <a:solidFill>
-            <a:srgbClr val="FFFFFF"/>
-          </a:solidFill>
-          <a:ln w="9525">
-            <a:solidFill>
-              <a:srgbClr val="E5E5EA"/>
-            </a:solidFill>
-            <a:prstDash val="solid"/>
-          </a:ln>
-          <a:effectLst>
-            <a:outerShdw sx="100000" sy="100000" kx="0" ky="0" algn="bl" rotWithShape="0" blurRad="114300" dist="25400" dir="5400000">
-              <a:srgbClr val="000000">
-                <a:alpha val="9000"/>
-              </a:srgbClr>
-            </a:outerShdw>
-          </a:effectLst>
-        </p:spPr>
-      </p:sp>
-      <p:sp>
-        <p:nvSpPr>
-          <p:cNvPr id="20" name="Shape 15"/>
-          <p:cNvSpPr/>
-          <p:nvPr/>
-        </p:nvSpPr>
-        <p:spPr>
-          <a:xfrm>
-            <a:off x="6507328" y="3392424"/>
-            <a:ext cx="566928" cy="566928"/>
+            <a:off x="7114032" y="3611880"/>
+            <a:ext cx="512064" cy="512064"/>
           </a:xfrm>
           <a:prstGeom prst="roundRect">
             <a:avLst>
@@ -12887,7 +12490,7 @@
       </p:sp>
       <p:pic>
         <p:nvPicPr>
-          <p:cNvPr id="21" name="Image 3" descr="/var/folders/b7/tkzbyvzx72qcg9wb0t1jybvm0000gn/T/diaporama-zLbeHS/icone-22.png">    </p:cNvPr>
+          <p:cNvPr id="15" name="Image 3" descr="/var/folders/b7/tkzbyvzx72qcg9wb0t1jybvm0000gn/T/diaporama-4ZvB4P/icone-26.png">    </p:cNvPr>
           <p:cNvPicPr>
             <a:picLocks noChangeAspect="1"/>
           </p:cNvPicPr>
@@ -12901,8 +12504,8 @@
         </p:blipFill>
         <p:spPr>
           <a:xfrm>
-            <a:off x="6643390" y="3528487"/>
-            <a:ext cx="294803" cy="294803"/>
+            <a:off x="7236927" y="3734775"/>
+            <a:ext cx="266273" cy="266273"/>
           </a:xfrm>
           <a:prstGeom prst="rect">
             <a:avLst/>
@@ -12911,30 +12514,30 @@
       </p:pic>
       <p:sp>
         <p:nvSpPr>
-          <p:cNvPr id="22" name="Text 16"/>
-          <p:cNvSpPr txBox="1"/>
-          <p:nvPr/>
-        </p:nvSpPr>
-        <p:spPr>
-          <a:xfrm>
-            <a:off x="7284568" y="3319272"/>
-            <a:ext cx="4129888" cy="329184"/>
-          </a:xfrm>
-          <a:prstGeom prst="rect">
-            <a:avLst/>
-          </a:prstGeom>
-          <a:noFill/>
-          <a:ln/>
-        </p:spPr>
-        <p:txBody>
-          <a:bodyPr wrap="square" lIns="0" tIns="0" rIns="0" bIns="0" rtlCol="0" anchor="t"/>
-          <a:lstStyle/>
-          <a:p>
-            <a:pPr indent="0" marL="0">
-              <a:buNone/>
-            </a:pPr>
-            <a:r>
-              <a:rPr lang="en-US" sz="1700" b="1" dirty="0">
+          <p:cNvPr id="16" name="Text 10"/>
+          <p:cNvSpPr txBox="1"/>
+          <p:nvPr/>
+        </p:nvSpPr>
+        <p:spPr>
+          <a:xfrm>
+            <a:off x="7799832" y="3584448"/>
+            <a:ext cx="3843223" cy="292608"/>
+          </a:xfrm>
+          <a:prstGeom prst="rect">
+            <a:avLst/>
+          </a:prstGeom>
+          <a:noFill/>
+          <a:ln/>
+        </p:spPr>
+        <p:txBody>
+          <a:bodyPr wrap="square" lIns="0" tIns="0" rIns="0" bIns="0" rtlCol="0" anchor="t"/>
+          <a:lstStyle/>
+          <a:p>
+            <a:pPr indent="0" marL="0">
+              <a:buNone/>
+            </a:pPr>
+            <a:r>
+              <a:rPr lang="en-US" sz="1600" b="1" dirty="0">
                 <a:solidFill>
                   <a:srgbClr val="1D1D1F"/>
                 </a:solidFill>
@@ -12942,38 +12545,38 @@
                 <a:ea typeface="Arial" pitchFamily="34" charset="-122"/>
                 <a:cs typeface="Arial" pitchFamily="34" charset="-120"/>
               </a:rPr>
-              <a:t>Tester avant la classe</a:t>
-            </a:r>
-            <a:endParaRPr lang="en-US" sz="1700" dirty="0"/>
-          </a:p>
-        </p:txBody>
-      </p:sp>
-      <p:sp>
-        <p:nvSpPr>
-          <p:cNvPr id="23" name="Text 17"/>
-          <p:cNvSpPr txBox="1"/>
-          <p:nvPr/>
-        </p:nvSpPr>
-        <p:spPr>
-          <a:xfrm>
-            <a:off x="7284568" y="3685032"/>
-            <a:ext cx="4129888" cy="685800"/>
-          </a:xfrm>
-          <a:prstGeom prst="rect">
-            <a:avLst/>
-          </a:prstGeom>
-          <a:noFill/>
-          <a:ln/>
-        </p:spPr>
-        <p:txBody>
-          <a:bodyPr wrap="square" lIns="0" tIns="0" rIns="0" bIns="0" rtlCol="0" anchor="t"/>
-          <a:lstStyle/>
-          <a:p>
-            <a:pPr indent="0" marL="0">
-              <a:buNone/>
-            </a:pPr>
-            <a:r>
-              <a:rPr lang="en-US" sz="1350" dirty="0">
+              <a:t>Le wiki</a:t>
+            </a:r>
+            <a:endParaRPr lang="en-US" sz="1600" dirty="0"/>
+          </a:p>
+        </p:txBody>
+      </p:sp>
+      <p:sp>
+        <p:nvSpPr>
+          <p:cNvPr id="17" name="Text 11"/>
+          <p:cNvSpPr txBox="1"/>
+          <p:nvPr/>
+        </p:nvSpPr>
+        <p:spPr>
+          <a:xfrm>
+            <a:off x="7799832" y="3886200"/>
+            <a:ext cx="3843223" cy="640080"/>
+          </a:xfrm>
+          <a:prstGeom prst="rect">
+            <a:avLst/>
+          </a:prstGeom>
+          <a:noFill/>
+          <a:ln/>
+        </p:spPr>
+        <p:txBody>
+          <a:bodyPr wrap="square" lIns="0" tIns="0" rIns="0" bIns="0" rtlCol="0" anchor="t"/>
+          <a:lstStyle/>
+          <a:p>
+            <a:pPr indent="0" marL="0">
+              <a:buNone/>
+            </a:pPr>
+            <a:r>
+              <a:rPr lang="en-US" sz="1300" dirty="0">
                 <a:solidFill>
                   <a:srgbClr val="4A4A4F"/>
                 </a:solidFill>
@@ -12981,60 +12584,26 @@
                 <a:ea typeface="Arial" pitchFamily="34" charset="-122"/>
                 <a:cs typeface="Arial" pitchFamily="34" charset="-120"/>
               </a:rPr>
-              <a:t>Importez d’abord dans un espace de test et jouez l’activité comme un élève.</a:t>
-            </a:r>
-            <a:endParaRPr lang="en-US" sz="1350" dirty="0"/>
-          </a:p>
-        </p:txBody>
-      </p:sp>
-      <p:sp>
-        <p:nvSpPr>
-          <p:cNvPr id="24" name="Shape 18"/>
+              <a:t>Le guide complet, captures à l’appui.</a:t>
+            </a:r>
+            <a:endParaRPr lang="en-US" sz="1300" dirty="0"/>
+          </a:p>
+        </p:txBody>
+      </p:sp>
+      <p:sp>
+        <p:nvSpPr>
+          <p:cNvPr id="18" name="Shape 12"/>
           <p:cNvSpPr/>
           <p:nvPr/>
         </p:nvSpPr>
         <p:spPr>
           <a:xfrm>
-            <a:off x="548640" y="4654296"/>
-            <a:ext cx="5410048" cy="1371600"/>
+            <a:off x="7114032" y="4617720"/>
+            <a:ext cx="512064" cy="512064"/>
           </a:xfrm>
           <a:prstGeom prst="roundRect">
             <a:avLst>
-              <a:gd name="adj" fmla="val 10667"/>
-            </a:avLst>
-          </a:prstGeom>
-          <a:solidFill>
-            <a:srgbClr val="FFFFFF"/>
-          </a:solidFill>
-          <a:ln w="9525">
-            <a:solidFill>
-              <a:srgbClr val="E5E5EA"/>
-            </a:solidFill>
-            <a:prstDash val="solid"/>
-          </a:ln>
-          <a:effectLst>
-            <a:outerShdw sx="100000" sy="100000" kx="0" ky="0" algn="bl" rotWithShape="0" blurRad="114300" dist="25400" dir="5400000">
-              <a:srgbClr val="000000">
-                <a:alpha val="9000"/>
-              </a:srgbClr>
-            </a:outerShdw>
-          </a:effectLst>
-        </p:spPr>
-      </p:sp>
-      <p:sp>
-        <p:nvSpPr>
-          <p:cNvPr id="25" name="Shape 19"/>
-          <p:cNvSpPr/>
-          <p:nvPr/>
-        </p:nvSpPr>
-        <p:spPr>
-          <a:xfrm>
-            <a:off x="822960" y="4965192"/>
-            <a:ext cx="566928" cy="566928"/>
-          </a:xfrm>
-          <a:prstGeom prst="roundRect">
-            <a:avLst>
-              <a:gd name="adj" fmla="val 28000"/>
+              <a:gd name="adj" fmla="val 28571"/>
             </a:avLst>
           </a:prstGeom>
           <a:solidFill>
@@ -13045,7 +12614,7 @@
       </p:sp>
       <p:pic>
         <p:nvPicPr>
-          <p:cNvPr id="26" name="Image 4" descr="/var/folders/b7/tkzbyvzx72qcg9wb0t1jybvm0000gn/T/diaporama-zLbeHS/icone-23.png">    </p:cNvPr>
+          <p:cNvPr id="19" name="Image 4" descr="/var/folders/b7/tkzbyvzx72qcg9wb0t1jybvm0000gn/T/diaporama-4ZvB4P/logo-tchap.png">    </p:cNvPr>
           <p:cNvPicPr>
             <a:picLocks noChangeAspect="1"/>
           </p:cNvPicPr>
@@ -13059,8 +12628,8 @@
         </p:blipFill>
         <p:spPr>
           <a:xfrm>
-            <a:off x="959023" y="5101255"/>
-            <a:ext cx="294803" cy="294803"/>
+            <a:off x="7205472" y="4709160"/>
+            <a:ext cx="329184" cy="329184"/>
           </a:xfrm>
           <a:prstGeom prst="rect">
             <a:avLst/>
@@ -13069,30 +12638,30 @@
       </p:pic>
       <p:sp>
         <p:nvSpPr>
-          <p:cNvPr id="27" name="Text 20"/>
-          <p:cNvSpPr txBox="1"/>
-          <p:nvPr/>
-        </p:nvSpPr>
-        <p:spPr>
-          <a:xfrm>
-            <a:off x="1600200" y="4892040"/>
-            <a:ext cx="4129888" cy="329184"/>
-          </a:xfrm>
-          <a:prstGeom prst="rect">
-            <a:avLst/>
-          </a:prstGeom>
-          <a:noFill/>
-          <a:ln/>
-        </p:spPr>
-        <p:txBody>
-          <a:bodyPr wrap="square" lIns="0" tIns="0" rIns="0" bIns="0" rtlCol="0" anchor="t"/>
-          <a:lstStyle/>
-          <a:p>
-            <a:pPr indent="0" marL="0">
-              <a:buNone/>
-            </a:pPr>
-            <a:r>
-              <a:rPr lang="en-US" sz="1700" b="1" dirty="0">
+          <p:cNvPr id="20" name="Text 13"/>
+          <p:cNvSpPr txBox="1"/>
+          <p:nvPr/>
+        </p:nvSpPr>
+        <p:spPr>
+          <a:xfrm>
+            <a:off x="7799832" y="4590288"/>
+            <a:ext cx="3843223" cy="292608"/>
+          </a:xfrm>
+          <a:prstGeom prst="rect">
+            <a:avLst/>
+          </a:prstGeom>
+          <a:noFill/>
+          <a:ln/>
+        </p:spPr>
+        <p:txBody>
+          <a:bodyPr wrap="square" lIns="0" tIns="0" rIns="0" bIns="0" rtlCol="0" anchor="t"/>
+          <a:lstStyle/>
+          <a:p>
+            <a:pPr indent="0" marL="0">
+              <a:buNone/>
+            </a:pPr>
+            <a:r>
+              <a:rPr lang="en-US" sz="1600" b="1" dirty="0">
                 <a:solidFill>
                   <a:srgbClr val="1D1D1F"/>
                 </a:solidFill>
@@ -13100,38 +12669,38 @@
                 <a:ea typeface="Arial" pitchFamily="34" charset="-122"/>
                 <a:cs typeface="Arial" pitchFamily="34" charset="-120"/>
               </a:rPr>
-              <a:t>Signaler un problème</a:t>
-            </a:r>
-            <a:endParaRPr lang="en-US" sz="1700" dirty="0"/>
-          </a:p>
-        </p:txBody>
-      </p:sp>
-      <p:sp>
-        <p:nvSpPr>
-          <p:cNvPr id="28" name="Text 21"/>
-          <p:cNvSpPr txBox="1"/>
-          <p:nvPr/>
-        </p:nvSpPr>
-        <p:spPr>
-          <a:xfrm>
-            <a:off x="1600200" y="5257800"/>
-            <a:ext cx="4129888" cy="685800"/>
-          </a:xfrm>
-          <a:prstGeom prst="rect">
-            <a:avLst/>
-          </a:prstGeom>
-          <a:noFill/>
-          <a:ln/>
-        </p:spPr>
-        <p:txBody>
-          <a:bodyPr wrap="square" lIns="0" tIns="0" rIns="0" bIns="0" rtlCol="0" anchor="t"/>
-          <a:lstStyle/>
-          <a:p>
-            <a:pPr indent="0" marL="0">
-              <a:buNone/>
-            </a:pPr>
-            <a:r>
-              <a:rPr lang="en-US" sz="1350" dirty="0">
+              <a:t>Tchap</a:t>
+            </a:r>
+            <a:endParaRPr lang="en-US" sz="1600" dirty="0"/>
+          </a:p>
+        </p:txBody>
+      </p:sp>
+      <p:sp>
+        <p:nvSpPr>
+          <p:cNvPr id="21" name="Text 14"/>
+          <p:cNvSpPr txBox="1"/>
+          <p:nvPr/>
+        </p:nvSpPr>
+        <p:spPr>
+          <a:xfrm>
+            <a:off x="7799832" y="4892040"/>
+            <a:ext cx="3843223" cy="640080"/>
+          </a:xfrm>
+          <a:prstGeom prst="rect">
+            <a:avLst/>
+          </a:prstGeom>
+          <a:noFill/>
+          <a:ln/>
+        </p:spPr>
+        <p:txBody>
+          <a:bodyPr wrap="square" lIns="0" tIns="0" rIns="0" bIns="0" rtlCol="0" anchor="t"/>
+          <a:lstStyle/>
+          <a:p>
+            <a:pPr indent="0" marL="0">
+              <a:buNone/>
+            </a:pPr>
+            <a:r>
+              <a:rPr lang="en-US" sz="1300" dirty="0">
                 <a:solidFill>
                   <a:srgbClr val="4A4A4F"/>
                 </a:solidFill>
@@ -13139,81 +12708,15 @@
                 <a:ea typeface="Arial" pitchFamily="34" charset="-122"/>
                 <a:cs typeface="Arial" pitchFamily="34" charset="-120"/>
               </a:rPr>
-              <a:t>Un ticket sur la Forge ou un message sur Tchap, avec si possible le fichier JSON concerné.</a:t>
-            </a:r>
-            <a:endParaRPr lang="en-US" sz="1350" dirty="0"/>
-          </a:p>
-        </p:txBody>
-      </p:sp>
-      <p:sp>
-        <p:nvSpPr>
-          <p:cNvPr id="29" name="Shape 22"/>
-          <p:cNvSpPr/>
-          <p:nvPr/>
-        </p:nvSpPr>
-        <p:spPr>
-          <a:xfrm>
-            <a:off x="6233008" y="4654296"/>
-            <a:ext cx="5410048" cy="1371600"/>
-          </a:xfrm>
-          <a:prstGeom prst="roundRect">
-            <a:avLst>
-              <a:gd name="adj" fmla="val 10667"/>
-            </a:avLst>
-          </a:prstGeom>
-          <a:solidFill>
-            <a:srgbClr val="FFF7EC"/>
-          </a:solidFill>
-          <a:ln w="9525">
-            <a:solidFill>
-              <a:srgbClr val="EEE0CF"/>
-            </a:solidFill>
-            <a:prstDash val="solid"/>
-          </a:ln>
-        </p:spPr>
-      </p:sp>
-      <p:sp>
-        <p:nvSpPr>
-          <p:cNvPr id="30" name="Text 23"/>
-          <p:cNvSpPr txBox="1"/>
-          <p:nvPr/>
-        </p:nvSpPr>
-        <p:spPr>
-          <a:xfrm>
-            <a:off x="6507328" y="4654296"/>
-            <a:ext cx="4861408" cy="1371600"/>
-          </a:xfrm>
-          <a:prstGeom prst="rect">
-            <a:avLst/>
-          </a:prstGeom>
-          <a:noFill/>
-          <a:ln/>
-        </p:spPr>
-        <p:txBody>
-          <a:bodyPr wrap="square" lIns="0" tIns="0" rIns="0" bIns="0" rtlCol="0" anchor="ctr"/>
-          <a:lstStyle/>
-          <a:p>
-            <a:pPr algn="ctr" indent="0" marL="0">
-              <a:buNone/>
-            </a:pPr>
-            <a:r>
-              <a:rPr lang="en-US" sz="2200" b="1" dirty="0">
-                <a:solidFill>
-                  <a:srgbClr val="8F4014"/>
-                </a:solidFill>
-                <a:latin typeface="Arial" pitchFamily="34" charset="0"/>
-                <a:ea typeface="Arial" pitchFamily="34" charset="-122"/>
-                <a:cs typeface="Arial" pitchFamily="34" charset="-120"/>
-              </a:rPr>
-              <a:t>L’IA propose, vous décidez.</a:t>
-            </a:r>
-            <a:endParaRPr lang="en-US" sz="2200" dirty="0"/>
-          </a:p>
-        </p:txBody>
-      </p:sp>
-      <p:sp>
-        <p:nvSpPr>
-          <p:cNvPr id="31" name="Text 24"/>
+              <a:t>Le salon de la communauté : questions, idées, entraide.</a:t>
+            </a:r>
+            <a:endParaRPr lang="en-US" sz="1300" dirty="0"/>
+          </a:p>
+        </p:txBody>
+      </p:sp>
+      <p:sp>
+        <p:nvSpPr>
+          <p:cNvPr id="22" name="Text 15"/>
           <p:cNvSpPr txBox="1"/>
           <p:nvPr/>
         </p:nvSpPr>
@@ -13244,7 +12747,7 @@
                 <a:ea typeface="Arial" pitchFamily="34" charset="-122"/>
                 <a:cs typeface="Arial" pitchFamily="34" charset="-120"/>
               </a:rPr>
-              <a:t>Caramel v7.0.1 · Présentation · septembre 2026</a:t>
+              <a:t>Caramel v7.1.0 · Présentation · septembre 2026</a:t>
             </a:r>
             <a:endParaRPr lang="en-US" sz="900" dirty="0"/>
           </a:p>
@@ -13252,7 +12755,7 @@
       </p:sp>
       <p:sp>
         <p:nvSpPr>
-          <p:cNvPr id="32" name="Text 25"/>
+          <p:cNvPr id="23" name="Text 16"/>
           <p:cNvSpPr txBox="1"/>
           <p:nvPr/>
         </p:nvSpPr>
@@ -13283,7 +12786,7 @@
                 <a:ea typeface="Arial" pitchFamily="34" charset="-122"/>
                 <a:cs typeface="Arial" pitchFamily="34" charset="-120"/>
               </a:rPr>
-              <a:t>21 / 24</a:t>
+              <a:t>21 / 25</a:t>
             </a:r>
             <a:endParaRPr lang="en-US" sz="900" dirty="0"/>
           </a:p>
@@ -13329,6 +12832,45 @@
         </p:nvSpPr>
         <p:spPr>
           <a:xfrm>
+            <a:off x="548640" y="384048"/>
+            <a:ext cx="11094415" cy="274320"/>
+          </a:xfrm>
+          <a:prstGeom prst="rect">
+            <a:avLst/>
+          </a:prstGeom>
+          <a:noFill/>
+          <a:ln/>
+        </p:spPr>
+        <p:txBody>
+          <a:bodyPr wrap="square" lIns="0" tIns="0" rIns="0" bIns="0" rtlCol="0" anchor="t"/>
+          <a:lstStyle/>
+          <a:p>
+            <a:pPr indent="0" marL="0">
+              <a:buNone/>
+            </a:pPr>
+            <a:r>
+              <a:rPr lang="en-US" sz="1200" b="1" dirty="0">
+                <a:solidFill>
+                  <a:srgbClr val="8F4014"/>
+                </a:solidFill>
+                <a:latin typeface="Arial" pitchFamily="34" charset="0"/>
+                <a:ea typeface="Arial" pitchFamily="34" charset="-122"/>
+                <a:cs typeface="Arial" pitchFamily="34" charset="-120"/>
+              </a:rPr>
+              <a:t>4 · Partager et se faire aider</a:t>
+            </a:r>
+            <a:endParaRPr lang="en-US" sz="1200" dirty="0"/>
+          </a:p>
+        </p:txBody>
+      </p:sp>
+      <p:sp>
+        <p:nvSpPr>
+          <p:cNvPr id="3" name="Text 1"/>
+          <p:cNvSpPr txBox="1"/>
+          <p:nvPr/>
+        </p:nvSpPr>
+        <p:spPr>
+          <a:xfrm>
             <a:off x="548640" y="658368"/>
             <a:ext cx="11094415" cy="658368"/>
           </a:xfrm>
@@ -13354,7 +12896,7 @@
                 <a:ea typeface="Arial" pitchFamily="34" charset="-122"/>
                 <a:cs typeface="Arial" pitchFamily="34" charset="-120"/>
               </a:rPr>
-              <a:t>Proposer un atelier de 45 minutes</a:t>
+              <a:t>Les bons réflexes</a:t>
             </a:r>
             <a:endParaRPr lang="en-US" sz="3000" dirty="0"/>
           </a:p>
@@ -13362,18 +12904,18 @@
       </p:sp>
       <p:sp>
         <p:nvSpPr>
-          <p:cNvPr id="3" name="Shape 1"/>
+          <p:cNvPr id="4" name="Shape 2"/>
           <p:cNvSpPr/>
           <p:nvPr/>
         </p:nvSpPr>
         <p:spPr>
           <a:xfrm>
-            <a:off x="548640" y="1554480"/>
-            <a:ext cx="2602154" cy="2834640"/>
+            <a:off x="548640" y="1508760"/>
+            <a:ext cx="5410048" cy="1371600"/>
           </a:xfrm>
           <a:prstGeom prst="roundRect">
             <a:avLst>
-              <a:gd name="adj" fmla="val 5622"/>
+              <a:gd name="adj" fmla="val 10667"/>
             </a:avLst>
           </a:prstGeom>
           <a:solidFill>
@@ -13396,18 +12938,18 @@
       </p:sp>
       <p:sp>
         <p:nvSpPr>
-          <p:cNvPr id="4" name="Shape 2"/>
+          <p:cNvPr id="5" name="Shape 3"/>
           <p:cNvSpPr/>
           <p:nvPr/>
         </p:nvSpPr>
         <p:spPr>
           <a:xfrm>
-            <a:off x="822960" y="1847088"/>
-            <a:ext cx="914400" cy="384048"/>
+            <a:off x="822960" y="1819656"/>
+            <a:ext cx="566928" cy="566928"/>
           </a:xfrm>
           <a:prstGeom prst="roundRect">
             <a:avLst>
-              <a:gd name="adj" fmla="val 50000"/>
+              <a:gd name="adj" fmla="val 28000"/>
             </a:avLst>
           </a:prstGeom>
           <a:solidFill>
@@ -13416,71 +12958,56 @@
           <a:ln/>
         </p:spPr>
       </p:sp>
-      <p:sp>
-        <p:nvSpPr>
-          <p:cNvPr id="5" name="Text 3"/>
-          <p:cNvSpPr txBox="1"/>
-          <p:nvPr/>
-        </p:nvSpPr>
-        <p:spPr>
-          <a:xfrm>
-            <a:off x="822960" y="1847088"/>
-            <a:ext cx="914400" cy="384048"/>
-          </a:xfrm>
-          <a:prstGeom prst="rect">
-            <a:avLst/>
-          </a:prstGeom>
-          <a:noFill/>
-          <a:ln/>
-        </p:spPr>
-        <p:txBody>
-          <a:bodyPr wrap="square" lIns="0" tIns="0" rIns="0" bIns="0" rtlCol="0" anchor="ctr"/>
-          <a:lstStyle/>
-          <a:p>
-            <a:pPr algn="ctr" indent="0" marL="0">
-              <a:buNone/>
-            </a:pPr>
-            <a:r>
-              <a:rPr lang="en-US" sz="1300" b="1" dirty="0">
-                <a:solidFill>
-                  <a:srgbClr val="8F4014"/>
-                </a:solidFill>
-                <a:latin typeface="Arial" pitchFamily="34" charset="0"/>
-                <a:ea typeface="Arial" pitchFamily="34" charset="-122"/>
-                <a:cs typeface="Arial" pitchFamily="34" charset="-120"/>
-              </a:rPr>
-              <a:t>5 min</a:t>
-            </a:r>
-            <a:endParaRPr lang="en-US" sz="1300" dirty="0"/>
-          </a:p>
-        </p:txBody>
-      </p:sp>
-      <p:sp>
-        <p:nvSpPr>
-          <p:cNvPr id="6" name="Text 4"/>
-          <p:cNvSpPr txBox="1"/>
-          <p:nvPr/>
-        </p:nvSpPr>
-        <p:spPr>
-          <a:xfrm>
-            <a:off x="822960" y="2450592"/>
-            <a:ext cx="2053514" cy="365760"/>
-          </a:xfrm>
-          <a:prstGeom prst="rect">
-            <a:avLst/>
-          </a:prstGeom>
-          <a:noFill/>
-          <a:ln/>
-        </p:spPr>
-        <p:txBody>
-          <a:bodyPr wrap="square" lIns="0" tIns="0" rIns="0" bIns="0" rtlCol="0" anchor="t"/>
-          <a:lstStyle/>
-          <a:p>
-            <a:pPr indent="0" marL="0">
-              <a:buNone/>
-            </a:pPr>
-            <a:r>
-              <a:rPr lang="en-US" sz="1800" b="1" dirty="0">
+      <p:pic>
+        <p:nvPicPr>
+          <p:cNvPr id="6" name="Image 0" descr="/var/folders/b7/tkzbyvzx72qcg9wb0t1jybvm0000gn/T/diaporama-4ZvB4P/icone-19.png">    </p:cNvPr>
+          <p:cNvPicPr>
+            <a:picLocks noChangeAspect="1"/>
+          </p:cNvPicPr>
+          <p:nvPr/>
+        </p:nvPicPr>
+        <p:blipFill>
+          <a:blip r:embed="rId1"/>
+          <a:stretch>
+            <a:fillRect/>
+          </a:stretch>
+        </p:blipFill>
+        <p:spPr>
+          <a:xfrm>
+            <a:off x="959023" y="1955719"/>
+            <a:ext cx="294803" cy="294803"/>
+          </a:xfrm>
+          <a:prstGeom prst="rect">
+            <a:avLst/>
+          </a:prstGeom>
+        </p:spPr>
+      </p:pic>
+      <p:sp>
+        <p:nvSpPr>
+          <p:cNvPr id="7" name="Text 4"/>
+          <p:cNvSpPr txBox="1"/>
+          <p:nvPr/>
+        </p:nvSpPr>
+        <p:spPr>
+          <a:xfrm>
+            <a:off x="1600200" y="1746504"/>
+            <a:ext cx="4129888" cy="329184"/>
+          </a:xfrm>
+          <a:prstGeom prst="rect">
+            <a:avLst/>
+          </a:prstGeom>
+          <a:noFill/>
+          <a:ln/>
+        </p:spPr>
+        <p:txBody>
+          <a:bodyPr wrap="square" lIns="0" tIns="0" rIns="0" bIns="0" rtlCol="0" anchor="t"/>
+          <a:lstStyle/>
+          <a:p>
+            <a:pPr indent="0" marL="0">
+              <a:buNone/>
+            </a:pPr>
+            <a:r>
+              <a:rPr lang="en-US" sz="1700" b="1" dirty="0">
                 <a:solidFill>
                   <a:srgbClr val="1D1D1F"/>
                 </a:solidFill>
@@ -13488,38 +13015,38 @@
                 <a:ea typeface="Arial" pitchFamily="34" charset="-122"/>
                 <a:cs typeface="Arial" pitchFamily="34" charset="-120"/>
               </a:rPr>
-              <a:t>La vidéo</a:t>
-            </a:r>
-            <a:endParaRPr lang="en-US" sz="1800" dirty="0"/>
-          </a:p>
-        </p:txBody>
-      </p:sp>
-      <p:sp>
-        <p:nvSpPr>
-          <p:cNvPr id="7" name="Text 5"/>
-          <p:cNvSpPr txBox="1"/>
-          <p:nvPr/>
-        </p:nvSpPr>
-        <p:spPr>
-          <a:xfrm>
-            <a:off x="822960" y="2880360"/>
-            <a:ext cx="2053514" cy="1417320"/>
-          </a:xfrm>
-          <a:prstGeom prst="rect">
-            <a:avLst/>
-          </a:prstGeom>
-          <a:noFill/>
-          <a:ln/>
-        </p:spPr>
-        <p:txBody>
-          <a:bodyPr wrap="square" lIns="0" tIns="0" rIns="0" bIns="0" rtlCol="0" anchor="t"/>
-          <a:lstStyle/>
-          <a:p>
-            <a:pPr indent="0" marL="0">
-              <a:buNone/>
-            </a:pPr>
-            <a:r>
-              <a:rPr lang="en-US" sz="1400" dirty="0">
+              <a:t>Relire avant de diffuser</a:t>
+            </a:r>
+            <a:endParaRPr lang="en-US" sz="1700" dirty="0"/>
+          </a:p>
+        </p:txBody>
+      </p:sp>
+      <p:sp>
+        <p:nvSpPr>
+          <p:cNvPr id="8" name="Text 5"/>
+          <p:cNvSpPr txBox="1"/>
+          <p:nvPr/>
+        </p:nvSpPr>
+        <p:spPr>
+          <a:xfrm>
+            <a:off x="1600200" y="2112264"/>
+            <a:ext cx="4129888" cy="685800"/>
+          </a:xfrm>
+          <a:prstGeom prst="rect">
+            <a:avLst/>
+          </a:prstGeom>
+          <a:noFill/>
+          <a:ln/>
+        </p:spPr>
+        <p:txBody>
+          <a:bodyPr wrap="square" lIns="0" tIns="0" rIns="0" bIns="0" rtlCol="0" anchor="t"/>
+          <a:lstStyle/>
+          <a:p>
+            <a:pPr indent="0" marL="0">
+              <a:buNone/>
+            </a:pPr>
+            <a:r>
+              <a:rPr lang="en-US" sz="1350" dirty="0">
                 <a:solidFill>
                   <a:srgbClr val="4A4A4F"/>
                 </a:solidFill>
@@ -13527,26 +13054,26 @@
                 <a:ea typeface="Arial" pitchFamily="34" charset="-122"/>
                 <a:cs typeface="Arial" pitchFamily="34" charset="-120"/>
               </a:rPr>
-              <a:t>La présentation de Caramel 7 pour poser le décor : ce que l’outil prépare, et ses limites.</a:t>
-            </a:r>
-            <a:endParaRPr lang="en-US" sz="1400" dirty="0"/>
-          </a:p>
-        </p:txBody>
-      </p:sp>
-      <p:sp>
-        <p:nvSpPr>
-          <p:cNvPr id="8" name="Shape 6"/>
+              <a:t>L’IA peut se tromper : un fait, une réponse, une consigne ambiguë. Vous restez l’auteur de ce que vous donnez aux élèves.</a:t>
+            </a:r>
+            <a:endParaRPr lang="en-US" sz="1350" dirty="0"/>
+          </a:p>
+        </p:txBody>
+      </p:sp>
+      <p:sp>
+        <p:nvSpPr>
+          <p:cNvPr id="9" name="Shape 6"/>
           <p:cNvSpPr/>
           <p:nvPr/>
         </p:nvSpPr>
         <p:spPr>
           <a:xfrm>
-            <a:off x="3379394" y="1554480"/>
-            <a:ext cx="2602154" cy="2834640"/>
+            <a:off x="6233008" y="1508760"/>
+            <a:ext cx="5410048" cy="1371600"/>
           </a:xfrm>
           <a:prstGeom prst="roundRect">
             <a:avLst>
-              <a:gd name="adj" fmla="val 5622"/>
+              <a:gd name="adj" fmla="val 10667"/>
             </a:avLst>
           </a:prstGeom>
           <a:solidFill>
@@ -13569,18 +13096,18 @@
       </p:sp>
       <p:sp>
         <p:nvSpPr>
-          <p:cNvPr id="9" name="Shape 7"/>
+          <p:cNvPr id="10" name="Shape 7"/>
           <p:cNvSpPr/>
           <p:nvPr/>
         </p:nvSpPr>
         <p:spPr>
           <a:xfrm>
-            <a:off x="3653714" y="1847088"/>
-            <a:ext cx="914400" cy="384048"/>
+            <a:off x="6507328" y="1819656"/>
+            <a:ext cx="566928" cy="566928"/>
           </a:xfrm>
           <a:prstGeom prst="roundRect">
             <a:avLst>
-              <a:gd name="adj" fmla="val 50000"/>
+              <a:gd name="adj" fmla="val 28000"/>
             </a:avLst>
           </a:prstGeom>
           <a:solidFill>
@@ -13589,71 +13116,56 @@
           <a:ln/>
         </p:spPr>
       </p:sp>
-      <p:sp>
-        <p:nvSpPr>
-          <p:cNvPr id="10" name="Text 8"/>
-          <p:cNvSpPr txBox="1"/>
-          <p:nvPr/>
-        </p:nvSpPr>
-        <p:spPr>
-          <a:xfrm>
-            <a:off x="3653714" y="1847088"/>
-            <a:ext cx="914400" cy="384048"/>
-          </a:xfrm>
-          <a:prstGeom prst="rect">
-            <a:avLst/>
-          </a:prstGeom>
-          <a:noFill/>
-          <a:ln/>
-        </p:spPr>
-        <p:txBody>
-          <a:bodyPr wrap="square" lIns="0" tIns="0" rIns="0" bIns="0" rtlCol="0" anchor="ctr"/>
-          <a:lstStyle/>
-          <a:p>
-            <a:pPr algn="ctr" indent="0" marL="0">
-              <a:buNone/>
-            </a:pPr>
-            <a:r>
-              <a:rPr lang="en-US" sz="1300" b="1" dirty="0">
-                <a:solidFill>
-                  <a:srgbClr val="8F4014"/>
-                </a:solidFill>
-                <a:latin typeface="Arial" pitchFamily="34" charset="0"/>
-                <a:ea typeface="Arial" pitchFamily="34" charset="-122"/>
-                <a:cs typeface="Arial" pitchFamily="34" charset="-120"/>
-              </a:rPr>
-              <a:t>10 min</a:t>
-            </a:r>
-            <a:endParaRPr lang="en-US" sz="1300" dirty="0"/>
-          </a:p>
-        </p:txBody>
-      </p:sp>
-      <p:sp>
-        <p:nvSpPr>
-          <p:cNvPr id="11" name="Text 9"/>
-          <p:cNvSpPr txBox="1"/>
-          <p:nvPr/>
-        </p:nvSpPr>
-        <p:spPr>
-          <a:xfrm>
-            <a:off x="3653714" y="2450592"/>
-            <a:ext cx="2053514" cy="365760"/>
-          </a:xfrm>
-          <a:prstGeom prst="rect">
-            <a:avLst/>
-          </a:prstGeom>
-          <a:noFill/>
-          <a:ln/>
-        </p:spPr>
-        <p:txBody>
-          <a:bodyPr wrap="square" lIns="0" tIns="0" rIns="0" bIns="0" rtlCol="0" anchor="t"/>
-          <a:lstStyle/>
-          <a:p>
-            <a:pPr indent="0" marL="0">
-              <a:buNone/>
-            </a:pPr>
-            <a:r>
-              <a:rPr lang="en-US" sz="1800" b="1" dirty="0">
+      <p:pic>
+        <p:nvPicPr>
+          <p:cNvPr id="11" name="Image 1" descr="/var/folders/b7/tkzbyvzx72qcg9wb0t1jybvm0000gn/T/diaporama-4ZvB4P/icone-20.png">    </p:cNvPr>
+          <p:cNvPicPr>
+            <a:picLocks noChangeAspect="1"/>
+          </p:cNvPicPr>
+          <p:nvPr/>
+        </p:nvPicPr>
+        <p:blipFill>
+          <a:blip r:embed="rId2"/>
+          <a:stretch>
+            <a:fillRect/>
+          </a:stretch>
+        </p:blipFill>
+        <p:spPr>
+          <a:xfrm>
+            <a:off x="6643390" y="1955719"/>
+            <a:ext cx="294803" cy="294803"/>
+          </a:xfrm>
+          <a:prstGeom prst="rect">
+            <a:avLst/>
+          </a:prstGeom>
+        </p:spPr>
+      </p:pic>
+      <p:sp>
+        <p:nvSpPr>
+          <p:cNvPr id="12" name="Text 8"/>
+          <p:cNvSpPr txBox="1"/>
+          <p:nvPr/>
+        </p:nvSpPr>
+        <p:spPr>
+          <a:xfrm>
+            <a:off x="7284568" y="1746504"/>
+            <a:ext cx="4129888" cy="329184"/>
+          </a:xfrm>
+          <a:prstGeom prst="rect">
+            <a:avLst/>
+          </a:prstGeom>
+          <a:noFill/>
+          <a:ln/>
+        </p:spPr>
+        <p:txBody>
+          <a:bodyPr wrap="square" lIns="0" tIns="0" rIns="0" bIns="0" rtlCol="0" anchor="t"/>
+          <a:lstStyle/>
+          <a:p>
+            <a:pPr indent="0" marL="0">
+              <a:buNone/>
+            </a:pPr>
+            <a:r>
+              <a:rPr lang="en-US" sz="1700" b="1" dirty="0">
                 <a:solidFill>
                   <a:srgbClr val="1D1D1F"/>
                 </a:solidFill>
@@ -13661,38 +13173,38 @@
                 <a:ea typeface="Arial" pitchFamily="34" charset="-122"/>
                 <a:cs typeface="Arial" pitchFamily="34" charset="-120"/>
               </a:rPr>
-              <a:t>En direct</a:t>
-            </a:r>
-            <a:endParaRPr lang="en-US" sz="1800" dirty="0"/>
-          </a:p>
-        </p:txBody>
-      </p:sp>
-      <p:sp>
-        <p:nvSpPr>
-          <p:cNvPr id="12" name="Text 10"/>
-          <p:cNvSpPr txBox="1"/>
-          <p:nvPr/>
-        </p:nvSpPr>
-        <p:spPr>
-          <a:xfrm>
-            <a:off x="3653714" y="2880360"/>
-            <a:ext cx="2053514" cy="1417320"/>
-          </a:xfrm>
-          <a:prstGeom prst="rect">
-            <a:avLst/>
-          </a:prstGeom>
-          <a:noFill/>
-          <a:ln/>
-        </p:spPr>
-        <p:txBody>
-          <a:bodyPr wrap="square" lIns="0" tIns="0" rIns="0" bIns="0" rtlCol="0" anchor="t"/>
-          <a:lstStyle/>
-          <a:p>
-            <a:pPr indent="0" marL="0">
-              <a:buNone/>
-            </a:pPr>
-            <a:r>
-              <a:rPr lang="en-US" sz="1400" dirty="0">
+              <a:t>Protéger les élèves</a:t>
+            </a:r>
+            <a:endParaRPr lang="en-US" sz="1700" dirty="0"/>
+          </a:p>
+        </p:txBody>
+      </p:sp>
+      <p:sp>
+        <p:nvSpPr>
+          <p:cNvPr id="13" name="Text 9"/>
+          <p:cNvSpPr txBox="1"/>
+          <p:nvPr/>
+        </p:nvSpPr>
+        <p:spPr>
+          <a:xfrm>
+            <a:off x="7284568" y="2112264"/>
+            <a:ext cx="4129888" cy="685800"/>
+          </a:xfrm>
+          <a:prstGeom prst="rect">
+            <a:avLst/>
+          </a:prstGeom>
+          <a:noFill/>
+          <a:ln/>
+        </p:spPr>
+        <p:txBody>
+          <a:bodyPr wrap="square" lIns="0" tIns="0" rIns="0" bIns="0" rtlCol="0" anchor="t"/>
+          <a:lstStyle/>
+          <a:p>
+            <a:pPr indent="0" marL="0">
+              <a:buNone/>
+            </a:pPr>
+            <a:r>
+              <a:rPr lang="en-US" sz="1350" dirty="0">
                 <a:solidFill>
                   <a:srgbClr val="4A4A4F"/>
                 </a:solidFill>
@@ -13700,26 +13212,26 @@
                 <a:ea typeface="Arial" pitchFamily="34" charset="-122"/>
                 <a:cs typeface="Arial" pitchFamily="34" charset="-120"/>
               </a:rPr>
-              <a:t>Une démonstration sur une activité de la discipline du groupe, de la demande à l’aperçu.</a:t>
-            </a:r>
-            <a:endParaRPr lang="en-US" sz="1400" dirty="0"/>
-          </a:p>
-        </p:txBody>
-      </p:sp>
-      <p:sp>
-        <p:nvSpPr>
-          <p:cNvPr id="13" name="Shape 11"/>
+              <a:t>Aucun nom, aucune donnée personnelle, ni dans les champs, ni dans les documents.</a:t>
+            </a:r>
+            <a:endParaRPr lang="en-US" sz="1350" dirty="0"/>
+          </a:p>
+        </p:txBody>
+      </p:sp>
+      <p:sp>
+        <p:nvSpPr>
+          <p:cNvPr id="14" name="Shape 10"/>
           <p:cNvSpPr/>
           <p:nvPr/>
         </p:nvSpPr>
         <p:spPr>
           <a:xfrm>
-            <a:off x="6210148" y="1554480"/>
-            <a:ext cx="2602154" cy="2834640"/>
+            <a:off x="548640" y="3081528"/>
+            <a:ext cx="5410048" cy="1371600"/>
           </a:xfrm>
           <a:prstGeom prst="roundRect">
             <a:avLst>
-              <a:gd name="adj" fmla="val 5622"/>
+              <a:gd name="adj" fmla="val 10667"/>
             </a:avLst>
           </a:prstGeom>
           <a:solidFill>
@@ -13742,18 +13254,18 @@
       </p:sp>
       <p:sp>
         <p:nvSpPr>
-          <p:cNvPr id="14" name="Shape 12"/>
+          <p:cNvPr id="15" name="Shape 11"/>
           <p:cNvSpPr/>
           <p:nvPr/>
         </p:nvSpPr>
         <p:spPr>
           <a:xfrm>
-            <a:off x="6484468" y="1847088"/>
-            <a:ext cx="914400" cy="384048"/>
+            <a:off x="822960" y="3392424"/>
+            <a:ext cx="566928" cy="566928"/>
           </a:xfrm>
           <a:prstGeom prst="roundRect">
             <a:avLst>
-              <a:gd name="adj" fmla="val 50000"/>
+              <a:gd name="adj" fmla="val 28000"/>
             </a:avLst>
           </a:prstGeom>
           <a:solidFill>
@@ -13762,71 +13274,56 @@
           <a:ln/>
         </p:spPr>
       </p:sp>
-      <p:sp>
-        <p:nvSpPr>
-          <p:cNvPr id="15" name="Text 13"/>
-          <p:cNvSpPr txBox="1"/>
-          <p:nvPr/>
-        </p:nvSpPr>
-        <p:spPr>
-          <a:xfrm>
-            <a:off x="6484468" y="1847088"/>
-            <a:ext cx="914400" cy="384048"/>
-          </a:xfrm>
-          <a:prstGeom prst="rect">
-            <a:avLst/>
-          </a:prstGeom>
-          <a:noFill/>
-          <a:ln/>
-        </p:spPr>
-        <p:txBody>
-          <a:bodyPr wrap="square" lIns="0" tIns="0" rIns="0" bIns="0" rtlCol="0" anchor="ctr"/>
-          <a:lstStyle/>
-          <a:p>
-            <a:pPr algn="ctr" indent="0" marL="0">
-              <a:buNone/>
-            </a:pPr>
-            <a:r>
-              <a:rPr lang="en-US" sz="1300" b="1" dirty="0">
-                <a:solidFill>
-                  <a:srgbClr val="8F4014"/>
-                </a:solidFill>
-                <a:latin typeface="Arial" pitchFamily="34" charset="0"/>
-                <a:ea typeface="Arial" pitchFamily="34" charset="-122"/>
-                <a:cs typeface="Arial" pitchFamily="34" charset="-120"/>
-              </a:rPr>
-              <a:t>20 min</a:t>
-            </a:r>
-            <a:endParaRPr lang="en-US" sz="1300" dirty="0"/>
-          </a:p>
-        </p:txBody>
-      </p:sp>
-      <p:sp>
-        <p:nvSpPr>
-          <p:cNvPr id="16" name="Text 14"/>
-          <p:cNvSpPr txBox="1"/>
-          <p:nvPr/>
-        </p:nvSpPr>
-        <p:spPr>
-          <a:xfrm>
-            <a:off x="6484468" y="2450592"/>
-            <a:ext cx="2053514" cy="365760"/>
-          </a:xfrm>
-          <a:prstGeom prst="rect">
-            <a:avLst/>
-          </a:prstGeom>
-          <a:noFill/>
-          <a:ln/>
-        </p:spPr>
-        <p:txBody>
-          <a:bodyPr wrap="square" lIns="0" tIns="0" rIns="0" bIns="0" rtlCol="0" anchor="t"/>
-          <a:lstStyle/>
-          <a:p>
-            <a:pPr indent="0" marL="0">
-              <a:buNone/>
-            </a:pPr>
-            <a:r>
-              <a:rPr lang="en-US" sz="1800" b="1" dirty="0">
+      <p:pic>
+        <p:nvPicPr>
+          <p:cNvPr id="16" name="Image 2" descr="/var/folders/b7/tkzbyvzx72qcg9wb0t1jybvm0000gn/T/diaporama-4ZvB4P/icone-21.png">    </p:cNvPr>
+          <p:cNvPicPr>
+            <a:picLocks noChangeAspect="1"/>
+          </p:cNvPicPr>
+          <p:nvPr/>
+        </p:nvPicPr>
+        <p:blipFill>
+          <a:blip r:embed="rId3"/>
+          <a:stretch>
+            <a:fillRect/>
+          </a:stretch>
+        </p:blipFill>
+        <p:spPr>
+          <a:xfrm>
+            <a:off x="959023" y="3528487"/>
+            <a:ext cx="294803" cy="294803"/>
+          </a:xfrm>
+          <a:prstGeom prst="rect">
+            <a:avLst/>
+          </a:prstGeom>
+        </p:spPr>
+      </p:pic>
+      <p:sp>
+        <p:nvSpPr>
+          <p:cNvPr id="17" name="Text 12"/>
+          <p:cNvSpPr txBox="1"/>
+          <p:nvPr/>
+        </p:nvSpPr>
+        <p:spPr>
+          <a:xfrm>
+            <a:off x="1600200" y="3319272"/>
+            <a:ext cx="4129888" cy="329184"/>
+          </a:xfrm>
+          <a:prstGeom prst="rect">
+            <a:avLst/>
+          </a:prstGeom>
+          <a:noFill/>
+          <a:ln/>
+        </p:spPr>
+        <p:txBody>
+          <a:bodyPr wrap="square" lIns="0" tIns="0" rIns="0" bIns="0" rtlCol="0" anchor="t"/>
+          <a:lstStyle/>
+          <a:p>
+            <a:pPr indent="0" marL="0">
+              <a:buNone/>
+            </a:pPr>
+            <a:r>
+              <a:rPr lang="en-US" sz="1700" b="1" dirty="0">
                 <a:solidFill>
                   <a:srgbClr val="1D1D1F"/>
                 </a:solidFill>
@@ -13834,38 +13331,38 @@
                 <a:ea typeface="Arial" pitchFamily="34" charset="-122"/>
                 <a:cs typeface="Arial" pitchFamily="34" charset="-120"/>
               </a:rPr>
-              <a:t>L’atelier</a:t>
-            </a:r>
-            <a:endParaRPr lang="en-US" sz="1800" dirty="0"/>
-          </a:p>
-        </p:txBody>
-      </p:sp>
-      <p:sp>
-        <p:nvSpPr>
-          <p:cNvPr id="17" name="Text 15"/>
-          <p:cNvSpPr txBox="1"/>
-          <p:nvPr/>
-        </p:nvSpPr>
-        <p:spPr>
-          <a:xfrm>
-            <a:off x="6484468" y="2880360"/>
-            <a:ext cx="2053514" cy="1417320"/>
-          </a:xfrm>
-          <a:prstGeom prst="rect">
-            <a:avLst/>
-          </a:prstGeom>
-          <a:noFill/>
-          <a:ln/>
-        </p:spPr>
-        <p:txBody>
-          <a:bodyPr wrap="square" lIns="0" tIns="0" rIns="0" bIns="0" rtlCol="0" anchor="t"/>
-          <a:lstStyle/>
-          <a:p>
-            <a:pPr indent="0" marL="0">
-              <a:buNone/>
-            </a:pPr>
-            <a:r>
-              <a:rPr lang="en-US" sz="1400" dirty="0">
+              <a:t>Respecter les droits</a:t>
+            </a:r>
+            <a:endParaRPr lang="en-US" sz="1700" dirty="0"/>
+          </a:p>
+        </p:txBody>
+      </p:sp>
+      <p:sp>
+        <p:nvSpPr>
+          <p:cNvPr id="18" name="Text 13"/>
+          <p:cNvSpPr txBox="1"/>
+          <p:nvPr/>
+        </p:nvSpPr>
+        <p:spPr>
+          <a:xfrm>
+            <a:off x="1600200" y="3685032"/>
+            <a:ext cx="4129888" cy="685800"/>
+          </a:xfrm>
+          <a:prstGeom prst="rect">
+            <a:avLst/>
+          </a:prstGeom>
+          <a:noFill/>
+          <a:ln/>
+        </p:spPr>
+        <p:txBody>
+          <a:bodyPr wrap="square" lIns="0" tIns="0" rIns="0" bIns="0" rtlCol="0" anchor="t"/>
+          <a:lstStyle/>
+          <a:p>
+            <a:pPr indent="0" marL="0">
+              <a:buNone/>
+            </a:pPr>
+            <a:r>
+              <a:rPr lang="en-US" sz="1350" dirty="0">
                 <a:solidFill>
                   <a:srgbClr val="4A4A4F"/>
                 </a:solidFill>
@@ -13873,26 +13370,26 @@
                 <a:ea typeface="Arial" pitchFamily="34" charset="-122"/>
                 <a:cs typeface="Arial" pitchFamily="34" charset="-120"/>
               </a:rPr>
-              <a:t>Chacun prépare une activité pour sa classe, la relit, la corrige, puis la dépose sur un espace de test.</a:t>
-            </a:r>
-            <a:endParaRPr lang="en-US" sz="1400" dirty="0"/>
-          </a:p>
-        </p:txBody>
-      </p:sp>
-      <p:sp>
-        <p:nvSpPr>
-          <p:cNvPr id="18" name="Shape 16"/>
+              <a:t>Documents, images et textes utilisés doivent pouvoir l’être. En déposant sur la Sucrerie, vous le certifiez.</a:t>
+            </a:r>
+            <a:endParaRPr lang="en-US" sz="1350" dirty="0"/>
+          </a:p>
+        </p:txBody>
+      </p:sp>
+      <p:sp>
+        <p:nvSpPr>
+          <p:cNvPr id="19" name="Shape 14"/>
           <p:cNvSpPr/>
           <p:nvPr/>
         </p:nvSpPr>
         <p:spPr>
           <a:xfrm>
-            <a:off x="9040901" y="1554480"/>
-            <a:ext cx="2602154" cy="2834640"/>
+            <a:off x="6233008" y="3081528"/>
+            <a:ext cx="5410048" cy="1371600"/>
           </a:xfrm>
           <a:prstGeom prst="roundRect">
             <a:avLst>
-              <a:gd name="adj" fmla="val 5622"/>
+              <a:gd name="adj" fmla="val 10667"/>
             </a:avLst>
           </a:prstGeom>
           <a:solidFill>
@@ -13915,180 +13412,14 @@
       </p:sp>
       <p:sp>
         <p:nvSpPr>
-          <p:cNvPr id="19" name="Shape 17"/>
+          <p:cNvPr id="20" name="Shape 15"/>
           <p:cNvSpPr/>
           <p:nvPr/>
         </p:nvSpPr>
         <p:spPr>
           <a:xfrm>
-            <a:off x="9315221" y="1847088"/>
-            <a:ext cx="914400" cy="384048"/>
-          </a:xfrm>
-          <a:prstGeom prst="roundRect">
-            <a:avLst>
-              <a:gd name="adj" fmla="val 50000"/>
-            </a:avLst>
-          </a:prstGeom>
-          <a:solidFill>
-            <a:srgbClr val="FFECD4"/>
-          </a:solidFill>
-          <a:ln/>
-        </p:spPr>
-      </p:sp>
-      <p:sp>
-        <p:nvSpPr>
-          <p:cNvPr id="20" name="Text 18"/>
-          <p:cNvSpPr txBox="1"/>
-          <p:nvPr/>
-        </p:nvSpPr>
-        <p:spPr>
-          <a:xfrm>
-            <a:off x="9315221" y="1847088"/>
-            <a:ext cx="914400" cy="384048"/>
-          </a:xfrm>
-          <a:prstGeom prst="rect">
-            <a:avLst/>
-          </a:prstGeom>
-          <a:noFill/>
-          <a:ln/>
-        </p:spPr>
-        <p:txBody>
-          <a:bodyPr wrap="square" lIns="0" tIns="0" rIns="0" bIns="0" rtlCol="0" anchor="ctr"/>
-          <a:lstStyle/>
-          <a:p>
-            <a:pPr algn="ctr" indent="0" marL="0">
-              <a:buNone/>
-            </a:pPr>
-            <a:r>
-              <a:rPr lang="en-US" sz="1300" b="1" dirty="0">
-                <a:solidFill>
-                  <a:srgbClr val="8F4014"/>
-                </a:solidFill>
-                <a:latin typeface="Arial" pitchFamily="34" charset="0"/>
-                <a:ea typeface="Arial" pitchFamily="34" charset="-122"/>
-                <a:cs typeface="Arial" pitchFamily="34" charset="-120"/>
-              </a:rPr>
-              <a:t>10 min</a:t>
-            </a:r>
-            <a:endParaRPr lang="en-US" sz="1300" dirty="0"/>
-          </a:p>
-        </p:txBody>
-      </p:sp>
-      <p:sp>
-        <p:nvSpPr>
-          <p:cNvPr id="21" name="Text 19"/>
-          <p:cNvSpPr txBox="1"/>
-          <p:nvPr/>
-        </p:nvSpPr>
-        <p:spPr>
-          <a:xfrm>
-            <a:off x="9315221" y="2450592"/>
-            <a:ext cx="2053514" cy="365760"/>
-          </a:xfrm>
-          <a:prstGeom prst="rect">
-            <a:avLst/>
-          </a:prstGeom>
-          <a:noFill/>
-          <a:ln/>
-        </p:spPr>
-        <p:txBody>
-          <a:bodyPr wrap="square" lIns="0" tIns="0" rIns="0" bIns="0" rtlCol="0" anchor="t"/>
-          <a:lstStyle/>
-          <a:p>
-            <a:pPr indent="0" marL="0">
-              <a:buNone/>
-            </a:pPr>
-            <a:r>
-              <a:rPr lang="en-US" sz="1800" b="1" dirty="0">
-                <a:solidFill>
-                  <a:srgbClr val="1D1D1F"/>
-                </a:solidFill>
-                <a:latin typeface="Arial" pitchFamily="34" charset="0"/>
-                <a:ea typeface="Arial" pitchFamily="34" charset="-122"/>
-                <a:cs typeface="Arial" pitchFamily="34" charset="-120"/>
-              </a:rPr>
-              <a:t>Le retour collectif</a:t>
-            </a:r>
-            <a:endParaRPr lang="en-US" sz="1800" dirty="0"/>
-          </a:p>
-        </p:txBody>
-      </p:sp>
-      <p:sp>
-        <p:nvSpPr>
-          <p:cNvPr id="22" name="Text 20"/>
-          <p:cNvSpPr txBox="1"/>
-          <p:nvPr/>
-        </p:nvSpPr>
-        <p:spPr>
-          <a:xfrm>
-            <a:off x="9315221" y="2880360"/>
-            <a:ext cx="2053514" cy="1417320"/>
-          </a:xfrm>
-          <a:prstGeom prst="rect">
-            <a:avLst/>
-          </a:prstGeom>
-          <a:noFill/>
-          <a:ln/>
-        </p:spPr>
-        <p:txBody>
-          <a:bodyPr wrap="square" lIns="0" tIns="0" rIns="0" bIns="0" rtlCol="0" anchor="t"/>
-          <a:lstStyle/>
-          <a:p>
-            <a:pPr indent="0" marL="0">
-              <a:buNone/>
-            </a:pPr>
-            <a:r>
-              <a:rPr lang="en-US" sz="1400" dirty="0">
-                <a:solidFill>
-                  <a:srgbClr val="4A4A4F"/>
-                </a:solidFill>
-                <a:latin typeface="Arial" pitchFamily="34" charset="0"/>
-                <a:ea typeface="Arial" pitchFamily="34" charset="-122"/>
-                <a:cs typeface="Arial" pitchFamily="34" charset="-120"/>
-              </a:rPr>
-              <a:t>Ce que l’IA a bien fait, ce qu’il a fallu reprendre, et la place de la Sucrerie pour partager.</a:t>
-            </a:r>
-            <a:endParaRPr lang="en-US" sz="1400" dirty="0"/>
-          </a:p>
-        </p:txBody>
-      </p:sp>
-      <p:sp>
-        <p:nvSpPr>
-          <p:cNvPr id="23" name="Shape 21"/>
-          <p:cNvSpPr/>
-          <p:nvPr/>
-        </p:nvSpPr>
-        <p:spPr>
-          <a:xfrm>
-            <a:off x="548640" y="4709160"/>
-            <a:ext cx="11094415" cy="1143000"/>
-          </a:xfrm>
-          <a:prstGeom prst="roundRect">
-            <a:avLst>
-              <a:gd name="adj" fmla="val 12800"/>
-            </a:avLst>
-          </a:prstGeom>
-          <a:solidFill>
-            <a:srgbClr val="FFE8EE"/>
-          </a:solidFill>
-          <a:ln w="9525">
-            <a:solidFill>
-              <a:srgbClr val="EDDCE5"/>
-            </a:solidFill>
-            <a:prstDash val="solid"/>
-          </a:ln>
-        </p:spPr>
-      </p:sp>
-      <p:sp>
-        <p:nvSpPr>
-          <p:cNvPr id="24" name="Shape 22"/>
-          <p:cNvSpPr/>
-          <p:nvPr/>
-        </p:nvSpPr>
-        <p:spPr>
-          <a:xfrm>
-            <a:off x="822960" y="5010912"/>
-            <a:ext cx="548640" cy="548640"/>
+            <a:off x="6507328" y="3392424"/>
+            <a:ext cx="566928" cy="566928"/>
           </a:xfrm>
           <a:prstGeom prst="roundRect">
             <a:avLst>
@@ -14096,29 +13427,29 @@
             </a:avLst>
           </a:prstGeom>
           <a:solidFill>
-            <a:srgbClr val="FFFFFF"/>
+            <a:srgbClr val="FFECD4"/>
           </a:solidFill>
           <a:ln/>
         </p:spPr>
       </p:sp>
       <p:pic>
         <p:nvPicPr>
-          <p:cNvPr id="25" name="Image 0" descr="/var/folders/b7/tkzbyvzx72qcg9wb0t1jybvm0000gn/T/diaporama-zLbeHS/icone-25.png">    </p:cNvPr>
+          <p:cNvPr id="21" name="Image 3" descr="/var/folders/b7/tkzbyvzx72qcg9wb0t1jybvm0000gn/T/diaporama-4ZvB4P/icone-22.png">    </p:cNvPr>
           <p:cNvPicPr>
             <a:picLocks noChangeAspect="1"/>
           </p:cNvPicPr>
           <p:nvPr/>
         </p:nvPicPr>
         <p:blipFill>
-          <a:blip r:embed="rId1"/>
+          <a:blip r:embed="rId4"/>
           <a:stretch>
             <a:fillRect/>
           </a:stretch>
         </p:blipFill>
         <p:spPr>
           <a:xfrm>
-            <a:off x="954634" y="5142586"/>
-            <a:ext cx="285293" cy="285293"/>
+            <a:off x="6643390" y="3528487"/>
+            <a:ext cx="294803" cy="294803"/>
           </a:xfrm>
           <a:prstGeom prst="rect">
             <a:avLst/>
@@ -14127,14 +13458,277 @@
       </p:pic>
       <p:sp>
         <p:nvSpPr>
-          <p:cNvPr id="26" name="Text 23"/>
-          <p:cNvSpPr txBox="1"/>
-          <p:nvPr/>
-        </p:nvSpPr>
-        <p:spPr>
-          <a:xfrm>
-            <a:off x="1600200" y="4754880"/>
-            <a:ext cx="9768535" cy="1051560"/>
+          <p:cNvPr id="22" name="Text 16"/>
+          <p:cNvSpPr txBox="1"/>
+          <p:nvPr/>
+        </p:nvSpPr>
+        <p:spPr>
+          <a:xfrm>
+            <a:off x="7284568" y="3319272"/>
+            <a:ext cx="4129888" cy="329184"/>
+          </a:xfrm>
+          <a:prstGeom prst="rect">
+            <a:avLst/>
+          </a:prstGeom>
+          <a:noFill/>
+          <a:ln/>
+        </p:spPr>
+        <p:txBody>
+          <a:bodyPr wrap="square" lIns="0" tIns="0" rIns="0" bIns="0" rtlCol="0" anchor="t"/>
+          <a:lstStyle/>
+          <a:p>
+            <a:pPr indent="0" marL="0">
+              <a:buNone/>
+            </a:pPr>
+            <a:r>
+              <a:rPr lang="en-US" sz="1700" b="1" dirty="0">
+                <a:solidFill>
+                  <a:srgbClr val="1D1D1F"/>
+                </a:solidFill>
+                <a:latin typeface="Arial" pitchFamily="34" charset="0"/>
+                <a:ea typeface="Arial" pitchFamily="34" charset="-122"/>
+                <a:cs typeface="Arial" pitchFamily="34" charset="-120"/>
+              </a:rPr>
+              <a:t>Tester avant la classe</a:t>
+            </a:r>
+            <a:endParaRPr lang="en-US" sz="1700" dirty="0"/>
+          </a:p>
+        </p:txBody>
+      </p:sp>
+      <p:sp>
+        <p:nvSpPr>
+          <p:cNvPr id="23" name="Text 17"/>
+          <p:cNvSpPr txBox="1"/>
+          <p:nvPr/>
+        </p:nvSpPr>
+        <p:spPr>
+          <a:xfrm>
+            <a:off x="7284568" y="3685032"/>
+            <a:ext cx="4129888" cy="685800"/>
+          </a:xfrm>
+          <a:prstGeom prst="rect">
+            <a:avLst/>
+          </a:prstGeom>
+          <a:noFill/>
+          <a:ln/>
+        </p:spPr>
+        <p:txBody>
+          <a:bodyPr wrap="square" lIns="0" tIns="0" rIns="0" bIns="0" rtlCol="0" anchor="t"/>
+          <a:lstStyle/>
+          <a:p>
+            <a:pPr indent="0" marL="0">
+              <a:buNone/>
+            </a:pPr>
+            <a:r>
+              <a:rPr lang="en-US" sz="1350" dirty="0">
+                <a:solidFill>
+                  <a:srgbClr val="4A4A4F"/>
+                </a:solidFill>
+                <a:latin typeface="Arial" pitchFamily="34" charset="0"/>
+                <a:ea typeface="Arial" pitchFamily="34" charset="-122"/>
+                <a:cs typeface="Arial" pitchFamily="34" charset="-120"/>
+              </a:rPr>
+              <a:t>Importez d’abord dans un espace de test et jouez l’activité comme un élève.</a:t>
+            </a:r>
+            <a:endParaRPr lang="en-US" sz="1350" dirty="0"/>
+          </a:p>
+        </p:txBody>
+      </p:sp>
+      <p:sp>
+        <p:nvSpPr>
+          <p:cNvPr id="24" name="Shape 18"/>
+          <p:cNvSpPr/>
+          <p:nvPr/>
+        </p:nvSpPr>
+        <p:spPr>
+          <a:xfrm>
+            <a:off x="548640" y="4654296"/>
+            <a:ext cx="5410048" cy="1371600"/>
+          </a:xfrm>
+          <a:prstGeom prst="roundRect">
+            <a:avLst>
+              <a:gd name="adj" fmla="val 10667"/>
+            </a:avLst>
+          </a:prstGeom>
+          <a:solidFill>
+            <a:srgbClr val="FFFFFF"/>
+          </a:solidFill>
+          <a:ln w="9525">
+            <a:solidFill>
+              <a:srgbClr val="E5E5EA"/>
+            </a:solidFill>
+            <a:prstDash val="solid"/>
+          </a:ln>
+          <a:effectLst>
+            <a:outerShdw sx="100000" sy="100000" kx="0" ky="0" algn="bl" rotWithShape="0" blurRad="114300" dist="25400" dir="5400000">
+              <a:srgbClr val="000000">
+                <a:alpha val="9000"/>
+              </a:srgbClr>
+            </a:outerShdw>
+          </a:effectLst>
+        </p:spPr>
+      </p:sp>
+      <p:sp>
+        <p:nvSpPr>
+          <p:cNvPr id="25" name="Shape 19"/>
+          <p:cNvSpPr/>
+          <p:nvPr/>
+        </p:nvSpPr>
+        <p:spPr>
+          <a:xfrm>
+            <a:off x="822960" y="4965192"/>
+            <a:ext cx="566928" cy="566928"/>
+          </a:xfrm>
+          <a:prstGeom prst="roundRect">
+            <a:avLst>
+              <a:gd name="adj" fmla="val 28000"/>
+            </a:avLst>
+          </a:prstGeom>
+          <a:solidFill>
+            <a:srgbClr val="FFECD4"/>
+          </a:solidFill>
+          <a:ln/>
+        </p:spPr>
+      </p:sp>
+      <p:pic>
+        <p:nvPicPr>
+          <p:cNvPr id="26" name="Image 4" descr="/var/folders/b7/tkzbyvzx72qcg9wb0t1jybvm0000gn/T/diaporama-4ZvB4P/icone-23.png">    </p:cNvPr>
+          <p:cNvPicPr>
+            <a:picLocks noChangeAspect="1"/>
+          </p:cNvPicPr>
+          <p:nvPr/>
+        </p:nvPicPr>
+        <p:blipFill>
+          <a:blip r:embed="rId5"/>
+          <a:stretch>
+            <a:fillRect/>
+          </a:stretch>
+        </p:blipFill>
+        <p:spPr>
+          <a:xfrm>
+            <a:off x="959023" y="5101255"/>
+            <a:ext cx="294803" cy="294803"/>
+          </a:xfrm>
+          <a:prstGeom prst="rect">
+            <a:avLst/>
+          </a:prstGeom>
+        </p:spPr>
+      </p:pic>
+      <p:sp>
+        <p:nvSpPr>
+          <p:cNvPr id="27" name="Text 20"/>
+          <p:cNvSpPr txBox="1"/>
+          <p:nvPr/>
+        </p:nvSpPr>
+        <p:spPr>
+          <a:xfrm>
+            <a:off x="1600200" y="4892040"/>
+            <a:ext cx="4129888" cy="329184"/>
+          </a:xfrm>
+          <a:prstGeom prst="rect">
+            <a:avLst/>
+          </a:prstGeom>
+          <a:noFill/>
+          <a:ln/>
+        </p:spPr>
+        <p:txBody>
+          <a:bodyPr wrap="square" lIns="0" tIns="0" rIns="0" bIns="0" rtlCol="0" anchor="t"/>
+          <a:lstStyle/>
+          <a:p>
+            <a:pPr indent="0" marL="0">
+              <a:buNone/>
+            </a:pPr>
+            <a:r>
+              <a:rPr lang="en-US" sz="1700" b="1" dirty="0">
+                <a:solidFill>
+                  <a:srgbClr val="1D1D1F"/>
+                </a:solidFill>
+                <a:latin typeface="Arial" pitchFamily="34" charset="0"/>
+                <a:ea typeface="Arial" pitchFamily="34" charset="-122"/>
+                <a:cs typeface="Arial" pitchFamily="34" charset="-120"/>
+              </a:rPr>
+              <a:t>Signaler un problème</a:t>
+            </a:r>
+            <a:endParaRPr lang="en-US" sz="1700" dirty="0"/>
+          </a:p>
+        </p:txBody>
+      </p:sp>
+      <p:sp>
+        <p:nvSpPr>
+          <p:cNvPr id="28" name="Text 21"/>
+          <p:cNvSpPr txBox="1"/>
+          <p:nvPr/>
+        </p:nvSpPr>
+        <p:spPr>
+          <a:xfrm>
+            <a:off x="1600200" y="5257800"/>
+            <a:ext cx="4129888" cy="685800"/>
+          </a:xfrm>
+          <a:prstGeom prst="rect">
+            <a:avLst/>
+          </a:prstGeom>
+          <a:noFill/>
+          <a:ln/>
+        </p:spPr>
+        <p:txBody>
+          <a:bodyPr wrap="square" lIns="0" tIns="0" rIns="0" bIns="0" rtlCol="0" anchor="t"/>
+          <a:lstStyle/>
+          <a:p>
+            <a:pPr indent="0" marL="0">
+              <a:buNone/>
+            </a:pPr>
+            <a:r>
+              <a:rPr lang="en-US" sz="1350" dirty="0">
+                <a:solidFill>
+                  <a:srgbClr val="4A4A4F"/>
+                </a:solidFill>
+                <a:latin typeface="Arial" pitchFamily="34" charset="0"/>
+                <a:ea typeface="Arial" pitchFamily="34" charset="-122"/>
+                <a:cs typeface="Arial" pitchFamily="34" charset="-120"/>
+              </a:rPr>
+              <a:t>Un ticket sur la Forge ou un message sur Tchap, avec si possible le fichier JSON concerné.</a:t>
+            </a:r>
+            <a:endParaRPr lang="en-US" sz="1350" dirty="0"/>
+          </a:p>
+        </p:txBody>
+      </p:sp>
+      <p:sp>
+        <p:nvSpPr>
+          <p:cNvPr id="29" name="Shape 22"/>
+          <p:cNvSpPr/>
+          <p:nvPr/>
+        </p:nvSpPr>
+        <p:spPr>
+          <a:xfrm>
+            <a:off x="6233008" y="4654296"/>
+            <a:ext cx="5410048" cy="1371600"/>
+          </a:xfrm>
+          <a:prstGeom prst="roundRect">
+            <a:avLst>
+              <a:gd name="adj" fmla="val 10667"/>
+            </a:avLst>
+          </a:prstGeom>
+          <a:solidFill>
+            <a:srgbClr val="FFF7EC"/>
+          </a:solidFill>
+          <a:ln w="9525">
+            <a:solidFill>
+              <a:srgbClr val="EEE0CF"/>
+            </a:solidFill>
+            <a:prstDash val="solid"/>
+          </a:ln>
+        </p:spPr>
+      </p:sp>
+      <p:sp>
+        <p:nvSpPr>
+          <p:cNvPr id="30" name="Text 23"/>
+          <p:cNvSpPr txBox="1"/>
+          <p:nvPr/>
+        </p:nvSpPr>
+        <p:spPr>
+          <a:xfrm>
+            <a:off x="6507328" y="4654296"/>
+            <a:ext cx="4861408" cy="1371600"/>
           </a:xfrm>
           <a:prstGeom prst="rect">
             <a:avLst/>
@@ -14146,42 +13740,27 @@
           <a:bodyPr wrap="square" lIns="0" tIns="0" rIns="0" bIns="0" rtlCol="0" anchor="ctr"/>
           <a:lstStyle/>
           <a:p>
-            <a:pPr indent="0" marL="0">
-              <a:buNone/>
-            </a:pPr>
-            <a:r>
-              <a:rPr lang="en-US" sz="1500" b="1" dirty="0">
-                <a:solidFill>
-                  <a:srgbClr val="9A4F7E"/>
-                </a:solidFill>
-                <a:latin typeface="Arial" pitchFamily="34" charset="0"/>
-                <a:ea typeface="Arial" pitchFamily="34" charset="-122"/>
-                <a:cs typeface="Arial" pitchFamily="34" charset="-120"/>
-              </a:rPr>
-              <a:t>Variante en défi
-</a:t>
-            </a:r>
-            <a:pPr indent="0" marL="0">
-              <a:buNone/>
-            </a:pPr>
-            <a:r>
-              <a:rPr lang="en-US" sz="1350" dirty="0">
-                <a:solidFill>
-                  <a:srgbClr val="4A4A4F"/>
-                </a:solidFill>
-                <a:latin typeface="Arial" pitchFamily="34" charset="0"/>
-                <a:ea typeface="Arial" pitchFamily="34" charset="-122"/>
-                <a:cs typeface="Arial" pitchFamily="34" charset="-120"/>
-              </a:rPr>
-              <a:t>Chaque groupe prépare au moins trois activités sur un même thème et les rassemble dans une collection sur la Sucrerie, que les autres groupes découvrent ensuite.</a:t>
-            </a:r>
-            <a:endParaRPr lang="en-US" sz="1500" dirty="0"/>
-          </a:p>
-        </p:txBody>
-      </p:sp>
-      <p:sp>
-        <p:nvSpPr>
-          <p:cNvPr id="27" name="Text 24"/>
+            <a:pPr algn="ctr" indent="0" marL="0">
+              <a:buNone/>
+            </a:pPr>
+            <a:r>
+              <a:rPr lang="en-US" sz="2200" b="1" dirty="0">
+                <a:solidFill>
+                  <a:srgbClr val="8F4014"/>
+                </a:solidFill>
+                <a:latin typeface="Arial" pitchFamily="34" charset="0"/>
+                <a:ea typeface="Arial" pitchFamily="34" charset="-122"/>
+                <a:cs typeface="Arial" pitchFamily="34" charset="-120"/>
+              </a:rPr>
+              <a:t>L’IA propose, vous décidez.</a:t>
+            </a:r>
+            <a:endParaRPr lang="en-US" sz="2200" dirty="0"/>
+          </a:p>
+        </p:txBody>
+      </p:sp>
+      <p:sp>
+        <p:nvSpPr>
+          <p:cNvPr id="31" name="Text 24"/>
           <p:cNvSpPr txBox="1"/>
           <p:nvPr/>
         </p:nvSpPr>
@@ -14212,7 +13791,7 @@
                 <a:ea typeface="Arial" pitchFamily="34" charset="-122"/>
                 <a:cs typeface="Arial" pitchFamily="34" charset="-120"/>
               </a:rPr>
-              <a:t>Caramel v7.0.1 · Présentation · septembre 2026</a:t>
+              <a:t>Caramel v7.1.0 · Présentation · septembre 2026</a:t>
             </a:r>
             <a:endParaRPr lang="en-US" sz="900" dirty="0"/>
           </a:p>
@@ -14220,7 +13799,7 @@
       </p:sp>
       <p:sp>
         <p:nvSpPr>
-          <p:cNvPr id="28" name="Text 25"/>
+          <p:cNvPr id="32" name="Text 25"/>
           <p:cNvSpPr txBox="1"/>
           <p:nvPr/>
         </p:nvSpPr>
@@ -14251,7 +13830,7 @@
                 <a:ea typeface="Arial" pitchFamily="34" charset="-122"/>
                 <a:cs typeface="Arial" pitchFamily="34" charset="-120"/>
               </a:rPr>
-              <a:t>22 / 24</a:t>
+              <a:t>22 / 25</a:t>
             </a:r>
             <a:endParaRPr lang="en-US" sz="900" dirty="0"/>
           </a:p>
@@ -14322,7 +13901,7 @@
                 <a:ea typeface="Arial" pitchFamily="34" charset="-122"/>
                 <a:cs typeface="Arial" pitchFamily="34" charset="-120"/>
               </a:rPr>
-              <a:t>Liens utiles</a:t>
+              <a:t>Proposer un atelier de 45 minutes</a:t>
             </a:r>
             <a:endParaRPr lang="en-US" sz="3000" dirty="0"/>
           </a:p>
@@ -14336,12 +13915,12 @@
         </p:nvSpPr>
         <p:spPr>
           <a:xfrm>
-            <a:off x="548640" y="1417320"/>
-            <a:ext cx="7589520" cy="4434840"/>
+            <a:off x="548640" y="1554480"/>
+            <a:ext cx="2602154" cy="2834640"/>
           </a:xfrm>
           <a:prstGeom prst="roundRect">
             <a:avLst>
-              <a:gd name="adj" fmla="val 3299"/>
+              <a:gd name="adj" fmla="val 5622"/>
             </a:avLst>
           </a:prstGeom>
           <a:solidFill>
@@ -14370,12 +13949,12 @@
         </p:nvSpPr>
         <p:spPr>
           <a:xfrm>
-            <a:off x="822960" y="1600200"/>
-            <a:ext cx="402336" cy="402336"/>
+            <a:off x="822960" y="1847088"/>
+            <a:ext cx="914400" cy="384048"/>
           </a:xfrm>
           <a:prstGeom prst="roundRect">
             <a:avLst>
-              <a:gd name="adj" fmla="val 28000"/>
+              <a:gd name="adj" fmla="val 50000"/>
             </a:avLst>
           </a:prstGeom>
           <a:solidFill>
@@ -14384,889 +13963,137 @@
           <a:ln/>
         </p:spPr>
       </p:sp>
-      <p:pic>
-        <p:nvPicPr>
-          <p:cNvPr id="5" name="Image 0" descr="/var/folders/b7/tkzbyvzx72qcg9wb0t1jybvm0000gn/T/diaporama-zLbeHS/icone-33.png">    </p:cNvPr>
-          <p:cNvPicPr>
-            <a:picLocks noChangeAspect="1"/>
-          </p:cNvPicPr>
-          <p:nvPr/>
-        </p:nvPicPr>
-        <p:blipFill>
-          <a:blip r:embed="rId1"/>
-          <a:stretch>
-            <a:fillRect/>
-          </a:stretch>
-        </p:blipFill>
-        <p:spPr>
-          <a:xfrm>
-            <a:off x="919521" y="1696761"/>
-            <a:ext cx="209215" cy="209215"/>
-          </a:xfrm>
-          <a:prstGeom prst="rect">
-            <a:avLst/>
-          </a:prstGeom>
-        </p:spPr>
-      </p:pic>
-      <p:sp>
-        <p:nvSpPr>
-          <p:cNvPr id="6" name="Text 3"/>
-          <p:cNvSpPr txBox="1"/>
-          <p:nvPr/>
-        </p:nvSpPr>
-        <p:spPr>
-          <a:xfrm>
-            <a:off x="1417320" y="1545336"/>
-            <a:ext cx="6492240" cy="475488"/>
-          </a:xfrm>
-          <a:prstGeom prst="rect">
-            <a:avLst/>
-          </a:prstGeom>
-          <a:noFill/>
-          <a:ln/>
-        </p:spPr>
-        <p:txBody>
-          <a:bodyPr wrap="square" lIns="0" tIns="0" rIns="0" bIns="0" rtlCol="0" anchor="t"/>
-          <a:lstStyle/>
-          <a:p>
-            <a:pPr indent="0" marL="0">
+      <p:sp>
+        <p:nvSpPr>
+          <p:cNvPr id="5" name="Text 3"/>
+          <p:cNvSpPr txBox="1"/>
+          <p:nvPr/>
+        </p:nvSpPr>
+        <p:spPr>
+          <a:xfrm>
+            <a:off x="822960" y="1847088"/>
+            <a:ext cx="914400" cy="384048"/>
+          </a:xfrm>
+          <a:prstGeom prst="rect">
+            <a:avLst/>
+          </a:prstGeom>
+          <a:noFill/>
+          <a:ln/>
+        </p:spPr>
+        <p:txBody>
+          <a:bodyPr wrap="square" lIns="0" tIns="0" rIns="0" bIns="0" rtlCol="0" anchor="ctr"/>
+          <a:lstStyle/>
+          <a:p>
+            <a:pPr algn="ctr" indent="0" marL="0">
               <a:buNone/>
             </a:pPr>
             <a:r>
               <a:rPr lang="en-US" sz="1300" b="1" dirty="0">
                 <a:solidFill>
+                  <a:srgbClr val="8F4014"/>
+                </a:solidFill>
+                <a:latin typeface="Arial" pitchFamily="34" charset="0"/>
+                <a:ea typeface="Arial" pitchFamily="34" charset="-122"/>
+                <a:cs typeface="Arial" pitchFamily="34" charset="-120"/>
+              </a:rPr>
+              <a:t>5 min</a:t>
+            </a:r>
+            <a:endParaRPr lang="en-US" sz="1300" dirty="0"/>
+          </a:p>
+        </p:txBody>
+      </p:sp>
+      <p:sp>
+        <p:nvSpPr>
+          <p:cNvPr id="6" name="Text 4"/>
+          <p:cNvSpPr txBox="1"/>
+          <p:nvPr/>
+        </p:nvSpPr>
+        <p:spPr>
+          <a:xfrm>
+            <a:off x="822960" y="2450592"/>
+            <a:ext cx="2053514" cy="365760"/>
+          </a:xfrm>
+          <a:prstGeom prst="rect">
+            <a:avLst/>
+          </a:prstGeom>
+          <a:noFill/>
+          <a:ln/>
+        </p:spPr>
+        <p:txBody>
+          <a:bodyPr wrap="square" lIns="0" tIns="0" rIns="0" bIns="0" rtlCol="0" anchor="t"/>
+          <a:lstStyle/>
+          <a:p>
+            <a:pPr indent="0" marL="0">
+              <a:buNone/>
+            </a:pPr>
+            <a:r>
+              <a:rPr lang="en-US" sz="1800" b="1" dirty="0">
+                <a:solidFill>
                   <a:srgbClr val="1D1D1F"/>
                 </a:solidFill>
                 <a:latin typeface="Arial" pitchFamily="34" charset="0"/>
                 <a:ea typeface="Arial" pitchFamily="34" charset="-122"/>
                 <a:cs typeface="Arial" pitchFamily="34" charset="-120"/>
               </a:rPr>
-              <a:t>Caramel
-</a:t>
-            </a:r>
-            <a:pPr indent="0" marL="0">
-              <a:buNone/>
-            </a:pPr>
-            <a:r>
-              <a:rPr lang="en-US" sz="1100" u="sng" dirty="0">
-                <a:solidFill>
-                  <a:srgbClr val="0056B3"/>
-                </a:solidFill>
-                <a:latin typeface="Arial" pitchFamily="34" charset="0"/>
-                <a:ea typeface="Arial" pitchFamily="34" charset="-122"/>
-                <a:cs typeface="Arial" pitchFamily="34" charset="-120"/>
-                <a:hlinkClick r:id="rId2" invalidUrl="" action="" tgtFrame="" tooltip="https://caramel.forge.apps.education.fr/" history="1" highlightClick="0" endSnd="0">
-                  <a:extLst>
-                    <a:ext uri="{A12FA001-AC4F-418D-AE19-62706E023703}">
-                      <ahyp:hlinkClr xmlns:ahyp="http://schemas.microsoft.com/office/drawing/2018/hyperlinkcolor" val="tx"/>
-                    </a:ext>
-                  </a:extLst>
-                </a:hlinkClick>
-              </a:rPr>
-              <a:t>caramel.forge.apps.education.fr</a:t>
-            </a:r>
-            <a:endParaRPr lang="en-US" sz="1300" dirty="0"/>
-          </a:p>
-        </p:txBody>
-      </p:sp>
-      <p:sp>
-        <p:nvSpPr>
-          <p:cNvPr id="7" name="Shape 4"/>
+              <a:t>La vidéo</a:t>
+            </a:r>
+            <a:endParaRPr lang="en-US" sz="1800" dirty="0"/>
+          </a:p>
+        </p:txBody>
+      </p:sp>
+      <p:sp>
+        <p:nvSpPr>
+          <p:cNvPr id="7" name="Text 5"/>
+          <p:cNvSpPr txBox="1"/>
+          <p:nvPr/>
+        </p:nvSpPr>
+        <p:spPr>
+          <a:xfrm>
+            <a:off x="822960" y="2880360"/>
+            <a:ext cx="2053514" cy="1417320"/>
+          </a:xfrm>
+          <a:prstGeom prst="rect">
+            <a:avLst/>
+          </a:prstGeom>
+          <a:noFill/>
+          <a:ln/>
+        </p:spPr>
+        <p:txBody>
+          <a:bodyPr wrap="square" lIns="0" tIns="0" rIns="0" bIns="0" rtlCol="0" anchor="t"/>
+          <a:lstStyle/>
+          <a:p>
+            <a:pPr indent="0" marL="0">
+              <a:buNone/>
+            </a:pPr>
+            <a:r>
+              <a:rPr lang="en-US" sz="1400" dirty="0">
+                <a:solidFill>
+                  <a:srgbClr val="4A4A4F"/>
+                </a:solidFill>
+                <a:latin typeface="Arial" pitchFamily="34" charset="0"/>
+                <a:ea typeface="Arial" pitchFamily="34" charset="-122"/>
+                <a:cs typeface="Arial" pitchFamily="34" charset="-120"/>
+              </a:rPr>
+              <a:t>La présentation de Caramel 7 pour poser le décor : ce que l’outil prépare, et ses limites.</a:t>
+            </a:r>
+            <a:endParaRPr lang="en-US" sz="1400" dirty="0"/>
+          </a:p>
+        </p:txBody>
+      </p:sp>
+      <p:sp>
+        <p:nvSpPr>
+          <p:cNvPr id="8" name="Shape 6"/>
           <p:cNvSpPr/>
           <p:nvPr/>
         </p:nvSpPr>
         <p:spPr>
           <a:xfrm>
-            <a:off x="822960" y="2121408"/>
-            <a:ext cx="402336" cy="402336"/>
+            <a:off x="3379394" y="1554480"/>
+            <a:ext cx="2602154" cy="2834640"/>
           </a:xfrm>
           <a:prstGeom prst="roundRect">
             <a:avLst>
-              <a:gd name="adj" fmla="val 28000"/>
-            </a:avLst>
-          </a:prstGeom>
-          <a:solidFill>
-            <a:srgbClr val="FFECD4"/>
-          </a:solidFill>
-          <a:ln/>
-        </p:spPr>
-      </p:sp>
-      <p:pic>
-        <p:nvPicPr>
-          <p:cNvPr id="8" name="Image 1" descr="/var/folders/b7/tkzbyvzx72qcg9wb0t1jybvm0000gn/T/diaporama-zLbeHS/icone-32.png">    </p:cNvPr>
-          <p:cNvPicPr>
-            <a:picLocks noChangeAspect="1"/>
-          </p:cNvPicPr>
-          <p:nvPr/>
-        </p:nvPicPr>
-        <p:blipFill>
-          <a:blip r:embed="rId3"/>
-          <a:stretch>
-            <a:fillRect/>
-          </a:stretch>
-        </p:blipFill>
-        <p:spPr>
-          <a:xfrm>
-            <a:off x="919521" y="2217969"/>
-            <a:ext cx="209215" cy="209215"/>
-          </a:xfrm>
-          <a:prstGeom prst="rect">
-            <a:avLst/>
-          </a:prstGeom>
-        </p:spPr>
-      </p:pic>
-      <p:sp>
-        <p:nvSpPr>
-          <p:cNvPr id="9" name="Text 5"/>
-          <p:cNvSpPr txBox="1"/>
-          <p:nvPr/>
-        </p:nvSpPr>
-        <p:spPr>
-          <a:xfrm>
-            <a:off x="1417320" y="2066544"/>
-            <a:ext cx="6492240" cy="475488"/>
-          </a:xfrm>
-          <a:prstGeom prst="rect">
-            <a:avLst/>
-          </a:prstGeom>
-          <a:noFill/>
-          <a:ln/>
-        </p:spPr>
-        <p:txBody>
-          <a:bodyPr wrap="square" lIns="0" tIns="0" rIns="0" bIns="0" rtlCol="0" anchor="t"/>
-          <a:lstStyle/>
-          <a:p>
-            <a:pPr indent="0" marL="0">
-              <a:buNone/>
-            </a:pPr>
-            <a:r>
-              <a:rPr lang="en-US" sz="1300" b="1" dirty="0">
-                <a:solidFill>
-                  <a:srgbClr val="1D1D1F"/>
-                </a:solidFill>
-                <a:latin typeface="Arial" pitchFamily="34" charset="0"/>
-                <a:ea typeface="Arial" pitchFamily="34" charset="-122"/>
-                <a:cs typeface="Arial" pitchFamily="34" charset="-120"/>
-              </a:rPr>
-              <a:t>Découvrir Caramel : vidéo, diaporama, activités à essayer
-</a:t>
-            </a:r>
-            <a:pPr indent="0" marL="0">
-              <a:buNone/>
-            </a:pPr>
-            <a:r>
-              <a:rPr lang="en-US" sz="1100" u="sng" dirty="0">
-                <a:solidFill>
-                  <a:srgbClr val="0056B3"/>
-                </a:solidFill>
-                <a:latin typeface="Arial" pitchFamily="34" charset="0"/>
-                <a:ea typeface="Arial" pitchFamily="34" charset="-122"/>
-                <a:cs typeface="Arial" pitchFamily="34" charset="-120"/>
-                <a:hlinkClick r:id="rId4" invalidUrl="" action="" tgtFrame="" tooltip="https://caramel.forge.apps.education.fr/decouvrir/" history="1" highlightClick="0" endSnd="0">
-                  <a:extLst>
-                    <a:ext uri="{A12FA001-AC4F-418D-AE19-62706E023703}">
-                      <ahyp:hlinkClr xmlns:ahyp="http://schemas.microsoft.com/office/drawing/2018/hyperlinkcolor" val="tx"/>
-                    </a:ext>
-                  </a:extLst>
-                </a:hlinkClick>
-              </a:rPr>
-              <a:t>caramel.forge.apps.education.fr/decouvrir</a:t>
-            </a:r>
-            <a:endParaRPr lang="en-US" sz="1300" dirty="0"/>
-          </a:p>
-        </p:txBody>
-      </p:sp>
-      <p:sp>
-        <p:nvSpPr>
-          <p:cNvPr id="10" name="Shape 6"/>
-          <p:cNvSpPr/>
-          <p:nvPr/>
-        </p:nvSpPr>
-        <p:spPr>
-          <a:xfrm>
-            <a:off x="822960" y="2642616"/>
-            <a:ext cx="402336" cy="402336"/>
-          </a:xfrm>
-          <a:prstGeom prst="roundRect">
-            <a:avLst>
-              <a:gd name="adj" fmla="val 28000"/>
-            </a:avLst>
-          </a:prstGeom>
-          <a:solidFill>
-            <a:srgbClr val="FFE8EE"/>
-          </a:solidFill>
-          <a:ln/>
-        </p:spPr>
-      </p:sp>
-      <p:pic>
-        <p:nvPicPr>
-          <p:cNvPr id="11" name="Image 2" descr="/var/folders/b7/tkzbyvzx72qcg9wb0t1jybvm0000gn/T/diaporama-zLbeHS/icone-18.png">    </p:cNvPr>
-          <p:cNvPicPr>
-            <a:picLocks noChangeAspect="1"/>
-          </p:cNvPicPr>
-          <p:nvPr/>
-        </p:nvPicPr>
-        <p:blipFill>
-          <a:blip r:embed="rId5"/>
-          <a:stretch>
-            <a:fillRect/>
-          </a:stretch>
-        </p:blipFill>
-        <p:spPr>
-          <a:xfrm>
-            <a:off x="919521" y="2739177"/>
-            <a:ext cx="209215" cy="209215"/>
-          </a:xfrm>
-          <a:prstGeom prst="rect">
-            <a:avLst/>
-          </a:prstGeom>
-        </p:spPr>
-      </p:pic>
-      <p:sp>
-        <p:nvSpPr>
-          <p:cNvPr id="12" name="Text 7"/>
-          <p:cNvSpPr txBox="1"/>
-          <p:nvPr/>
-        </p:nvSpPr>
-        <p:spPr>
-          <a:xfrm>
-            <a:off x="1417320" y="2587752"/>
-            <a:ext cx="6492240" cy="475488"/>
-          </a:xfrm>
-          <a:prstGeom prst="rect">
-            <a:avLst/>
-          </a:prstGeom>
-          <a:noFill/>
-          <a:ln/>
-        </p:spPr>
-        <p:txBody>
-          <a:bodyPr wrap="square" lIns="0" tIns="0" rIns="0" bIns="0" rtlCol="0" anchor="t"/>
-          <a:lstStyle/>
-          <a:p>
-            <a:pPr indent="0" marL="0">
-              <a:buNone/>
-            </a:pPr>
-            <a:r>
-              <a:rPr lang="en-US" sz="1300" b="1" dirty="0">
-                <a:solidFill>
-                  <a:srgbClr val="1D1D1F"/>
-                </a:solidFill>
-                <a:latin typeface="Arial" pitchFamily="34" charset="0"/>
-                <a:ea typeface="Arial" pitchFamily="34" charset="-122"/>
-                <a:cs typeface="Arial" pitchFamily="34" charset="-120"/>
-              </a:rPr>
-              <a:t>La Sucrerie, et son salon Tchap
-</a:t>
-            </a:r>
-            <a:pPr indent="0" marL="0">
-              <a:buNone/>
-            </a:pPr>
-            <a:r>
-              <a:rPr lang="en-US" sz="1100" u="sng" dirty="0">
-                <a:solidFill>
-                  <a:srgbClr val="0056B3"/>
-                </a:solidFill>
-                <a:latin typeface="Arial" pitchFamily="34" charset="0"/>
-                <a:ea typeface="Arial" pitchFamily="34" charset="-122"/>
-                <a:cs typeface="Arial" pitchFamily="34" charset="-120"/>
-                <a:hlinkClick r:id="rId6" invalidUrl="" action="" tgtFrame="" tooltip="https://sucrerie.forge.apps.education.fr/" history="1" highlightClick="0" endSnd="0">
-                  <a:extLst>
-                    <a:ext uri="{A12FA001-AC4F-418D-AE19-62706E023703}">
-                      <ahyp:hlinkClr xmlns:ahyp="http://schemas.microsoft.com/office/drawing/2018/hyperlinkcolor" val="tx"/>
-                    </a:ext>
-                  </a:extLst>
-                </a:hlinkClick>
-              </a:rPr>
-              <a:t>sucrerie.forge.apps.education.fr</a:t>
-            </a:r>
-            <a:pPr indent="0" marL="0">
-              <a:buNone/>
-            </a:pPr>
-            <a:r>
-              <a:rPr lang="en-US" sz="1100" dirty="0">
-                <a:solidFill>
-                  <a:srgbClr val="6E6E73"/>
-                </a:solidFill>
-                <a:latin typeface="Arial" pitchFamily="34" charset="0"/>
-                <a:ea typeface="Arial" pitchFamily="34" charset="-122"/>
-                <a:cs typeface="Arial" pitchFamily="34" charset="-120"/>
-              </a:rPr>
-              <a:t>  ·  </a:t>
-            </a:r>
-            <a:pPr indent="0" marL="0">
-              <a:buNone/>
-            </a:pPr>
-            <a:r>
-              <a:rPr lang="en-US" sz="1100" u="sng" dirty="0">
-                <a:solidFill>
-                  <a:srgbClr val="0056B3"/>
-                </a:solidFill>
-                <a:latin typeface="Arial" pitchFamily="34" charset="0"/>
-                <a:ea typeface="Arial" pitchFamily="34" charset="-122"/>
-                <a:cs typeface="Arial" pitchFamily="34" charset="-120"/>
-                <a:hlinkClick r:id="rId7" invalidUrl="" action="" tgtFrame="" tooltip="https://edurl.fr/sucrerie-tchap" history="1" highlightClick="0" endSnd="0">
-                  <a:extLst>
-                    <a:ext uri="{A12FA001-AC4F-418D-AE19-62706E023703}">
-                      <ahyp:hlinkClr xmlns:ahyp="http://schemas.microsoft.com/office/drawing/2018/hyperlinkcolor" val="tx"/>
-                    </a:ext>
-                  </a:extLst>
-                </a:hlinkClick>
-              </a:rPr>
-              <a:t>edurl.fr/sucrerie-tchap</a:t>
-            </a:r>
-            <a:endParaRPr lang="en-US" sz="1300" dirty="0"/>
-          </a:p>
-        </p:txBody>
-      </p:sp>
-      <p:sp>
-        <p:nvSpPr>
-          <p:cNvPr id="13" name="Shape 8"/>
-          <p:cNvSpPr/>
-          <p:nvPr/>
-        </p:nvSpPr>
-        <p:spPr>
-          <a:xfrm>
-            <a:off x="822960" y="3163824"/>
-            <a:ext cx="402336" cy="402336"/>
-          </a:xfrm>
-          <a:prstGeom prst="roundRect">
-            <a:avLst>
-              <a:gd name="adj" fmla="val 28000"/>
-            </a:avLst>
-          </a:prstGeom>
-          <a:solidFill>
-            <a:srgbClr val="FFECD4"/>
-          </a:solidFill>
-          <a:ln/>
-        </p:spPr>
-      </p:sp>
-      <p:pic>
-        <p:nvPicPr>
-          <p:cNvPr id="14" name="Image 3" descr="/var/folders/b7/tkzbyvzx72qcg9wb0t1jybvm0000gn/T/diaporama-zLbeHS/icone-26.png">    </p:cNvPr>
-          <p:cNvPicPr>
-            <a:picLocks noChangeAspect="1"/>
-          </p:cNvPicPr>
-          <p:nvPr/>
-        </p:nvPicPr>
-        <p:blipFill>
-          <a:blip r:embed="rId8"/>
-          <a:stretch>
-            <a:fillRect/>
-          </a:stretch>
-        </p:blipFill>
-        <p:spPr>
-          <a:xfrm>
-            <a:off x="919521" y="3260385"/>
-            <a:ext cx="209215" cy="209215"/>
-          </a:xfrm>
-          <a:prstGeom prst="rect">
-            <a:avLst/>
-          </a:prstGeom>
-        </p:spPr>
-      </p:pic>
-      <p:sp>
-        <p:nvSpPr>
-          <p:cNvPr id="15" name="Text 9"/>
-          <p:cNvSpPr txBox="1"/>
-          <p:nvPr/>
-        </p:nvSpPr>
-        <p:spPr>
-          <a:xfrm>
-            <a:off x="1417320" y="3108960"/>
-            <a:ext cx="6492240" cy="475488"/>
-          </a:xfrm>
-          <a:prstGeom prst="rect">
-            <a:avLst/>
-          </a:prstGeom>
-          <a:noFill/>
-          <a:ln/>
-        </p:spPr>
-        <p:txBody>
-          <a:bodyPr wrap="square" lIns="0" tIns="0" rIns="0" bIns="0" rtlCol="0" anchor="t"/>
-          <a:lstStyle/>
-          <a:p>
-            <a:pPr indent="0" marL="0">
-              <a:buNone/>
-            </a:pPr>
-            <a:r>
-              <a:rPr lang="en-US" sz="1300" b="1" dirty="0">
-                <a:solidFill>
-                  <a:srgbClr val="1D1D1F"/>
-                </a:solidFill>
-                <a:latin typeface="Arial" pitchFamily="34" charset="0"/>
-                <a:ea typeface="Arial" pitchFamily="34" charset="-122"/>
-                <a:cs typeface="Arial" pitchFamily="34" charset="-120"/>
-              </a:rPr>
-              <a:t>Le wiki : le guide complet
-</a:t>
-            </a:r>
-            <a:pPr indent="0" marL="0">
-              <a:buNone/>
-            </a:pPr>
-            <a:r>
-              <a:rPr lang="en-US" sz="1100" u="sng" dirty="0">
-                <a:solidFill>
-                  <a:srgbClr val="0056B3"/>
-                </a:solidFill>
-                <a:latin typeface="Arial" pitchFamily="34" charset="0"/>
-                <a:ea typeface="Arial" pitchFamily="34" charset="-122"/>
-                <a:cs typeface="Arial" pitchFamily="34" charset="-120"/>
-                <a:hlinkClick r:id="rId9" invalidUrl="" action="" tgtFrame="" tooltip="https://forge.apps.education.fr/caramel/caramel/-/wikis/home" history="1" highlightClick="0" endSnd="0">
-                  <a:extLst>
-                    <a:ext uri="{A12FA001-AC4F-418D-AE19-62706E023703}">
-                      <ahyp:hlinkClr xmlns:ahyp="http://schemas.microsoft.com/office/drawing/2018/hyperlinkcolor" val="tx"/>
-                    </a:ext>
-                  </a:extLst>
-                </a:hlinkClick>
-              </a:rPr>
-              <a:t>forge.apps.education.fr/caramel/caramel/-/wikis/home</a:t>
-            </a:r>
-            <a:endParaRPr lang="en-US" sz="1300" dirty="0"/>
-          </a:p>
-        </p:txBody>
-      </p:sp>
-      <p:sp>
-        <p:nvSpPr>
-          <p:cNvPr id="16" name="Shape 10"/>
-          <p:cNvSpPr/>
-          <p:nvPr/>
-        </p:nvSpPr>
-        <p:spPr>
-          <a:xfrm>
-            <a:off x="822960" y="3685032"/>
-            <a:ext cx="402336" cy="402336"/>
-          </a:xfrm>
-          <a:prstGeom prst="roundRect">
-            <a:avLst>
-              <a:gd name="adj" fmla="val 28000"/>
-            </a:avLst>
-          </a:prstGeom>
-          <a:solidFill>
-            <a:srgbClr val="FFECD4"/>
-          </a:solidFill>
-          <a:ln/>
-        </p:spPr>
-      </p:sp>
-      <p:pic>
-        <p:nvPicPr>
-          <p:cNvPr id="17" name="Image 4" descr="/var/folders/b7/tkzbyvzx72qcg9wb0t1jybvm0000gn/T/diaporama-zLbeHS/icone-27.png">    </p:cNvPr>
-          <p:cNvPicPr>
-            <a:picLocks noChangeAspect="1"/>
-          </p:cNvPicPr>
-          <p:nvPr/>
-        </p:nvPicPr>
-        <p:blipFill>
-          <a:blip r:embed="rId10"/>
-          <a:stretch>
-            <a:fillRect/>
-          </a:stretch>
-        </p:blipFill>
-        <p:spPr>
-          <a:xfrm>
-            <a:off x="919521" y="3781593"/>
-            <a:ext cx="209215" cy="209215"/>
-          </a:xfrm>
-          <a:prstGeom prst="rect">
-            <a:avLst/>
-          </a:prstGeom>
-        </p:spPr>
-      </p:pic>
-      <p:sp>
-        <p:nvSpPr>
-          <p:cNvPr id="18" name="Text 11"/>
-          <p:cNvSpPr txBox="1"/>
-          <p:nvPr/>
-        </p:nvSpPr>
-        <p:spPr>
-          <a:xfrm>
-            <a:off x="1417320" y="3630168"/>
-            <a:ext cx="6492240" cy="475488"/>
-          </a:xfrm>
-          <a:prstGeom prst="rect">
-            <a:avLst/>
-          </a:prstGeom>
-          <a:noFill/>
-          <a:ln/>
-        </p:spPr>
-        <p:txBody>
-          <a:bodyPr wrap="square" lIns="0" tIns="0" rIns="0" bIns="0" rtlCol="0" anchor="t"/>
-          <a:lstStyle/>
-          <a:p>
-            <a:pPr indent="0" marL="0">
-              <a:buNone/>
-            </a:pPr>
-            <a:r>
-              <a:rPr lang="en-US" sz="1300" b="1" dirty="0">
-                <a:solidFill>
-                  <a:srgbClr val="1D1D1F"/>
-                </a:solidFill>
-                <a:latin typeface="Arial" pitchFamily="34" charset="0"/>
-                <a:ea typeface="Arial" pitchFamily="34" charset="-122"/>
-                <a:cs typeface="Arial" pitchFamily="34" charset="-120"/>
-              </a:rPr>
-              <a:t>Le salon Tchap de Caramel
-</a:t>
-            </a:r>
-            <a:pPr indent="0" marL="0">
-              <a:buNone/>
-            </a:pPr>
-            <a:r>
-              <a:rPr lang="en-US" sz="1100" u="sng" dirty="0">
-                <a:solidFill>
-                  <a:srgbClr val="0056B3"/>
-                </a:solidFill>
-                <a:latin typeface="Arial" pitchFamily="34" charset="0"/>
-                <a:ea typeface="Arial" pitchFamily="34" charset="-122"/>
-                <a:cs typeface="Arial" pitchFamily="34" charset="-120"/>
-                <a:hlinkClick r:id="rId11" invalidUrl="" action="" tgtFrame="" tooltip="https://edurl.fr/caramel-tchap" history="1" highlightClick="0" endSnd="0">
-                  <a:extLst>
-                    <a:ext uri="{A12FA001-AC4F-418D-AE19-62706E023703}">
-                      <ahyp:hlinkClr xmlns:ahyp="http://schemas.microsoft.com/office/drawing/2018/hyperlinkcolor" val="tx"/>
-                    </a:ext>
-                  </a:extLst>
-                </a:hlinkClick>
-              </a:rPr>
-              <a:t>edurl.fr/caramel-tchap</a:t>
-            </a:r>
-            <a:endParaRPr lang="en-US" sz="1300" dirty="0"/>
-          </a:p>
-        </p:txBody>
-      </p:sp>
-      <p:sp>
-        <p:nvSpPr>
-          <p:cNvPr id="19" name="Shape 12"/>
-          <p:cNvSpPr/>
-          <p:nvPr/>
-        </p:nvSpPr>
-        <p:spPr>
-          <a:xfrm>
-            <a:off x="822960" y="4206240"/>
-            <a:ext cx="402336" cy="402336"/>
-          </a:xfrm>
-          <a:prstGeom prst="roundRect">
-            <a:avLst>
-              <a:gd name="adj" fmla="val 28000"/>
-            </a:avLst>
-          </a:prstGeom>
-          <a:solidFill>
-            <a:srgbClr val="FFECD4"/>
-          </a:solidFill>
-          <a:ln/>
-        </p:spPr>
-      </p:sp>
-      <p:pic>
-        <p:nvPicPr>
-          <p:cNvPr id="20" name="Image 5" descr="/var/folders/b7/tkzbyvzx72qcg9wb0t1jybvm0000gn/T/diaporama-zLbeHS/icone-31.png">    </p:cNvPr>
-          <p:cNvPicPr>
-            <a:picLocks noChangeAspect="1"/>
-          </p:cNvPicPr>
-          <p:nvPr/>
-        </p:nvPicPr>
-        <p:blipFill>
-          <a:blip r:embed="rId12"/>
-          <a:stretch>
-            <a:fillRect/>
-          </a:stretch>
-        </p:blipFill>
-        <p:spPr>
-          <a:xfrm>
-            <a:off x="919521" y="4302801"/>
-            <a:ext cx="209215" cy="209215"/>
-          </a:xfrm>
-          <a:prstGeom prst="rect">
-            <a:avLst/>
-          </a:prstGeom>
-        </p:spPr>
-      </p:pic>
-      <p:sp>
-        <p:nvSpPr>
-          <p:cNvPr id="21" name="Text 13"/>
-          <p:cNvSpPr txBox="1"/>
-          <p:nvPr/>
-        </p:nvSpPr>
-        <p:spPr>
-          <a:xfrm>
-            <a:off x="1417320" y="4151376"/>
-            <a:ext cx="6492240" cy="475488"/>
-          </a:xfrm>
-          <a:prstGeom prst="rect">
-            <a:avLst/>
-          </a:prstGeom>
-          <a:noFill/>
-          <a:ln/>
-        </p:spPr>
-        <p:txBody>
-          <a:bodyPr wrap="square" lIns="0" tIns="0" rIns="0" bIns="0" rtlCol="0" anchor="t"/>
-          <a:lstStyle/>
-          <a:p>
-            <a:pPr indent="0" marL="0">
-              <a:buNone/>
-            </a:pPr>
-            <a:r>
-              <a:rPr lang="en-US" sz="1300" b="1" dirty="0">
-                <a:solidFill>
-                  <a:srgbClr val="1D1D1F"/>
-                </a:solidFill>
-                <a:latin typeface="Arial" pitchFamily="34" charset="0"/>
-                <a:ea typeface="Arial" pitchFamily="34" charset="-122"/>
-                <a:cs typeface="Arial" pitchFamily="34" charset="-120"/>
-              </a:rPr>
-              <a:t>La vidéo « Caramel 7 » (Podeduc)
-</a:t>
-            </a:r>
-            <a:pPr indent="0" marL="0">
-              <a:buNone/>
-            </a:pPr>
-            <a:r>
-              <a:rPr lang="en-US" sz="1100" u="sng" dirty="0">
-                <a:solidFill>
-                  <a:srgbClr val="0056B3"/>
-                </a:solidFill>
-                <a:latin typeface="Arial" pitchFamily="34" charset="0"/>
-                <a:ea typeface="Arial" pitchFamily="34" charset="-122"/>
-                <a:cs typeface="Arial" pitchFamily="34" charset="-120"/>
-                <a:hlinkClick r:id="rId13" invalidUrl="" action="" tgtFrame="" tooltip="https://podeduc.apps.education.fr/video/161411-caramel-7/" history="1" highlightClick="0" endSnd="0">
-                  <a:extLst>
-                    <a:ext uri="{A12FA001-AC4F-418D-AE19-62706E023703}">
-                      <ahyp:hlinkClr xmlns:ahyp="http://schemas.microsoft.com/office/drawing/2018/hyperlinkcolor" val="tx"/>
-                    </a:ext>
-                  </a:extLst>
-                </a:hlinkClick>
-              </a:rPr>
-              <a:t>podeduc.apps.education.fr/video/161411-caramel-7</a:t>
-            </a:r>
-            <a:endParaRPr lang="en-US" sz="1300" dirty="0"/>
-          </a:p>
-        </p:txBody>
-      </p:sp>
-      <p:sp>
-        <p:nvSpPr>
-          <p:cNvPr id="22" name="Shape 14"/>
-          <p:cNvSpPr/>
-          <p:nvPr/>
-        </p:nvSpPr>
-        <p:spPr>
-          <a:xfrm>
-            <a:off x="822960" y="4727448"/>
-            <a:ext cx="402336" cy="402336"/>
-          </a:xfrm>
-          <a:prstGeom prst="roundRect">
-            <a:avLst>
-              <a:gd name="adj" fmla="val 28000"/>
-            </a:avLst>
-          </a:prstGeom>
-          <a:solidFill>
-            <a:srgbClr val="FFECD4"/>
-          </a:solidFill>
-          <a:ln/>
-        </p:spPr>
-      </p:sp>
-      <p:pic>
-        <p:nvPicPr>
-          <p:cNvPr id="23" name="Image 6" descr="/var/folders/b7/tkzbyvzx72qcg9wb0t1jybvm0000gn/T/diaporama-zLbeHS/icone-28.png">    </p:cNvPr>
-          <p:cNvPicPr>
-            <a:picLocks noChangeAspect="1"/>
-          </p:cNvPicPr>
-          <p:nvPr/>
-        </p:nvPicPr>
-        <p:blipFill>
-          <a:blip r:embed="rId14"/>
-          <a:stretch>
-            <a:fillRect/>
-          </a:stretch>
-        </p:blipFill>
-        <p:spPr>
-          <a:xfrm>
-            <a:off x="919521" y="4824009"/>
-            <a:ext cx="209215" cy="209215"/>
-          </a:xfrm>
-          <a:prstGeom prst="rect">
-            <a:avLst/>
-          </a:prstGeom>
-        </p:spPr>
-      </p:pic>
-      <p:sp>
-        <p:nvSpPr>
-          <p:cNvPr id="24" name="Text 15"/>
-          <p:cNvSpPr txBox="1"/>
-          <p:nvPr/>
-        </p:nvSpPr>
-        <p:spPr>
-          <a:xfrm>
-            <a:off x="1417320" y="4672584"/>
-            <a:ext cx="6492240" cy="475488"/>
-          </a:xfrm>
-          <a:prstGeom prst="rect">
-            <a:avLst/>
-          </a:prstGeom>
-          <a:noFill/>
-          <a:ln/>
-        </p:spPr>
-        <p:txBody>
-          <a:bodyPr wrap="square" lIns="0" tIns="0" rIns="0" bIns="0" rtlCol="0" anchor="t"/>
-          <a:lstStyle/>
-          <a:p>
-            <a:pPr indent="0" marL="0">
-              <a:buNone/>
-            </a:pPr>
-            <a:r>
-              <a:rPr lang="en-US" sz="1300" b="1" dirty="0">
-                <a:solidFill>
-                  <a:srgbClr val="1D1D1F"/>
-                </a:solidFill>
-                <a:latin typeface="Arial" pitchFamily="34" charset="0"/>
-                <a:ea typeface="Arial" pitchFamily="34" charset="-122"/>
-                <a:cs typeface="Arial" pitchFamily="34" charset="-120"/>
-              </a:rPr>
-              <a:t>Le code, les tickets, les nouveautés de chaque version
-</a:t>
-            </a:r>
-            <a:pPr indent="0" marL="0">
-              <a:buNone/>
-            </a:pPr>
-            <a:r>
-              <a:rPr lang="en-US" sz="1100" u="sng" dirty="0">
-                <a:solidFill>
-                  <a:srgbClr val="0056B3"/>
-                </a:solidFill>
-                <a:latin typeface="Arial" pitchFamily="34" charset="0"/>
-                <a:ea typeface="Arial" pitchFamily="34" charset="-122"/>
-                <a:cs typeface="Arial" pitchFamily="34" charset="-120"/>
-                <a:hlinkClick r:id="rId15" invalidUrl="" action="" tgtFrame="" tooltip="https://forge.apps.education.fr/caramel/caramel" history="1" highlightClick="0" endSnd="0">
-                  <a:extLst>
-                    <a:ext uri="{A12FA001-AC4F-418D-AE19-62706E023703}">
-                      <ahyp:hlinkClr xmlns:ahyp="http://schemas.microsoft.com/office/drawing/2018/hyperlinkcolor" val="tx"/>
-                    </a:ext>
-                  </a:extLst>
-                </a:hlinkClick>
-              </a:rPr>
-              <a:t>forge.apps.education.fr/caramel/caramel</a:t>
-            </a:r>
-            <a:endParaRPr lang="en-US" sz="1300" dirty="0"/>
-          </a:p>
-        </p:txBody>
-      </p:sp>
-      <p:sp>
-        <p:nvSpPr>
-          <p:cNvPr id="25" name="Shape 16"/>
-          <p:cNvSpPr/>
-          <p:nvPr/>
-        </p:nvSpPr>
-        <p:spPr>
-          <a:xfrm>
-            <a:off x="822960" y="5248656"/>
-            <a:ext cx="402336" cy="402336"/>
-          </a:xfrm>
-          <a:prstGeom prst="roundRect">
-            <a:avLst>
-              <a:gd name="adj" fmla="val 28000"/>
-            </a:avLst>
-          </a:prstGeom>
-          <a:solidFill>
-            <a:srgbClr val="FFECD4"/>
-          </a:solidFill>
-          <a:ln/>
-        </p:spPr>
-      </p:sp>
-      <p:pic>
-        <p:nvPicPr>
-          <p:cNvPr id="26" name="Image 7" descr="/var/folders/b7/tkzbyvzx72qcg9wb0t1jybvm0000gn/T/diaporama-zLbeHS/icone-22.png">    </p:cNvPr>
-          <p:cNvPicPr>
-            <a:picLocks noChangeAspect="1"/>
-          </p:cNvPicPr>
-          <p:nvPr/>
-        </p:nvPicPr>
-        <p:blipFill>
-          <a:blip r:embed="rId16"/>
-          <a:stretch>
-            <a:fillRect/>
-          </a:stretch>
-        </p:blipFill>
-        <p:spPr>
-          <a:xfrm>
-            <a:off x="919521" y="5345217"/>
-            <a:ext cx="209215" cy="209215"/>
-          </a:xfrm>
-          <a:prstGeom prst="rect">
-            <a:avLst/>
-          </a:prstGeom>
-        </p:spPr>
-      </p:pic>
-      <p:sp>
-        <p:nvSpPr>
-          <p:cNvPr id="27" name="Text 17"/>
-          <p:cNvSpPr txBox="1"/>
-          <p:nvPr/>
-        </p:nvSpPr>
-        <p:spPr>
-          <a:xfrm>
-            <a:off x="1417320" y="5193792"/>
-            <a:ext cx="6492240" cy="475488"/>
-          </a:xfrm>
-          <a:prstGeom prst="rect">
-            <a:avLst/>
-          </a:prstGeom>
-          <a:noFill/>
-          <a:ln/>
-        </p:spPr>
-        <p:txBody>
-          <a:bodyPr wrap="square" lIns="0" tIns="0" rIns="0" bIns="0" rtlCol="0" anchor="t"/>
-          <a:lstStyle/>
-          <a:p>
-            <a:pPr indent="0" marL="0">
-              <a:buNone/>
-            </a:pPr>
-            <a:r>
-              <a:rPr lang="en-US" sz="1300" b="1" dirty="0">
-                <a:solidFill>
-                  <a:srgbClr val="1D1D1F"/>
-                </a:solidFill>
-                <a:latin typeface="Arial" pitchFamily="34" charset="0"/>
-                <a:ea typeface="Arial" pitchFamily="34" charset="-122"/>
-                <a:cs typeface="Arial" pitchFamily="34" charset="-120"/>
-              </a:rPr>
-              <a:t>Le bac à sable : les nouveautés avant tout le monde
-</a:t>
-            </a:r>
-            <a:pPr indent="0" marL="0">
-              <a:buNone/>
-            </a:pPr>
-            <a:r>
-              <a:rPr lang="en-US" sz="1100" u="sng" dirty="0">
-                <a:solidFill>
-                  <a:srgbClr val="0056B3"/>
-                </a:solidFill>
-                <a:latin typeface="Arial" pitchFamily="34" charset="0"/>
-                <a:ea typeface="Arial" pitchFamily="34" charset="-122"/>
-                <a:cs typeface="Arial" pitchFamily="34" charset="-120"/>
-                <a:hlinkClick r:id="rId17" invalidUrl="" action="" tgtFrame="" tooltip="https://caramel.forge.apps.education.fr/bas/" history="1" highlightClick="0" endSnd="0">
-                  <a:extLst>
-                    <a:ext uri="{A12FA001-AC4F-418D-AE19-62706E023703}">
-                      <ahyp:hlinkClr xmlns:ahyp="http://schemas.microsoft.com/office/drawing/2018/hyperlinkcolor" val="tx"/>
-                    </a:ext>
-                  </a:extLst>
-                </a:hlinkClick>
-              </a:rPr>
-              <a:t>caramel.forge.apps.education.fr/bas</a:t>
-            </a:r>
-            <a:endParaRPr lang="en-US" sz="1300" dirty="0"/>
-          </a:p>
-        </p:txBody>
-      </p:sp>
-      <p:sp>
-        <p:nvSpPr>
-          <p:cNvPr id="28" name="Shape 18"/>
-          <p:cNvSpPr/>
-          <p:nvPr/>
-        </p:nvSpPr>
-        <p:spPr>
-          <a:xfrm>
-            <a:off x="8503920" y="1417320"/>
-            <a:ext cx="3139135" cy="2103120"/>
-          </a:xfrm>
-          <a:prstGeom prst="roundRect">
-            <a:avLst>
-              <a:gd name="adj" fmla="val 6957"/>
+              <a:gd name="adj" fmla="val 5622"/>
             </a:avLst>
           </a:prstGeom>
           <a:solidFill>
@@ -15287,122 +14114,159 @@
           </a:effectLst>
         </p:spPr>
       </p:sp>
-      <p:pic>
-        <p:nvPicPr>
-          <p:cNvPr id="29" name="Image 8" descr="/var/folders/b7/tkzbyvzx72qcg9wb0t1jybvm0000gn/T/diaporama-zLbeHS/qr-caramel.png">    </p:cNvPr>
-          <p:cNvPicPr>
-            <a:picLocks noChangeAspect="1"/>
-          </p:cNvPicPr>
-          <p:nvPr/>
-        </p:nvPicPr>
-        <p:blipFill>
-          <a:blip r:embed="rId18"/>
-          <a:stretch>
-            <a:fillRect/>
-          </a:stretch>
-        </p:blipFill>
-        <p:spPr>
-          <a:xfrm>
-            <a:off x="8778240" y="1691640"/>
-            <a:ext cx="1554480" cy="1554480"/>
-          </a:xfrm>
-          <a:prstGeom prst="rect">
-            <a:avLst/>
-          </a:prstGeom>
-        </p:spPr>
-      </p:pic>
-      <p:sp>
-        <p:nvSpPr>
-          <p:cNvPr id="30" name="Text 19"/>
-          <p:cNvSpPr txBox="1"/>
-          <p:nvPr/>
-        </p:nvSpPr>
-        <p:spPr>
-          <a:xfrm>
-            <a:off x="10469880" y="1920240"/>
-            <a:ext cx="1036015" cy="548640"/>
-          </a:xfrm>
-          <a:prstGeom prst="rect">
-            <a:avLst/>
-          </a:prstGeom>
-          <a:noFill/>
-          <a:ln/>
-        </p:spPr>
-        <p:txBody>
-          <a:bodyPr wrap="square" lIns="0" tIns="0" rIns="0" bIns="0" rtlCol="0" anchor="t"/>
-          <a:lstStyle/>
-          <a:p>
-            <a:pPr indent="0" marL="0">
-              <a:buNone/>
-            </a:pPr>
-            <a:r>
-              <a:rPr lang="en-US" sz="1500" b="1" dirty="0">
-                <a:solidFill>
-                  <a:srgbClr val="1D1D1F"/>
-                </a:solidFill>
-                <a:latin typeface="Arial" pitchFamily="34" charset="0"/>
-                <a:ea typeface="Arial" pitchFamily="34" charset="-122"/>
-                <a:cs typeface="Arial" pitchFamily="34" charset="-120"/>
-              </a:rPr>
-              <a:t>Ouvrir Caramel</a:t>
-            </a:r>
-            <a:endParaRPr lang="en-US" sz="1500" dirty="0"/>
-          </a:p>
-        </p:txBody>
-      </p:sp>
-      <p:sp>
-        <p:nvSpPr>
-          <p:cNvPr id="31" name="Text 20"/>
-          <p:cNvSpPr txBox="1"/>
-          <p:nvPr/>
-        </p:nvSpPr>
-        <p:spPr>
-          <a:xfrm>
-            <a:off x="10469880" y="2468880"/>
-            <a:ext cx="1036015" cy="640080"/>
-          </a:xfrm>
-          <a:prstGeom prst="rect">
-            <a:avLst/>
-          </a:prstGeom>
-          <a:noFill/>
-          <a:ln/>
-        </p:spPr>
-        <p:txBody>
-          <a:bodyPr wrap="square" lIns="0" tIns="0" rIns="0" bIns="0" rtlCol="0" anchor="t"/>
-          <a:lstStyle/>
-          <a:p>
-            <a:pPr indent="0" marL="0">
-              <a:buNone/>
-            </a:pPr>
-            <a:r>
-              <a:rPr lang="en-US" sz="1150" dirty="0">
-                <a:solidFill>
-                  <a:srgbClr val="6E6E73"/>
-                </a:solidFill>
-                <a:latin typeface="Arial" pitchFamily="34" charset="0"/>
-                <a:ea typeface="Arial" pitchFamily="34" charset="-122"/>
-                <a:cs typeface="Arial" pitchFamily="34" charset="-120"/>
-              </a:rPr>
-              <a:t>Scannez avec un téléphone ou une tablette.</a:t>
-            </a:r>
-            <a:endParaRPr lang="en-US" sz="1150" dirty="0"/>
-          </a:p>
-        </p:txBody>
-      </p:sp>
-      <p:sp>
-        <p:nvSpPr>
-          <p:cNvPr id="32" name="Shape 21"/>
+      <p:sp>
+        <p:nvSpPr>
+          <p:cNvPr id="9" name="Shape 7"/>
           <p:cNvSpPr/>
           <p:nvPr/>
         </p:nvSpPr>
         <p:spPr>
           <a:xfrm>
-            <a:off x="8503920" y="3749040"/>
-            <a:ext cx="3139135" cy="2103120"/>
+            <a:off x="3653714" y="1847088"/>
+            <a:ext cx="914400" cy="384048"/>
           </a:xfrm>
           <a:prstGeom prst="roundRect">
             <a:avLst>
-              <a:gd name="adj" fmla="val 6957"/>
+              <a:gd name="adj" fmla="val 50000"/>
+            </a:avLst>
+          </a:prstGeom>
+          <a:solidFill>
+            <a:srgbClr val="FFECD4"/>
+          </a:solidFill>
+          <a:ln/>
+        </p:spPr>
+      </p:sp>
+      <p:sp>
+        <p:nvSpPr>
+          <p:cNvPr id="10" name="Text 8"/>
+          <p:cNvSpPr txBox="1"/>
+          <p:nvPr/>
+        </p:nvSpPr>
+        <p:spPr>
+          <a:xfrm>
+            <a:off x="3653714" y="1847088"/>
+            <a:ext cx="914400" cy="384048"/>
+          </a:xfrm>
+          <a:prstGeom prst="rect">
+            <a:avLst/>
+          </a:prstGeom>
+          <a:noFill/>
+          <a:ln/>
+        </p:spPr>
+        <p:txBody>
+          <a:bodyPr wrap="square" lIns="0" tIns="0" rIns="0" bIns="0" rtlCol="0" anchor="ctr"/>
+          <a:lstStyle/>
+          <a:p>
+            <a:pPr algn="ctr" indent="0" marL="0">
+              <a:buNone/>
+            </a:pPr>
+            <a:r>
+              <a:rPr lang="en-US" sz="1300" b="1" dirty="0">
+                <a:solidFill>
+                  <a:srgbClr val="8F4014"/>
+                </a:solidFill>
+                <a:latin typeface="Arial" pitchFamily="34" charset="0"/>
+                <a:ea typeface="Arial" pitchFamily="34" charset="-122"/>
+                <a:cs typeface="Arial" pitchFamily="34" charset="-120"/>
+              </a:rPr>
+              <a:t>10 min</a:t>
+            </a:r>
+            <a:endParaRPr lang="en-US" sz="1300" dirty="0"/>
+          </a:p>
+        </p:txBody>
+      </p:sp>
+      <p:sp>
+        <p:nvSpPr>
+          <p:cNvPr id="11" name="Text 9"/>
+          <p:cNvSpPr txBox="1"/>
+          <p:nvPr/>
+        </p:nvSpPr>
+        <p:spPr>
+          <a:xfrm>
+            <a:off x="3653714" y="2450592"/>
+            <a:ext cx="2053514" cy="365760"/>
+          </a:xfrm>
+          <a:prstGeom prst="rect">
+            <a:avLst/>
+          </a:prstGeom>
+          <a:noFill/>
+          <a:ln/>
+        </p:spPr>
+        <p:txBody>
+          <a:bodyPr wrap="square" lIns="0" tIns="0" rIns="0" bIns="0" rtlCol="0" anchor="t"/>
+          <a:lstStyle/>
+          <a:p>
+            <a:pPr indent="0" marL="0">
+              <a:buNone/>
+            </a:pPr>
+            <a:r>
+              <a:rPr lang="en-US" sz="1800" b="1" dirty="0">
+                <a:solidFill>
+                  <a:srgbClr val="1D1D1F"/>
+                </a:solidFill>
+                <a:latin typeface="Arial" pitchFamily="34" charset="0"/>
+                <a:ea typeface="Arial" pitchFamily="34" charset="-122"/>
+                <a:cs typeface="Arial" pitchFamily="34" charset="-120"/>
+              </a:rPr>
+              <a:t>En direct</a:t>
+            </a:r>
+            <a:endParaRPr lang="en-US" sz="1800" dirty="0"/>
+          </a:p>
+        </p:txBody>
+      </p:sp>
+      <p:sp>
+        <p:nvSpPr>
+          <p:cNvPr id="12" name="Text 10"/>
+          <p:cNvSpPr txBox="1"/>
+          <p:nvPr/>
+        </p:nvSpPr>
+        <p:spPr>
+          <a:xfrm>
+            <a:off x="3653714" y="2880360"/>
+            <a:ext cx="2053514" cy="1417320"/>
+          </a:xfrm>
+          <a:prstGeom prst="rect">
+            <a:avLst/>
+          </a:prstGeom>
+          <a:noFill/>
+          <a:ln/>
+        </p:spPr>
+        <p:txBody>
+          <a:bodyPr wrap="square" lIns="0" tIns="0" rIns="0" bIns="0" rtlCol="0" anchor="t"/>
+          <a:lstStyle/>
+          <a:p>
+            <a:pPr indent="0" marL="0">
+              <a:buNone/>
+            </a:pPr>
+            <a:r>
+              <a:rPr lang="en-US" sz="1400" dirty="0">
+                <a:solidFill>
+                  <a:srgbClr val="4A4A4F"/>
+                </a:solidFill>
+                <a:latin typeface="Arial" pitchFamily="34" charset="0"/>
+                <a:ea typeface="Arial" pitchFamily="34" charset="-122"/>
+                <a:cs typeface="Arial" pitchFamily="34" charset="-120"/>
+              </a:rPr>
+              <a:t>Une démonstration sur une activité de la discipline du groupe, de la demande à l’aperçu.</a:t>
+            </a:r>
+            <a:endParaRPr lang="en-US" sz="1400" dirty="0"/>
+          </a:p>
+        </p:txBody>
+      </p:sp>
+      <p:sp>
+        <p:nvSpPr>
+          <p:cNvPr id="13" name="Shape 11"/>
+          <p:cNvSpPr/>
+          <p:nvPr/>
+        </p:nvSpPr>
+        <p:spPr>
+          <a:xfrm>
+            <a:off x="6210148" y="1554480"/>
+            <a:ext cx="2602154" cy="2834640"/>
+          </a:xfrm>
+          <a:prstGeom prst="roundRect">
+            <a:avLst>
+              <a:gd name="adj" fmla="val 5622"/>
             </a:avLst>
           </a:prstGeom>
           <a:solidFill>
@@ -15423,24 +14287,385 @@
           </a:effectLst>
         </p:spPr>
       </p:sp>
+      <p:sp>
+        <p:nvSpPr>
+          <p:cNvPr id="14" name="Shape 12"/>
+          <p:cNvSpPr/>
+          <p:nvPr/>
+        </p:nvSpPr>
+        <p:spPr>
+          <a:xfrm>
+            <a:off x="6484468" y="1847088"/>
+            <a:ext cx="914400" cy="384048"/>
+          </a:xfrm>
+          <a:prstGeom prst="roundRect">
+            <a:avLst>
+              <a:gd name="adj" fmla="val 50000"/>
+            </a:avLst>
+          </a:prstGeom>
+          <a:solidFill>
+            <a:srgbClr val="FFECD4"/>
+          </a:solidFill>
+          <a:ln/>
+        </p:spPr>
+      </p:sp>
+      <p:sp>
+        <p:nvSpPr>
+          <p:cNvPr id="15" name="Text 13"/>
+          <p:cNvSpPr txBox="1"/>
+          <p:nvPr/>
+        </p:nvSpPr>
+        <p:spPr>
+          <a:xfrm>
+            <a:off x="6484468" y="1847088"/>
+            <a:ext cx="914400" cy="384048"/>
+          </a:xfrm>
+          <a:prstGeom prst="rect">
+            <a:avLst/>
+          </a:prstGeom>
+          <a:noFill/>
+          <a:ln/>
+        </p:spPr>
+        <p:txBody>
+          <a:bodyPr wrap="square" lIns="0" tIns="0" rIns="0" bIns="0" rtlCol="0" anchor="ctr"/>
+          <a:lstStyle/>
+          <a:p>
+            <a:pPr algn="ctr" indent="0" marL="0">
+              <a:buNone/>
+            </a:pPr>
+            <a:r>
+              <a:rPr lang="en-US" sz="1300" b="1" dirty="0">
+                <a:solidFill>
+                  <a:srgbClr val="8F4014"/>
+                </a:solidFill>
+                <a:latin typeface="Arial" pitchFamily="34" charset="0"/>
+                <a:ea typeface="Arial" pitchFamily="34" charset="-122"/>
+                <a:cs typeface="Arial" pitchFamily="34" charset="-120"/>
+              </a:rPr>
+              <a:t>20 min</a:t>
+            </a:r>
+            <a:endParaRPr lang="en-US" sz="1300" dirty="0"/>
+          </a:p>
+        </p:txBody>
+      </p:sp>
+      <p:sp>
+        <p:nvSpPr>
+          <p:cNvPr id="16" name="Text 14"/>
+          <p:cNvSpPr txBox="1"/>
+          <p:nvPr/>
+        </p:nvSpPr>
+        <p:spPr>
+          <a:xfrm>
+            <a:off x="6484468" y="2450592"/>
+            <a:ext cx="2053514" cy="365760"/>
+          </a:xfrm>
+          <a:prstGeom prst="rect">
+            <a:avLst/>
+          </a:prstGeom>
+          <a:noFill/>
+          <a:ln/>
+        </p:spPr>
+        <p:txBody>
+          <a:bodyPr wrap="square" lIns="0" tIns="0" rIns="0" bIns="0" rtlCol="0" anchor="t"/>
+          <a:lstStyle/>
+          <a:p>
+            <a:pPr indent="0" marL="0">
+              <a:buNone/>
+            </a:pPr>
+            <a:r>
+              <a:rPr lang="en-US" sz="1800" b="1" dirty="0">
+                <a:solidFill>
+                  <a:srgbClr val="1D1D1F"/>
+                </a:solidFill>
+                <a:latin typeface="Arial" pitchFamily="34" charset="0"/>
+                <a:ea typeface="Arial" pitchFamily="34" charset="-122"/>
+                <a:cs typeface="Arial" pitchFamily="34" charset="-120"/>
+              </a:rPr>
+              <a:t>L’atelier</a:t>
+            </a:r>
+            <a:endParaRPr lang="en-US" sz="1800" dirty="0"/>
+          </a:p>
+        </p:txBody>
+      </p:sp>
+      <p:sp>
+        <p:nvSpPr>
+          <p:cNvPr id="17" name="Text 15"/>
+          <p:cNvSpPr txBox="1"/>
+          <p:nvPr/>
+        </p:nvSpPr>
+        <p:spPr>
+          <a:xfrm>
+            <a:off x="6484468" y="2880360"/>
+            <a:ext cx="2053514" cy="1417320"/>
+          </a:xfrm>
+          <a:prstGeom prst="rect">
+            <a:avLst/>
+          </a:prstGeom>
+          <a:noFill/>
+          <a:ln/>
+        </p:spPr>
+        <p:txBody>
+          <a:bodyPr wrap="square" lIns="0" tIns="0" rIns="0" bIns="0" rtlCol="0" anchor="t"/>
+          <a:lstStyle/>
+          <a:p>
+            <a:pPr indent="0" marL="0">
+              <a:buNone/>
+            </a:pPr>
+            <a:r>
+              <a:rPr lang="en-US" sz="1400" dirty="0">
+                <a:solidFill>
+                  <a:srgbClr val="4A4A4F"/>
+                </a:solidFill>
+                <a:latin typeface="Arial" pitchFamily="34" charset="0"/>
+                <a:ea typeface="Arial" pitchFamily="34" charset="-122"/>
+                <a:cs typeface="Arial" pitchFamily="34" charset="-120"/>
+              </a:rPr>
+              <a:t>Chacun prépare une activité pour sa classe, la relit, la corrige, puis la dépose sur un espace de test.</a:t>
+            </a:r>
+            <a:endParaRPr lang="en-US" sz="1400" dirty="0"/>
+          </a:p>
+        </p:txBody>
+      </p:sp>
+      <p:sp>
+        <p:nvSpPr>
+          <p:cNvPr id="18" name="Shape 16"/>
+          <p:cNvSpPr/>
+          <p:nvPr/>
+        </p:nvSpPr>
+        <p:spPr>
+          <a:xfrm>
+            <a:off x="9040901" y="1554480"/>
+            <a:ext cx="2602154" cy="2834640"/>
+          </a:xfrm>
+          <a:prstGeom prst="roundRect">
+            <a:avLst>
+              <a:gd name="adj" fmla="val 5622"/>
+            </a:avLst>
+          </a:prstGeom>
+          <a:solidFill>
+            <a:srgbClr val="FFFFFF"/>
+          </a:solidFill>
+          <a:ln w="9525">
+            <a:solidFill>
+              <a:srgbClr val="E5E5EA"/>
+            </a:solidFill>
+            <a:prstDash val="solid"/>
+          </a:ln>
+          <a:effectLst>
+            <a:outerShdw sx="100000" sy="100000" kx="0" ky="0" algn="bl" rotWithShape="0" blurRad="114300" dist="25400" dir="5400000">
+              <a:srgbClr val="000000">
+                <a:alpha val="9000"/>
+              </a:srgbClr>
+            </a:outerShdw>
+          </a:effectLst>
+        </p:spPr>
+      </p:sp>
+      <p:sp>
+        <p:nvSpPr>
+          <p:cNvPr id="19" name="Shape 17"/>
+          <p:cNvSpPr/>
+          <p:nvPr/>
+        </p:nvSpPr>
+        <p:spPr>
+          <a:xfrm>
+            <a:off x="9315221" y="1847088"/>
+            <a:ext cx="914400" cy="384048"/>
+          </a:xfrm>
+          <a:prstGeom prst="roundRect">
+            <a:avLst>
+              <a:gd name="adj" fmla="val 50000"/>
+            </a:avLst>
+          </a:prstGeom>
+          <a:solidFill>
+            <a:srgbClr val="FFECD4"/>
+          </a:solidFill>
+          <a:ln/>
+        </p:spPr>
+      </p:sp>
+      <p:sp>
+        <p:nvSpPr>
+          <p:cNvPr id="20" name="Text 18"/>
+          <p:cNvSpPr txBox="1"/>
+          <p:nvPr/>
+        </p:nvSpPr>
+        <p:spPr>
+          <a:xfrm>
+            <a:off x="9315221" y="1847088"/>
+            <a:ext cx="914400" cy="384048"/>
+          </a:xfrm>
+          <a:prstGeom prst="rect">
+            <a:avLst/>
+          </a:prstGeom>
+          <a:noFill/>
+          <a:ln/>
+        </p:spPr>
+        <p:txBody>
+          <a:bodyPr wrap="square" lIns="0" tIns="0" rIns="0" bIns="0" rtlCol="0" anchor="ctr"/>
+          <a:lstStyle/>
+          <a:p>
+            <a:pPr algn="ctr" indent="0" marL="0">
+              <a:buNone/>
+            </a:pPr>
+            <a:r>
+              <a:rPr lang="en-US" sz="1300" b="1" dirty="0">
+                <a:solidFill>
+                  <a:srgbClr val="8F4014"/>
+                </a:solidFill>
+                <a:latin typeface="Arial" pitchFamily="34" charset="0"/>
+                <a:ea typeface="Arial" pitchFamily="34" charset="-122"/>
+                <a:cs typeface="Arial" pitchFamily="34" charset="-120"/>
+              </a:rPr>
+              <a:t>10 min</a:t>
+            </a:r>
+            <a:endParaRPr lang="en-US" sz="1300" dirty="0"/>
+          </a:p>
+        </p:txBody>
+      </p:sp>
+      <p:sp>
+        <p:nvSpPr>
+          <p:cNvPr id="21" name="Text 19"/>
+          <p:cNvSpPr txBox="1"/>
+          <p:nvPr/>
+        </p:nvSpPr>
+        <p:spPr>
+          <a:xfrm>
+            <a:off x="9315221" y="2450592"/>
+            <a:ext cx="2053514" cy="365760"/>
+          </a:xfrm>
+          <a:prstGeom prst="rect">
+            <a:avLst/>
+          </a:prstGeom>
+          <a:noFill/>
+          <a:ln/>
+        </p:spPr>
+        <p:txBody>
+          <a:bodyPr wrap="square" lIns="0" tIns="0" rIns="0" bIns="0" rtlCol="0" anchor="t"/>
+          <a:lstStyle/>
+          <a:p>
+            <a:pPr indent="0" marL="0">
+              <a:buNone/>
+            </a:pPr>
+            <a:r>
+              <a:rPr lang="en-US" sz="1800" b="1" dirty="0">
+                <a:solidFill>
+                  <a:srgbClr val="1D1D1F"/>
+                </a:solidFill>
+                <a:latin typeface="Arial" pitchFamily="34" charset="0"/>
+                <a:ea typeface="Arial" pitchFamily="34" charset="-122"/>
+                <a:cs typeface="Arial" pitchFamily="34" charset="-120"/>
+              </a:rPr>
+              <a:t>Le retour collectif</a:t>
+            </a:r>
+            <a:endParaRPr lang="en-US" sz="1800" dirty="0"/>
+          </a:p>
+        </p:txBody>
+      </p:sp>
+      <p:sp>
+        <p:nvSpPr>
+          <p:cNvPr id="22" name="Text 20"/>
+          <p:cNvSpPr txBox="1"/>
+          <p:nvPr/>
+        </p:nvSpPr>
+        <p:spPr>
+          <a:xfrm>
+            <a:off x="9315221" y="2880360"/>
+            <a:ext cx="2053514" cy="1417320"/>
+          </a:xfrm>
+          <a:prstGeom prst="rect">
+            <a:avLst/>
+          </a:prstGeom>
+          <a:noFill/>
+          <a:ln/>
+        </p:spPr>
+        <p:txBody>
+          <a:bodyPr wrap="square" lIns="0" tIns="0" rIns="0" bIns="0" rtlCol="0" anchor="t"/>
+          <a:lstStyle/>
+          <a:p>
+            <a:pPr indent="0" marL="0">
+              <a:buNone/>
+            </a:pPr>
+            <a:r>
+              <a:rPr lang="en-US" sz="1400" dirty="0">
+                <a:solidFill>
+                  <a:srgbClr val="4A4A4F"/>
+                </a:solidFill>
+                <a:latin typeface="Arial" pitchFamily="34" charset="0"/>
+                <a:ea typeface="Arial" pitchFamily="34" charset="-122"/>
+                <a:cs typeface="Arial" pitchFamily="34" charset="-120"/>
+              </a:rPr>
+              <a:t>Ce que l’IA a bien fait, ce qu’il a fallu reprendre, et la place de la Sucrerie pour partager.</a:t>
+            </a:r>
+            <a:endParaRPr lang="en-US" sz="1400" dirty="0"/>
+          </a:p>
+        </p:txBody>
+      </p:sp>
+      <p:sp>
+        <p:nvSpPr>
+          <p:cNvPr id="23" name="Shape 21"/>
+          <p:cNvSpPr/>
+          <p:nvPr/>
+        </p:nvSpPr>
+        <p:spPr>
+          <a:xfrm>
+            <a:off x="548640" y="4709160"/>
+            <a:ext cx="11094415" cy="1143000"/>
+          </a:xfrm>
+          <a:prstGeom prst="roundRect">
+            <a:avLst>
+              <a:gd name="adj" fmla="val 12800"/>
+            </a:avLst>
+          </a:prstGeom>
+          <a:solidFill>
+            <a:srgbClr val="FFE8EE"/>
+          </a:solidFill>
+          <a:ln w="9525">
+            <a:solidFill>
+              <a:srgbClr val="EDDCE5"/>
+            </a:solidFill>
+            <a:prstDash val="solid"/>
+          </a:ln>
+        </p:spPr>
+      </p:sp>
+      <p:sp>
+        <p:nvSpPr>
+          <p:cNvPr id="24" name="Shape 22"/>
+          <p:cNvSpPr/>
+          <p:nvPr/>
+        </p:nvSpPr>
+        <p:spPr>
+          <a:xfrm>
+            <a:off x="822960" y="5010912"/>
+            <a:ext cx="548640" cy="548640"/>
+          </a:xfrm>
+          <a:prstGeom prst="roundRect">
+            <a:avLst>
+              <a:gd name="adj" fmla="val 28000"/>
+            </a:avLst>
+          </a:prstGeom>
+          <a:solidFill>
+            <a:srgbClr val="FFFFFF"/>
+          </a:solidFill>
+          <a:ln/>
+        </p:spPr>
+      </p:sp>
       <p:pic>
         <p:nvPicPr>
-          <p:cNvPr id="33" name="Image 9" descr="/var/folders/b7/tkzbyvzx72qcg9wb0t1jybvm0000gn/T/diaporama-zLbeHS/qr-decouvrir.png">    </p:cNvPr>
+          <p:cNvPr id="25" name="Image 0" descr="/var/folders/b7/tkzbyvzx72qcg9wb0t1jybvm0000gn/T/diaporama-4ZvB4P/icone-25.png">    </p:cNvPr>
           <p:cNvPicPr>
             <a:picLocks noChangeAspect="1"/>
           </p:cNvPicPr>
           <p:nvPr/>
         </p:nvPicPr>
         <p:blipFill>
-          <a:blip r:embed="rId19"/>
+          <a:blip r:embed="rId1"/>
           <a:stretch>
             <a:fillRect/>
           </a:stretch>
         </p:blipFill>
         <p:spPr>
           <a:xfrm>
-            <a:off x="8778240" y="4023360"/>
-            <a:ext cx="1554480" cy="1554480"/>
+            <a:off x="954634" y="5142586"/>
+            <a:ext cx="285293" cy="285293"/>
           </a:xfrm>
           <a:prstGeom prst="rect">
             <a:avLst/>
@@ -15449,23 +14674,23 @@
       </p:pic>
       <p:sp>
         <p:nvSpPr>
-          <p:cNvPr id="34" name="Text 22"/>
-          <p:cNvSpPr txBox="1"/>
-          <p:nvPr/>
-        </p:nvSpPr>
-        <p:spPr>
-          <a:xfrm>
-            <a:off x="10469880" y="4251960"/>
-            <a:ext cx="1036015" cy="548640"/>
-          </a:xfrm>
-          <a:prstGeom prst="rect">
-            <a:avLst/>
-          </a:prstGeom>
-          <a:noFill/>
-          <a:ln/>
-        </p:spPr>
-        <p:txBody>
-          <a:bodyPr wrap="square" lIns="0" tIns="0" rIns="0" bIns="0" rtlCol="0" anchor="t"/>
+          <p:cNvPr id="26" name="Text 23"/>
+          <p:cNvSpPr txBox="1"/>
+          <p:nvPr/>
+        </p:nvSpPr>
+        <p:spPr>
+          <a:xfrm>
+            <a:off x="1600200" y="4754880"/>
+            <a:ext cx="9768535" cy="1051560"/>
+          </a:xfrm>
+          <a:prstGeom prst="rect">
+            <a:avLst/>
+          </a:prstGeom>
+          <a:noFill/>
+          <a:ln/>
+        </p:spPr>
+        <p:txBody>
+          <a:bodyPr wrap="square" lIns="0" tIns="0" rIns="0" bIns="0" rtlCol="0" anchor="ctr"/>
           <a:lstStyle/>
           <a:p>
             <a:pPr indent="0" marL="0">
@@ -15474,13 +14699,28 @@
             <a:r>
               <a:rPr lang="en-US" sz="1500" b="1" dirty="0">
                 <a:solidFill>
-                  <a:srgbClr val="1D1D1F"/>
-                </a:solidFill>
-                <a:latin typeface="Arial" pitchFamily="34" charset="0"/>
-                <a:ea typeface="Arial" pitchFamily="34" charset="-122"/>
-                <a:cs typeface="Arial" pitchFamily="34" charset="-120"/>
-              </a:rPr>
-              <a:t>Découvrir Caramel</a:t>
+                  <a:srgbClr val="9A4F7E"/>
+                </a:solidFill>
+                <a:latin typeface="Arial" pitchFamily="34" charset="0"/>
+                <a:ea typeface="Arial" pitchFamily="34" charset="-122"/>
+                <a:cs typeface="Arial" pitchFamily="34" charset="-120"/>
+              </a:rPr>
+              <a:t>Variante en défi
+</a:t>
+            </a:r>
+            <a:pPr indent="0" marL="0">
+              <a:buNone/>
+            </a:pPr>
+            <a:r>
+              <a:rPr lang="en-US" sz="1350" dirty="0">
+                <a:solidFill>
+                  <a:srgbClr val="4A4A4F"/>
+                </a:solidFill>
+                <a:latin typeface="Arial" pitchFamily="34" charset="0"/>
+                <a:ea typeface="Arial" pitchFamily="34" charset="-122"/>
+                <a:cs typeface="Arial" pitchFamily="34" charset="-120"/>
+              </a:rPr>
+              <a:t>Chaque groupe prépare au moins trois activités sur un même thème et les rassemble dans une collection sur la Sucrerie, que les autres groupes découvrent ensuite.</a:t>
             </a:r>
             <a:endParaRPr lang="en-US" sz="1500" dirty="0"/>
           </a:p>
@@ -15488,46 +14728,7 @@
       </p:sp>
       <p:sp>
         <p:nvSpPr>
-          <p:cNvPr id="35" name="Text 23"/>
-          <p:cNvSpPr txBox="1"/>
-          <p:nvPr/>
-        </p:nvSpPr>
-        <p:spPr>
-          <a:xfrm>
-            <a:off x="10469880" y="4800600"/>
-            <a:ext cx="1036015" cy="640080"/>
-          </a:xfrm>
-          <a:prstGeom prst="rect">
-            <a:avLst/>
-          </a:prstGeom>
-          <a:noFill/>
-          <a:ln/>
-        </p:spPr>
-        <p:txBody>
-          <a:bodyPr wrap="square" lIns="0" tIns="0" rIns="0" bIns="0" rtlCol="0" anchor="t"/>
-          <a:lstStyle/>
-          <a:p>
-            <a:pPr indent="0" marL="0">
-              <a:buNone/>
-            </a:pPr>
-            <a:r>
-              <a:rPr lang="en-US" sz="1150" dirty="0">
-                <a:solidFill>
-                  <a:srgbClr val="6E6E73"/>
-                </a:solidFill>
-                <a:latin typeface="Arial" pitchFamily="34" charset="0"/>
-                <a:ea typeface="Arial" pitchFamily="34" charset="-122"/>
-                <a:cs typeface="Arial" pitchFamily="34" charset="-120"/>
-              </a:rPr>
-              <a:t>Scannez avec un téléphone ou une tablette.</a:t>
-            </a:r>
-            <a:endParaRPr lang="en-US" sz="1150" dirty="0"/>
-          </a:p>
-        </p:txBody>
-      </p:sp>
-      <p:sp>
-        <p:nvSpPr>
-          <p:cNvPr id="36" name="Text 24"/>
+          <p:cNvPr id="27" name="Text 24"/>
           <p:cNvSpPr txBox="1"/>
           <p:nvPr/>
         </p:nvSpPr>
@@ -15558,7 +14759,7 @@
                 <a:ea typeface="Arial" pitchFamily="34" charset="-122"/>
                 <a:cs typeface="Arial" pitchFamily="34" charset="-120"/>
               </a:rPr>
-              <a:t>Caramel v7.0.1 · Présentation · septembre 2026</a:t>
+              <a:t>Caramel v7.1.0 · Présentation · septembre 2026</a:t>
             </a:r>
             <a:endParaRPr lang="en-US" sz="900" dirty="0"/>
           </a:p>
@@ -15566,7 +14767,7 @@
       </p:sp>
       <p:sp>
         <p:nvSpPr>
-          <p:cNvPr id="37" name="Text 25"/>
+          <p:cNvPr id="28" name="Text 25"/>
           <p:cNvSpPr txBox="1"/>
           <p:nvPr/>
         </p:nvSpPr>
@@ -15597,7 +14798,7 @@
                 <a:ea typeface="Arial" pitchFamily="34" charset="-122"/>
                 <a:cs typeface="Arial" pitchFamily="34" charset="-120"/>
               </a:rPr>
-              <a:t>23 / 24</a:t>
+              <a:t>23 / 25</a:t>
             </a:r>
             <a:endParaRPr lang="en-US" sz="900" dirty="0"/>
           </a:p>
@@ -15614,6 +14815,1352 @@
 <file path=ppt/slides/slide24.xml><?xml version="1.0" encoding="utf-8"?>
 <p:sld xmlns:a="http://schemas.openxmlformats.org/drawingml/2006/main" xmlns:r="http://schemas.openxmlformats.org/officeDocument/2006/relationships" xmlns:p="http://schemas.openxmlformats.org/presentationml/2006/main">
   <p:cSld name="Slide 24">
+    <p:bg>
+      <p:bgPr>
+        <a:solidFill>
+          <a:srgbClr val="F5F5F7"/>
+        </a:solidFill>
+      </p:bgPr>
+    </p:bg>
+    <p:spTree>
+      <p:nvGrpSpPr>
+        <p:cNvPr id="1" name=""/>
+        <p:cNvGrpSpPr/>
+        <p:nvPr/>
+      </p:nvGrpSpPr>
+      <p:grpSpPr>
+        <a:xfrm>
+          <a:off x="0" y="0"/>
+          <a:ext cx="0" cy="0"/>
+          <a:chOff x="0" y="0"/>
+          <a:chExt cx="0" cy="0"/>
+        </a:xfrm>
+      </p:grpSpPr>
+      <p:sp>
+        <p:nvSpPr>
+          <p:cNvPr id="2" name="Text 0"/>
+          <p:cNvSpPr txBox="1"/>
+          <p:nvPr/>
+        </p:nvSpPr>
+        <p:spPr>
+          <a:xfrm>
+            <a:off x="548640" y="658368"/>
+            <a:ext cx="11094415" cy="658368"/>
+          </a:xfrm>
+          <a:prstGeom prst="rect">
+            <a:avLst/>
+          </a:prstGeom>
+          <a:noFill/>
+          <a:ln/>
+        </p:spPr>
+        <p:txBody>
+          <a:bodyPr wrap="square" lIns="0" tIns="0" rIns="0" bIns="0" rtlCol="0" anchor="ctr"/>
+          <a:lstStyle/>
+          <a:p>
+            <a:pPr indent="0" marL="0">
+              <a:buNone/>
+            </a:pPr>
+            <a:r>
+              <a:rPr lang="en-US" sz="3000" b="1" dirty="0">
+                <a:solidFill>
+                  <a:srgbClr val="1D1D1F"/>
+                </a:solidFill>
+                <a:latin typeface="Arial" pitchFamily="34" charset="0"/>
+                <a:ea typeface="Arial" pitchFamily="34" charset="-122"/>
+                <a:cs typeface="Arial" pitchFamily="34" charset="-120"/>
+              </a:rPr>
+              <a:t>Liens utiles</a:t>
+            </a:r>
+            <a:endParaRPr lang="en-US" sz="3000" dirty="0"/>
+          </a:p>
+        </p:txBody>
+      </p:sp>
+      <p:sp>
+        <p:nvSpPr>
+          <p:cNvPr id="3" name="Shape 1"/>
+          <p:cNvSpPr/>
+          <p:nvPr/>
+        </p:nvSpPr>
+        <p:spPr>
+          <a:xfrm>
+            <a:off x="548640" y="1417320"/>
+            <a:ext cx="7589520" cy="4434840"/>
+          </a:xfrm>
+          <a:prstGeom prst="roundRect">
+            <a:avLst>
+              <a:gd name="adj" fmla="val 3299"/>
+            </a:avLst>
+          </a:prstGeom>
+          <a:solidFill>
+            <a:srgbClr val="FFFFFF"/>
+          </a:solidFill>
+          <a:ln w="9525">
+            <a:solidFill>
+              <a:srgbClr val="E5E5EA"/>
+            </a:solidFill>
+            <a:prstDash val="solid"/>
+          </a:ln>
+          <a:effectLst>
+            <a:outerShdw sx="100000" sy="100000" kx="0" ky="0" algn="bl" rotWithShape="0" blurRad="114300" dist="25400" dir="5400000">
+              <a:srgbClr val="000000">
+                <a:alpha val="9000"/>
+              </a:srgbClr>
+            </a:outerShdw>
+          </a:effectLst>
+        </p:spPr>
+      </p:sp>
+      <p:sp>
+        <p:nvSpPr>
+          <p:cNvPr id="4" name="Shape 2"/>
+          <p:cNvSpPr/>
+          <p:nvPr/>
+        </p:nvSpPr>
+        <p:spPr>
+          <a:xfrm>
+            <a:off x="822960" y="1600200"/>
+            <a:ext cx="402336" cy="402336"/>
+          </a:xfrm>
+          <a:prstGeom prst="roundRect">
+            <a:avLst>
+              <a:gd name="adj" fmla="val 28000"/>
+            </a:avLst>
+          </a:prstGeom>
+          <a:solidFill>
+            <a:srgbClr val="FFECD4"/>
+          </a:solidFill>
+          <a:ln/>
+        </p:spPr>
+      </p:sp>
+      <p:pic>
+        <p:nvPicPr>
+          <p:cNvPr id="5" name="Image 0" descr="/var/folders/b7/tkzbyvzx72qcg9wb0t1jybvm0000gn/T/diaporama-4ZvB4P/icone-33.png">    </p:cNvPr>
+          <p:cNvPicPr>
+            <a:picLocks noChangeAspect="1"/>
+          </p:cNvPicPr>
+          <p:nvPr/>
+        </p:nvPicPr>
+        <p:blipFill>
+          <a:blip r:embed="rId1"/>
+          <a:stretch>
+            <a:fillRect/>
+          </a:stretch>
+        </p:blipFill>
+        <p:spPr>
+          <a:xfrm>
+            <a:off x="919521" y="1696761"/>
+            <a:ext cx="209215" cy="209215"/>
+          </a:xfrm>
+          <a:prstGeom prst="rect">
+            <a:avLst/>
+          </a:prstGeom>
+        </p:spPr>
+      </p:pic>
+      <p:sp>
+        <p:nvSpPr>
+          <p:cNvPr id="6" name="Text 3"/>
+          <p:cNvSpPr txBox="1"/>
+          <p:nvPr/>
+        </p:nvSpPr>
+        <p:spPr>
+          <a:xfrm>
+            <a:off x="1417320" y="1545336"/>
+            <a:ext cx="6492240" cy="475488"/>
+          </a:xfrm>
+          <a:prstGeom prst="rect">
+            <a:avLst/>
+          </a:prstGeom>
+          <a:noFill/>
+          <a:ln/>
+        </p:spPr>
+        <p:txBody>
+          <a:bodyPr wrap="square" lIns="0" tIns="0" rIns="0" bIns="0" rtlCol="0" anchor="t"/>
+          <a:lstStyle/>
+          <a:p>
+            <a:pPr indent="0" marL="0">
+              <a:buNone/>
+            </a:pPr>
+            <a:r>
+              <a:rPr lang="en-US" sz="1300" b="1" dirty="0">
+                <a:solidFill>
+                  <a:srgbClr val="1D1D1F"/>
+                </a:solidFill>
+                <a:latin typeface="Arial" pitchFamily="34" charset="0"/>
+                <a:ea typeface="Arial" pitchFamily="34" charset="-122"/>
+                <a:cs typeface="Arial" pitchFamily="34" charset="-120"/>
+              </a:rPr>
+              <a:t>Caramel
+</a:t>
+            </a:r>
+            <a:pPr indent="0" marL="0">
+              <a:buNone/>
+            </a:pPr>
+            <a:r>
+              <a:rPr lang="en-US" sz="1100" u="sng" dirty="0">
+                <a:solidFill>
+                  <a:srgbClr val="0056B3"/>
+                </a:solidFill>
+                <a:latin typeface="Arial" pitchFamily="34" charset="0"/>
+                <a:ea typeface="Arial" pitchFamily="34" charset="-122"/>
+                <a:cs typeface="Arial" pitchFamily="34" charset="-120"/>
+                <a:hlinkClick r:id="rId2" invalidUrl="" action="" tgtFrame="" tooltip="https://caramel.forge.apps.education.fr/" history="1" highlightClick="0" endSnd="0">
+                  <a:extLst>
+                    <a:ext uri="{A12FA001-AC4F-418D-AE19-62706E023703}">
+                      <ahyp:hlinkClr xmlns:ahyp="http://schemas.microsoft.com/office/drawing/2018/hyperlinkcolor" val="tx"/>
+                    </a:ext>
+                  </a:extLst>
+                </a:hlinkClick>
+              </a:rPr>
+              <a:t>caramel.forge.apps.education.fr</a:t>
+            </a:r>
+            <a:endParaRPr lang="en-US" sz="1300" dirty="0"/>
+          </a:p>
+        </p:txBody>
+      </p:sp>
+      <p:sp>
+        <p:nvSpPr>
+          <p:cNvPr id="7" name="Shape 4"/>
+          <p:cNvSpPr/>
+          <p:nvPr/>
+        </p:nvSpPr>
+        <p:spPr>
+          <a:xfrm>
+            <a:off x="822960" y="2121408"/>
+            <a:ext cx="402336" cy="402336"/>
+          </a:xfrm>
+          <a:prstGeom prst="roundRect">
+            <a:avLst>
+              <a:gd name="adj" fmla="val 28000"/>
+            </a:avLst>
+          </a:prstGeom>
+          <a:solidFill>
+            <a:srgbClr val="FFECD4"/>
+          </a:solidFill>
+          <a:ln/>
+        </p:spPr>
+      </p:sp>
+      <p:pic>
+        <p:nvPicPr>
+          <p:cNvPr id="8" name="Image 1" descr="/var/folders/b7/tkzbyvzx72qcg9wb0t1jybvm0000gn/T/diaporama-4ZvB4P/icone-32.png">    </p:cNvPr>
+          <p:cNvPicPr>
+            <a:picLocks noChangeAspect="1"/>
+          </p:cNvPicPr>
+          <p:nvPr/>
+        </p:nvPicPr>
+        <p:blipFill>
+          <a:blip r:embed="rId3"/>
+          <a:stretch>
+            <a:fillRect/>
+          </a:stretch>
+        </p:blipFill>
+        <p:spPr>
+          <a:xfrm>
+            <a:off x="919521" y="2217969"/>
+            <a:ext cx="209215" cy="209215"/>
+          </a:xfrm>
+          <a:prstGeom prst="rect">
+            <a:avLst/>
+          </a:prstGeom>
+        </p:spPr>
+      </p:pic>
+      <p:sp>
+        <p:nvSpPr>
+          <p:cNvPr id="9" name="Text 5"/>
+          <p:cNvSpPr txBox="1"/>
+          <p:nvPr/>
+        </p:nvSpPr>
+        <p:spPr>
+          <a:xfrm>
+            <a:off x="1417320" y="2066544"/>
+            <a:ext cx="6492240" cy="475488"/>
+          </a:xfrm>
+          <a:prstGeom prst="rect">
+            <a:avLst/>
+          </a:prstGeom>
+          <a:noFill/>
+          <a:ln/>
+        </p:spPr>
+        <p:txBody>
+          <a:bodyPr wrap="square" lIns="0" tIns="0" rIns="0" bIns="0" rtlCol="0" anchor="t"/>
+          <a:lstStyle/>
+          <a:p>
+            <a:pPr indent="0" marL="0">
+              <a:buNone/>
+            </a:pPr>
+            <a:r>
+              <a:rPr lang="en-US" sz="1300" b="1" dirty="0">
+                <a:solidFill>
+                  <a:srgbClr val="1D1D1F"/>
+                </a:solidFill>
+                <a:latin typeface="Arial" pitchFamily="34" charset="0"/>
+                <a:ea typeface="Arial" pitchFamily="34" charset="-122"/>
+                <a:cs typeface="Arial" pitchFamily="34" charset="-120"/>
+              </a:rPr>
+              <a:t>Découvrir Caramel : vidéo, diaporama, activités à essayer
+</a:t>
+            </a:r>
+            <a:pPr indent="0" marL="0">
+              <a:buNone/>
+            </a:pPr>
+            <a:r>
+              <a:rPr lang="en-US" sz="1100" u="sng" dirty="0">
+                <a:solidFill>
+                  <a:srgbClr val="0056B3"/>
+                </a:solidFill>
+                <a:latin typeface="Arial" pitchFamily="34" charset="0"/>
+                <a:ea typeface="Arial" pitchFamily="34" charset="-122"/>
+                <a:cs typeface="Arial" pitchFamily="34" charset="-120"/>
+                <a:hlinkClick r:id="rId4" invalidUrl="" action="" tgtFrame="" tooltip="https://caramel.forge.apps.education.fr/decouvrir/" history="1" highlightClick="0" endSnd="0">
+                  <a:extLst>
+                    <a:ext uri="{A12FA001-AC4F-418D-AE19-62706E023703}">
+                      <ahyp:hlinkClr xmlns:ahyp="http://schemas.microsoft.com/office/drawing/2018/hyperlinkcolor" val="tx"/>
+                    </a:ext>
+                  </a:extLst>
+                </a:hlinkClick>
+              </a:rPr>
+              <a:t>caramel.forge.apps.education.fr/decouvrir</a:t>
+            </a:r>
+            <a:endParaRPr lang="en-US" sz="1300" dirty="0"/>
+          </a:p>
+        </p:txBody>
+      </p:sp>
+      <p:sp>
+        <p:nvSpPr>
+          <p:cNvPr id="10" name="Shape 6"/>
+          <p:cNvSpPr/>
+          <p:nvPr/>
+        </p:nvSpPr>
+        <p:spPr>
+          <a:xfrm>
+            <a:off x="822960" y="2642616"/>
+            <a:ext cx="402336" cy="402336"/>
+          </a:xfrm>
+          <a:prstGeom prst="roundRect">
+            <a:avLst>
+              <a:gd name="adj" fmla="val 28000"/>
+            </a:avLst>
+          </a:prstGeom>
+          <a:solidFill>
+            <a:srgbClr val="FFE8EE"/>
+          </a:solidFill>
+          <a:ln/>
+        </p:spPr>
+      </p:sp>
+      <p:pic>
+        <p:nvPicPr>
+          <p:cNvPr id="11" name="Image 2" descr="/var/folders/b7/tkzbyvzx72qcg9wb0t1jybvm0000gn/T/diaporama-4ZvB4P/icone-18.png">    </p:cNvPr>
+          <p:cNvPicPr>
+            <a:picLocks noChangeAspect="1"/>
+          </p:cNvPicPr>
+          <p:nvPr/>
+        </p:nvPicPr>
+        <p:blipFill>
+          <a:blip r:embed="rId5"/>
+          <a:stretch>
+            <a:fillRect/>
+          </a:stretch>
+        </p:blipFill>
+        <p:spPr>
+          <a:xfrm>
+            <a:off x="919521" y="2739177"/>
+            <a:ext cx="209215" cy="209215"/>
+          </a:xfrm>
+          <a:prstGeom prst="rect">
+            <a:avLst/>
+          </a:prstGeom>
+        </p:spPr>
+      </p:pic>
+      <p:sp>
+        <p:nvSpPr>
+          <p:cNvPr id="12" name="Text 7"/>
+          <p:cNvSpPr txBox="1"/>
+          <p:nvPr/>
+        </p:nvSpPr>
+        <p:spPr>
+          <a:xfrm>
+            <a:off x="1417320" y="2587752"/>
+            <a:ext cx="6492240" cy="475488"/>
+          </a:xfrm>
+          <a:prstGeom prst="rect">
+            <a:avLst/>
+          </a:prstGeom>
+          <a:noFill/>
+          <a:ln/>
+        </p:spPr>
+        <p:txBody>
+          <a:bodyPr wrap="square" lIns="0" tIns="0" rIns="0" bIns="0" rtlCol="0" anchor="t"/>
+          <a:lstStyle/>
+          <a:p>
+            <a:pPr indent="0" marL="0">
+              <a:buNone/>
+            </a:pPr>
+            <a:r>
+              <a:rPr lang="en-US" sz="1300" b="1" dirty="0">
+                <a:solidFill>
+                  <a:srgbClr val="1D1D1F"/>
+                </a:solidFill>
+                <a:latin typeface="Arial" pitchFamily="34" charset="0"/>
+                <a:ea typeface="Arial" pitchFamily="34" charset="-122"/>
+                <a:cs typeface="Arial" pitchFamily="34" charset="-120"/>
+              </a:rPr>
+              <a:t>La Sucrerie, et son salon Tchap
+</a:t>
+            </a:r>
+            <a:pPr indent="0" marL="0">
+              <a:buNone/>
+            </a:pPr>
+            <a:r>
+              <a:rPr lang="en-US" sz="1100" u="sng" dirty="0">
+                <a:solidFill>
+                  <a:srgbClr val="0056B3"/>
+                </a:solidFill>
+                <a:latin typeface="Arial" pitchFamily="34" charset="0"/>
+                <a:ea typeface="Arial" pitchFamily="34" charset="-122"/>
+                <a:cs typeface="Arial" pitchFamily="34" charset="-120"/>
+                <a:hlinkClick r:id="rId6" invalidUrl="" action="" tgtFrame="" tooltip="https://sucrerie.forge.apps.education.fr/" history="1" highlightClick="0" endSnd="0">
+                  <a:extLst>
+                    <a:ext uri="{A12FA001-AC4F-418D-AE19-62706E023703}">
+                      <ahyp:hlinkClr xmlns:ahyp="http://schemas.microsoft.com/office/drawing/2018/hyperlinkcolor" val="tx"/>
+                    </a:ext>
+                  </a:extLst>
+                </a:hlinkClick>
+              </a:rPr>
+              <a:t>sucrerie.forge.apps.education.fr</a:t>
+            </a:r>
+            <a:pPr indent="0" marL="0">
+              <a:buNone/>
+            </a:pPr>
+            <a:r>
+              <a:rPr lang="en-US" sz="1100" dirty="0">
+                <a:solidFill>
+                  <a:srgbClr val="6E6E73"/>
+                </a:solidFill>
+                <a:latin typeface="Arial" pitchFamily="34" charset="0"/>
+                <a:ea typeface="Arial" pitchFamily="34" charset="-122"/>
+                <a:cs typeface="Arial" pitchFamily="34" charset="-120"/>
+              </a:rPr>
+              <a:t>  ·  </a:t>
+            </a:r>
+            <a:pPr indent="0" marL="0">
+              <a:buNone/>
+            </a:pPr>
+            <a:r>
+              <a:rPr lang="en-US" sz="1100" u="sng" dirty="0">
+                <a:solidFill>
+                  <a:srgbClr val="0056B3"/>
+                </a:solidFill>
+                <a:latin typeface="Arial" pitchFamily="34" charset="0"/>
+                <a:ea typeface="Arial" pitchFamily="34" charset="-122"/>
+                <a:cs typeface="Arial" pitchFamily="34" charset="-120"/>
+                <a:hlinkClick r:id="rId7" invalidUrl="" action="" tgtFrame="" tooltip="https://edurl.fr/sucrerie-tchap" history="1" highlightClick="0" endSnd="0">
+                  <a:extLst>
+                    <a:ext uri="{A12FA001-AC4F-418D-AE19-62706E023703}">
+                      <ahyp:hlinkClr xmlns:ahyp="http://schemas.microsoft.com/office/drawing/2018/hyperlinkcolor" val="tx"/>
+                    </a:ext>
+                  </a:extLst>
+                </a:hlinkClick>
+              </a:rPr>
+              <a:t>edurl.fr/sucrerie-tchap</a:t>
+            </a:r>
+            <a:endParaRPr lang="en-US" sz="1300" dirty="0"/>
+          </a:p>
+        </p:txBody>
+      </p:sp>
+      <p:sp>
+        <p:nvSpPr>
+          <p:cNvPr id="13" name="Shape 8"/>
+          <p:cNvSpPr/>
+          <p:nvPr/>
+        </p:nvSpPr>
+        <p:spPr>
+          <a:xfrm>
+            <a:off x="822960" y="3163824"/>
+            <a:ext cx="402336" cy="402336"/>
+          </a:xfrm>
+          <a:prstGeom prst="roundRect">
+            <a:avLst>
+              <a:gd name="adj" fmla="val 28000"/>
+            </a:avLst>
+          </a:prstGeom>
+          <a:solidFill>
+            <a:srgbClr val="FFECD4"/>
+          </a:solidFill>
+          <a:ln/>
+        </p:spPr>
+      </p:sp>
+      <p:pic>
+        <p:nvPicPr>
+          <p:cNvPr id="14" name="Image 3" descr="/var/folders/b7/tkzbyvzx72qcg9wb0t1jybvm0000gn/T/diaporama-4ZvB4P/icone-26.png">    </p:cNvPr>
+          <p:cNvPicPr>
+            <a:picLocks noChangeAspect="1"/>
+          </p:cNvPicPr>
+          <p:nvPr/>
+        </p:nvPicPr>
+        <p:blipFill>
+          <a:blip r:embed="rId8"/>
+          <a:stretch>
+            <a:fillRect/>
+          </a:stretch>
+        </p:blipFill>
+        <p:spPr>
+          <a:xfrm>
+            <a:off x="919521" y="3260385"/>
+            <a:ext cx="209215" cy="209215"/>
+          </a:xfrm>
+          <a:prstGeom prst="rect">
+            <a:avLst/>
+          </a:prstGeom>
+        </p:spPr>
+      </p:pic>
+      <p:sp>
+        <p:nvSpPr>
+          <p:cNvPr id="15" name="Text 9"/>
+          <p:cNvSpPr txBox="1"/>
+          <p:nvPr/>
+        </p:nvSpPr>
+        <p:spPr>
+          <a:xfrm>
+            <a:off x="1417320" y="3108960"/>
+            <a:ext cx="6492240" cy="475488"/>
+          </a:xfrm>
+          <a:prstGeom prst="rect">
+            <a:avLst/>
+          </a:prstGeom>
+          <a:noFill/>
+          <a:ln/>
+        </p:spPr>
+        <p:txBody>
+          <a:bodyPr wrap="square" lIns="0" tIns="0" rIns="0" bIns="0" rtlCol="0" anchor="t"/>
+          <a:lstStyle/>
+          <a:p>
+            <a:pPr indent="0" marL="0">
+              <a:buNone/>
+            </a:pPr>
+            <a:r>
+              <a:rPr lang="en-US" sz="1300" b="1" dirty="0">
+                <a:solidFill>
+                  <a:srgbClr val="1D1D1F"/>
+                </a:solidFill>
+                <a:latin typeface="Arial" pitchFamily="34" charset="0"/>
+                <a:ea typeface="Arial" pitchFamily="34" charset="-122"/>
+                <a:cs typeface="Arial" pitchFamily="34" charset="-120"/>
+              </a:rPr>
+              <a:t>Le wiki : le guide complet
+</a:t>
+            </a:r>
+            <a:pPr indent="0" marL="0">
+              <a:buNone/>
+            </a:pPr>
+            <a:r>
+              <a:rPr lang="en-US" sz="1100" u="sng" dirty="0">
+                <a:solidFill>
+                  <a:srgbClr val="0056B3"/>
+                </a:solidFill>
+                <a:latin typeface="Arial" pitchFamily="34" charset="0"/>
+                <a:ea typeface="Arial" pitchFamily="34" charset="-122"/>
+                <a:cs typeface="Arial" pitchFamily="34" charset="-120"/>
+                <a:hlinkClick r:id="rId9" invalidUrl="" action="" tgtFrame="" tooltip="https://forge.apps.education.fr/caramel/caramel/-/wikis/home" history="1" highlightClick="0" endSnd="0">
+                  <a:extLst>
+                    <a:ext uri="{A12FA001-AC4F-418D-AE19-62706E023703}">
+                      <ahyp:hlinkClr xmlns:ahyp="http://schemas.microsoft.com/office/drawing/2018/hyperlinkcolor" val="tx"/>
+                    </a:ext>
+                  </a:extLst>
+                </a:hlinkClick>
+              </a:rPr>
+              <a:t>forge.apps.education.fr/caramel/caramel/-/wikis/home</a:t>
+            </a:r>
+            <a:endParaRPr lang="en-US" sz="1300" dirty="0"/>
+          </a:p>
+        </p:txBody>
+      </p:sp>
+      <p:sp>
+        <p:nvSpPr>
+          <p:cNvPr id="16" name="Shape 10"/>
+          <p:cNvSpPr/>
+          <p:nvPr/>
+        </p:nvSpPr>
+        <p:spPr>
+          <a:xfrm>
+            <a:off x="822960" y="3685032"/>
+            <a:ext cx="402336" cy="402336"/>
+          </a:xfrm>
+          <a:prstGeom prst="roundRect">
+            <a:avLst>
+              <a:gd name="adj" fmla="val 28000"/>
+            </a:avLst>
+          </a:prstGeom>
+          <a:solidFill>
+            <a:srgbClr val="FFECD4"/>
+          </a:solidFill>
+          <a:ln/>
+        </p:spPr>
+      </p:sp>
+      <p:pic>
+        <p:nvPicPr>
+          <p:cNvPr id="17" name="Image 4" descr="/var/folders/b7/tkzbyvzx72qcg9wb0t1jybvm0000gn/T/diaporama-4ZvB4P/icone-27.png">    </p:cNvPr>
+          <p:cNvPicPr>
+            <a:picLocks noChangeAspect="1"/>
+          </p:cNvPicPr>
+          <p:nvPr/>
+        </p:nvPicPr>
+        <p:blipFill>
+          <a:blip r:embed="rId10"/>
+          <a:stretch>
+            <a:fillRect/>
+          </a:stretch>
+        </p:blipFill>
+        <p:spPr>
+          <a:xfrm>
+            <a:off x="919521" y="3781593"/>
+            <a:ext cx="209215" cy="209215"/>
+          </a:xfrm>
+          <a:prstGeom prst="rect">
+            <a:avLst/>
+          </a:prstGeom>
+        </p:spPr>
+      </p:pic>
+      <p:sp>
+        <p:nvSpPr>
+          <p:cNvPr id="18" name="Text 11"/>
+          <p:cNvSpPr txBox="1"/>
+          <p:nvPr/>
+        </p:nvSpPr>
+        <p:spPr>
+          <a:xfrm>
+            <a:off x="1417320" y="3630168"/>
+            <a:ext cx="6492240" cy="475488"/>
+          </a:xfrm>
+          <a:prstGeom prst="rect">
+            <a:avLst/>
+          </a:prstGeom>
+          <a:noFill/>
+          <a:ln/>
+        </p:spPr>
+        <p:txBody>
+          <a:bodyPr wrap="square" lIns="0" tIns="0" rIns="0" bIns="0" rtlCol="0" anchor="t"/>
+          <a:lstStyle/>
+          <a:p>
+            <a:pPr indent="0" marL="0">
+              <a:buNone/>
+            </a:pPr>
+            <a:r>
+              <a:rPr lang="en-US" sz="1300" b="1" dirty="0">
+                <a:solidFill>
+                  <a:srgbClr val="1D1D1F"/>
+                </a:solidFill>
+                <a:latin typeface="Arial" pitchFamily="34" charset="0"/>
+                <a:ea typeface="Arial" pitchFamily="34" charset="-122"/>
+                <a:cs typeface="Arial" pitchFamily="34" charset="-120"/>
+              </a:rPr>
+              <a:t>Le salon Tchap de Caramel
+</a:t>
+            </a:r>
+            <a:pPr indent="0" marL="0">
+              <a:buNone/>
+            </a:pPr>
+            <a:r>
+              <a:rPr lang="en-US" sz="1100" u="sng" dirty="0">
+                <a:solidFill>
+                  <a:srgbClr val="0056B3"/>
+                </a:solidFill>
+                <a:latin typeface="Arial" pitchFamily="34" charset="0"/>
+                <a:ea typeface="Arial" pitchFamily="34" charset="-122"/>
+                <a:cs typeface="Arial" pitchFamily="34" charset="-120"/>
+                <a:hlinkClick r:id="rId11" invalidUrl="" action="" tgtFrame="" tooltip="https://edurl.fr/caramel-tchap" history="1" highlightClick="0" endSnd="0">
+                  <a:extLst>
+                    <a:ext uri="{A12FA001-AC4F-418D-AE19-62706E023703}">
+                      <ahyp:hlinkClr xmlns:ahyp="http://schemas.microsoft.com/office/drawing/2018/hyperlinkcolor" val="tx"/>
+                    </a:ext>
+                  </a:extLst>
+                </a:hlinkClick>
+              </a:rPr>
+              <a:t>edurl.fr/caramel-tchap</a:t>
+            </a:r>
+            <a:endParaRPr lang="en-US" sz="1300" dirty="0"/>
+          </a:p>
+        </p:txBody>
+      </p:sp>
+      <p:sp>
+        <p:nvSpPr>
+          <p:cNvPr id="19" name="Shape 12"/>
+          <p:cNvSpPr/>
+          <p:nvPr/>
+        </p:nvSpPr>
+        <p:spPr>
+          <a:xfrm>
+            <a:off x="822960" y="4206240"/>
+            <a:ext cx="402336" cy="402336"/>
+          </a:xfrm>
+          <a:prstGeom prst="roundRect">
+            <a:avLst>
+              <a:gd name="adj" fmla="val 28000"/>
+            </a:avLst>
+          </a:prstGeom>
+          <a:solidFill>
+            <a:srgbClr val="FFECD4"/>
+          </a:solidFill>
+          <a:ln/>
+        </p:spPr>
+      </p:sp>
+      <p:pic>
+        <p:nvPicPr>
+          <p:cNvPr id="20" name="Image 5" descr="/var/folders/b7/tkzbyvzx72qcg9wb0t1jybvm0000gn/T/diaporama-4ZvB4P/icone-31.png">    </p:cNvPr>
+          <p:cNvPicPr>
+            <a:picLocks noChangeAspect="1"/>
+          </p:cNvPicPr>
+          <p:nvPr/>
+        </p:nvPicPr>
+        <p:blipFill>
+          <a:blip r:embed="rId12"/>
+          <a:stretch>
+            <a:fillRect/>
+          </a:stretch>
+        </p:blipFill>
+        <p:spPr>
+          <a:xfrm>
+            <a:off x="919521" y="4302801"/>
+            <a:ext cx="209215" cy="209215"/>
+          </a:xfrm>
+          <a:prstGeom prst="rect">
+            <a:avLst/>
+          </a:prstGeom>
+        </p:spPr>
+      </p:pic>
+      <p:sp>
+        <p:nvSpPr>
+          <p:cNvPr id="21" name="Text 13"/>
+          <p:cNvSpPr txBox="1"/>
+          <p:nvPr/>
+        </p:nvSpPr>
+        <p:spPr>
+          <a:xfrm>
+            <a:off x="1417320" y="4151376"/>
+            <a:ext cx="6492240" cy="475488"/>
+          </a:xfrm>
+          <a:prstGeom prst="rect">
+            <a:avLst/>
+          </a:prstGeom>
+          <a:noFill/>
+          <a:ln/>
+        </p:spPr>
+        <p:txBody>
+          <a:bodyPr wrap="square" lIns="0" tIns="0" rIns="0" bIns="0" rtlCol="0" anchor="t"/>
+          <a:lstStyle/>
+          <a:p>
+            <a:pPr indent="0" marL="0">
+              <a:buNone/>
+            </a:pPr>
+            <a:r>
+              <a:rPr lang="en-US" sz="1300" b="1" dirty="0">
+                <a:solidFill>
+                  <a:srgbClr val="1D1D1F"/>
+                </a:solidFill>
+                <a:latin typeface="Arial" pitchFamily="34" charset="0"/>
+                <a:ea typeface="Arial" pitchFamily="34" charset="-122"/>
+                <a:cs typeface="Arial" pitchFamily="34" charset="-120"/>
+              </a:rPr>
+              <a:t>La vidéo « Caramel 7 » (Podeduc)
+</a:t>
+            </a:r>
+            <a:pPr indent="0" marL="0">
+              <a:buNone/>
+            </a:pPr>
+            <a:r>
+              <a:rPr lang="en-US" sz="1100" u="sng" dirty="0">
+                <a:solidFill>
+                  <a:srgbClr val="0056B3"/>
+                </a:solidFill>
+                <a:latin typeface="Arial" pitchFamily="34" charset="0"/>
+                <a:ea typeface="Arial" pitchFamily="34" charset="-122"/>
+                <a:cs typeface="Arial" pitchFamily="34" charset="-120"/>
+                <a:hlinkClick r:id="rId13" invalidUrl="" action="" tgtFrame="" tooltip="https://podeduc.apps.education.fr/video/161411-caramel-7/" history="1" highlightClick="0" endSnd="0">
+                  <a:extLst>
+                    <a:ext uri="{A12FA001-AC4F-418D-AE19-62706E023703}">
+                      <ahyp:hlinkClr xmlns:ahyp="http://schemas.microsoft.com/office/drawing/2018/hyperlinkcolor" val="tx"/>
+                    </a:ext>
+                  </a:extLst>
+                </a:hlinkClick>
+              </a:rPr>
+              <a:t>podeduc.apps.education.fr/video/161411-caramel-7</a:t>
+            </a:r>
+            <a:endParaRPr lang="en-US" sz="1300" dirty="0"/>
+          </a:p>
+        </p:txBody>
+      </p:sp>
+      <p:sp>
+        <p:nvSpPr>
+          <p:cNvPr id="22" name="Shape 14"/>
+          <p:cNvSpPr/>
+          <p:nvPr/>
+        </p:nvSpPr>
+        <p:spPr>
+          <a:xfrm>
+            <a:off x="822960" y="4727448"/>
+            <a:ext cx="402336" cy="402336"/>
+          </a:xfrm>
+          <a:prstGeom prst="roundRect">
+            <a:avLst>
+              <a:gd name="adj" fmla="val 28000"/>
+            </a:avLst>
+          </a:prstGeom>
+          <a:solidFill>
+            <a:srgbClr val="FFECD4"/>
+          </a:solidFill>
+          <a:ln/>
+        </p:spPr>
+      </p:sp>
+      <p:pic>
+        <p:nvPicPr>
+          <p:cNvPr id="23" name="Image 6" descr="/var/folders/b7/tkzbyvzx72qcg9wb0t1jybvm0000gn/T/diaporama-4ZvB4P/icone-28.png">    </p:cNvPr>
+          <p:cNvPicPr>
+            <a:picLocks noChangeAspect="1"/>
+          </p:cNvPicPr>
+          <p:nvPr/>
+        </p:nvPicPr>
+        <p:blipFill>
+          <a:blip r:embed="rId14"/>
+          <a:stretch>
+            <a:fillRect/>
+          </a:stretch>
+        </p:blipFill>
+        <p:spPr>
+          <a:xfrm>
+            <a:off x="919521" y="4824009"/>
+            <a:ext cx="209215" cy="209215"/>
+          </a:xfrm>
+          <a:prstGeom prst="rect">
+            <a:avLst/>
+          </a:prstGeom>
+        </p:spPr>
+      </p:pic>
+      <p:sp>
+        <p:nvSpPr>
+          <p:cNvPr id="24" name="Text 15"/>
+          <p:cNvSpPr txBox="1"/>
+          <p:nvPr/>
+        </p:nvSpPr>
+        <p:spPr>
+          <a:xfrm>
+            <a:off x="1417320" y="4672584"/>
+            <a:ext cx="6492240" cy="475488"/>
+          </a:xfrm>
+          <a:prstGeom prst="rect">
+            <a:avLst/>
+          </a:prstGeom>
+          <a:noFill/>
+          <a:ln/>
+        </p:spPr>
+        <p:txBody>
+          <a:bodyPr wrap="square" lIns="0" tIns="0" rIns="0" bIns="0" rtlCol="0" anchor="t"/>
+          <a:lstStyle/>
+          <a:p>
+            <a:pPr indent="0" marL="0">
+              <a:buNone/>
+            </a:pPr>
+            <a:r>
+              <a:rPr lang="en-US" sz="1300" b="1" dirty="0">
+                <a:solidFill>
+                  <a:srgbClr val="1D1D1F"/>
+                </a:solidFill>
+                <a:latin typeface="Arial" pitchFamily="34" charset="0"/>
+                <a:ea typeface="Arial" pitchFamily="34" charset="-122"/>
+                <a:cs typeface="Arial" pitchFamily="34" charset="-120"/>
+              </a:rPr>
+              <a:t>Le code, les tickets, les nouveautés de chaque version
+</a:t>
+            </a:r>
+            <a:pPr indent="0" marL="0">
+              <a:buNone/>
+            </a:pPr>
+            <a:r>
+              <a:rPr lang="en-US" sz="1100" u="sng" dirty="0">
+                <a:solidFill>
+                  <a:srgbClr val="0056B3"/>
+                </a:solidFill>
+                <a:latin typeface="Arial" pitchFamily="34" charset="0"/>
+                <a:ea typeface="Arial" pitchFamily="34" charset="-122"/>
+                <a:cs typeface="Arial" pitchFamily="34" charset="-120"/>
+                <a:hlinkClick r:id="rId15" invalidUrl="" action="" tgtFrame="" tooltip="https://forge.apps.education.fr/caramel/caramel" history="1" highlightClick="0" endSnd="0">
+                  <a:extLst>
+                    <a:ext uri="{A12FA001-AC4F-418D-AE19-62706E023703}">
+                      <ahyp:hlinkClr xmlns:ahyp="http://schemas.microsoft.com/office/drawing/2018/hyperlinkcolor" val="tx"/>
+                    </a:ext>
+                  </a:extLst>
+                </a:hlinkClick>
+              </a:rPr>
+              <a:t>forge.apps.education.fr/caramel/caramel</a:t>
+            </a:r>
+            <a:endParaRPr lang="en-US" sz="1300" dirty="0"/>
+          </a:p>
+        </p:txBody>
+      </p:sp>
+      <p:sp>
+        <p:nvSpPr>
+          <p:cNvPr id="25" name="Shape 16"/>
+          <p:cNvSpPr/>
+          <p:nvPr/>
+        </p:nvSpPr>
+        <p:spPr>
+          <a:xfrm>
+            <a:off x="822960" y="5248656"/>
+            <a:ext cx="402336" cy="402336"/>
+          </a:xfrm>
+          <a:prstGeom prst="roundRect">
+            <a:avLst>
+              <a:gd name="adj" fmla="val 28000"/>
+            </a:avLst>
+          </a:prstGeom>
+          <a:solidFill>
+            <a:srgbClr val="FFECD4"/>
+          </a:solidFill>
+          <a:ln/>
+        </p:spPr>
+      </p:sp>
+      <p:pic>
+        <p:nvPicPr>
+          <p:cNvPr id="26" name="Image 7" descr="/var/folders/b7/tkzbyvzx72qcg9wb0t1jybvm0000gn/T/diaporama-4ZvB4P/icone-22.png">    </p:cNvPr>
+          <p:cNvPicPr>
+            <a:picLocks noChangeAspect="1"/>
+          </p:cNvPicPr>
+          <p:nvPr/>
+        </p:nvPicPr>
+        <p:blipFill>
+          <a:blip r:embed="rId16"/>
+          <a:stretch>
+            <a:fillRect/>
+          </a:stretch>
+        </p:blipFill>
+        <p:spPr>
+          <a:xfrm>
+            <a:off x="919521" y="5345217"/>
+            <a:ext cx="209215" cy="209215"/>
+          </a:xfrm>
+          <a:prstGeom prst="rect">
+            <a:avLst/>
+          </a:prstGeom>
+        </p:spPr>
+      </p:pic>
+      <p:sp>
+        <p:nvSpPr>
+          <p:cNvPr id="27" name="Text 17"/>
+          <p:cNvSpPr txBox="1"/>
+          <p:nvPr/>
+        </p:nvSpPr>
+        <p:spPr>
+          <a:xfrm>
+            <a:off x="1417320" y="5193792"/>
+            <a:ext cx="6492240" cy="475488"/>
+          </a:xfrm>
+          <a:prstGeom prst="rect">
+            <a:avLst/>
+          </a:prstGeom>
+          <a:noFill/>
+          <a:ln/>
+        </p:spPr>
+        <p:txBody>
+          <a:bodyPr wrap="square" lIns="0" tIns="0" rIns="0" bIns="0" rtlCol="0" anchor="t"/>
+          <a:lstStyle/>
+          <a:p>
+            <a:pPr indent="0" marL="0">
+              <a:buNone/>
+            </a:pPr>
+            <a:r>
+              <a:rPr lang="en-US" sz="1300" b="1" dirty="0">
+                <a:solidFill>
+                  <a:srgbClr val="1D1D1F"/>
+                </a:solidFill>
+                <a:latin typeface="Arial" pitchFamily="34" charset="0"/>
+                <a:ea typeface="Arial" pitchFamily="34" charset="-122"/>
+                <a:cs typeface="Arial" pitchFamily="34" charset="-120"/>
+              </a:rPr>
+              <a:t>Le bac à sable : les nouveautés avant tout le monde
+</a:t>
+            </a:r>
+            <a:pPr indent="0" marL="0">
+              <a:buNone/>
+            </a:pPr>
+            <a:r>
+              <a:rPr lang="en-US" sz="1100" u="sng" dirty="0">
+                <a:solidFill>
+                  <a:srgbClr val="0056B3"/>
+                </a:solidFill>
+                <a:latin typeface="Arial" pitchFamily="34" charset="0"/>
+                <a:ea typeface="Arial" pitchFamily="34" charset="-122"/>
+                <a:cs typeface="Arial" pitchFamily="34" charset="-120"/>
+                <a:hlinkClick r:id="rId17" invalidUrl="" action="" tgtFrame="" tooltip="https://caramel.forge.apps.education.fr/bas/" history="1" highlightClick="0" endSnd="0">
+                  <a:extLst>
+                    <a:ext uri="{A12FA001-AC4F-418D-AE19-62706E023703}">
+                      <ahyp:hlinkClr xmlns:ahyp="http://schemas.microsoft.com/office/drawing/2018/hyperlinkcolor" val="tx"/>
+                    </a:ext>
+                  </a:extLst>
+                </a:hlinkClick>
+              </a:rPr>
+              <a:t>caramel.forge.apps.education.fr/bas</a:t>
+            </a:r>
+            <a:endParaRPr lang="en-US" sz="1300" dirty="0"/>
+          </a:p>
+        </p:txBody>
+      </p:sp>
+      <p:sp>
+        <p:nvSpPr>
+          <p:cNvPr id="28" name="Shape 18"/>
+          <p:cNvSpPr/>
+          <p:nvPr/>
+        </p:nvSpPr>
+        <p:spPr>
+          <a:xfrm>
+            <a:off x="8503920" y="1417320"/>
+            <a:ext cx="3139135" cy="2103120"/>
+          </a:xfrm>
+          <a:prstGeom prst="roundRect">
+            <a:avLst>
+              <a:gd name="adj" fmla="val 6957"/>
+            </a:avLst>
+          </a:prstGeom>
+          <a:solidFill>
+            <a:srgbClr val="FFFFFF"/>
+          </a:solidFill>
+          <a:ln w="9525">
+            <a:solidFill>
+              <a:srgbClr val="E5E5EA"/>
+            </a:solidFill>
+            <a:prstDash val="solid"/>
+          </a:ln>
+          <a:effectLst>
+            <a:outerShdw sx="100000" sy="100000" kx="0" ky="0" algn="bl" rotWithShape="0" blurRad="114300" dist="25400" dir="5400000">
+              <a:srgbClr val="000000">
+                <a:alpha val="9000"/>
+              </a:srgbClr>
+            </a:outerShdw>
+          </a:effectLst>
+        </p:spPr>
+      </p:sp>
+      <p:pic>
+        <p:nvPicPr>
+          <p:cNvPr id="29" name="Image 8" descr="/var/folders/b7/tkzbyvzx72qcg9wb0t1jybvm0000gn/T/diaporama-4ZvB4P/qr-caramel.png">    </p:cNvPr>
+          <p:cNvPicPr>
+            <a:picLocks noChangeAspect="1"/>
+          </p:cNvPicPr>
+          <p:nvPr/>
+        </p:nvPicPr>
+        <p:blipFill>
+          <a:blip r:embed="rId18"/>
+          <a:stretch>
+            <a:fillRect/>
+          </a:stretch>
+        </p:blipFill>
+        <p:spPr>
+          <a:xfrm>
+            <a:off x="8778240" y="1691640"/>
+            <a:ext cx="1554480" cy="1554480"/>
+          </a:xfrm>
+          <a:prstGeom prst="rect">
+            <a:avLst/>
+          </a:prstGeom>
+        </p:spPr>
+      </p:pic>
+      <p:sp>
+        <p:nvSpPr>
+          <p:cNvPr id="30" name="Text 19"/>
+          <p:cNvSpPr txBox="1"/>
+          <p:nvPr/>
+        </p:nvSpPr>
+        <p:spPr>
+          <a:xfrm>
+            <a:off x="10469880" y="1920240"/>
+            <a:ext cx="1036015" cy="548640"/>
+          </a:xfrm>
+          <a:prstGeom prst="rect">
+            <a:avLst/>
+          </a:prstGeom>
+          <a:noFill/>
+          <a:ln/>
+        </p:spPr>
+        <p:txBody>
+          <a:bodyPr wrap="square" lIns="0" tIns="0" rIns="0" bIns="0" rtlCol="0" anchor="t"/>
+          <a:lstStyle/>
+          <a:p>
+            <a:pPr indent="0" marL="0">
+              <a:buNone/>
+            </a:pPr>
+            <a:r>
+              <a:rPr lang="en-US" sz="1500" b="1" dirty="0">
+                <a:solidFill>
+                  <a:srgbClr val="1D1D1F"/>
+                </a:solidFill>
+                <a:latin typeface="Arial" pitchFamily="34" charset="0"/>
+                <a:ea typeface="Arial" pitchFamily="34" charset="-122"/>
+                <a:cs typeface="Arial" pitchFamily="34" charset="-120"/>
+              </a:rPr>
+              <a:t>Ouvrir Caramel</a:t>
+            </a:r>
+            <a:endParaRPr lang="en-US" sz="1500" dirty="0"/>
+          </a:p>
+        </p:txBody>
+      </p:sp>
+      <p:sp>
+        <p:nvSpPr>
+          <p:cNvPr id="31" name="Text 20"/>
+          <p:cNvSpPr txBox="1"/>
+          <p:nvPr/>
+        </p:nvSpPr>
+        <p:spPr>
+          <a:xfrm>
+            <a:off x="10469880" y="2468880"/>
+            <a:ext cx="1036015" cy="640080"/>
+          </a:xfrm>
+          <a:prstGeom prst="rect">
+            <a:avLst/>
+          </a:prstGeom>
+          <a:noFill/>
+          <a:ln/>
+        </p:spPr>
+        <p:txBody>
+          <a:bodyPr wrap="square" lIns="0" tIns="0" rIns="0" bIns="0" rtlCol="0" anchor="t"/>
+          <a:lstStyle/>
+          <a:p>
+            <a:pPr indent="0" marL="0">
+              <a:buNone/>
+            </a:pPr>
+            <a:r>
+              <a:rPr lang="en-US" sz="1150" dirty="0">
+                <a:solidFill>
+                  <a:srgbClr val="6E6E73"/>
+                </a:solidFill>
+                <a:latin typeface="Arial" pitchFamily="34" charset="0"/>
+                <a:ea typeface="Arial" pitchFamily="34" charset="-122"/>
+                <a:cs typeface="Arial" pitchFamily="34" charset="-120"/>
+              </a:rPr>
+              <a:t>Scannez avec un téléphone ou une tablette.</a:t>
+            </a:r>
+            <a:endParaRPr lang="en-US" sz="1150" dirty="0"/>
+          </a:p>
+        </p:txBody>
+      </p:sp>
+      <p:sp>
+        <p:nvSpPr>
+          <p:cNvPr id="32" name="Shape 21"/>
+          <p:cNvSpPr/>
+          <p:nvPr/>
+        </p:nvSpPr>
+        <p:spPr>
+          <a:xfrm>
+            <a:off x="8503920" y="3749040"/>
+            <a:ext cx="3139135" cy="2103120"/>
+          </a:xfrm>
+          <a:prstGeom prst="roundRect">
+            <a:avLst>
+              <a:gd name="adj" fmla="val 6957"/>
+            </a:avLst>
+          </a:prstGeom>
+          <a:solidFill>
+            <a:srgbClr val="FFFFFF"/>
+          </a:solidFill>
+          <a:ln w="9525">
+            <a:solidFill>
+              <a:srgbClr val="E5E5EA"/>
+            </a:solidFill>
+            <a:prstDash val="solid"/>
+          </a:ln>
+          <a:effectLst>
+            <a:outerShdw sx="100000" sy="100000" kx="0" ky="0" algn="bl" rotWithShape="0" blurRad="114300" dist="25400" dir="5400000">
+              <a:srgbClr val="000000">
+                <a:alpha val="9000"/>
+              </a:srgbClr>
+            </a:outerShdw>
+          </a:effectLst>
+        </p:spPr>
+      </p:sp>
+      <p:pic>
+        <p:nvPicPr>
+          <p:cNvPr id="33" name="Image 9" descr="/var/folders/b7/tkzbyvzx72qcg9wb0t1jybvm0000gn/T/diaporama-4ZvB4P/qr-decouvrir.png">    </p:cNvPr>
+          <p:cNvPicPr>
+            <a:picLocks noChangeAspect="1"/>
+          </p:cNvPicPr>
+          <p:nvPr/>
+        </p:nvPicPr>
+        <p:blipFill>
+          <a:blip r:embed="rId19"/>
+          <a:stretch>
+            <a:fillRect/>
+          </a:stretch>
+        </p:blipFill>
+        <p:spPr>
+          <a:xfrm>
+            <a:off x="8778240" y="4023360"/>
+            <a:ext cx="1554480" cy="1554480"/>
+          </a:xfrm>
+          <a:prstGeom prst="rect">
+            <a:avLst/>
+          </a:prstGeom>
+        </p:spPr>
+      </p:pic>
+      <p:sp>
+        <p:nvSpPr>
+          <p:cNvPr id="34" name="Text 22"/>
+          <p:cNvSpPr txBox="1"/>
+          <p:nvPr/>
+        </p:nvSpPr>
+        <p:spPr>
+          <a:xfrm>
+            <a:off x="10469880" y="4251960"/>
+            <a:ext cx="1036015" cy="548640"/>
+          </a:xfrm>
+          <a:prstGeom prst="rect">
+            <a:avLst/>
+          </a:prstGeom>
+          <a:noFill/>
+          <a:ln/>
+        </p:spPr>
+        <p:txBody>
+          <a:bodyPr wrap="square" lIns="0" tIns="0" rIns="0" bIns="0" rtlCol="0" anchor="t"/>
+          <a:lstStyle/>
+          <a:p>
+            <a:pPr indent="0" marL="0">
+              <a:buNone/>
+            </a:pPr>
+            <a:r>
+              <a:rPr lang="en-US" sz="1500" b="1" dirty="0">
+                <a:solidFill>
+                  <a:srgbClr val="1D1D1F"/>
+                </a:solidFill>
+                <a:latin typeface="Arial" pitchFamily="34" charset="0"/>
+                <a:ea typeface="Arial" pitchFamily="34" charset="-122"/>
+                <a:cs typeface="Arial" pitchFamily="34" charset="-120"/>
+              </a:rPr>
+              <a:t>Découvrir Caramel</a:t>
+            </a:r>
+            <a:endParaRPr lang="en-US" sz="1500" dirty="0"/>
+          </a:p>
+        </p:txBody>
+      </p:sp>
+      <p:sp>
+        <p:nvSpPr>
+          <p:cNvPr id="35" name="Text 23"/>
+          <p:cNvSpPr txBox="1"/>
+          <p:nvPr/>
+        </p:nvSpPr>
+        <p:spPr>
+          <a:xfrm>
+            <a:off x="10469880" y="4800600"/>
+            <a:ext cx="1036015" cy="640080"/>
+          </a:xfrm>
+          <a:prstGeom prst="rect">
+            <a:avLst/>
+          </a:prstGeom>
+          <a:noFill/>
+          <a:ln/>
+        </p:spPr>
+        <p:txBody>
+          <a:bodyPr wrap="square" lIns="0" tIns="0" rIns="0" bIns="0" rtlCol="0" anchor="t"/>
+          <a:lstStyle/>
+          <a:p>
+            <a:pPr indent="0" marL="0">
+              <a:buNone/>
+            </a:pPr>
+            <a:r>
+              <a:rPr lang="en-US" sz="1150" dirty="0">
+                <a:solidFill>
+                  <a:srgbClr val="6E6E73"/>
+                </a:solidFill>
+                <a:latin typeface="Arial" pitchFamily="34" charset="0"/>
+                <a:ea typeface="Arial" pitchFamily="34" charset="-122"/>
+                <a:cs typeface="Arial" pitchFamily="34" charset="-120"/>
+              </a:rPr>
+              <a:t>Scannez avec un téléphone ou une tablette.</a:t>
+            </a:r>
+            <a:endParaRPr lang="en-US" sz="1150" dirty="0"/>
+          </a:p>
+        </p:txBody>
+      </p:sp>
+      <p:sp>
+        <p:nvSpPr>
+          <p:cNvPr id="36" name="Text 24"/>
+          <p:cNvSpPr txBox="1"/>
+          <p:nvPr/>
+        </p:nvSpPr>
+        <p:spPr>
+          <a:xfrm>
+            <a:off x="548640" y="6419088"/>
+            <a:ext cx="5486400" cy="237744"/>
+          </a:xfrm>
+          <a:prstGeom prst="rect">
+            <a:avLst/>
+          </a:prstGeom>
+          <a:noFill/>
+          <a:ln/>
+        </p:spPr>
+        <p:txBody>
+          <a:bodyPr wrap="square" lIns="0" tIns="0" rIns="0" bIns="0" rtlCol="0" anchor="t"/>
+          <a:lstStyle/>
+          <a:p>
+            <a:pPr indent="0" marL="0">
+              <a:buNone/>
+            </a:pPr>
+            <a:r>
+              <a:rPr lang="en-US" sz="900" dirty="0">
+                <a:solidFill>
+                  <a:srgbClr val="6E6E73"/>
+                </a:solidFill>
+                <a:latin typeface="Arial" pitchFamily="34" charset="0"/>
+                <a:ea typeface="Arial" pitchFamily="34" charset="-122"/>
+                <a:cs typeface="Arial" pitchFamily="34" charset="-120"/>
+              </a:rPr>
+              <a:t>Caramel v7.1.0 · Présentation · septembre 2026</a:t>
+            </a:r>
+            <a:endParaRPr lang="en-US" sz="900" dirty="0"/>
+          </a:p>
+        </p:txBody>
+      </p:sp>
+      <p:sp>
+        <p:nvSpPr>
+          <p:cNvPr id="37" name="Text 25"/>
+          <p:cNvSpPr txBox="1"/>
+          <p:nvPr/>
+        </p:nvSpPr>
+        <p:spPr>
+          <a:xfrm>
+            <a:off x="10271455" y="6419088"/>
+            <a:ext cx="1371600" cy="237744"/>
+          </a:xfrm>
+          <a:prstGeom prst="rect">
+            <a:avLst/>
+          </a:prstGeom>
+          <a:noFill/>
+          <a:ln/>
+        </p:spPr>
+        <p:txBody>
+          <a:bodyPr wrap="square" lIns="0" tIns="0" rIns="0" bIns="0" rtlCol="0" anchor="t"/>
+          <a:lstStyle/>
+          <a:p>
+            <a:pPr algn="r" indent="0" marL="0">
+              <a:buNone/>
+            </a:pPr>
+            <a:r>
+              <a:rPr lang="en-US" sz="900" dirty="0">
+                <a:solidFill>
+                  <a:srgbClr val="6E6E73"/>
+                </a:solidFill>
+                <a:latin typeface="Arial" pitchFamily="34" charset="0"/>
+                <a:ea typeface="Arial" pitchFamily="34" charset="-122"/>
+                <a:cs typeface="Arial" pitchFamily="34" charset="-120"/>
+              </a:rPr>
+              <a:t>24 / 25</a:t>
+            </a:r>
+            <a:endParaRPr lang="en-US" sz="900" dirty="0"/>
+          </a:p>
+        </p:txBody>
+      </p:sp>
+    </p:spTree>
+  </p:cSld>
+  <p:clrMapOvr>
+    <a:masterClrMapping/>
+  </p:clrMapOvr>
+</p:sld>
+</file>
+
+<file path=ppt/slides/slide25.xml><?xml version="1.0" encoding="utf-8"?>
+<p:sld xmlns:a="http://schemas.openxmlformats.org/drawingml/2006/main" xmlns:r="http://schemas.openxmlformats.org/officeDocument/2006/relationships" xmlns:p="http://schemas.openxmlformats.org/presentationml/2006/main">
+  <p:cSld name="Slide 25">
     <p:bg>
       <p:bgPr>
         <a:solidFill>
@@ -15637,7 +16184,7 @@
       </p:grpSpPr>
       <p:pic>
         <p:nvPicPr>
-          <p:cNvPr id="2" name="Image 0" descr="/var/folders/b7/tkzbyvzx72qcg9wb0t1jybvm0000gn/T/diaporama-zLbeHS/logo-caramel.png">    </p:cNvPr>
+          <p:cNvPr id="2" name="Image 0" descr="/var/folders/b7/tkzbyvzx72qcg9wb0t1jybvm0000gn/T/diaporama-4ZvB4P/logo-caramel.png">    </p:cNvPr>
           <p:cNvPicPr>
             <a:picLocks noChangeAspect="1"/>
           </p:cNvPicPr>
@@ -15739,7 +16286,7 @@
       </p:sp>
       <p:pic>
         <p:nvPicPr>
-          <p:cNvPr id="5" name="Image 1" descr="/var/folders/b7/tkzbyvzx72qcg9wb0t1jybvm0000gn/T/diaporama-zLbeHS/qr-caramel.png">    </p:cNvPr>
+          <p:cNvPr id="5" name="Image 1" descr="/var/folders/b7/tkzbyvzx72qcg9wb0t1jybvm0000gn/T/diaporama-4ZvB4P/qr-caramel.png">    </p:cNvPr>
           <p:cNvPicPr>
             <a:picLocks noChangeAspect="1"/>
           </p:cNvPicPr>
@@ -15935,7 +16482,7 @@
                 <a:ea typeface="Arial" pitchFamily="34" charset="-122"/>
                 <a:cs typeface="Arial" pitchFamily="34" charset="-120"/>
               </a:rPr>
-              <a:t>Caramel v7.0.1 · support mis à jour le 30 septembre 2026</a:t>
+              <a:t>Caramel v7.1.0 · support mis à jour le 30 septembre 2026</a:t>
             </a:r>
             <a:endParaRPr lang="en-US" sz="1100" dirty="0"/>
           </a:p>
@@ -16204,7 +16751,7 @@
       </p:sp>
       <p:pic>
         <p:nvPicPr>
-          <p:cNvPr id="8" name="Image 0" descr="/var/folders/b7/tkzbyvzx72qcg9wb0t1jybvm0000gn/T/diaporama-zLbeHS/icone-35.png">    </p:cNvPr>
+          <p:cNvPr id="8" name="Image 0" descr="/var/folders/b7/tkzbyvzx72qcg9wb0t1jybvm0000gn/T/diaporama-4ZvB4P/icone-35.png">    </p:cNvPr>
           <p:cNvPicPr>
             <a:picLocks noChangeAspect="1"/>
           </p:cNvPicPr>
@@ -16379,7 +16926,7 @@
       </p:sp>
       <p:pic>
         <p:nvPicPr>
-          <p:cNvPr id="13" name="Image 1" descr="/var/folders/b7/tkzbyvzx72qcg9wb0t1jybvm0000gn/T/diaporama-zLbeHS/icone-35.png">    </p:cNvPr>
+          <p:cNvPr id="13" name="Image 1" descr="/var/folders/b7/tkzbyvzx72qcg9wb0t1jybvm0000gn/T/diaporama-4ZvB4P/icone-35.png">    </p:cNvPr>
           <p:cNvPicPr>
             <a:picLocks noChangeAspect="1"/>
           </p:cNvPicPr>
@@ -16903,7 +17450,7 @@
                 <a:ea typeface="Arial" pitchFamily="34" charset="-122"/>
                 <a:cs typeface="Arial" pitchFamily="34" charset="-120"/>
               </a:rPr>
-              <a:t>Caramel v7.0.1 · Présentation · septembre 2026</a:t>
+              <a:t>Caramel v7.1.0 · Présentation · septembre 2026</a:t>
             </a:r>
             <a:endParaRPr lang="en-US" sz="900" dirty="0"/>
           </a:p>
@@ -16942,7 +17489,7 @@
                 <a:ea typeface="Arial" pitchFamily="34" charset="-122"/>
                 <a:cs typeface="Arial" pitchFamily="34" charset="-120"/>
               </a:rPr>
-              <a:t>3 / 24</a:t>
+              <a:t>3 / 25</a:t>
             </a:r>
             <a:endParaRPr lang="en-US" sz="900" dirty="0"/>
           </a:p>
@@ -18423,7 +18970,7 @@
                 <a:ea typeface="Arial" pitchFamily="34" charset="-122"/>
                 <a:cs typeface="Arial" pitchFamily="34" charset="-120"/>
               </a:rPr>
-              <a:t>Caramel v7.0.1 · Présentation · septembre 2026</a:t>
+              <a:t>Caramel v7.1.0 · Présentation · septembre 2026</a:t>
             </a:r>
             <a:endParaRPr lang="en-US" sz="900" dirty="0"/>
           </a:p>
@@ -18462,7 +19009,7 @@
                 <a:ea typeface="Arial" pitchFamily="34" charset="-122"/>
                 <a:cs typeface="Arial" pitchFamily="34" charset="-120"/>
               </a:rPr>
-              <a:t>4 / 24</a:t>
+              <a:t>4 / 25</a:t>
             </a:r>
             <a:endParaRPr lang="en-US" sz="900" dirty="0"/>
           </a:p>
@@ -19256,7 +19803,7 @@
                 <a:ea typeface="Arial" pitchFamily="34" charset="-122"/>
                 <a:cs typeface="Arial" pitchFamily="34" charset="-120"/>
               </a:rPr>
-              <a:t>Caramel v7.0.1 · Présentation · septembre 2026</a:t>
+              <a:t>Caramel v7.1.0 · Présentation · septembre 2026</a:t>
             </a:r>
             <a:endParaRPr lang="en-US" sz="900" dirty="0"/>
           </a:p>
@@ -19295,7 +19842,7 @@
                 <a:ea typeface="Arial" pitchFamily="34" charset="-122"/>
                 <a:cs typeface="Arial" pitchFamily="34" charset="-120"/>
               </a:rPr>
-              <a:t>5 / 24</a:t>
+              <a:t>5 / 25</a:t>
             </a:r>
             <a:endParaRPr lang="en-US" sz="900" dirty="0"/>
           </a:p>
@@ -19508,7 +20055,7 @@
       </p:sp>
       <p:pic>
         <p:nvPicPr>
-          <p:cNvPr id="7" name="Image 0" descr="/var/folders/b7/tkzbyvzx72qcg9wb0t1jybvm0000gn/T/diaporama-zLbeHS/icone-0.png">    </p:cNvPr>
+          <p:cNvPr id="7" name="Image 0" descr="/var/folders/b7/tkzbyvzx72qcg9wb0t1jybvm0000gn/T/diaporama-4ZvB4P/icone-0.png">    </p:cNvPr>
           <p:cNvPicPr>
             <a:picLocks noChangeAspect="1"/>
           </p:cNvPicPr>
@@ -19721,7 +20268,7 @@
       </p:sp>
       <p:pic>
         <p:nvPicPr>
-          <p:cNvPr id="12" name="Image 1" descr="/var/folders/b7/tkzbyvzx72qcg9wb0t1jybvm0000gn/T/diaporama-zLbeHS/icone-1.png">    </p:cNvPr>
+          <p:cNvPr id="12" name="Image 1" descr="/var/folders/b7/tkzbyvzx72qcg9wb0t1jybvm0000gn/T/diaporama-4ZvB4P/icone-1.png">    </p:cNvPr>
           <p:cNvPicPr>
             <a:picLocks noChangeAspect="1"/>
           </p:cNvPicPr>
@@ -19934,7 +20481,7 @@
       </p:sp>
       <p:pic>
         <p:nvPicPr>
-          <p:cNvPr id="17" name="Image 2" descr="/var/folders/b7/tkzbyvzx72qcg9wb0t1jybvm0000gn/T/diaporama-zLbeHS/icone-2.png">    </p:cNvPr>
+          <p:cNvPr id="17" name="Image 2" descr="/var/folders/b7/tkzbyvzx72qcg9wb0t1jybvm0000gn/T/diaporama-4ZvB4P/icone-2.png">    </p:cNvPr>
           <p:cNvPicPr>
             <a:picLocks noChangeAspect="1"/>
           </p:cNvPicPr>
@@ -20122,7 +20669,7 @@
                 <a:ea typeface="Arial" pitchFamily="34" charset="-122"/>
                 <a:cs typeface="Arial" pitchFamily="34" charset="-120"/>
               </a:rPr>
-              <a:t>Caramel v7.0.1 · Présentation · septembre 2026</a:t>
+              <a:t>Caramel v7.1.0 · Présentation · septembre 2026</a:t>
             </a:r>
             <a:endParaRPr lang="en-US" sz="900" dirty="0"/>
           </a:p>
@@ -20161,7 +20708,7 @@
                 <a:ea typeface="Arial" pitchFamily="34" charset="-122"/>
                 <a:cs typeface="Arial" pitchFamily="34" charset="-120"/>
               </a:rPr>
-              <a:t>6 / 24</a:t>
+              <a:t>6 / 25</a:t>
             </a:r>
             <a:endParaRPr lang="en-US" sz="900" dirty="0"/>
           </a:p>
@@ -20335,7 +20882,7 @@
       </p:sp>
       <p:pic>
         <p:nvPicPr>
-          <p:cNvPr id="6" name="Image 0" descr="/var/folders/b7/tkzbyvzx72qcg9wb0t1jybvm0000gn/T/diaporama-zLbeHS/icone-3.png">    </p:cNvPr>
+          <p:cNvPr id="6" name="Image 0" descr="/var/folders/b7/tkzbyvzx72qcg9wb0t1jybvm0000gn/T/diaporama-4ZvB4P/icone-3.png">    </p:cNvPr>
           <p:cNvPicPr>
             <a:picLocks noChangeAspect="1"/>
           </p:cNvPicPr>
@@ -20493,7 +21040,7 @@
       </p:sp>
       <p:pic>
         <p:nvPicPr>
-          <p:cNvPr id="11" name="Image 1" descr="/var/folders/b7/tkzbyvzx72qcg9wb0t1jybvm0000gn/T/diaporama-zLbeHS/icone-4.png">    </p:cNvPr>
+          <p:cNvPr id="11" name="Image 1" descr="/var/folders/b7/tkzbyvzx72qcg9wb0t1jybvm0000gn/T/diaporama-4ZvB4P/icone-4.png">    </p:cNvPr>
           <p:cNvPicPr>
             <a:picLocks noChangeAspect="1"/>
           </p:cNvPicPr>
@@ -20651,7 +21198,7 @@
       </p:sp>
       <p:pic>
         <p:nvPicPr>
-          <p:cNvPr id="16" name="Image 2" descr="/var/folders/b7/tkzbyvzx72qcg9wb0t1jybvm0000gn/T/diaporama-zLbeHS/icone-5.png">    </p:cNvPr>
+          <p:cNvPr id="16" name="Image 2" descr="/var/folders/b7/tkzbyvzx72qcg9wb0t1jybvm0000gn/T/diaporama-4ZvB4P/icone-5.png">    </p:cNvPr>
           <p:cNvPicPr>
             <a:picLocks noChangeAspect="1"/>
           </p:cNvPicPr>
@@ -20837,7 +21384,7 @@
       </p:sp>
       <p:pic>
         <p:nvPicPr>
-          <p:cNvPr id="21" name="Image 3" descr="/var/folders/b7/tkzbyvzx72qcg9wb0t1jybvm0000gn/T/diaporama-zLbeHS/icone-6.png">    </p:cNvPr>
+          <p:cNvPr id="21" name="Image 3" descr="/var/folders/b7/tkzbyvzx72qcg9wb0t1jybvm0000gn/T/diaporama-4ZvB4P/icone-6.png">    </p:cNvPr>
           <p:cNvPicPr>
             <a:picLocks noChangeAspect="1"/>
           </p:cNvPicPr>
@@ -20966,7 +21513,7 @@
       </p:sp>
       <p:pic>
         <p:nvPicPr>
-          <p:cNvPr id="25" name="Image 4" descr="/var/folders/b7/tkzbyvzx72qcg9wb0t1jybvm0000gn/T/diaporama-zLbeHS/icone-7.png">    </p:cNvPr>
+          <p:cNvPr id="25" name="Image 4" descr="/var/folders/b7/tkzbyvzx72qcg9wb0t1jybvm0000gn/T/diaporama-4ZvB4P/icone-7.png">    </p:cNvPr>
           <p:cNvPicPr>
             <a:picLocks noChangeAspect="1"/>
           </p:cNvPicPr>
@@ -21133,7 +21680,7 @@
                 <a:ea typeface="Arial" pitchFamily="34" charset="-122"/>
                 <a:cs typeface="Arial" pitchFamily="34" charset="-120"/>
               </a:rPr>
-              <a:t>Caramel v7.0.1 · Présentation · septembre 2026</a:t>
+              <a:t>Caramel v7.1.0 · Présentation · septembre 2026</a:t>
             </a:r>
             <a:endParaRPr lang="en-US" sz="900" dirty="0"/>
           </a:p>
@@ -21172,7 +21719,7 @@
                 <a:ea typeface="Arial" pitchFamily="34" charset="-122"/>
                 <a:cs typeface="Arial" pitchFamily="34" charset="-120"/>
               </a:rPr>
-              <a:t>7 / 24</a:t>
+              <a:t>7 / 25</a:t>
             </a:r>
             <a:endParaRPr lang="en-US" sz="900" dirty="0"/>
           </a:p>
@@ -21579,7 +22126,7 @@
       </p:sp>
       <p:pic>
         <p:nvPicPr>
-          <p:cNvPr id="12" name="Image 0" descr="/var/folders/b7/tkzbyvzx72qcg9wb0t1jybvm0000gn/T/diaporama-zLbeHS/icone-8.png">    </p:cNvPr>
+          <p:cNvPr id="12" name="Image 0" descr="/var/folders/b7/tkzbyvzx72qcg9wb0t1jybvm0000gn/T/diaporama-4ZvB4P/icone-8.png">    </p:cNvPr>
           <p:cNvPicPr>
             <a:picLocks noChangeAspect="1"/>
           </p:cNvPicPr>
@@ -21787,7 +22334,7 @@
       </p:sp>
       <p:pic>
         <p:nvPicPr>
-          <p:cNvPr id="18" name="Image 1" descr="/var/folders/b7/tkzbyvzx72qcg9wb0t1jybvm0000gn/T/diaporama-zLbeHS/icone-9.png">    </p:cNvPr>
+          <p:cNvPr id="18" name="Image 1" descr="/var/folders/b7/tkzbyvzx72qcg9wb0t1jybvm0000gn/T/diaporama-4ZvB4P/icone-9.png">    </p:cNvPr>
           <p:cNvPicPr>
             <a:picLocks noChangeAspect="1"/>
           </p:cNvPicPr>
@@ -21967,7 +22514,7 @@
       </p:sp>
       <p:pic>
         <p:nvPicPr>
-          <p:cNvPr id="24" name="Image 2" descr="/var/folders/b7/tkzbyvzx72qcg9wb0t1jybvm0000gn/T/diaporama-zLbeHS/icone-10.png">    </p:cNvPr>
+          <p:cNvPr id="24" name="Image 2" descr="/var/folders/b7/tkzbyvzx72qcg9wb0t1jybvm0000gn/T/diaporama-4ZvB4P/icone-10.png">    </p:cNvPr>
           <p:cNvPicPr>
             <a:picLocks noChangeAspect="1"/>
           </p:cNvPicPr>
@@ -22222,7 +22769,7 @@
                 <a:ea typeface="Arial" pitchFamily="34" charset="-122"/>
                 <a:cs typeface="Arial" pitchFamily="34" charset="-120"/>
               </a:rPr>
-              <a:t>Caramel v7.0.1 · Présentation · septembre 2026</a:t>
+              <a:t>Caramel v7.1.0 · Présentation · septembre 2026</a:t>
             </a:r>
             <a:endParaRPr lang="en-US" sz="900" dirty="0"/>
           </a:p>
@@ -22261,7 +22808,7 @@
                 <a:ea typeface="Arial" pitchFamily="34" charset="-122"/>
                 <a:cs typeface="Arial" pitchFamily="34" charset="-120"/>
               </a:rPr>
-              <a:t>8 / 24</a:t>
+              <a:t>8 / 25</a:t>
             </a:r>
             <a:endParaRPr lang="en-US" sz="900" dirty="0"/>
           </a:p>
@@ -22413,7 +22960,7 @@
       </p:sp>
       <p:pic>
         <p:nvPicPr>
-          <p:cNvPr id="5" name="Image 0" descr="/var/folders/b7/tkzbyvzx72qcg9wb0t1jybvm0000gn/T/diaporama-zLbeHS/rapide.jpg">    </p:cNvPr>
+          <p:cNvPr id="5" name="Image 0" descr="/var/folders/b7/tkzbyvzx72qcg9wb0t1jybvm0000gn/T/diaporama-4ZvB4P/rapide.jpg">    </p:cNvPr>
           <p:cNvPicPr>
             <a:picLocks noChangeAspect="1"/>
           </p:cNvPicPr>
@@ -22702,7 +23249,7 @@
                 <a:ea typeface="Arial" pitchFamily="34" charset="-122"/>
                 <a:cs typeface="Arial" pitchFamily="34" charset="-120"/>
               </a:rPr>
-              <a:t>Caramel v7.0.1 · Présentation · septembre 2026</a:t>
+              <a:t>Caramel v7.1.0 · Présentation · septembre 2026</a:t>
             </a:r>
             <a:endParaRPr lang="en-US" sz="900" dirty="0"/>
           </a:p>
@@ -22741,7 +23288,7 @@
                 <a:ea typeface="Arial" pitchFamily="34" charset="-122"/>
                 <a:cs typeface="Arial" pitchFamily="34" charset="-120"/>
               </a:rPr>
-              <a:t>9 / 24</a:t>
+              <a:t>9 / 25</a:t>
             </a:r>
             <a:endParaRPr lang="en-US" sz="900" dirty="0"/>
           </a:p>

--- a/assets/presentation/diaporama/caramel-presentation.pptx
+++ b/assets/presentation/diaporama/caramel-presentation.pptx
@@ -1142,7 +1142,7 @@
           <a:p>
             <a:r>
               <a:rPr lang="en-US" dirty="0"/>
-              <a:t>Au-delà d’une activité, Caramel prépare un parcours entier : plusieurs activités organisées en étapes, livrées dans un seul fichier de cours. Le commutateur « Un parcours », sous le formulaire, ouvre l’atelier. Le cadrage tient en quatre questions : la plateforme, le déroulé — en classe, à distance ou les deux —, l’ampleur, d’une séance à une séquence entière, et le chemin des élèves : le même pour tous, ou des chemins selon les résultats d’un test. On peut aussi partir d’une trame toute faite : trois sont proposées, les autres sont à un clic.</a:t>
+              <a:t>Au-delà d’une activité, Caramel prépare un parcours entier : plusieurs activités organisées en étapes, livrées dans un seul fichier de cours. Le commutateur « Un parcours », sous le formulaire, ouvre l’atelier. Le cadrage tient en quatre questions : la plateforme, le déroulé — en classe, à distance ou les deux —, l’ampleur, d’une séance à une séquence entière, et le chemin des élèves : le même pour tous, ou des chemins selon les résultats d’un test. On peut aussi partir d’une trame toute faite : apprendre en autonomie, réviser, s’entraîner ou évaluer — et une vingtaine d’autres à un clic.</a:t>
             </a:r>
             <a:endParaRPr lang="en-US" dirty="0"/>
           </a:p>
@@ -2022,7 +2022,7 @@
           <a:p>
             <a:r>
               <a:rPr lang="en-US" dirty="0"/>
-              <a:t>Pour conclure : Caramel s’ouvre à l’adresse caramel.forge.apps.education.fr, gratuitement et sans compte. Invitez chacun à préparer une activité pour sa propre classe, à la relire dans l’éditeur, puis à la déposer sur un espace de test. Les contacts des deux co-créateurs figurent ici pour toute question. Ce support correspond à Caramel 7.1.0, dans sa version du 30 septembre 2026.</a:t>
+              <a:t>Pour conclure : Caramel s’ouvre à l’adresse caramel.forge.apps.education.fr, gratuitement et sans compte. Invitez chacun à préparer une activité pour sa propre classe, à la relire dans l’éditeur, puis à la déposer sur un espace de test. Les contacts des deux co-créateurs figurent ici pour toute question. Ce support correspond à Caramel 7.1.0, dans sa version du 1er octobre 2026.</a:t>
             </a:r>
             <a:endParaRPr lang="en-US" dirty="0"/>
           </a:p>
@@ -3013,7 +3013,7 @@
       </p:grpSpPr>
       <p:pic>
         <p:nvPicPr>
-          <p:cNvPr id="2" name="Image 0" descr="/var/folders/b7/tkzbyvzx72qcg9wb0t1jybvm0000gn/T/diaporama-4ZvB4P/logo-caramel.png">    </p:cNvPr>
+          <p:cNvPr id="2" name="Image 0" descr="/var/folders/b7/tkzbyvzx72qcg9wb0t1jybvm0000gn/T/diaporama-rW2MhI/logo-caramel.png">    </p:cNvPr>
           <p:cNvPicPr>
             <a:picLocks noChangeAspect="1"/>
           </p:cNvPicPr>
@@ -3234,7 +3234,7 @@
                 <a:ea typeface="Arial" pitchFamily="34" charset="-122"/>
                 <a:cs typeface="Arial" pitchFamily="34" charset="-120"/>
               </a:rPr>
-              <a:t>Support de présentation · Caramel v7.1.0 · 30 septembre 2026</a:t>
+              <a:t>Support de présentation · Caramel v7.1.0 · 1er octobre 2026</a:t>
             </a:r>
             <a:endParaRPr lang="en-US" sz="1200" dirty="0"/>
           </a:p>
@@ -3276,7 +3276,7 @@
       </p:sp>
       <p:pic>
         <p:nvPicPr>
-          <p:cNvPr id="9" name="Image 1" descr="/var/folders/b7/tkzbyvzx72qcg9wb0t1jybvm0000gn/T/diaporama-4ZvB4P/accueil.jpg">    </p:cNvPr>
+          <p:cNvPr id="9" name="Image 1" descr="/var/folders/b7/tkzbyvzx72qcg9wb0t1jybvm0000gn/T/diaporama-rW2MhI/accueil.jpg">    </p:cNvPr>
           <p:cNvPicPr>
             <a:picLocks noChangeAspect="1"/>
           </p:cNvPicPr>
@@ -3471,7 +3471,7 @@
       </p:sp>
       <p:pic>
         <p:nvPicPr>
-          <p:cNvPr id="6" name="Image 0" descr="/var/folders/b7/tkzbyvzx72qcg9wb0t1jybvm0000gn/T/diaporama-4ZvB4P/icone-11.png">    </p:cNvPr>
+          <p:cNvPr id="6" name="Image 0" descr="/var/folders/b7/tkzbyvzx72qcg9wb0t1jybvm0000gn/T/diaporama-rW2MhI/icone-11.png">    </p:cNvPr>
           <p:cNvPicPr>
             <a:picLocks noChangeAspect="1"/>
           </p:cNvPicPr>
@@ -3570,7 +3570,7 @@
       </p:sp>
       <p:pic>
         <p:nvPicPr>
-          <p:cNvPr id="9" name="Image 1" descr="/var/folders/b7/tkzbyvzx72qcg9wb0t1jybvm0000gn/T/diaporama-4ZvB4P/icone-12.png">    </p:cNvPr>
+          <p:cNvPr id="9" name="Image 1" descr="/var/folders/b7/tkzbyvzx72qcg9wb0t1jybvm0000gn/T/diaporama-rW2MhI/icone-12.png">    </p:cNvPr>
           <p:cNvPicPr>
             <a:picLocks noChangeAspect="1"/>
           </p:cNvPicPr>
@@ -3669,7 +3669,7 @@
       </p:sp>
       <p:pic>
         <p:nvPicPr>
-          <p:cNvPr id="12" name="Image 2" descr="/var/folders/b7/tkzbyvzx72qcg9wb0t1jybvm0000gn/T/diaporama-4ZvB4P/icone-13.png">    </p:cNvPr>
+          <p:cNvPr id="12" name="Image 2" descr="/var/folders/b7/tkzbyvzx72qcg9wb0t1jybvm0000gn/T/diaporama-rW2MhI/icone-13.png">    </p:cNvPr>
           <p:cNvPicPr>
             <a:picLocks noChangeAspect="1"/>
           </p:cNvPicPr>
@@ -3768,7 +3768,7 @@
       </p:sp>
       <p:pic>
         <p:nvPicPr>
-          <p:cNvPr id="15" name="Image 3" descr="/var/folders/b7/tkzbyvzx72qcg9wb0t1jybvm0000gn/T/diaporama-4ZvB4P/icone-14.png">    </p:cNvPr>
+          <p:cNvPr id="15" name="Image 3" descr="/var/folders/b7/tkzbyvzx72qcg9wb0t1jybvm0000gn/T/diaporama-rW2MhI/icone-14.png">    </p:cNvPr>
           <p:cNvPicPr>
             <a:picLocks noChangeAspect="1"/>
           </p:cNvPicPr>
@@ -3867,7 +3867,7 @@
       </p:sp>
       <p:pic>
         <p:nvPicPr>
-          <p:cNvPr id="18" name="Image 4" descr="/var/folders/b7/tkzbyvzx72qcg9wb0t1jybvm0000gn/T/diaporama-4ZvB4P/icone-15.png">    </p:cNvPr>
+          <p:cNvPr id="18" name="Image 4" descr="/var/folders/b7/tkzbyvzx72qcg9wb0t1jybvm0000gn/T/diaporama-rW2MhI/icone-15.png">    </p:cNvPr>
           <p:cNvPicPr>
             <a:picLocks noChangeAspect="1"/>
           </p:cNvPicPr>
@@ -3978,7 +3978,7 @@
       </p:sp>
       <p:pic>
         <p:nvPicPr>
-          <p:cNvPr id="21" name="Image 5" descr="/var/folders/b7/tkzbyvzx72qcg9wb0t1jybvm0000gn/T/diaporama-4ZvB4P/avance.jpg">    </p:cNvPr>
+          <p:cNvPr id="21" name="Image 5" descr="/var/folders/b7/tkzbyvzx72qcg9wb0t1jybvm0000gn/T/diaporama-rW2MhI/avance.jpg">    </p:cNvPr>
           <p:cNvPicPr>
             <a:picLocks noChangeAspect="1"/>
           </p:cNvPicPr>
@@ -4033,7 +4033,7 @@
                 <a:ea typeface="Arial" pitchFamily="34" charset="-122"/>
                 <a:cs typeface="Arial" pitchFamily="34" charset="-120"/>
               </a:rPr>
-              <a:t>Caramel v7.1.0 · Présentation · septembre 2026</a:t>
+              <a:t>Caramel v7.1.0 · Présentation · octobre 2026</a:t>
             </a:r>
             <a:endParaRPr lang="en-US" sz="900" dirty="0"/>
           </a:p>
@@ -4224,7 +4224,7 @@
       </p:sp>
       <p:pic>
         <p:nvPicPr>
-          <p:cNvPr id="5" name="Image 0" descr="/var/folders/b7/tkzbyvzx72qcg9wb0t1jybvm0000gn/T/diaporama-4ZvB4P/activites.jpg">    </p:cNvPr>
+          <p:cNvPr id="5" name="Image 0" descr="/var/folders/b7/tkzbyvzx72qcg9wb0t1jybvm0000gn/T/diaporama-rW2MhI/activites.jpg">    </p:cNvPr>
           <p:cNvPicPr>
             <a:picLocks noChangeAspect="1"/>
           </p:cNvPicPr>
@@ -5066,7 +5066,7 @@
                 <a:ea typeface="Arial" pitchFamily="34" charset="-122"/>
                 <a:cs typeface="Arial" pitchFamily="34" charset="-120"/>
               </a:rPr>
-              <a:t>Caramel v7.1.0 · Présentation · septembre 2026</a:t>
+              <a:t>Caramel v7.1.0 · Présentation · octobre 2026</a:t>
             </a:r>
             <a:endParaRPr lang="en-US" sz="900" dirty="0"/>
           </a:p>
@@ -5456,7 +5456,7 @@
       </p:sp>
       <p:pic>
         <p:nvPicPr>
-          <p:cNvPr id="10" name="Image 0" descr="/var/folders/b7/tkzbyvzx72qcg9wb0t1jybvm0000gn/T/diaporama-4ZvB4P/icone-1.png">    </p:cNvPr>
+          <p:cNvPr id="10" name="Image 0" descr="/var/folders/b7/tkzbyvzx72qcg9wb0t1jybvm0000gn/T/diaporama-rW2MhI/icone-1.png">    </p:cNvPr>
           <p:cNvPicPr>
             <a:picLocks noChangeAspect="1"/>
           </p:cNvPicPr>
@@ -5553,7 +5553,7 @@
       </p:sp>
       <p:pic>
         <p:nvPicPr>
-          <p:cNvPr id="13" name="Image 1" descr="/var/folders/b7/tkzbyvzx72qcg9wb0t1jybvm0000gn/T/diaporama-4ZvB4P/generation.jpg">    </p:cNvPr>
+          <p:cNvPr id="13" name="Image 1" descr="/var/folders/b7/tkzbyvzx72qcg9wb0t1jybvm0000gn/T/diaporama-rW2MhI/generation.jpg">    </p:cNvPr>
           <p:cNvPicPr>
             <a:picLocks noChangeAspect="1"/>
           </p:cNvPicPr>
@@ -5667,7 +5667,7 @@
                 <a:ea typeface="Arial" pitchFamily="34" charset="-122"/>
                 <a:cs typeface="Arial" pitchFamily="34" charset="-120"/>
               </a:rPr>
-              <a:t>Caramel v7.1.0 · Présentation · septembre 2026</a:t>
+              <a:t>Caramel v7.1.0 · Présentation · octobre 2026</a:t>
             </a:r>
             <a:endParaRPr lang="en-US" sz="900" dirty="0"/>
           </a:p>
@@ -5858,7 +5858,7 @@
       </p:sp>
       <p:pic>
         <p:nvPicPr>
-          <p:cNvPr id="5" name="Image 0" descr="/var/folders/b7/tkzbyvzx72qcg9wb0t1jybvm0000gn/T/diaporama-4ZvB4P/apercu.jpg">    </p:cNvPr>
+          <p:cNvPr id="5" name="Image 0" descr="/var/folders/b7/tkzbyvzx72qcg9wb0t1jybvm0000gn/T/diaporama-rW2MhI/apercu.jpg">    </p:cNvPr>
           <p:cNvPicPr>
             <a:picLocks noChangeAspect="1"/>
           </p:cNvPicPr>
@@ -5916,7 +5916,7 @@
       </p:sp>
       <p:pic>
         <p:nvPicPr>
-          <p:cNvPr id="7" name="Image 1" descr="/var/folders/b7/tkzbyvzx72qcg9wb0t1jybvm0000gn/T/diaporama-4ZvB4P/editeur.jpg">    </p:cNvPr>
+          <p:cNvPr id="7" name="Image 1" descr="/var/folders/b7/tkzbyvzx72qcg9wb0t1jybvm0000gn/T/diaporama-rW2MhI/editeur.jpg">    </p:cNvPr>
           <p:cNvPicPr>
             <a:picLocks noChangeAspect="1"/>
           </p:cNvPicPr>
@@ -6127,7 +6127,7 @@
                 <a:ea typeface="Arial" pitchFamily="34" charset="-122"/>
                 <a:cs typeface="Arial" pitchFamily="34" charset="-120"/>
               </a:rPr>
-              <a:t>Caramel v7.1.0 · Présentation · septembre 2026</a:t>
+              <a:t>Caramel v7.1.0 · Présentation · octobre 2026</a:t>
             </a:r>
             <a:endParaRPr lang="en-US" sz="900" dirty="0"/>
           </a:p>
@@ -6318,7 +6318,7 @@
       </p:sp>
       <p:pic>
         <p:nvPicPr>
-          <p:cNvPr id="5" name="Image 0" descr="/var/folders/b7/tkzbyvzx72qcg9wb0t1jybvm0000gn/T/diaporama-4ZvB4P/barre.jpg">    </p:cNvPr>
+          <p:cNvPr id="5" name="Image 0" descr="/var/folders/b7/tkzbyvzx72qcg9wb0t1jybvm0000gn/T/diaporama-rW2MhI/barre.jpg">    </p:cNvPr>
           <p:cNvPicPr>
             <a:picLocks noChangeAspect="1"/>
           </p:cNvPicPr>
@@ -6398,7 +6398,7 @@
       </p:sp>
       <p:pic>
         <p:nvPicPr>
-          <p:cNvPr id="8" name="Image 1" descr="/var/folders/b7/tkzbyvzx72qcg9wb0t1jybvm0000gn/T/diaporama-4ZvB4P/icone-16.png">    </p:cNvPr>
+          <p:cNvPr id="8" name="Image 1" descr="/var/folders/b7/tkzbyvzx72qcg9wb0t1jybvm0000gn/T/diaporama-rW2MhI/icone-16.png">    </p:cNvPr>
           <p:cNvPicPr>
             <a:picLocks noChangeAspect="1"/>
           </p:cNvPicPr>
@@ -6556,7 +6556,7 @@
       </p:sp>
       <p:pic>
         <p:nvPicPr>
-          <p:cNvPr id="13" name="Image 2" descr="/var/folders/b7/tkzbyvzx72qcg9wb0t1jybvm0000gn/T/diaporama-4ZvB4P/icone-17.png">    </p:cNvPr>
+          <p:cNvPr id="13" name="Image 2" descr="/var/folders/b7/tkzbyvzx72qcg9wb0t1jybvm0000gn/T/diaporama-rW2MhI/icone-17.png">    </p:cNvPr>
           <p:cNvPicPr>
             <a:picLocks noChangeAspect="1"/>
           </p:cNvPicPr>
@@ -6714,7 +6714,7 @@
       </p:sp>
       <p:pic>
         <p:nvPicPr>
-          <p:cNvPr id="18" name="Image 3" descr="/var/folders/b7/tkzbyvzx72qcg9wb0t1jybvm0000gn/T/diaporama-4ZvB4P/icone-18.png">    </p:cNvPr>
+          <p:cNvPr id="18" name="Image 3" descr="/var/folders/b7/tkzbyvzx72qcg9wb0t1jybvm0000gn/T/diaporama-rW2MhI/icone-18.png">    </p:cNvPr>
           <p:cNvPicPr>
             <a:picLocks noChangeAspect="1"/>
           </p:cNvPicPr>
@@ -6847,7 +6847,7 @@
                 <a:ea typeface="Arial" pitchFamily="34" charset="-122"/>
                 <a:cs typeface="Arial" pitchFamily="34" charset="-120"/>
               </a:rPr>
-              <a:t>Caramel v7.1.0 · Présentation · septembre 2026</a:t>
+              <a:t>Caramel v7.1.0 · Présentation · octobre 2026</a:t>
             </a:r>
             <a:endParaRPr lang="en-US" sz="900" dirty="0"/>
           </a:p>
@@ -7470,7 +7470,7 @@
       </p:sp>
       <p:pic>
         <p:nvPicPr>
-          <p:cNvPr id="18" name="Image 0" descr="/var/folders/b7/tkzbyvzx72qcg9wb0t1jybvm0000gn/T/diaporama-4ZvB4P/icone-39.png">    </p:cNvPr>
+          <p:cNvPr id="18" name="Image 0" descr="/var/folders/b7/tkzbyvzx72qcg9wb0t1jybvm0000gn/T/diaporama-rW2MhI/icone-39.png">    </p:cNvPr>
           <p:cNvPicPr>
             <a:picLocks noChangeAspect="1"/>
           </p:cNvPicPr>
@@ -7753,7 +7753,7 @@
                 <a:ea typeface="Arial" pitchFamily="34" charset="-122"/>
                 <a:cs typeface="Arial" pitchFamily="34" charset="-120"/>
               </a:rPr>
-              <a:t>Caramel v7.1.0 · Présentation · septembre 2026</a:t>
+              <a:t>Caramel v7.1.0 · Présentation · octobre 2026</a:t>
             </a:r>
             <a:endParaRPr lang="en-US" sz="900" dirty="0"/>
           </a:p>
@@ -8627,7 +8627,7 @@
       </p:sp>
       <p:pic>
         <p:nvPicPr>
-          <p:cNvPr id="27" name="Image 0" descr="/var/folders/b7/tkzbyvzx72qcg9wb0t1jybvm0000gn/T/diaporama-4ZvB4P/cadrage.jpg">    </p:cNvPr>
+          <p:cNvPr id="27" name="Image 0" descr="/var/folders/b7/tkzbyvzx72qcg9wb0t1jybvm0000gn/T/diaporama-rW2MhI/cadrage.jpg">    </p:cNvPr>
           <p:cNvPicPr>
             <a:picLocks noChangeAspect="1"/>
           </p:cNvPicPr>
@@ -8836,7 +8836,7 @@
                 <a:ea typeface="Arial" pitchFamily="34" charset="-122"/>
                 <a:cs typeface="Arial" pitchFamily="34" charset="-120"/>
               </a:rPr>
-              <a:t>Caramel v7.1.0 · Présentation · septembre 2026</a:t>
+              <a:t>Caramel v7.1.0 · Présentation · octobre 2026</a:t>
             </a:r>
             <a:endParaRPr lang="en-US" sz="900" dirty="0"/>
           </a:p>
@@ -9027,7 +9027,7 @@
       </p:sp>
       <p:pic>
         <p:nvPicPr>
-          <p:cNvPr id="5" name="Image 0" descr="/var/folders/b7/tkzbyvzx72qcg9wb0t1jybvm0000gn/T/diaporama-4ZvB4P/plan.jpg">    </p:cNvPr>
+          <p:cNvPr id="5" name="Image 0" descr="/var/folders/b7/tkzbyvzx72qcg9wb0t1jybvm0000gn/T/diaporama-rW2MhI/plan.jpg">    </p:cNvPr>
           <p:cNvPicPr>
             <a:picLocks noChangeAspect="1"/>
           </p:cNvPicPr>
@@ -9280,7 +9280,7 @@
                 <a:ea typeface="Arial" pitchFamily="34" charset="-122"/>
                 <a:cs typeface="Arial" pitchFamily="34" charset="-120"/>
               </a:rPr>
-              <a:t>Caramel v7.1.0 · Présentation · septembre 2026</a:t>
+              <a:t>Caramel v7.1.0 · Présentation · octobre 2026</a:t>
             </a:r>
             <a:endParaRPr lang="en-US" sz="900" dirty="0"/>
           </a:p>
@@ -9471,7 +9471,7 @@
       </p:sp>
       <p:pic>
         <p:nvPicPr>
-          <p:cNvPr id="5" name="Image 0" descr="/var/folders/b7/tkzbyvzx72qcg9wb0t1jybvm0000gn/T/diaporama-4ZvB4P/eleve.jpg">    </p:cNvPr>
+          <p:cNvPr id="5" name="Image 0" descr="/var/folders/b7/tkzbyvzx72qcg9wb0t1jybvm0000gn/T/diaporama-rW2MhI/eleve.jpg">    </p:cNvPr>
           <p:cNvPicPr>
             <a:picLocks noChangeAspect="1"/>
           </p:cNvPicPr>
@@ -9529,7 +9529,7 @@
       </p:sp>
       <p:pic>
         <p:nvPicPr>
-          <p:cNvPr id="7" name="Image 1" descr="/var/folders/b7/tkzbyvzx72qcg9wb0t1jybvm0000gn/T/diaporama-4ZvB4P/chemins.jpg">    </p:cNvPr>
+          <p:cNvPr id="7" name="Image 1" descr="/var/folders/b7/tkzbyvzx72qcg9wb0t1jybvm0000gn/T/diaporama-rW2MhI/chemins.jpg">    </p:cNvPr>
           <p:cNvPicPr>
             <a:picLocks noChangeAspect="1"/>
           </p:cNvPicPr>
@@ -9738,7 +9738,7 @@
                 <a:ea typeface="Arial" pitchFamily="34" charset="-122"/>
                 <a:cs typeface="Arial" pitchFamily="34" charset="-120"/>
               </a:rPr>
-              <a:t>Caramel v7.1.0 · Présentation · septembre 2026</a:t>
+              <a:t>Caramel v7.1.0 · Présentation · octobre 2026</a:t>
             </a:r>
             <a:endParaRPr lang="en-US" sz="900" dirty="0"/>
           </a:p>
@@ -9929,7 +9929,7 @@
       </p:sp>
       <p:pic>
         <p:nvPicPr>
-          <p:cNvPr id="5" name="Image 0" descr="/var/folders/b7/tkzbyvzx72qcg9wb0t1jybvm0000gn/T/diaporama-4ZvB4P/fabrication.jpg">    </p:cNvPr>
+          <p:cNvPr id="5" name="Image 0" descr="/var/folders/b7/tkzbyvzx72qcg9wb0t1jybvm0000gn/T/diaporama-rW2MhI/fabrication.jpg">    </p:cNvPr>
           <p:cNvPicPr>
             <a:picLocks noChangeAspect="1"/>
           </p:cNvPicPr>
@@ -9987,7 +9987,7 @@
       </p:sp>
       <p:pic>
         <p:nvPicPr>
-          <p:cNvPr id="7" name="Image 1" descr="/var/folders/b7/tkzbyvzx72qcg9wb0t1jybvm0000gn/T/diaporama-4ZvB4P/livraison.jpg">    </p:cNvPr>
+          <p:cNvPr id="7" name="Image 1" descr="/var/folders/b7/tkzbyvzx72qcg9wb0t1jybvm0000gn/T/diaporama-rW2MhI/livraison.jpg">    </p:cNvPr>
           <p:cNvPicPr>
             <a:picLocks noChangeAspect="1"/>
           </p:cNvPicPr>
@@ -10198,7 +10198,7 @@
                 <a:ea typeface="Arial" pitchFamily="34" charset="-122"/>
                 <a:cs typeface="Arial" pitchFamily="34" charset="-120"/>
               </a:rPr>
-              <a:t>Caramel v7.1.0 · Présentation · septembre 2026</a:t>
+              <a:t>Caramel v7.1.0 · Présentation · octobre 2026</a:t>
             </a:r>
             <a:endParaRPr lang="en-US" sz="900" dirty="0"/>
           </a:p>
@@ -10553,7 +10553,7 @@
       </p:sp>
       <p:pic>
         <p:nvPicPr>
-          <p:cNvPr id="9" name="Image 1" descr="/var/folders/b7/tkzbyvzx72qcg9wb0t1jybvm0000gn/T/diaporama-4ZvB4P/icone-36.png">    </p:cNvPr>
+          <p:cNvPr id="9" name="Image 1" descr="/var/folders/b7/tkzbyvzx72qcg9wb0t1jybvm0000gn/T/diaporama-rW2MhI/icone-36.png">    </p:cNvPr>
           <p:cNvPicPr>
             <a:picLocks noChangeAspect="1"/>
           </p:cNvPicPr>
@@ -10841,7 +10841,7 @@
       </p:sp>
       <p:pic>
         <p:nvPicPr>
-          <p:cNvPr id="16" name="Image 3" descr="/var/folders/b7/tkzbyvzx72qcg9wb0t1jybvm0000gn/T/diaporama-4ZvB4P/icone-36.png">    </p:cNvPr>
+          <p:cNvPr id="16" name="Image 3" descr="/var/folders/b7/tkzbyvzx72qcg9wb0t1jybvm0000gn/T/diaporama-rW2MhI/icone-36.png">    </p:cNvPr>
           <p:cNvPicPr>
             <a:picLocks noChangeAspect="1"/>
           </p:cNvPicPr>
@@ -10933,7 +10933,7 @@
       </p:sp>
       <p:pic>
         <p:nvPicPr>
-          <p:cNvPr id="19" name="Image 4" descr="/var/folders/b7/tkzbyvzx72qcg9wb0t1jybvm0000gn/T/diaporama-4ZvB4P/icone-28.png">    </p:cNvPr>
+          <p:cNvPr id="19" name="Image 4" descr="/var/folders/b7/tkzbyvzx72qcg9wb0t1jybvm0000gn/T/diaporama-rW2MhI/icone-28.png">    </p:cNvPr>
           <p:cNvPicPr>
             <a:picLocks noChangeAspect="1"/>
           </p:cNvPicPr>
@@ -11057,7 +11057,7 @@
       </p:sp>
       <p:pic>
         <p:nvPicPr>
-          <p:cNvPr id="23" name="Image 5" descr="/var/folders/b7/tkzbyvzx72qcg9wb0t1jybvm0000gn/T/diaporama-4ZvB4P/icone-29.png">    </p:cNvPr>
+          <p:cNvPr id="23" name="Image 5" descr="/var/folders/b7/tkzbyvzx72qcg9wb0t1jybvm0000gn/T/diaporama-rW2MhI/icone-29.png">    </p:cNvPr>
           <p:cNvPicPr>
             <a:picLocks noChangeAspect="1"/>
           </p:cNvPicPr>
@@ -11181,7 +11181,7 @@
       </p:sp>
       <p:pic>
         <p:nvPicPr>
-          <p:cNvPr id="27" name="Image 6" descr="/var/folders/b7/tkzbyvzx72qcg9wb0t1jybvm0000gn/T/diaporama-4ZvB4P/icone-32.png">    </p:cNvPr>
+          <p:cNvPr id="27" name="Image 6" descr="/var/folders/b7/tkzbyvzx72qcg9wb0t1jybvm0000gn/T/diaporama-rW2MhI/icone-32.png">    </p:cNvPr>
           <p:cNvPicPr>
             <a:picLocks noChangeAspect="1"/>
           </p:cNvPicPr>
@@ -11314,7 +11314,7 @@
                 <a:ea typeface="Arial" pitchFamily="34" charset="-122"/>
                 <a:cs typeface="Arial" pitchFamily="34" charset="-120"/>
               </a:rPr>
-              <a:t>Caramel v7.1.0 · Présentation · septembre 2026</a:t>
+              <a:t>Caramel v7.1.0 · Présentation · octobre 2026</a:t>
             </a:r>
             <a:endParaRPr lang="en-US" sz="900" dirty="0"/>
           </a:p>
@@ -11471,7 +11471,7 @@
       </p:sp>
       <p:pic>
         <p:nvPicPr>
-          <p:cNvPr id="4" name="Image 0" descr="/var/folders/b7/tkzbyvzx72qcg9wb0t1jybvm0000gn/T/diaporama-4ZvB4P/logo-sucrerie.png">    </p:cNvPr>
+          <p:cNvPr id="4" name="Image 0" descr="/var/folders/b7/tkzbyvzx72qcg9wb0t1jybvm0000gn/T/diaporama-rW2MhI/logo-sucrerie.png">    </p:cNvPr>
           <p:cNvPicPr>
             <a:picLocks noChangeAspect="1"/>
           </p:cNvPicPr>
@@ -11772,7 +11772,7 @@
       </p:sp>
       <p:pic>
         <p:nvPicPr>
-          <p:cNvPr id="7" name="Image 1" descr="/var/folders/b7/tkzbyvzx72qcg9wb0t1jybvm0000gn/T/diaporama-4ZvB4P/qr-sucrerie.png">    </p:cNvPr>
+          <p:cNvPr id="7" name="Image 1" descr="/var/folders/b7/tkzbyvzx72qcg9wb0t1jybvm0000gn/T/diaporama-rW2MhI/qr-sucrerie.png">    </p:cNvPr>
           <p:cNvPicPr>
             <a:picLocks noChangeAspect="1"/>
           </p:cNvPicPr>
@@ -11891,7 +11891,7 @@
       </p:sp>
       <p:pic>
         <p:nvPicPr>
-          <p:cNvPr id="10" name="Image 2" descr="/var/folders/b7/tkzbyvzx72qcg9wb0t1jybvm0000gn/T/diaporama-4ZvB4P/sucrerie.jpg">    </p:cNvPr>
+          <p:cNvPr id="10" name="Image 2" descr="/var/folders/b7/tkzbyvzx72qcg9wb0t1jybvm0000gn/T/diaporama-rW2MhI/sucrerie.jpg">    </p:cNvPr>
           <p:cNvPicPr>
             <a:picLocks noChangeAspect="1"/>
           </p:cNvPicPr>
@@ -12005,7 +12005,7 @@
                 <a:ea typeface="Arial" pitchFamily="34" charset="-122"/>
                 <a:cs typeface="Arial" pitchFamily="34" charset="-120"/>
               </a:rPr>
-              <a:t>Caramel v7.1.0 · Présentation · septembre 2026</a:t>
+              <a:t>Caramel v7.1.0 · Présentation · octobre 2026</a:t>
             </a:r>
             <a:endParaRPr lang="en-US" sz="900" dirty="0"/>
           </a:p>
@@ -12196,7 +12196,7 @@
       </p:sp>
       <p:pic>
         <p:nvPicPr>
-          <p:cNvPr id="5" name="Image 0" descr="/var/folders/b7/tkzbyvzx72qcg9wb0t1jybvm0000gn/T/diaporama-4ZvB4P/caramelia.jpg">    </p:cNvPr>
+          <p:cNvPr id="5" name="Image 0" descr="/var/folders/b7/tkzbyvzx72qcg9wb0t1jybvm0000gn/T/diaporama-rW2MhI/caramelia.jpg">    </p:cNvPr>
           <p:cNvPicPr>
             <a:picLocks noChangeAspect="1"/>
           </p:cNvPicPr>
@@ -12242,7 +12242,7 @@
       </p:sp>
       <p:pic>
         <p:nvPicPr>
-          <p:cNvPr id="7" name="Image 1" descr="/var/folders/b7/tkzbyvzx72qcg9wb0t1jybvm0000gn/T/diaporama-4ZvB4P/logo-caramelia.png">    </p:cNvPr>
+          <p:cNvPr id="7" name="Image 1" descr="/var/folders/b7/tkzbyvzx72qcg9wb0t1jybvm0000gn/T/diaporama-rW2MhI/logo-caramelia.png">    </p:cNvPr>
           <p:cNvPicPr>
             <a:picLocks noChangeAspect="1"/>
           </p:cNvPicPr>
@@ -12366,7 +12366,7 @@
       </p:sp>
       <p:pic>
         <p:nvPicPr>
-          <p:cNvPr id="11" name="Image 2" descr="/var/folders/b7/tkzbyvzx72qcg9wb0t1jybvm0000gn/T/diaporama-4ZvB4P/icone-24.png">    </p:cNvPr>
+          <p:cNvPr id="11" name="Image 2" descr="/var/folders/b7/tkzbyvzx72qcg9wb0t1jybvm0000gn/T/diaporama-rW2MhI/icone-24.png">    </p:cNvPr>
           <p:cNvPicPr>
             <a:picLocks noChangeAspect="1"/>
           </p:cNvPicPr>
@@ -12490,7 +12490,7 @@
       </p:sp>
       <p:pic>
         <p:nvPicPr>
-          <p:cNvPr id="15" name="Image 3" descr="/var/folders/b7/tkzbyvzx72qcg9wb0t1jybvm0000gn/T/diaporama-4ZvB4P/icone-26.png">    </p:cNvPr>
+          <p:cNvPr id="15" name="Image 3" descr="/var/folders/b7/tkzbyvzx72qcg9wb0t1jybvm0000gn/T/diaporama-rW2MhI/icone-26.png">    </p:cNvPr>
           <p:cNvPicPr>
             <a:picLocks noChangeAspect="1"/>
           </p:cNvPicPr>
@@ -12614,7 +12614,7 @@
       </p:sp>
       <p:pic>
         <p:nvPicPr>
-          <p:cNvPr id="19" name="Image 4" descr="/var/folders/b7/tkzbyvzx72qcg9wb0t1jybvm0000gn/T/diaporama-4ZvB4P/logo-tchap.png">    </p:cNvPr>
+          <p:cNvPr id="19" name="Image 4" descr="/var/folders/b7/tkzbyvzx72qcg9wb0t1jybvm0000gn/T/diaporama-rW2MhI/logo-tchap.png">    </p:cNvPr>
           <p:cNvPicPr>
             <a:picLocks noChangeAspect="1"/>
           </p:cNvPicPr>
@@ -12747,7 +12747,7 @@
                 <a:ea typeface="Arial" pitchFamily="34" charset="-122"/>
                 <a:cs typeface="Arial" pitchFamily="34" charset="-120"/>
               </a:rPr>
-              <a:t>Caramel v7.1.0 · Présentation · septembre 2026</a:t>
+              <a:t>Caramel v7.1.0 · Présentation · octobre 2026</a:t>
             </a:r>
             <a:endParaRPr lang="en-US" sz="900" dirty="0"/>
           </a:p>
@@ -12960,7 +12960,7 @@
       </p:sp>
       <p:pic>
         <p:nvPicPr>
-          <p:cNvPr id="6" name="Image 0" descr="/var/folders/b7/tkzbyvzx72qcg9wb0t1jybvm0000gn/T/diaporama-4ZvB4P/icone-19.png">    </p:cNvPr>
+          <p:cNvPr id="6" name="Image 0" descr="/var/folders/b7/tkzbyvzx72qcg9wb0t1jybvm0000gn/T/diaporama-rW2MhI/icone-19.png">    </p:cNvPr>
           <p:cNvPicPr>
             <a:picLocks noChangeAspect="1"/>
           </p:cNvPicPr>
@@ -13118,7 +13118,7 @@
       </p:sp>
       <p:pic>
         <p:nvPicPr>
-          <p:cNvPr id="11" name="Image 1" descr="/var/folders/b7/tkzbyvzx72qcg9wb0t1jybvm0000gn/T/diaporama-4ZvB4P/icone-20.png">    </p:cNvPr>
+          <p:cNvPr id="11" name="Image 1" descr="/var/folders/b7/tkzbyvzx72qcg9wb0t1jybvm0000gn/T/diaporama-rW2MhI/icone-20.png">    </p:cNvPr>
           <p:cNvPicPr>
             <a:picLocks noChangeAspect="1"/>
           </p:cNvPicPr>
@@ -13276,7 +13276,7 @@
       </p:sp>
       <p:pic>
         <p:nvPicPr>
-          <p:cNvPr id="16" name="Image 2" descr="/var/folders/b7/tkzbyvzx72qcg9wb0t1jybvm0000gn/T/diaporama-4ZvB4P/icone-21.png">    </p:cNvPr>
+          <p:cNvPr id="16" name="Image 2" descr="/var/folders/b7/tkzbyvzx72qcg9wb0t1jybvm0000gn/T/diaporama-rW2MhI/icone-21.png">    </p:cNvPr>
           <p:cNvPicPr>
             <a:picLocks noChangeAspect="1"/>
           </p:cNvPicPr>
@@ -13434,7 +13434,7 @@
       </p:sp>
       <p:pic>
         <p:nvPicPr>
-          <p:cNvPr id="21" name="Image 3" descr="/var/folders/b7/tkzbyvzx72qcg9wb0t1jybvm0000gn/T/diaporama-4ZvB4P/icone-22.png">    </p:cNvPr>
+          <p:cNvPr id="21" name="Image 3" descr="/var/folders/b7/tkzbyvzx72qcg9wb0t1jybvm0000gn/T/diaporama-rW2MhI/icone-22.png">    </p:cNvPr>
           <p:cNvPicPr>
             <a:picLocks noChangeAspect="1"/>
           </p:cNvPicPr>
@@ -13592,7 +13592,7 @@
       </p:sp>
       <p:pic>
         <p:nvPicPr>
-          <p:cNvPr id="26" name="Image 4" descr="/var/folders/b7/tkzbyvzx72qcg9wb0t1jybvm0000gn/T/diaporama-4ZvB4P/icone-23.png">    </p:cNvPr>
+          <p:cNvPr id="26" name="Image 4" descr="/var/folders/b7/tkzbyvzx72qcg9wb0t1jybvm0000gn/T/diaporama-rW2MhI/icone-23.png">    </p:cNvPr>
           <p:cNvPicPr>
             <a:picLocks noChangeAspect="1"/>
           </p:cNvPicPr>
@@ -13791,7 +13791,7 @@
                 <a:ea typeface="Arial" pitchFamily="34" charset="-122"/>
                 <a:cs typeface="Arial" pitchFamily="34" charset="-120"/>
               </a:rPr>
-              <a:t>Caramel v7.1.0 · Présentation · septembre 2026</a:t>
+              <a:t>Caramel v7.1.0 · Présentation · octobre 2026</a:t>
             </a:r>
             <a:endParaRPr lang="en-US" sz="900" dirty="0"/>
           </a:p>
@@ -14650,7 +14650,7 @@
       </p:sp>
       <p:pic>
         <p:nvPicPr>
-          <p:cNvPr id="25" name="Image 0" descr="/var/folders/b7/tkzbyvzx72qcg9wb0t1jybvm0000gn/T/diaporama-4ZvB4P/icone-25.png">    </p:cNvPr>
+          <p:cNvPr id="25" name="Image 0" descr="/var/folders/b7/tkzbyvzx72qcg9wb0t1jybvm0000gn/T/diaporama-rW2MhI/icone-25.png">    </p:cNvPr>
           <p:cNvPicPr>
             <a:picLocks noChangeAspect="1"/>
           </p:cNvPicPr>
@@ -14759,7 +14759,7 @@
                 <a:ea typeface="Arial" pitchFamily="34" charset="-122"/>
                 <a:cs typeface="Arial" pitchFamily="34" charset="-120"/>
               </a:rPr>
-              <a:t>Caramel v7.1.0 · Présentation · septembre 2026</a:t>
+              <a:t>Caramel v7.1.0 · Présentation · octobre 2026</a:t>
             </a:r>
             <a:endParaRPr lang="en-US" sz="900" dirty="0"/>
           </a:p>
@@ -14933,7 +14933,7 @@
       </p:sp>
       <p:pic>
         <p:nvPicPr>
-          <p:cNvPr id="5" name="Image 0" descr="/var/folders/b7/tkzbyvzx72qcg9wb0t1jybvm0000gn/T/diaporama-4ZvB4P/icone-33.png">    </p:cNvPr>
+          <p:cNvPr id="5" name="Image 0" descr="/var/folders/b7/tkzbyvzx72qcg9wb0t1jybvm0000gn/T/diaporama-rW2MhI/icone-33.png">    </p:cNvPr>
           <p:cNvPicPr>
             <a:picLocks noChangeAspect="1"/>
           </p:cNvPicPr>
@@ -15040,7 +15040,7 @@
       </p:sp>
       <p:pic>
         <p:nvPicPr>
-          <p:cNvPr id="8" name="Image 1" descr="/var/folders/b7/tkzbyvzx72qcg9wb0t1jybvm0000gn/T/diaporama-4ZvB4P/icone-32.png">    </p:cNvPr>
+          <p:cNvPr id="8" name="Image 1" descr="/var/folders/b7/tkzbyvzx72qcg9wb0t1jybvm0000gn/T/diaporama-rW2MhI/icone-32.png">    </p:cNvPr>
           <p:cNvPicPr>
             <a:picLocks noChangeAspect="1"/>
           </p:cNvPicPr>
@@ -15147,7 +15147,7 @@
       </p:sp>
       <p:pic>
         <p:nvPicPr>
-          <p:cNvPr id="11" name="Image 2" descr="/var/folders/b7/tkzbyvzx72qcg9wb0t1jybvm0000gn/T/diaporama-4ZvB4P/icone-18.png">    </p:cNvPr>
+          <p:cNvPr id="11" name="Image 2" descr="/var/folders/b7/tkzbyvzx72qcg9wb0t1jybvm0000gn/T/diaporama-rW2MhI/icone-18.png">    </p:cNvPr>
           <p:cNvPicPr>
             <a:picLocks noChangeAspect="1"/>
           </p:cNvPicPr>
@@ -15289,7 +15289,7 @@
       </p:sp>
       <p:pic>
         <p:nvPicPr>
-          <p:cNvPr id="14" name="Image 3" descr="/var/folders/b7/tkzbyvzx72qcg9wb0t1jybvm0000gn/T/diaporama-4ZvB4P/icone-26.png">    </p:cNvPr>
+          <p:cNvPr id="14" name="Image 3" descr="/var/folders/b7/tkzbyvzx72qcg9wb0t1jybvm0000gn/T/diaporama-rW2MhI/icone-26.png">    </p:cNvPr>
           <p:cNvPicPr>
             <a:picLocks noChangeAspect="1"/>
           </p:cNvPicPr>
@@ -15396,7 +15396,7 @@
       </p:sp>
       <p:pic>
         <p:nvPicPr>
-          <p:cNvPr id="17" name="Image 4" descr="/var/folders/b7/tkzbyvzx72qcg9wb0t1jybvm0000gn/T/diaporama-4ZvB4P/icone-27.png">    </p:cNvPr>
+          <p:cNvPr id="17" name="Image 4" descr="/var/folders/b7/tkzbyvzx72qcg9wb0t1jybvm0000gn/T/diaporama-rW2MhI/icone-27.png">    </p:cNvPr>
           <p:cNvPicPr>
             <a:picLocks noChangeAspect="1"/>
           </p:cNvPicPr>
@@ -15503,7 +15503,7 @@
       </p:sp>
       <p:pic>
         <p:nvPicPr>
-          <p:cNvPr id="20" name="Image 5" descr="/var/folders/b7/tkzbyvzx72qcg9wb0t1jybvm0000gn/T/diaporama-4ZvB4P/icone-31.png">    </p:cNvPr>
+          <p:cNvPr id="20" name="Image 5" descr="/var/folders/b7/tkzbyvzx72qcg9wb0t1jybvm0000gn/T/diaporama-rW2MhI/icone-31.png">    </p:cNvPr>
           <p:cNvPicPr>
             <a:picLocks noChangeAspect="1"/>
           </p:cNvPicPr>
@@ -15610,7 +15610,7 @@
       </p:sp>
       <p:pic>
         <p:nvPicPr>
-          <p:cNvPr id="23" name="Image 6" descr="/var/folders/b7/tkzbyvzx72qcg9wb0t1jybvm0000gn/T/diaporama-4ZvB4P/icone-28.png">    </p:cNvPr>
+          <p:cNvPr id="23" name="Image 6" descr="/var/folders/b7/tkzbyvzx72qcg9wb0t1jybvm0000gn/T/diaporama-rW2MhI/icone-28.png">    </p:cNvPr>
           <p:cNvPicPr>
             <a:picLocks noChangeAspect="1"/>
           </p:cNvPicPr>
@@ -15717,7 +15717,7 @@
       </p:sp>
       <p:pic>
         <p:nvPicPr>
-          <p:cNvPr id="26" name="Image 7" descr="/var/folders/b7/tkzbyvzx72qcg9wb0t1jybvm0000gn/T/diaporama-4ZvB4P/icone-22.png">    </p:cNvPr>
+          <p:cNvPr id="26" name="Image 7" descr="/var/folders/b7/tkzbyvzx72qcg9wb0t1jybvm0000gn/T/diaporama-rW2MhI/icone-22.png">    </p:cNvPr>
           <p:cNvPicPr>
             <a:picLocks noChangeAspect="1"/>
           </p:cNvPicPr>
@@ -15836,7 +15836,7 @@
       </p:sp>
       <p:pic>
         <p:nvPicPr>
-          <p:cNvPr id="29" name="Image 8" descr="/var/folders/b7/tkzbyvzx72qcg9wb0t1jybvm0000gn/T/diaporama-4ZvB4P/qr-caramel.png">    </p:cNvPr>
+          <p:cNvPr id="29" name="Image 8" descr="/var/folders/b7/tkzbyvzx72qcg9wb0t1jybvm0000gn/T/diaporama-rW2MhI/qr-caramel.png">    </p:cNvPr>
           <p:cNvPicPr>
             <a:picLocks noChangeAspect="1"/>
           </p:cNvPicPr>
@@ -15972,7 +15972,7 @@
       </p:sp>
       <p:pic>
         <p:nvPicPr>
-          <p:cNvPr id="33" name="Image 9" descr="/var/folders/b7/tkzbyvzx72qcg9wb0t1jybvm0000gn/T/diaporama-4ZvB4P/qr-decouvrir.png">    </p:cNvPr>
+          <p:cNvPr id="33" name="Image 9" descr="/var/folders/b7/tkzbyvzx72qcg9wb0t1jybvm0000gn/T/diaporama-rW2MhI/qr-decouvrir.png">    </p:cNvPr>
           <p:cNvPicPr>
             <a:picLocks noChangeAspect="1"/>
           </p:cNvPicPr>
@@ -16105,7 +16105,7 @@
                 <a:ea typeface="Arial" pitchFamily="34" charset="-122"/>
                 <a:cs typeface="Arial" pitchFamily="34" charset="-120"/>
               </a:rPr>
-              <a:t>Caramel v7.1.0 · Présentation · septembre 2026</a:t>
+              <a:t>Caramel v7.1.0 · Présentation · octobre 2026</a:t>
             </a:r>
             <a:endParaRPr lang="en-US" sz="900" dirty="0"/>
           </a:p>
@@ -16184,7 +16184,7 @@
       </p:grpSpPr>
       <p:pic>
         <p:nvPicPr>
-          <p:cNvPr id="2" name="Image 0" descr="/var/folders/b7/tkzbyvzx72qcg9wb0t1jybvm0000gn/T/diaporama-4ZvB4P/logo-caramel.png">    </p:cNvPr>
+          <p:cNvPr id="2" name="Image 0" descr="/var/folders/b7/tkzbyvzx72qcg9wb0t1jybvm0000gn/T/diaporama-rW2MhI/logo-caramel.png">    </p:cNvPr>
           <p:cNvPicPr>
             <a:picLocks noChangeAspect="1"/>
           </p:cNvPicPr>
@@ -16286,7 +16286,7 @@
       </p:sp>
       <p:pic>
         <p:nvPicPr>
-          <p:cNvPr id="5" name="Image 1" descr="/var/folders/b7/tkzbyvzx72qcg9wb0t1jybvm0000gn/T/diaporama-4ZvB4P/qr-caramel.png">    </p:cNvPr>
+          <p:cNvPr id="5" name="Image 1" descr="/var/folders/b7/tkzbyvzx72qcg9wb0t1jybvm0000gn/T/diaporama-rW2MhI/qr-caramel.png">    </p:cNvPr>
           <p:cNvPicPr>
             <a:picLocks noChangeAspect="1"/>
           </p:cNvPicPr>
@@ -16482,7 +16482,7 @@
                 <a:ea typeface="Arial" pitchFamily="34" charset="-122"/>
                 <a:cs typeface="Arial" pitchFamily="34" charset="-120"/>
               </a:rPr>
-              <a:t>Caramel v7.1.0 · support mis à jour le 30 septembre 2026</a:t>
+              <a:t>Caramel v7.1.0 · support mis à jour le 1er octobre 2026</a:t>
             </a:r>
             <a:endParaRPr lang="en-US" sz="1100" dirty="0"/>
           </a:p>
@@ -16751,7 +16751,7 @@
       </p:sp>
       <p:pic>
         <p:nvPicPr>
-          <p:cNvPr id="8" name="Image 0" descr="/var/folders/b7/tkzbyvzx72qcg9wb0t1jybvm0000gn/T/diaporama-4ZvB4P/icone-35.png">    </p:cNvPr>
+          <p:cNvPr id="8" name="Image 0" descr="/var/folders/b7/tkzbyvzx72qcg9wb0t1jybvm0000gn/T/diaporama-rW2MhI/icone-35.png">    </p:cNvPr>
           <p:cNvPicPr>
             <a:picLocks noChangeAspect="1"/>
           </p:cNvPicPr>
@@ -16926,7 +16926,7 @@
       </p:sp>
       <p:pic>
         <p:nvPicPr>
-          <p:cNvPr id="13" name="Image 1" descr="/var/folders/b7/tkzbyvzx72qcg9wb0t1jybvm0000gn/T/diaporama-4ZvB4P/icone-35.png">    </p:cNvPr>
+          <p:cNvPr id="13" name="Image 1" descr="/var/folders/b7/tkzbyvzx72qcg9wb0t1jybvm0000gn/T/diaporama-rW2MhI/icone-35.png">    </p:cNvPr>
           <p:cNvPicPr>
             <a:picLocks noChangeAspect="1"/>
           </p:cNvPicPr>
@@ -17450,7 +17450,7 @@
                 <a:ea typeface="Arial" pitchFamily="34" charset="-122"/>
                 <a:cs typeface="Arial" pitchFamily="34" charset="-120"/>
               </a:rPr>
-              <a:t>Caramel v7.1.0 · Présentation · septembre 2026</a:t>
+              <a:t>Caramel v7.1.0 · Présentation · octobre 2026</a:t>
             </a:r>
             <a:endParaRPr lang="en-US" sz="900" dirty="0"/>
           </a:p>
@@ -18970,7 +18970,7 @@
                 <a:ea typeface="Arial" pitchFamily="34" charset="-122"/>
                 <a:cs typeface="Arial" pitchFamily="34" charset="-120"/>
               </a:rPr>
-              <a:t>Caramel v7.1.0 · Présentation · septembre 2026</a:t>
+              <a:t>Caramel v7.1.0 · Présentation · octobre 2026</a:t>
             </a:r>
             <a:endParaRPr lang="en-US" sz="900" dirty="0"/>
           </a:p>
@@ -19803,7 +19803,7 @@
                 <a:ea typeface="Arial" pitchFamily="34" charset="-122"/>
                 <a:cs typeface="Arial" pitchFamily="34" charset="-120"/>
               </a:rPr>
-              <a:t>Caramel v7.1.0 · Présentation · septembre 2026</a:t>
+              <a:t>Caramel v7.1.0 · Présentation · octobre 2026</a:t>
             </a:r>
             <a:endParaRPr lang="en-US" sz="900" dirty="0"/>
           </a:p>
@@ -20055,7 +20055,7 @@
       </p:sp>
       <p:pic>
         <p:nvPicPr>
-          <p:cNvPr id="7" name="Image 0" descr="/var/folders/b7/tkzbyvzx72qcg9wb0t1jybvm0000gn/T/diaporama-4ZvB4P/icone-0.png">    </p:cNvPr>
+          <p:cNvPr id="7" name="Image 0" descr="/var/folders/b7/tkzbyvzx72qcg9wb0t1jybvm0000gn/T/diaporama-rW2MhI/icone-0.png">    </p:cNvPr>
           <p:cNvPicPr>
             <a:picLocks noChangeAspect="1"/>
           </p:cNvPicPr>
@@ -20268,7 +20268,7 @@
       </p:sp>
       <p:pic>
         <p:nvPicPr>
-          <p:cNvPr id="12" name="Image 1" descr="/var/folders/b7/tkzbyvzx72qcg9wb0t1jybvm0000gn/T/diaporama-4ZvB4P/icone-1.png">    </p:cNvPr>
+          <p:cNvPr id="12" name="Image 1" descr="/var/folders/b7/tkzbyvzx72qcg9wb0t1jybvm0000gn/T/diaporama-rW2MhI/icone-1.png">    </p:cNvPr>
           <p:cNvPicPr>
             <a:picLocks noChangeAspect="1"/>
           </p:cNvPicPr>
@@ -20481,7 +20481,7 @@
       </p:sp>
       <p:pic>
         <p:nvPicPr>
-          <p:cNvPr id="17" name="Image 2" descr="/var/folders/b7/tkzbyvzx72qcg9wb0t1jybvm0000gn/T/diaporama-4ZvB4P/icone-2.png">    </p:cNvPr>
+          <p:cNvPr id="17" name="Image 2" descr="/var/folders/b7/tkzbyvzx72qcg9wb0t1jybvm0000gn/T/diaporama-rW2MhI/icone-2.png">    </p:cNvPr>
           <p:cNvPicPr>
             <a:picLocks noChangeAspect="1"/>
           </p:cNvPicPr>
@@ -20669,7 +20669,7 @@
                 <a:ea typeface="Arial" pitchFamily="34" charset="-122"/>
                 <a:cs typeface="Arial" pitchFamily="34" charset="-120"/>
               </a:rPr>
-              <a:t>Caramel v7.1.0 · Présentation · septembre 2026</a:t>
+              <a:t>Caramel v7.1.0 · Présentation · octobre 2026</a:t>
             </a:r>
             <a:endParaRPr lang="en-US" sz="900" dirty="0"/>
           </a:p>
@@ -20882,7 +20882,7 @@
       </p:sp>
       <p:pic>
         <p:nvPicPr>
-          <p:cNvPr id="6" name="Image 0" descr="/var/folders/b7/tkzbyvzx72qcg9wb0t1jybvm0000gn/T/diaporama-4ZvB4P/icone-3.png">    </p:cNvPr>
+          <p:cNvPr id="6" name="Image 0" descr="/var/folders/b7/tkzbyvzx72qcg9wb0t1jybvm0000gn/T/diaporama-rW2MhI/icone-3.png">    </p:cNvPr>
           <p:cNvPicPr>
             <a:picLocks noChangeAspect="1"/>
           </p:cNvPicPr>
@@ -21040,7 +21040,7 @@
       </p:sp>
       <p:pic>
         <p:nvPicPr>
-          <p:cNvPr id="11" name="Image 1" descr="/var/folders/b7/tkzbyvzx72qcg9wb0t1jybvm0000gn/T/diaporama-4ZvB4P/icone-4.png">    </p:cNvPr>
+          <p:cNvPr id="11" name="Image 1" descr="/var/folders/b7/tkzbyvzx72qcg9wb0t1jybvm0000gn/T/diaporama-rW2MhI/icone-4.png">    </p:cNvPr>
           <p:cNvPicPr>
             <a:picLocks noChangeAspect="1"/>
           </p:cNvPicPr>
@@ -21198,7 +21198,7 @@
       </p:sp>
       <p:pic>
         <p:nvPicPr>
-          <p:cNvPr id="16" name="Image 2" descr="/var/folders/b7/tkzbyvzx72qcg9wb0t1jybvm0000gn/T/diaporama-4ZvB4P/icone-5.png">    </p:cNvPr>
+          <p:cNvPr id="16" name="Image 2" descr="/var/folders/b7/tkzbyvzx72qcg9wb0t1jybvm0000gn/T/diaporama-rW2MhI/icone-5.png">    </p:cNvPr>
           <p:cNvPicPr>
             <a:picLocks noChangeAspect="1"/>
           </p:cNvPicPr>
@@ -21384,7 +21384,7 @@
       </p:sp>
       <p:pic>
         <p:nvPicPr>
-          <p:cNvPr id="21" name="Image 3" descr="/var/folders/b7/tkzbyvzx72qcg9wb0t1jybvm0000gn/T/diaporama-4ZvB4P/icone-6.png">    </p:cNvPr>
+          <p:cNvPr id="21" name="Image 3" descr="/var/folders/b7/tkzbyvzx72qcg9wb0t1jybvm0000gn/T/diaporama-rW2MhI/icone-6.png">    </p:cNvPr>
           <p:cNvPicPr>
             <a:picLocks noChangeAspect="1"/>
           </p:cNvPicPr>
@@ -21513,7 +21513,7 @@
       </p:sp>
       <p:pic>
         <p:nvPicPr>
-          <p:cNvPr id="25" name="Image 4" descr="/var/folders/b7/tkzbyvzx72qcg9wb0t1jybvm0000gn/T/diaporama-4ZvB4P/icone-7.png">    </p:cNvPr>
+          <p:cNvPr id="25" name="Image 4" descr="/var/folders/b7/tkzbyvzx72qcg9wb0t1jybvm0000gn/T/diaporama-rW2MhI/icone-7.png">    </p:cNvPr>
           <p:cNvPicPr>
             <a:picLocks noChangeAspect="1"/>
           </p:cNvPicPr>
@@ -21680,7 +21680,7 @@
                 <a:ea typeface="Arial" pitchFamily="34" charset="-122"/>
                 <a:cs typeface="Arial" pitchFamily="34" charset="-120"/>
               </a:rPr>
-              <a:t>Caramel v7.1.0 · Présentation · septembre 2026</a:t>
+              <a:t>Caramel v7.1.0 · Présentation · octobre 2026</a:t>
             </a:r>
             <a:endParaRPr lang="en-US" sz="900" dirty="0"/>
           </a:p>
@@ -22126,7 +22126,7 @@
       </p:sp>
       <p:pic>
         <p:nvPicPr>
-          <p:cNvPr id="12" name="Image 0" descr="/var/folders/b7/tkzbyvzx72qcg9wb0t1jybvm0000gn/T/diaporama-4ZvB4P/icone-8.png">    </p:cNvPr>
+          <p:cNvPr id="12" name="Image 0" descr="/var/folders/b7/tkzbyvzx72qcg9wb0t1jybvm0000gn/T/diaporama-rW2MhI/icone-8.png">    </p:cNvPr>
           <p:cNvPicPr>
             <a:picLocks noChangeAspect="1"/>
           </p:cNvPicPr>
@@ -22334,7 +22334,7 @@
       </p:sp>
       <p:pic>
         <p:nvPicPr>
-          <p:cNvPr id="18" name="Image 1" descr="/var/folders/b7/tkzbyvzx72qcg9wb0t1jybvm0000gn/T/diaporama-4ZvB4P/icone-9.png">    </p:cNvPr>
+          <p:cNvPr id="18" name="Image 1" descr="/var/folders/b7/tkzbyvzx72qcg9wb0t1jybvm0000gn/T/diaporama-rW2MhI/icone-9.png">    </p:cNvPr>
           <p:cNvPicPr>
             <a:picLocks noChangeAspect="1"/>
           </p:cNvPicPr>
@@ -22514,7 +22514,7 @@
       </p:sp>
       <p:pic>
         <p:nvPicPr>
-          <p:cNvPr id="24" name="Image 2" descr="/var/folders/b7/tkzbyvzx72qcg9wb0t1jybvm0000gn/T/diaporama-4ZvB4P/icone-10.png">    </p:cNvPr>
+          <p:cNvPr id="24" name="Image 2" descr="/var/folders/b7/tkzbyvzx72qcg9wb0t1jybvm0000gn/T/diaporama-rW2MhI/icone-10.png">    </p:cNvPr>
           <p:cNvPicPr>
             <a:picLocks noChangeAspect="1"/>
           </p:cNvPicPr>
@@ -22769,7 +22769,7 @@
                 <a:ea typeface="Arial" pitchFamily="34" charset="-122"/>
                 <a:cs typeface="Arial" pitchFamily="34" charset="-120"/>
               </a:rPr>
-              <a:t>Caramel v7.1.0 · Présentation · septembre 2026</a:t>
+              <a:t>Caramel v7.1.0 · Présentation · octobre 2026</a:t>
             </a:r>
             <a:endParaRPr lang="en-US" sz="900" dirty="0"/>
           </a:p>
@@ -22960,7 +22960,7 @@
       </p:sp>
       <p:pic>
         <p:nvPicPr>
-          <p:cNvPr id="5" name="Image 0" descr="/var/folders/b7/tkzbyvzx72qcg9wb0t1jybvm0000gn/T/diaporama-4ZvB4P/rapide.jpg">    </p:cNvPr>
+          <p:cNvPr id="5" name="Image 0" descr="/var/folders/b7/tkzbyvzx72qcg9wb0t1jybvm0000gn/T/diaporama-rW2MhI/rapide.jpg">    </p:cNvPr>
           <p:cNvPicPr>
             <a:picLocks noChangeAspect="1"/>
           </p:cNvPicPr>
@@ -23249,7 +23249,7 @@
                 <a:ea typeface="Arial" pitchFamily="34" charset="-122"/>
                 <a:cs typeface="Arial" pitchFamily="34" charset="-120"/>
               </a:rPr>
-              <a:t>Caramel v7.1.0 · Présentation · septembre 2026</a:t>
+              <a:t>Caramel v7.1.0 · Présentation · octobre 2026</a:t>
             </a:r>
             <a:endParaRPr lang="en-US" sz="900" dirty="0"/>
           </a:p>
